--- a/talks/shipaton-kug-chennai-2026/shipaton-kug-chennai-2026.pptx
+++ b/talks/shipaton-kug-chennai-2026/shipaton-kug-chennai-2026.pptx
@@ -626,6 +626,11 @@
           </a:p>
           <a:p>
             <a:r>
+              <a:t>Tanglish: Banner-ah vechi vidunga. QR invent pannaathinga. DevFest-ku point pannunga.</a:t>
+            </a:r>
+          </a:p>
+          <a:p>
+            <a:r>
               <a:t>https://devfest.gdgchennai.in/ — Saturday 17 October 2026, IITM Research Park.</a:t>
             </a:r>
           </a:p>
@@ -1039,6 +1044,11 @@
               <a:t>Payment validates willingness to pay. It is not product-market fit.</a:t>
             </a:r>
           </a:p>
+          <a:p>
+            <a:r>
+              <a:t>First payment docs: https://razorpay.com/docs/</a:t>
+            </a:r>
+          </a:p>
         </p:txBody>
       </p:sp>
       <p:sp>
@@ -1201,6 +1211,11 @@
           </a:p>
           <a:p>
             <a:r>
+              <a:t>Tanglish: Sheet-la fill pannunga. Review Ready-ku maathunga. Organizers dhaan paathu review pannuvaanga.</a:t>
+            </a:r>
+          </a:p>
+          <a:p>
+            <a:r>
               <a:t>Columns: Product Name, Creator / Team, Product Category, Demo / Product URL, Repository URL, Monetization Model, Payment Integration (Live / Test / Planned), Deployment Status, Review Status (In Progress / Review Ready / Reviewed), Production Ready by Thursday (Yes / No), Notes.</a:t>
             </a:r>
           </a:p>
@@ -1217,6 +1232,11 @@
           <a:p>
             <a:r>
               <a:t>Sheet URL: SHEET_LINK_PLACEHOLDER</a:t>
+            </a:r>
+          </a:p>
+          <a:p>
+            <a:r>
+              <a:t>Event: https://luma.com/mprx0ocg</a:t>
             </a:r>
           </a:p>
         </p:txBody>
@@ -1309,6 +1329,16 @@
               <a:t>Checklist: working production URL or accessible release; core functionality; usable onboarding; no critical blockers; clear monetization; payment flow when applicable; basic analytics or feedback; enough for organizers to test.</a:t>
             </a:r>
           </a:p>
+          <a:p>
+            <a:r>
+              <a:t>Event: https://luma.com/mprx0ocg</a:t>
+            </a:r>
+          </a:p>
+          <a:p>
+            <a:r>
+              <a:t>DevFest: https://devfest.gdgchennai.in/</a:t>
+            </a:r>
+          </a:p>
         </p:txBody>
       </p:sp>
       <p:sp>
@@ -1382,6 +1412,11 @@
           <a:p>
             <a:r>
               <a:t>Prizes also awarded at DevFest: Saturday 17 October 2026, IITM Research Park. https://devfest.gdgchennai.in/</a:t>
+            </a:r>
+          </a:p>
+          <a:p>
+            <a:r>
+              <a:t>Tanglish: Ship pannunga. Review aaganum. Win-na bonus — guarantee illa.</a:t>
             </a:r>
           </a:p>
           <a:p>
@@ -5324,7 +5359,7 @@
       </p:sp>
       <p:pic>
         <p:nvPicPr>
-          <p:cNvPr id="3" name="Picture 2" descr="tmpda7yl5a6.png"/>
+          <p:cNvPr id="3" name="Picture 2" descr="tmp3smv7zdq.png"/>
           <p:cNvPicPr>
             <a:picLocks noChangeAspect="1"/>
           </p:cNvPicPr>

--- a/talks/shipaton-kug-chennai-2026/shipaton-kug-chennai-2026.pptx
+++ b/talks/shipaton-kug-chennai-2026/shipaton-kug-chennai-2026.pptx
@@ -24,6 +24,7 @@
     <p:sldId id="272" r:id="rId23"/>
     <p:sldId id="273" r:id="rId24"/>
     <p:sldId id="274" r:id="rId25"/>
+    <p:sldId id="275" r:id="rId26"/>
   </p:sldIdLst>
   <p:sldSz cx="12191695" cy="6858000" type="screen4x3"/>
   <p:notesSz cx="6858000" cy="9144000"/>
@@ -600,17 +601,17 @@
           <a:lstStyle/>
           <a:p>
             <a:r>
-              <a:t>Tanglish: Support-ku Discord pothum. Periya team venam.</a:t>
-            </a:r>
-          </a:p>
-          <a:p>
-            <a:r>
-              <a:t>Discord, email, or GitHub Discussions. Nobody needs a support org.</a:t>
-            </a:r>
-          </a:p>
-          <a:p>
-            <a:r>
-              <a:t>https://discord.com/</a:t>
+              <a:t>Tanglish: Oru price. Oru checkout. Adhu dhaan payment.</a:t>
+            </a:r>
+          </a:p>
+          <a:p>
+            <a:r>
+              <a:t>Prices are examples. Razorpay: https://razorpay.com/docs/</a:t>
+            </a:r>
+          </a:p>
+          <a:p>
+            <a:r>
+              <a:t>Stripe where available. Crowdfunding is not guaranteed funding.</a:t>
             </a:r>
           </a:p>
         </p:txBody>
@@ -680,17 +681,22 @@
           <a:lstStyle/>
           <a:p>
             <a:r>
-              <a:t>Tanglish: Like count customer illa. Problem solve panna, people trust pannuvaanga.</a:t>
-            </a:r>
-          </a:p>
-          <a:p>
-            <a:r>
-              <a:t>The owner's DunSocial observation, spoken lightly: posts he saw had about 5 or 10 likes. The projected line is the lesson, not the number.</a:t>
-            </a:r>
-          </a:p>
-          <a:p>
-            <a:r>
-              <a:t>https://dunsocial.com/</a:t>
+              <a:t>Tanglish: Analytics-ku oru tool pothum. Ella logo-um venam.</a:t>
+            </a:r>
+          </a:p>
+          <a:p>
+            <a:r>
+              <a:t>PostHog: https://posthog.com/</a:t>
+            </a:r>
+          </a:p>
+          <a:p>
+            <a:r>
+              <a:t>Also name Plausible, Firebase Analytics, and Mixpanel, and say pick one.</a:t>
+            </a:r>
+          </a:p>
+          <a:p>
+            <a:r>
+              <a:t>Track visitors, activation, retention, paid conversion, churn.</a:t>
             </a:r>
           </a:p>
         </p:txBody>
@@ -760,27 +766,17 @@
           <a:lstStyle/>
           <a:p>
             <a:r>
-              <a:t>Tanglish: Innoru feature kedayadhu. First paying customer dhaan matter. Simple-nu ninaichu GitHub-la vechutaanga.</a:t>
-            </a:r>
-          </a:p>
-          <a:p>
-            <a:r>
-              <a:t>Talk to customers. Show pricing early. Preorders. Paid pilot. Clear refund and delivery policy.</a:t>
-            </a:r>
-          </a:p>
-          <a:p>
-            <a:r>
-              <a:t>Validate demand. Smallest version someone will pay for. Turn the product into a business. Organic growth. An exit is possible later on https://acquire.com/</a:t>
-            </a:r>
-          </a:p>
-          <a:p>
-            <a:r>
-              <a:t>Prices are examples. Razorpay: https://razorpay.com/docs/</a:t>
-            </a:r>
-          </a:p>
-          <a:p>
-            <a:r>
-              <a:t>Stripe where available. Crowdfunding is not guaranteed funding.</a:t>
+              <a:t>Tanglish: Support-ku Discord pothum. Periya team venam.</a:t>
+            </a:r>
+          </a:p>
+          <a:p>
+            <a:r>
+              <a:t>Discord, email, or GitHub Discussions. Nobody needs a support org.</a:t>
+            </a:r>
+          </a:p>
+          <a:p>
+            <a:r>
+              <a:t>https://discord.com/</a:t>
             </a:r>
           </a:p>
         </p:txBody>
@@ -850,32 +846,17 @@
           <a:lstStyle/>
           <a:p>
             <a:r>
-              <a:t>Tanglish: Anju per ₹199 kudutha, almost thousand. Gross idhu — tax, fees illa. PMF illa, willingness to pay.</a:t>
-            </a:r>
-          </a:p>
-          <a:p>
-            <a:r>
-              <a:t>7-step path: painful problem → smallest useful solution → landing + pricing → payment method → share → measure → improve from behavior.</a:t>
-            </a:r>
-          </a:p>
-          <a:p>
-            <a:r>
-              <a:t>Loop: Launch → Analytics → Feedback → Improvements → Retention → Revenue.</a:t>
-            </a:r>
-          </a:p>
-          <a:p>
-            <a:r>
-              <a:t>PostHog, Firebase Analytics, Mixpanel, Plausible, Discord, GitHub Discussions, email, X, LinkedIn, Reddit, Product Hunt, YouTube, Instagram, SEO, Sentry, Crashlytics. Nobody needs every tool.</a:t>
-            </a:r>
-          </a:p>
-          <a:p>
-            <a:r>
-              <a:t>Payment is evidence someone will pay. It is not product-market fit.</a:t>
-            </a:r>
-          </a:p>
-          <a:p>
-            <a:r>
-              <a:t>https://razorpay.com/docs/</a:t>
+              <a:t>Tanglish: Like count customer illa. Problem solve panna, people trust pannuvaanga.</a:t>
+            </a:r>
+          </a:p>
+          <a:p>
+            <a:r>
+              <a:t>The owner's DunSocial observation, spoken lightly: posts he saw had about 5 or 10 likes. The projected line is the lesson, not the number.</a:t>
+            </a:r>
+          </a:p>
+          <a:p>
+            <a:r>
+              <a:t>https://www.dunsocial.com/</a:t>
             </a:r>
           </a:p>
         </p:txBody>
@@ -945,22 +926,27 @@
           <a:lstStyle/>
           <a:p>
             <a:r>
-              <a:t>Tanglish: Team venum-na team. Solo-va irundha, solo. Build anything. Ship something.</a:t>
-            </a:r>
-          </a:p>
-          <a:p>
-            <a:r>
-              <a:t>Individuals and teams. New ideas and existing products. Any stack. Any policy-compliant payment provider.</a:t>
-            </a:r>
-          </a:p>
-          <a:p>
-            <a:r>
-              <a:t>RevenueCat is a Luma collaborator, not a requirement. A workable way to charge counts. Big revenue during the event is not required.</a:t>
-            </a:r>
-          </a:p>
-          <a:p>
-            <a:r>
-              <a:t>https://luma.com/mprx0ocg</a:t>
+              <a:t>Tanglish: Innoru feature kedayadhu. First paying customer dhaan matter. Simple-nu ninaichu GitHub-la vechutaanga.</a:t>
+            </a:r>
+          </a:p>
+          <a:p>
+            <a:r>
+              <a:t>Talk to customers. Show pricing early. Preorders. Paid pilot. Clear refund and delivery policy.</a:t>
+            </a:r>
+          </a:p>
+          <a:p>
+            <a:r>
+              <a:t>Validate demand. Smallest version someone will pay for. Turn the product into a business. Organic growth. An exit is possible later on https://acquire.com/</a:t>
+            </a:r>
+          </a:p>
+          <a:p>
+            <a:r>
+              <a:t>Prices are examples. Razorpay: https://razorpay.com/docs/</a:t>
+            </a:r>
+          </a:p>
+          <a:p>
+            <a:r>
+              <a:t>Stripe where available. Crowdfunding is not guaranteed funding.</a:t>
             </a:r>
           </a:p>
         </p:txBody>
@@ -1030,22 +1016,32 @@
           <a:lstStyle/>
           <a:p>
             <a:r>
-              <a:t>Tanglish: Sheet-la fill pannunga. Review Ready-ku maathunga. Organizers dhaan paathu review pannuvaanga.</a:t>
-            </a:r>
-          </a:p>
-          <a:p>
-            <a:r>
-              <a:t>Sheet: https://docs.google.com/spreadsheets/d/1DZ7OSphlY8llxWisVc_FcLGeu9Psj_fvfxR2F7ohxcM/edit?usp=sharing</a:t>
-            </a:r>
-          </a:p>
-          <a:p>
-            <a:r>
-              <a:t>Columns: Product Name, Creator / Team, Product Category, Demo / Product URL, Repository URL, Monetization Model, Payment Integration, Deployment Status, Review Status, Production Ready by Thursday, Notes.</a:t>
-            </a:r>
-          </a:p>
-          <a:p>
-            <a:r>
-              <a:t>Workflow: fill the sheet, update URLs, the participant sets Review Status to Review Ready, organizers review. Review Ready is not approval.</a:t>
+              <a:t>Tanglish: Anju per ₹199 kudutha, almost thousand. Gross idhu — tax, fees illa. PMF illa, willingness to pay.</a:t>
+            </a:r>
+          </a:p>
+          <a:p>
+            <a:r>
+              <a:t>7-step path: painful problem → smallest useful solution → landing + pricing → payment method → share → measure → improve from behavior.</a:t>
+            </a:r>
+          </a:p>
+          <a:p>
+            <a:r>
+              <a:t>Loop: Launch → Analytics → Feedback → Improvements → Retention → Revenue.</a:t>
+            </a:r>
+          </a:p>
+          <a:p>
+            <a:r>
+              <a:t>PostHog, Firebase Analytics, Mixpanel, Plausible, Discord, GitHub Discussions, email, X, LinkedIn, Reddit, Product Hunt, YouTube, Instagram, SEO, Sentry, Crashlytics. Nobody needs every tool.</a:t>
+            </a:r>
+          </a:p>
+          <a:p>
+            <a:r>
+              <a:t>Payment is evidence someone will pay. It is not product-market fit.</a:t>
+            </a:r>
+          </a:p>
+          <a:p>
+            <a:r>
+              <a:t>https://razorpay.com/docs/</a:t>
             </a:r>
           </a:p>
         </p:txBody>
@@ -1115,37 +1111,22 @@
           <a:lstStyle/>
           <a:p>
             <a:r>
-              <a:t>Tanglish: Thursday-kku live aaganum. Review Ready-na ‘paathu videoonga.’ Production Ready-na users use panna ready.</a:t>
-            </a:r>
-          </a:p>
-          <a:p>
-            <a:r>
-              <a:t>Say Thursday. Do not print a calendar date.</a:t>
-            </a:r>
-          </a:p>
-          <a:p>
-            <a:r>
-              <a:t>Production Ready by Thursday = deployed and usable. Review Ready = please review.</a:t>
-            </a:r>
-          </a:p>
-          <a:p>
-            <a:r>
-              <a:t>Checklist: production URL; core flow works; usable onboarding; no critical blockers; a clear way to charge; payment flow works when they charge; basic analytics or feedback; enough for organizers to test.</a:t>
-            </a:r>
-          </a:p>
-          <a:p>
-            <a:r>
-              <a:t>Extra DevFest prize eligibility, not an automatic win.</a:t>
+              <a:t>Tanglish: Team venum-na team. Solo-va irundha, solo. Build anything. Ship something.</a:t>
+            </a:r>
+          </a:p>
+          <a:p>
+            <a:r>
+              <a:t>Individuals and teams. New ideas and existing products. Any stack. Any policy-compliant payment provider.</a:t>
+            </a:r>
+          </a:p>
+          <a:p>
+            <a:r>
+              <a:t>RevenueCat is a Luma collaborator, not a requirement. A workable way to charge counts. Big revenue during the event is not required.</a:t>
             </a:r>
           </a:p>
           <a:p>
             <a:r>
               <a:t>https://luma.com/mprx0ocg</a:t>
-            </a:r>
-          </a:p>
-          <a:p>
-            <a:r>
-              <a:t>https://devfest.gdgchennai.in/</a:t>
             </a:r>
           </a:p>
         </p:txBody>
@@ -1215,42 +1196,22 @@
           <a:lstStyle/>
           <a:p>
             <a:r>
-              <a:t>Tanglish: Ship pannunga. Review aaganum. Ticket-na bonus — guarantee illa.</a:t>
-            </a:r>
-          </a:p>
-          <a:p>
-            <a:r>
-              <a:t>On the slide, attributed to Sam Altman: We're going to see 10 person billion-dollar companies pretty soon.</a:t>
-            </a:r>
-          </a:p>
-          <a:p>
-            <a:r>
-              <a:t>Fuller reported line: We're going to see 10-person companies with billion-dollar valuations pretty soon.</a:t>
-            </a:r>
-          </a:p>
-          <a:p>
-            <a:r>
-              <a:t>https://www.forbes.com/sites/michaelashley/2025/02/17/the-future-is-solo-ai-is-creating-billion-dollar-one-person-companies/</a:t>
-            </a:r>
-          </a:p>
-          <a:p>
-            <a:r>
-              <a:t>Organizers review. Selected winners get DevFest Chennai tickets. Prizes also at DevFest, Sat 17 Oct 2026, IITM Research Park. Thursday production-ready teams are considered for an additional prize — not a guarantee.</a:t>
-            </a:r>
-          </a:p>
-          <a:p>
-            <a:r>
-              <a:t>Judging themes only: usefulness, execution, UX, monetization potential, real deployment, learning. Do not invent amounts, winner counts, or weights.</a:t>
-            </a:r>
-          </a:p>
-          <a:p>
-            <a:r>
-              <a:t>Close: Don't just build another side project. Build something people can use, ship it to the world, and see if someone is willing to pay for it.</a:t>
-            </a:r>
-          </a:p>
-          <a:p>
-            <a:r>
-              <a:t>https://devfest.gdgchennai.in/</a:t>
+              <a:t>Tanglish: Sheet-la fill pannunga. Review Ready-ku maathunga. Organizers dhaan paathu review pannuvaanga.</a:t>
+            </a:r>
+          </a:p>
+          <a:p>
+            <a:r>
+              <a:t>Sheet: https://docs.google.com/spreadsheets/d/1DZ7OSphlY8llxWisVc_FcLGeu9Psj_fvfxR2F7ohxcM/edit?usp=sharing</a:t>
+            </a:r>
+          </a:p>
+          <a:p>
+            <a:r>
+              <a:t>Columns: Product Name, Creator / Team, Product Category, Demo / Product URL, Repository URL, Monetization Model, Payment Integration, Deployment Status, Review Status, Production Ready by Thursday, Notes.</a:t>
+            </a:r>
+          </a:p>
+          <a:p>
+            <a:r>
+              <a:t>Workflow: fill the sheet, update URLs, the participant sets Review Status to Review Ready, organizers review. Review Ready is not approval.</a:t>
             </a:r>
           </a:p>
         </p:txBody>
@@ -1320,22 +1281,37 @@
           <a:lstStyle/>
           <a:p>
             <a:r>
-              <a:t>Tanglish: Banner-ah vechi vidunga. DevFest-ku point pannunga. QR invent pannaathinga.</a:t>
-            </a:r>
-          </a:p>
-          <a:p>
-            <a:r>
-              <a:t>Leave the banner up. Point people to DevFest.</a:t>
+              <a:t>Tanglish: Thursday-kku live aaganum. Review Ready-na ‘paathu videoonga.’ Production Ready-na users use panna ready.</a:t>
+            </a:r>
+          </a:p>
+          <a:p>
+            <a:r>
+              <a:t>Say Thursday. Do not print a calendar date.</a:t>
+            </a:r>
+          </a:p>
+          <a:p>
+            <a:r>
+              <a:t>Production Ready by Thursday = deployed and usable. Review Ready = please review.</a:t>
+            </a:r>
+          </a:p>
+          <a:p>
+            <a:r>
+              <a:t>Checklist: production URL; core flow works; usable onboarding; no critical blockers; a clear way to charge; payment flow works when they charge; basic analytics or feedback; enough for organizers to test.</a:t>
+            </a:r>
+          </a:p>
+          <a:p>
+            <a:r>
+              <a:t>Extra DevFest prize eligibility, not an automatic win.</a:t>
+            </a:r>
+          </a:p>
+          <a:p>
+            <a:r>
+              <a:t>https://luma.com/mprx0ocg</a:t>
             </a:r>
           </a:p>
           <a:p>
             <a:r>
               <a:t>https://devfest.gdgchennai.in/</a:t>
-            </a:r>
-          </a:p>
-          <a:p>
-            <a:r>
-              <a:t>https://devfest.gdgchennai.in/banner/main.webp</a:t>
             </a:r>
           </a:p>
         </p:txBody>
@@ -1405,22 +1381,42 @@
           <a:lstStyle/>
           <a:p>
             <a:r>
-              <a:t>Tanglish: Indha banner-ah vechi vidunga. Scan panna mudiyala-na DevFest site-ku point pannunga.</a:t>
-            </a:r>
-          </a:p>
-          <a:p>
-            <a:r>
-              <a:t>KUG community-partner art. Full image, no crop, no overlay, no second QR drawn on top.</a:t>
-            </a:r>
-          </a:p>
-          <a:p>
-            <a:r>
-              <a:t>The on-art QR did not decode in our check. Use https://devfest.gdgchennai.in/ — do not invent another.</a:t>
-            </a:r>
-          </a:p>
-          <a:p>
-            <a:r>
-              <a:t>Don't just build another side project. Build something people can use, ship it to the world, and see if someone is willing to pay for it.</a:t>
+              <a:t>Tanglish: Ship pannunga. Review aaganum. Ticket-na bonus — guarantee illa.</a:t>
+            </a:r>
+          </a:p>
+          <a:p>
+            <a:r>
+              <a:t>On the slide, attributed to Sam Altman: We're going to see 10 person billion-dollar companies pretty soon.</a:t>
+            </a:r>
+          </a:p>
+          <a:p>
+            <a:r>
+              <a:t>Fuller reported line: We're going to see 10-person companies with billion-dollar valuations pretty soon.</a:t>
+            </a:r>
+          </a:p>
+          <a:p>
+            <a:r>
+              <a:t>https://www.forbes.com/sites/michaelashley/2025/02/17/the-future-is-solo-ai-is-creating-billion-dollar-one-person-companies/</a:t>
+            </a:r>
+          </a:p>
+          <a:p>
+            <a:r>
+              <a:t>Organizers review. Selected winners get DevFest Chennai tickets. Prizes also at DevFest, Sat 17 Oct 2026, IITM Research Park. Thursday production-ready teams are considered for an additional prize — not a guarantee.</a:t>
+            </a:r>
+          </a:p>
+          <a:p>
+            <a:r>
+              <a:t>Judging themes only: usefulness, execution, UX, monetization potential, real deployment, learning. Do not invent amounts, winner counts, or weights.</a:t>
+            </a:r>
+          </a:p>
+          <a:p>
+            <a:r>
+              <a:t>Close: Don't just build another side project. Build something people can use, ship it to the world, and see if someone is willing to pay for it.</a:t>
+            </a:r>
+          </a:p>
+          <a:p>
+            <a:r>
+              <a:t>https://devfest.gdgchennai.in/</a:t>
             </a:r>
           </a:p>
         </p:txBody>
@@ -1540,6 +1536,91 @@
 </p:notes>
 </file>
 
+<file path=ppt/notesSlides/notesSlide20.xml><?xml version="1.0" encoding="utf-8"?>
+<p:notes xmlns:a="http://schemas.openxmlformats.org/drawingml/2006/main" xmlns:p="http://schemas.openxmlformats.org/presentationml/2006/main" xmlns:r="http://schemas.openxmlformats.org/officeDocument/2006/relationships">
+  <p:cSld>
+    <p:spTree>
+      <p:nvGrpSpPr>
+        <p:cNvPr id="1" name=""/>
+        <p:cNvGrpSpPr/>
+        <p:nvPr/>
+      </p:nvGrpSpPr>
+      <p:grpSpPr>
+        <a:xfrm>
+          <a:off x="0" y="0"/>
+          <a:ext cx="0" cy="0"/>
+          <a:chOff x="0" y="0"/>
+          <a:chExt cx="0" cy="0"/>
+        </a:xfrm>
+      </p:grpSpPr>
+      <p:sp>
+        <p:nvSpPr>
+          <p:cNvPr id="2" name="Slide Image Placeholder 1"/>
+          <p:cNvSpPr>
+            <a:spLocks noGrp="1"/>
+          </p:cNvSpPr>
+          <p:nvPr>
+            <p:ph type="sldImg" idx="2"/>
+          </p:nvPr>
+        </p:nvSpPr>
+        <p:spPr/>
+      </p:sp>
+      <p:sp>
+        <p:nvSpPr>
+          <p:cNvPr id="3" name="Notes Placeholder 2"/>
+          <p:cNvSpPr>
+            <a:spLocks noGrp="1"/>
+          </p:cNvSpPr>
+          <p:nvPr>
+            <p:ph type="body" idx="3" sz="quarter"/>
+          </p:nvPr>
+        </p:nvSpPr>
+        <p:spPr/>
+        <p:txBody>
+          <a:bodyPr/>
+          <a:lstStyle/>
+          <a:p>
+            <a:r>
+              <a:t>Tanglish: Indha banner-ah vechi vidunga. Scan panna mudiyala-na DevFest site-ku point pannunga.</a:t>
+            </a:r>
+          </a:p>
+          <a:p>
+            <a:r>
+              <a:t>KUG community-partner art. Full image, no crop, no overlay, no second QR drawn on top.</a:t>
+            </a:r>
+          </a:p>
+          <a:p>
+            <a:r>
+              <a:t>The on-art QR did not decode in our check. Use https://devfest.gdgchennai.in/ — do not invent another.</a:t>
+            </a:r>
+          </a:p>
+          <a:p>
+            <a:r>
+              <a:t>Don't just build another side project. Build something people can use, ship it to the world, and see if someone is willing to pay for it.</a:t>
+            </a:r>
+          </a:p>
+        </p:txBody>
+      </p:sp>
+      <p:sp>
+        <p:nvSpPr>
+          <p:cNvPr id="4" name="Slide Number Placeholder 3"/>
+          <p:cNvSpPr>
+            <a:spLocks noGrp="1"/>
+          </p:cNvSpPr>
+          <p:nvPr>
+            <p:ph type="sldNum" idx="5" sz="quarter"/>
+          </p:nvPr>
+        </p:nvSpPr>
+        <p:spPr/>
+      </p:sp>
+    </p:spTree>
+  </p:cSld>
+  <p:clrMapOvr>
+    <a:masterClrMapping/>
+  </p:clrMapOvr>
+</p:notes>
+</file>
+
 <file path=ppt/notesSlides/notesSlide3.xml><?xml version="1.0" encoding="utf-8"?>
 <p:notes xmlns:a="http://schemas.openxmlformats.org/drawingml/2006/main" xmlns:p="http://schemas.openxmlformats.org/presentationml/2006/main" xmlns:r="http://schemas.openxmlformats.org/officeDocument/2006/relationships">
   <p:cSld>
@@ -1585,27 +1666,17 @@
           <a:lstStyle/>
           <a:p>
             <a:r>
-              <a:t>Tanglish: Periya team venam. Months venam. Ad budget-um venam.</a:t>
-            </a:r>
-          </a:p>
-          <a:p>
-            <a:r>
-              <a:t>Credit Sanjeev NC, DevFest 2024 for the tiny-team, no-ad-budget, ship-before-polish point. Super Meme is the spoken example — inspiration only. No revenue, ARR, or size claims. Same for DroidClaw.</a:t>
-            </a:r>
-          </a:p>
-          <a:p>
-            <a:r>
-              <a:t>https://supermeme.ai/</a:t>
-            </a:r>
-          </a:p>
-          <a:p>
-            <a:r>
-              <a:t>https://droidclaw.ai/</a:t>
-            </a:r>
-          </a:p>
-          <a:p>
-            <a:r>
-              <a:t>Do not invent a YouTube id for Sanjeev's talk.</a:t>
+              <a:t>Tanglish: Startup School free. Online. YC. Early lessons-ah use pannunga. Lesson number invent pannaathinga.</a:t>
+            </a:r>
+          </a:p>
+          <a:p>
+            <a:r>
+              <a:t>Take Y Combinator Startup School. Free. Online. Say early lessons. Do not invent a lesson number.</a:t>
+            </a:r>
+          </a:p>
+          <a:p>
+            <a:r>
+              <a:t>https://www.startupschool.org/</a:t>
             </a:r>
           </a:p>
         </p:txBody>
@@ -1675,22 +1746,27 @@
           <a:lstStyle/>
           <a:p>
             <a:r>
-              <a:t>Tanglish: Instagram venam. Oru problem. Konjam per. Adhu pothum.</a:t>
-            </a:r>
-          </a:p>
-          <a:p>
-            <a:r>
-              <a:t>These are small products. Also: word game, quiz, browser game, PDF utilities, expense widget, social scheduling, inventory, booking reminders, productivity dashboards, Android performance report, API testing, log analysis.</a:t>
-            </a:r>
-          </a:p>
-          <a:p>
-            <a:r>
-              <a:t>Illustrative monetization: paid levels, one-time, credits, subscription, hosted plan, license.</a:t>
-            </a:r>
-          </a:p>
-          <a:p>
-            <a:r>
-              <a:t>https://luma.com/mprx0ocg</a:t>
+              <a:t>Tanglish: Periya team venam. Months venam. Ad budget-um venam.</a:t>
+            </a:r>
+          </a:p>
+          <a:p>
+            <a:r>
+              <a:t>Credit Sanjeev NC, DevFest 2024 for the tiny-team, no-ad-budget, ship-before-polish point. Super Meme is the spoken example — inspiration only. No revenue, ARR, or size claims. Same for DroidClaw.</a:t>
+            </a:r>
+          </a:p>
+          <a:p>
+            <a:r>
+              <a:t>https://supermeme.ai/</a:t>
+            </a:r>
+          </a:p>
+          <a:p>
+            <a:r>
+              <a:t>https://droidclaw.ai/</a:t>
+            </a:r>
+          </a:p>
+          <a:p>
+            <a:r>
+              <a:t>Do not invent a YouTube id for Sanjeev's talk.</a:t>
             </a:r>
           </a:p>
         </p:txBody>
@@ -1760,27 +1836,22 @@
           <a:lstStyle/>
           <a:p>
             <a:r>
-              <a:t>Tanglish: Puthiya invention venam. Oru job. Oru price. Adhu pothum.</a:t>
-            </a:r>
-          </a:p>
-          <a:p>
-            <a:r>
-              <a:t>Maaa is a Mac notch reminder. Pro is $2.99 once for two computers. https://www.maaa.app/</a:t>
-            </a:r>
-          </a:p>
-          <a:p>
-            <a:r>
-              <a:t>Lucky Charm hangs a charm on the desktop. https://luckycharm.kraftostech.com/</a:t>
-            </a:r>
-          </a:p>
-          <a:p>
-            <a:r>
-              <a:t>Carrd is one-page sites. https://carrd.co/</a:t>
-            </a:r>
-          </a:p>
-          <a:p>
-            <a:r>
-              <a:t>No revenue or popularity counts.</a:t>
+              <a:t>Tanglish: Instagram venam. Oru problem. Konjam per. Adhu pothum.</a:t>
+            </a:r>
+          </a:p>
+          <a:p>
+            <a:r>
+              <a:t>These are small products. Also: word game, quiz, browser game, PDF utilities, expense widget, social scheduling, inventory, booking reminders, productivity dashboards, Android performance report, API testing, log analysis.</a:t>
+            </a:r>
+          </a:p>
+          <a:p>
+            <a:r>
+              <a:t>Illustrative monetization: paid levels, one-time, credits, subscription, hosted plan, license.</a:t>
+            </a:r>
+          </a:p>
+          <a:p>
+            <a:r>
+              <a:t>https://luma.com/mprx0ocg</a:t>
             </a:r>
           </a:p>
         </p:txBody>
@@ -1850,22 +1921,27 @@
           <a:lstStyle/>
           <a:p>
             <a:r>
-              <a:t>Tanglish: Copycat-nu ninaikadheenga. Better version pothum. Market already irukku.</a:t>
-            </a:r>
-          </a:p>
-          <a:p>
-            <a:r>
-              <a:t>DunSocial is one more scheduler in a market that already has them. Public list price is $20/month — not a success claim. https://dunsocial.com/</a:t>
-            </a:r>
-          </a:p>
-          <a:p>
-            <a:r>
-              <a:t>The owner talked to the founder, who did not want an interview. What he did say: people trust you when you solve a problem, and he studies competitors.</a:t>
-            </a:r>
-          </a:p>
-          <a:p>
-            <a:r>
-              <a:t>The easiest test of a market is to ship a better version of something that already exists. Do not put a like count on this slide.</a:t>
+              <a:t>Tanglish: Puthiya invention venam. Oru job. Oru price. Adhu pothum.</a:t>
+            </a:r>
+          </a:p>
+          <a:p>
+            <a:r>
+              <a:t>Maaa is a Mac notch reminder. Pro is $2.99 once for two computers. https://www.maaa.app/</a:t>
+            </a:r>
+          </a:p>
+          <a:p>
+            <a:r>
+              <a:t>Lucky Charm hangs a charm on the desktop. https://luckycharm.kraftostech.com/</a:t>
+            </a:r>
+          </a:p>
+          <a:p>
+            <a:r>
+              <a:t>Carrd is one-page sites. https://carrd.co/</a:t>
+            </a:r>
+          </a:p>
+          <a:p>
+            <a:r>
+              <a:t>No revenue or popularity counts.</a:t>
             </a:r>
           </a:p>
         </p:txBody>
@@ -1935,17 +2011,22 @@
           <a:lstStyle/>
           <a:p>
             <a:r>
-              <a:t>Tanglish: First product. Game, charm, oru chinna app. Oruthan finish panna mudiyumnu irukanum.</a:t>
-            </a:r>
-          </a:p>
-          <a:p>
-            <a:r>
-              <a:t>The first part of the recipe is something one person can finish. Examples stay the ones already named.</a:t>
-            </a:r>
-          </a:p>
-          <a:p>
-            <a:r>
-              <a:t>https://www.maaa.app/</a:t>
+              <a:t>Tanglish: Copycat-nu ninaikadheenga. Better version pothum. Market already irukku.</a:t>
+            </a:r>
+          </a:p>
+          <a:p>
+            <a:r>
+              <a:t>DunSocial is one more scheduler in a market that already has them. Public list price is $20/month — not a success claim. https://www.dunsocial.com/</a:t>
+            </a:r>
+          </a:p>
+          <a:p>
+            <a:r>
+              <a:t>The owner talked to the founder, who did not want an interview. What he did say: people trust you when you solve a problem, and he studies competitors.</a:t>
+            </a:r>
+          </a:p>
+          <a:p>
+            <a:r>
+              <a:t>The easiest test of a market is to ship a better version of something that already exists. Do not put a like count on this slide.</a:t>
             </a:r>
           </a:p>
         </p:txBody>
@@ -2015,17 +2096,27 @@
           <a:lstStyle/>
           <a:p>
             <a:r>
-              <a:t>Tanglish: Oru price. Oru checkout. Adhu dhaan payment.</a:t>
-            </a:r>
-          </a:p>
-          <a:p>
-            <a:r>
-              <a:t>Prices are examples. Razorpay: https://razorpay.com/docs/</a:t>
-            </a:r>
-          </a:p>
-          <a:p>
-            <a:r>
-              <a:t>Stripe where available. Crowdfunding is not guaranteed funding.</a:t>
+              <a:t>Tanglish: Oru job. Ivanga already therinjavanga. Inspiration dhaan.</a:t>
+            </a:r>
+          </a:p>
+          <a:p>
+            <a:r>
+              <a:t>Raycast is a launcher. https://www.raycast.com/</a:t>
+            </a:r>
+          </a:p>
+          <a:p>
+            <a:r>
+              <a:t>Photopea is a browser photo editor. https://www.photopea.com/</a:t>
+            </a:r>
+          </a:p>
+          <a:p>
+            <a:r>
+              <a:t>Gumroad is a store for files and memberships. https://gumroad.com/</a:t>
+            </a:r>
+          </a:p>
+          <a:p>
+            <a:r>
+              <a:t>Screenshots are from the live sites. Inspiration only — no revenue, user-count, or success claims.</a:t>
             </a:r>
           </a:p>
         </p:txBody>
@@ -2095,22 +2186,17 @@
           <a:lstStyle/>
           <a:p>
             <a:r>
-              <a:t>Tanglish: Analytics-ku oru tool pothum. Ella logo-um venam.</a:t>
-            </a:r>
-          </a:p>
-          <a:p>
-            <a:r>
-              <a:t>PostHog: https://posthog.com/</a:t>
-            </a:r>
-          </a:p>
-          <a:p>
-            <a:r>
-              <a:t>Also name Plausible, Firebase Analytics, and Mixpanel, and say pick one.</a:t>
-            </a:r>
-          </a:p>
-          <a:p>
-            <a:r>
-              <a:t>Track visitors, activation, retention, paid conversion, churn.</a:t>
+              <a:t>Tanglish: First product. Game, charm, oru chinna app. Oruthan finish panna mudiyumnu irukanum.</a:t>
+            </a:r>
+          </a:p>
+          <a:p>
+            <a:r>
+              <a:t>The first part of the recipe is something one person can finish. Examples stay the ones already named.</a:t>
+            </a:r>
+          </a:p>
+          <a:p>
+            <a:r>
+              <a:t>https://www.maaa.app/</a:t>
             </a:r>
           </a:p>
         </p:txBody>
@@ -5252,7 +5338,7 @@
         </p:nvSpPr>
         <p:spPr>
           <a:xfrm>
-            <a:off x="640080" y="1143000"/>
+            <a:off x="640080" y="1051560"/>
             <a:ext cx="10881360" cy="1737360"/>
           </a:xfrm>
           <a:prstGeom prst="rect">
@@ -5268,13 +5354,13 @@
           <a:p>
             <a:pPr algn="ctr"/>
             <a:r>
-              <a:rPr sz="3200" b="1">
+              <a:rPr sz="3600" b="1">
                 <a:solidFill>
                   <a:srgbClr val="1D1D1F"/>
                 </a:solidFill>
                 <a:latin typeface="Calibri"/>
               </a:rPr>
-              <a:t>Then give them a place to talk.</a:t>
+              <a:t>Then take payment.</a:t>
             </a:r>
           </a:p>
         </p:txBody>
@@ -5287,7 +5373,7 @@
         </p:nvSpPr>
         <p:spPr>
           <a:xfrm>
-            <a:off x="640080" y="2926080"/>
+            <a:off x="640080" y="2834639"/>
             <a:ext cx="10881360" cy="777240"/>
           </a:xfrm>
           <a:prstGeom prst="rect">
@@ -5309,7 +5395,7 @@
                 </a:solidFill>
                 <a:latin typeface="Calibri"/>
               </a:rPr>
-              <a:t>Discord is enough.</a:t>
+              <a:t>One price. One checkout.</a:t>
             </a:r>
           </a:p>
         </p:txBody>
@@ -5322,8 +5408,8 @@
         </p:nvSpPr>
         <p:spPr>
           <a:xfrm>
-            <a:off x="4709160" y="3794760"/>
-            <a:ext cx="1554480" cy="777240"/>
+            <a:off x="4617720" y="3794760"/>
+            <a:ext cx="2926080" cy="1234440"/>
           </a:xfrm>
           <a:prstGeom prst="roundRect">
             <a:avLst/>
@@ -5365,13 +5451,58 @@
         </p:nvSpPr>
         <p:spPr>
           <a:xfrm>
-            <a:off x="5943600" y="4434840"/>
-            <a:ext cx="1554480" cy="658368"/>
+            <a:off x="4617720" y="3794760"/>
+            <a:ext cx="2926080" cy="292608"/>
           </a:xfrm>
           <a:prstGeom prst="roundRect">
             <a:avLst/>
           </a:prstGeom>
-          <a:noFill/>
+          <a:solidFill>
+            <a:srgbClr val="1EC8E6">
+              <a:lumMod val="45000"/>
+              <a:lumOff val="55000"/>
+            </a:srgbClr>
+          </a:solidFill>
+          <a:ln>
+            <a:noFill/>
+          </a:ln>
+        </p:spPr>
+        <p:style>
+          <a:lnRef idx="1">
+            <a:schemeClr val="accent1"/>
+          </a:lnRef>
+          <a:fillRef idx="3">
+            <a:schemeClr val="accent1"/>
+          </a:fillRef>
+          <a:effectRef idx="2">
+            <a:schemeClr val="accent1"/>
+          </a:effectRef>
+          <a:fontRef idx="minor">
+            <a:schemeClr val="lt1"/>
+          </a:fontRef>
+        </p:style>
+        <p:txBody>
+          <a:bodyPr rtlCol="0" anchor="ctr"/>
+          <a:lstStyle/>
+          <a:p>
+            <a:pPr algn="ctr"/>
+          </a:p>
+        </p:txBody>
+      </p:sp>
+      <p:cxnSp>
+        <p:nvCxnSpPr>
+          <p:cNvPr id="7" name="Connector 6"/>
+          <p:cNvCxnSpPr/>
+          <p:nvPr/>
+        </p:nvCxnSpPr>
+        <p:spPr>
+          <a:xfrm>
+            <a:off x="4937760" y="4617720"/>
+            <a:ext cx="868680" cy="0"/>
+          </a:xfrm>
+          <a:prstGeom prst="line">
+            <a:avLst/>
+          </a:prstGeom>
           <a:ln w="27940">
             <a:solidFill>
               <a:srgbClr val="1EC8E6"/>
@@ -5379,6 +5510,42 @@
           </a:ln>
         </p:spPr>
         <p:style>
+          <a:lnRef idx="2">
+            <a:schemeClr val="accent1"/>
+          </a:lnRef>
+          <a:fillRef idx="0">
+            <a:schemeClr val="accent1"/>
+          </a:fillRef>
+          <a:effectRef idx="1">
+            <a:schemeClr val="accent1"/>
+          </a:effectRef>
+          <a:fontRef idx="minor">
+            <a:schemeClr val="tx1"/>
+          </a:fontRef>
+        </p:style>
+      </p:cxnSp>
+      <p:sp>
+        <p:nvSpPr>
+          <p:cNvPr id="8" name="Oval 7"/>
+          <p:cNvSpPr/>
+          <p:nvPr/>
+        </p:nvSpPr>
+        <p:spPr>
+          <a:xfrm>
+            <a:off x="6903720" y="4315968"/>
+            <a:ext cx="384048" cy="384048"/>
+          </a:xfrm>
+          <a:prstGeom prst="ellipse">
+            <a:avLst/>
+          </a:prstGeom>
+          <a:noFill/>
+          <a:ln w="25400">
+            <a:solidFill>
+              <a:srgbClr val="7C5CFF"/>
+            </a:solidFill>
+          </a:ln>
+        </p:spPr>
+        <p:style>
           <a:lnRef idx="1">
             <a:schemeClr val="accent1"/>
           </a:lnRef>
@@ -5402,20 +5569,20 @@
       </p:sp>
       <p:sp>
         <p:nvSpPr>
-          <p:cNvPr id="7" name="Oval 6"/>
+          <p:cNvPr id="9" name="Rounded Rectangle 8"/>
           <p:cNvSpPr/>
           <p:nvPr/>
         </p:nvSpPr>
         <p:spPr>
           <a:xfrm>
-            <a:off x="4983480" y="4069080"/>
-            <a:ext cx="164592" cy="164592"/>
-          </a:xfrm>
-          <a:prstGeom prst="ellipse">
+            <a:off x="4838547" y="5806440"/>
+            <a:ext cx="1078992" cy="384048"/>
+          </a:xfrm>
+          <a:prstGeom prst="roundRect">
             <a:avLst/>
           </a:prstGeom>
           <a:solidFill>
-            <a:srgbClr val="1EC8E6"/>
+            <a:srgbClr val="E8E8ED"/>
           </a:solidFill>
           <a:ln>
             <a:noFill/>
@@ -5445,20 +5612,55 @@
       </p:sp>
       <p:sp>
         <p:nvSpPr>
-          <p:cNvPr id="8" name="Oval 7"/>
+          <p:cNvPr id="10" name="TextBox 9"/>
+          <p:cNvSpPr txBox="1"/>
+          <p:nvPr/>
+        </p:nvSpPr>
+        <p:spPr>
+          <a:xfrm>
+            <a:off x="4838547" y="5843016"/>
+            <a:ext cx="1078992" cy="329184"/>
+          </a:xfrm>
+          <a:prstGeom prst="rect">
+            <a:avLst/>
+          </a:prstGeom>
+          <a:noFill/>
+        </p:spPr>
+        <p:txBody>
+          <a:bodyPr wrap="square">
+            <a:spAutoFit/>
+          </a:bodyPr>
+          <a:lstStyle/>
+          <a:p>
+            <a:pPr algn="ctr"/>
+            <a:r>
+              <a:rPr sz="1200" b="1">
+                <a:solidFill>
+                  <a:srgbClr val="1D1D1F"/>
+                </a:solidFill>
+                <a:latin typeface="Calibri"/>
+              </a:rPr>
+              <a:t>₹99–₹499</a:t>
+            </a:r>
+          </a:p>
+        </p:txBody>
+      </p:sp>
+      <p:sp>
+        <p:nvSpPr>
+          <p:cNvPr id="11" name="Rounded Rectangle 10"/>
           <p:cNvSpPr/>
           <p:nvPr/>
         </p:nvSpPr>
         <p:spPr>
           <a:xfrm>
-            <a:off x="5276088" y="4069080"/>
-            <a:ext cx="164592" cy="164592"/>
-          </a:xfrm>
-          <a:prstGeom prst="ellipse">
+            <a:off x="6082131" y="5806440"/>
+            <a:ext cx="1271016" cy="384048"/>
+          </a:xfrm>
+          <a:prstGeom prst="roundRect">
             <a:avLst/>
           </a:prstGeom>
           <a:solidFill>
-            <a:srgbClr val="7C5CFF"/>
+            <a:srgbClr val="E8E8ED"/>
           </a:solidFill>
           <a:ln>
             <a:noFill/>
@@ -5488,44 +5690,36 @@
       </p:sp>
       <p:sp>
         <p:nvSpPr>
-          <p:cNvPr id="9" name="Oval 8"/>
-          <p:cNvSpPr/>
-          <p:nvPr/>
-        </p:nvSpPr>
-        <p:spPr>
-          <a:xfrm>
-            <a:off x="5568696" y="4069080"/>
-            <a:ext cx="164592" cy="164592"/>
-          </a:xfrm>
-          <a:prstGeom prst="ellipse">
-            <a:avLst/>
-          </a:prstGeom>
-          <a:solidFill>
-            <a:srgbClr val="1EC8E6"/>
-          </a:solidFill>
-          <a:ln>
-            <a:noFill/>
-          </a:ln>
-        </p:spPr>
-        <p:style>
-          <a:lnRef idx="1">
-            <a:schemeClr val="accent1"/>
-          </a:lnRef>
-          <a:fillRef idx="3">
-            <a:schemeClr val="accent1"/>
-          </a:fillRef>
-          <a:effectRef idx="2">
-            <a:schemeClr val="accent1"/>
-          </a:effectRef>
-          <a:fontRef idx="minor">
-            <a:schemeClr val="lt1"/>
-          </a:fontRef>
-        </p:style>
-        <p:txBody>
-          <a:bodyPr rtlCol="0" anchor="ctr"/>
-          <a:lstStyle/>
-          <a:p>
-            <a:pPr algn="ctr"/>
+          <p:cNvPr id="12" name="TextBox 11"/>
+          <p:cNvSpPr txBox="1"/>
+          <p:nvPr/>
+        </p:nvSpPr>
+        <p:spPr>
+          <a:xfrm>
+            <a:off x="6082131" y="5843016"/>
+            <a:ext cx="1271016" cy="329184"/>
+          </a:xfrm>
+          <a:prstGeom prst="rect">
+            <a:avLst/>
+          </a:prstGeom>
+          <a:noFill/>
+        </p:spPr>
+        <p:txBody>
+          <a:bodyPr wrap="square">
+            <a:spAutoFit/>
+          </a:bodyPr>
+          <a:lstStyle/>
+          <a:p>
+            <a:pPr algn="ctr"/>
+            <a:r>
+              <a:rPr sz="1200" b="1">
+                <a:solidFill>
+                  <a:srgbClr val="1D1D1F"/>
+                </a:solidFill>
+                <a:latin typeface="Calibri"/>
+              </a:rPr>
+              <a:t>₹199/month</a:t>
+            </a:r>
           </a:p>
         </p:txBody>
       </p:sp>
@@ -5598,7 +5792,7 @@
         </p:nvSpPr>
         <p:spPr>
           <a:xfrm>
-            <a:off x="640080" y="1874519"/>
+            <a:off x="640080" y="1051560"/>
             <a:ext cx="10881360" cy="1737360"/>
           </a:xfrm>
           <a:prstGeom prst="rect">
@@ -5614,13 +5808,13 @@
           <a:p>
             <a:pPr algn="ctr"/>
             <a:r>
-              <a:rPr sz="3000" b="1">
+              <a:rPr sz="3600" b="1">
                 <a:solidFill>
                   <a:srgbClr val="1D1D1F"/>
                 </a:solidFill>
                 <a:latin typeface="Calibri"/>
               </a:rPr>
-              <a:t>They stay when you solve the next problem.</a:t>
+              <a:t>Then watch what they do.</a:t>
             </a:r>
           </a:p>
         </p:txBody>
@@ -5633,7 +5827,7 @@
         </p:nvSpPr>
         <p:spPr>
           <a:xfrm>
-            <a:off x="640080" y="3657600"/>
+            <a:off x="640080" y="2834639"/>
             <a:ext cx="10881360" cy="777240"/>
           </a:xfrm>
           <a:prstGeom prst="rect">
@@ -5655,7 +5849,339 @@
                 </a:solidFill>
                 <a:latin typeface="Calibri"/>
               </a:rPr>
-              <a:t>Likes are not customers.</a:t>
+              <a:t>One analytics tool is enough.</a:t>
+            </a:r>
+          </a:p>
+        </p:txBody>
+      </p:sp>
+      <p:cxnSp>
+        <p:nvCxnSpPr>
+          <p:cNvPr id="5" name="Connector 4"/>
+          <p:cNvCxnSpPr/>
+          <p:nvPr/>
+        </p:nvCxnSpPr>
+        <p:spPr>
+          <a:xfrm>
+            <a:off x="4709160" y="3794760"/>
+            <a:ext cx="0" cy="1280160"/>
+          </a:xfrm>
+          <a:prstGeom prst="line">
+            <a:avLst/>
+          </a:prstGeom>
+          <a:ln w="25400">
+            <a:solidFill>
+              <a:srgbClr val="7C5CFF"/>
+            </a:solidFill>
+          </a:ln>
+        </p:spPr>
+        <p:style>
+          <a:lnRef idx="2">
+            <a:schemeClr val="accent1"/>
+          </a:lnRef>
+          <a:fillRef idx="0">
+            <a:schemeClr val="accent1"/>
+          </a:fillRef>
+          <a:effectRef idx="1">
+            <a:schemeClr val="accent1"/>
+          </a:effectRef>
+          <a:fontRef idx="minor">
+            <a:schemeClr val="tx1"/>
+          </a:fontRef>
+        </p:style>
+      </p:cxnSp>
+      <p:cxnSp>
+        <p:nvCxnSpPr>
+          <p:cNvPr id="6" name="Connector 5"/>
+          <p:cNvCxnSpPr/>
+          <p:nvPr/>
+        </p:nvCxnSpPr>
+        <p:spPr>
+          <a:xfrm>
+            <a:off x="4709160" y="5074920"/>
+            <a:ext cx="2788919" cy="0"/>
+          </a:xfrm>
+          <a:prstGeom prst="line">
+            <a:avLst/>
+          </a:prstGeom>
+          <a:ln w="25400">
+            <a:solidFill>
+              <a:srgbClr val="7C5CFF"/>
+            </a:solidFill>
+          </a:ln>
+        </p:spPr>
+        <p:style>
+          <a:lnRef idx="2">
+            <a:schemeClr val="accent1"/>
+          </a:lnRef>
+          <a:fillRef idx="0">
+            <a:schemeClr val="accent1"/>
+          </a:fillRef>
+          <a:effectRef idx="1">
+            <a:schemeClr val="accent1"/>
+          </a:effectRef>
+          <a:fontRef idx="minor">
+            <a:schemeClr val="tx1"/>
+          </a:fontRef>
+        </p:style>
+      </p:cxnSp>
+      <p:sp>
+        <p:nvSpPr>
+          <p:cNvPr id="7" name="Rounded Rectangle 6"/>
+          <p:cNvSpPr/>
+          <p:nvPr/>
+        </p:nvSpPr>
+        <p:spPr>
+          <a:xfrm>
+            <a:off x="4937760" y="4617720"/>
+            <a:ext cx="347472" cy="502920"/>
+          </a:xfrm>
+          <a:prstGeom prst="roundRect">
+            <a:avLst/>
+          </a:prstGeom>
+          <a:solidFill>
+            <a:srgbClr val="1EC8E6">
+              <a:lumMod val="65000"/>
+              <a:lumOff val="35000"/>
+            </a:srgbClr>
+          </a:solidFill>
+          <a:ln>
+            <a:noFill/>
+          </a:ln>
+        </p:spPr>
+        <p:style>
+          <a:lnRef idx="1">
+            <a:schemeClr val="accent1"/>
+          </a:lnRef>
+          <a:fillRef idx="3">
+            <a:schemeClr val="accent1"/>
+          </a:fillRef>
+          <a:effectRef idx="2">
+            <a:schemeClr val="accent1"/>
+          </a:effectRef>
+          <a:fontRef idx="minor">
+            <a:schemeClr val="lt1"/>
+          </a:fontRef>
+        </p:style>
+        <p:txBody>
+          <a:bodyPr rtlCol="0" anchor="ctr"/>
+          <a:lstStyle/>
+          <a:p>
+            <a:pPr algn="ctr"/>
+          </a:p>
+        </p:txBody>
+      </p:sp>
+      <p:sp>
+        <p:nvSpPr>
+          <p:cNvPr id="8" name="Rounded Rectangle 7"/>
+          <p:cNvSpPr/>
+          <p:nvPr/>
+        </p:nvSpPr>
+        <p:spPr>
+          <a:xfrm>
+            <a:off x="5623560" y="4297680"/>
+            <a:ext cx="347472" cy="777240"/>
+          </a:xfrm>
+          <a:prstGeom prst="roundRect">
+            <a:avLst/>
+          </a:prstGeom>
+          <a:solidFill>
+            <a:srgbClr val="7C5CFF">
+              <a:lumMod val="65000"/>
+              <a:lumOff val="35000"/>
+            </a:srgbClr>
+          </a:solidFill>
+          <a:ln>
+            <a:noFill/>
+          </a:ln>
+        </p:spPr>
+        <p:style>
+          <a:lnRef idx="1">
+            <a:schemeClr val="accent1"/>
+          </a:lnRef>
+          <a:fillRef idx="3">
+            <a:schemeClr val="accent1"/>
+          </a:fillRef>
+          <a:effectRef idx="2">
+            <a:schemeClr val="accent1"/>
+          </a:effectRef>
+          <a:fontRef idx="minor">
+            <a:schemeClr val="lt1"/>
+          </a:fontRef>
+        </p:style>
+        <p:txBody>
+          <a:bodyPr rtlCol="0" anchor="ctr"/>
+          <a:lstStyle/>
+          <a:p>
+            <a:pPr algn="ctr"/>
+          </a:p>
+        </p:txBody>
+      </p:sp>
+      <p:sp>
+        <p:nvSpPr>
+          <p:cNvPr id="9" name="Rounded Rectangle 8"/>
+          <p:cNvSpPr/>
+          <p:nvPr/>
+        </p:nvSpPr>
+        <p:spPr>
+          <a:xfrm>
+            <a:off x="6309360" y="4480560"/>
+            <a:ext cx="347472" cy="594360"/>
+          </a:xfrm>
+          <a:prstGeom prst="roundRect">
+            <a:avLst/>
+          </a:prstGeom>
+          <a:solidFill>
+            <a:srgbClr val="1EC8E6">
+              <a:lumMod val="65000"/>
+              <a:lumOff val="35000"/>
+            </a:srgbClr>
+          </a:solidFill>
+          <a:ln>
+            <a:noFill/>
+          </a:ln>
+        </p:spPr>
+        <p:style>
+          <a:lnRef idx="1">
+            <a:schemeClr val="accent1"/>
+          </a:lnRef>
+          <a:fillRef idx="3">
+            <a:schemeClr val="accent1"/>
+          </a:fillRef>
+          <a:effectRef idx="2">
+            <a:schemeClr val="accent1"/>
+          </a:effectRef>
+          <a:fontRef idx="minor">
+            <a:schemeClr val="lt1"/>
+          </a:fontRef>
+        </p:style>
+        <p:txBody>
+          <a:bodyPr rtlCol="0" anchor="ctr"/>
+          <a:lstStyle/>
+          <a:p>
+            <a:pPr algn="ctr"/>
+          </a:p>
+        </p:txBody>
+      </p:sp>
+      <p:sp>
+        <p:nvSpPr>
+          <p:cNvPr id="10" name="Rounded Rectangle 9"/>
+          <p:cNvSpPr/>
+          <p:nvPr/>
+        </p:nvSpPr>
+        <p:spPr>
+          <a:xfrm>
+            <a:off x="6995160" y="4023360"/>
+            <a:ext cx="347472" cy="1051560"/>
+          </a:xfrm>
+          <a:prstGeom prst="roundRect">
+            <a:avLst/>
+          </a:prstGeom>
+          <a:solidFill>
+            <a:srgbClr val="7C5CFF">
+              <a:lumMod val="65000"/>
+              <a:lumOff val="35000"/>
+            </a:srgbClr>
+          </a:solidFill>
+          <a:ln>
+            <a:noFill/>
+          </a:ln>
+        </p:spPr>
+        <p:style>
+          <a:lnRef idx="1">
+            <a:schemeClr val="accent1"/>
+          </a:lnRef>
+          <a:fillRef idx="3">
+            <a:schemeClr val="accent1"/>
+          </a:fillRef>
+          <a:effectRef idx="2">
+            <a:schemeClr val="accent1"/>
+          </a:effectRef>
+          <a:fontRef idx="minor">
+            <a:schemeClr val="lt1"/>
+          </a:fontRef>
+        </p:style>
+        <p:txBody>
+          <a:bodyPr rtlCol="0" anchor="ctr"/>
+          <a:lstStyle/>
+          <a:p>
+            <a:pPr algn="ctr"/>
+          </a:p>
+        </p:txBody>
+      </p:sp>
+      <p:sp>
+        <p:nvSpPr>
+          <p:cNvPr id="11" name="Rounded Rectangle 10"/>
+          <p:cNvSpPr/>
+          <p:nvPr/>
+        </p:nvSpPr>
+        <p:spPr>
+          <a:xfrm>
+            <a:off x="5604357" y="5806440"/>
+            <a:ext cx="982980" cy="384048"/>
+          </a:xfrm>
+          <a:prstGeom prst="roundRect">
+            <a:avLst/>
+          </a:prstGeom>
+          <a:solidFill>
+            <a:srgbClr val="E8E8ED"/>
+          </a:solidFill>
+          <a:ln>
+            <a:noFill/>
+          </a:ln>
+        </p:spPr>
+        <p:style>
+          <a:lnRef idx="1">
+            <a:schemeClr val="accent1"/>
+          </a:lnRef>
+          <a:fillRef idx="3">
+            <a:schemeClr val="accent1"/>
+          </a:fillRef>
+          <a:effectRef idx="2">
+            <a:schemeClr val="accent1"/>
+          </a:effectRef>
+          <a:fontRef idx="minor">
+            <a:schemeClr val="lt1"/>
+          </a:fontRef>
+        </p:style>
+        <p:txBody>
+          <a:bodyPr rtlCol="0" anchor="ctr"/>
+          <a:lstStyle/>
+          <a:p>
+            <a:pPr algn="ctr"/>
+          </a:p>
+        </p:txBody>
+      </p:sp>
+      <p:sp>
+        <p:nvSpPr>
+          <p:cNvPr id="12" name="TextBox 11"/>
+          <p:cNvSpPr txBox="1"/>
+          <p:nvPr/>
+        </p:nvSpPr>
+        <p:spPr>
+          <a:xfrm>
+            <a:off x="5604357" y="5843016"/>
+            <a:ext cx="982980" cy="329184"/>
+          </a:xfrm>
+          <a:prstGeom prst="rect">
+            <a:avLst/>
+          </a:prstGeom>
+          <a:noFill/>
+        </p:spPr>
+        <p:txBody>
+          <a:bodyPr wrap="square">
+            <a:spAutoFit/>
+          </a:bodyPr>
+          <a:lstStyle/>
+          <a:p>
+            <a:pPr algn="ctr"/>
+            <a:r>
+              <a:rPr sz="1200" b="1">
+                <a:solidFill>
+                  <a:srgbClr val="1D1D1F"/>
+                </a:solidFill>
+                <a:latin typeface="Calibri"/>
+              </a:rPr>
+              <a:t>PostHog</a:t>
             </a:r>
           </a:p>
         </p:txBody>
@@ -5729,7 +6255,7 @@
         </p:nvSpPr>
         <p:spPr>
           <a:xfrm>
-            <a:off x="640080" y="1325880"/>
+            <a:off x="640080" y="1143000"/>
             <a:ext cx="10881360" cy="1737360"/>
           </a:xfrm>
           <a:prstGeom prst="rect">
@@ -5745,13 +6271,13 @@
           <a:p>
             <a:pPr algn="ctr"/>
             <a:r>
-              <a:rPr sz="2800" b="1">
+              <a:rPr sz="3200" b="1">
                 <a:solidFill>
                   <a:srgbClr val="1D1D1F"/>
                 </a:solidFill>
                 <a:latin typeface="Calibri"/>
               </a:rPr>
-              <a:t>Your first paying customer beats another feature.</a:t>
+              <a:t>Then give them a place to talk.</a:t>
             </a:r>
           </a:p>
         </p:txBody>
@@ -5764,7 +6290,7 @@
         </p:nvSpPr>
         <p:spPr>
           <a:xfrm>
-            <a:off x="640080" y="3108960"/>
+            <a:off x="640080" y="2926080"/>
             <a:ext cx="10881360" cy="777240"/>
           </a:xfrm>
           <a:prstGeom prst="rect">
@@ -5786,8 +6312,223 @@
                 </a:solidFill>
                 <a:latin typeface="Calibri"/>
               </a:rPr>
-              <a:t>Too simple is why it stays in GitHub.</a:t>
-            </a:r>
+              <a:t>Discord is enough.</a:t>
+            </a:r>
+          </a:p>
+        </p:txBody>
+      </p:sp>
+      <p:sp>
+        <p:nvSpPr>
+          <p:cNvPr id="5" name="Rounded Rectangle 4"/>
+          <p:cNvSpPr/>
+          <p:nvPr/>
+        </p:nvSpPr>
+        <p:spPr>
+          <a:xfrm>
+            <a:off x="4709160" y="3794760"/>
+            <a:ext cx="1554480" cy="777240"/>
+          </a:xfrm>
+          <a:prstGeom prst="roundRect">
+            <a:avLst/>
+          </a:prstGeom>
+          <a:noFill/>
+          <a:ln w="27940">
+            <a:solidFill>
+              <a:srgbClr val="7C5CFF"/>
+            </a:solidFill>
+          </a:ln>
+        </p:spPr>
+        <p:style>
+          <a:lnRef idx="1">
+            <a:schemeClr val="accent1"/>
+          </a:lnRef>
+          <a:fillRef idx="3">
+            <a:schemeClr val="accent1"/>
+          </a:fillRef>
+          <a:effectRef idx="2">
+            <a:schemeClr val="accent1"/>
+          </a:effectRef>
+          <a:fontRef idx="minor">
+            <a:schemeClr val="lt1"/>
+          </a:fontRef>
+        </p:style>
+        <p:txBody>
+          <a:bodyPr rtlCol="0" anchor="ctr"/>
+          <a:lstStyle/>
+          <a:p>
+            <a:pPr algn="ctr"/>
+          </a:p>
+        </p:txBody>
+      </p:sp>
+      <p:sp>
+        <p:nvSpPr>
+          <p:cNvPr id="6" name="Rounded Rectangle 5"/>
+          <p:cNvSpPr/>
+          <p:nvPr/>
+        </p:nvSpPr>
+        <p:spPr>
+          <a:xfrm>
+            <a:off x="5943600" y="4434840"/>
+            <a:ext cx="1554480" cy="658368"/>
+          </a:xfrm>
+          <a:prstGeom prst="roundRect">
+            <a:avLst/>
+          </a:prstGeom>
+          <a:noFill/>
+          <a:ln w="27940">
+            <a:solidFill>
+              <a:srgbClr val="1EC8E6"/>
+            </a:solidFill>
+          </a:ln>
+        </p:spPr>
+        <p:style>
+          <a:lnRef idx="1">
+            <a:schemeClr val="accent1"/>
+          </a:lnRef>
+          <a:fillRef idx="3">
+            <a:schemeClr val="accent1"/>
+          </a:fillRef>
+          <a:effectRef idx="2">
+            <a:schemeClr val="accent1"/>
+          </a:effectRef>
+          <a:fontRef idx="minor">
+            <a:schemeClr val="lt1"/>
+          </a:fontRef>
+        </p:style>
+        <p:txBody>
+          <a:bodyPr rtlCol="0" anchor="ctr"/>
+          <a:lstStyle/>
+          <a:p>
+            <a:pPr algn="ctr"/>
+          </a:p>
+        </p:txBody>
+      </p:sp>
+      <p:sp>
+        <p:nvSpPr>
+          <p:cNvPr id="7" name="Oval 6"/>
+          <p:cNvSpPr/>
+          <p:nvPr/>
+        </p:nvSpPr>
+        <p:spPr>
+          <a:xfrm>
+            <a:off x="4983480" y="4069080"/>
+            <a:ext cx="164592" cy="164592"/>
+          </a:xfrm>
+          <a:prstGeom prst="ellipse">
+            <a:avLst/>
+          </a:prstGeom>
+          <a:solidFill>
+            <a:srgbClr val="1EC8E6"/>
+          </a:solidFill>
+          <a:ln>
+            <a:noFill/>
+          </a:ln>
+        </p:spPr>
+        <p:style>
+          <a:lnRef idx="1">
+            <a:schemeClr val="accent1"/>
+          </a:lnRef>
+          <a:fillRef idx="3">
+            <a:schemeClr val="accent1"/>
+          </a:fillRef>
+          <a:effectRef idx="2">
+            <a:schemeClr val="accent1"/>
+          </a:effectRef>
+          <a:fontRef idx="minor">
+            <a:schemeClr val="lt1"/>
+          </a:fontRef>
+        </p:style>
+        <p:txBody>
+          <a:bodyPr rtlCol="0" anchor="ctr"/>
+          <a:lstStyle/>
+          <a:p>
+            <a:pPr algn="ctr"/>
+          </a:p>
+        </p:txBody>
+      </p:sp>
+      <p:sp>
+        <p:nvSpPr>
+          <p:cNvPr id="8" name="Oval 7"/>
+          <p:cNvSpPr/>
+          <p:nvPr/>
+        </p:nvSpPr>
+        <p:spPr>
+          <a:xfrm>
+            <a:off x="5276088" y="4069080"/>
+            <a:ext cx="164592" cy="164592"/>
+          </a:xfrm>
+          <a:prstGeom prst="ellipse">
+            <a:avLst/>
+          </a:prstGeom>
+          <a:solidFill>
+            <a:srgbClr val="7C5CFF"/>
+          </a:solidFill>
+          <a:ln>
+            <a:noFill/>
+          </a:ln>
+        </p:spPr>
+        <p:style>
+          <a:lnRef idx="1">
+            <a:schemeClr val="accent1"/>
+          </a:lnRef>
+          <a:fillRef idx="3">
+            <a:schemeClr val="accent1"/>
+          </a:fillRef>
+          <a:effectRef idx="2">
+            <a:schemeClr val="accent1"/>
+          </a:effectRef>
+          <a:fontRef idx="minor">
+            <a:schemeClr val="lt1"/>
+          </a:fontRef>
+        </p:style>
+        <p:txBody>
+          <a:bodyPr rtlCol="0" anchor="ctr"/>
+          <a:lstStyle/>
+          <a:p>
+            <a:pPr algn="ctr"/>
+          </a:p>
+        </p:txBody>
+      </p:sp>
+      <p:sp>
+        <p:nvSpPr>
+          <p:cNvPr id="9" name="Oval 8"/>
+          <p:cNvSpPr/>
+          <p:nvPr/>
+        </p:nvSpPr>
+        <p:spPr>
+          <a:xfrm>
+            <a:off x="5568696" y="4069080"/>
+            <a:ext cx="164592" cy="164592"/>
+          </a:xfrm>
+          <a:prstGeom prst="ellipse">
+            <a:avLst/>
+          </a:prstGeom>
+          <a:solidFill>
+            <a:srgbClr val="1EC8E6"/>
+          </a:solidFill>
+          <a:ln>
+            <a:noFill/>
+          </a:ln>
+        </p:spPr>
+        <p:style>
+          <a:lnRef idx="1">
+            <a:schemeClr val="accent1"/>
+          </a:lnRef>
+          <a:fillRef idx="3">
+            <a:schemeClr val="accent1"/>
+          </a:fillRef>
+          <a:effectRef idx="2">
+            <a:schemeClr val="accent1"/>
+          </a:effectRef>
+          <a:fontRef idx="minor">
+            <a:schemeClr val="lt1"/>
+          </a:fontRef>
+        </p:style>
+        <p:txBody>
+          <a:bodyPr rtlCol="0" anchor="ctr"/>
+          <a:lstStyle/>
+          <a:p>
+            <a:pPr algn="ctr"/>
           </a:p>
         </p:txBody>
       </p:sp>
@@ -5860,7 +6601,7 @@
         </p:nvSpPr>
         <p:spPr>
           <a:xfrm>
-            <a:off x="640080" y="1554480"/>
+            <a:off x="640080" y="1874519"/>
             <a:ext cx="10881360" cy="1737360"/>
           </a:xfrm>
           <a:prstGeom prst="rect">
@@ -5876,13 +6617,13 @@
           <a:p>
             <a:pPr algn="ctr"/>
             <a:r>
-              <a:rPr sz="4000" b="1">
+              <a:rPr sz="3000" b="1">
                 <a:solidFill>
                   <a:srgbClr val="1D1D1F"/>
                 </a:solidFill>
                 <a:latin typeface="Calibri"/>
               </a:rPr>
-              <a:t>Five people × ₹199.</a:t>
+              <a:t>They stay when you solve the next problem.</a:t>
             </a:r>
           </a:p>
         </p:txBody>
@@ -5895,7 +6636,7 @@
         </p:nvSpPr>
         <p:spPr>
           <a:xfrm>
-            <a:off x="640080" y="3337560"/>
+            <a:off x="640080" y="3657600"/>
             <a:ext cx="10881360" cy="777240"/>
           </a:xfrm>
           <a:prstGeom prst="rect">
@@ -5917,319 +6658,7 @@
                 </a:solidFill>
                 <a:latin typeface="Calibri"/>
               </a:rPr>
-              <a:t>Your first ₹1,000.</a:t>
-            </a:r>
-          </a:p>
-        </p:txBody>
-      </p:sp>
-      <p:sp>
-        <p:nvSpPr>
-          <p:cNvPr id="5" name="Rounded Rectangle 4"/>
-          <p:cNvSpPr/>
-          <p:nvPr/>
-        </p:nvSpPr>
-        <p:spPr>
-          <a:xfrm>
-            <a:off x="3210915" y="5806440"/>
-            <a:ext cx="1655064" cy="384048"/>
-          </a:xfrm>
-          <a:prstGeom prst="roundRect">
-            <a:avLst/>
-          </a:prstGeom>
-          <a:solidFill>
-            <a:srgbClr val="E8E8ED"/>
-          </a:solidFill>
-          <a:ln>
-            <a:noFill/>
-          </a:ln>
-        </p:spPr>
-        <p:style>
-          <a:lnRef idx="1">
-            <a:schemeClr val="accent1"/>
-          </a:lnRef>
-          <a:fillRef idx="3">
-            <a:schemeClr val="accent1"/>
-          </a:fillRef>
-          <a:effectRef idx="2">
-            <a:schemeClr val="accent1"/>
-          </a:effectRef>
-          <a:fontRef idx="minor">
-            <a:schemeClr val="lt1"/>
-          </a:fontRef>
-        </p:style>
-        <p:txBody>
-          <a:bodyPr rtlCol="0" anchor="ctr"/>
-          <a:lstStyle/>
-          <a:p>
-            <a:pPr algn="ctr"/>
-          </a:p>
-        </p:txBody>
-      </p:sp>
-      <p:sp>
-        <p:nvSpPr>
-          <p:cNvPr id="6" name="TextBox 5"/>
-          <p:cNvSpPr txBox="1"/>
-          <p:nvPr/>
-        </p:nvSpPr>
-        <p:spPr>
-          <a:xfrm>
-            <a:off x="3210915" y="5843016"/>
-            <a:ext cx="1655064" cy="329184"/>
-          </a:xfrm>
-          <a:prstGeom prst="rect">
-            <a:avLst/>
-          </a:prstGeom>
-          <a:noFill/>
-        </p:spPr>
-        <p:txBody>
-          <a:bodyPr wrap="square">
-            <a:spAutoFit/>
-          </a:bodyPr>
-          <a:lstStyle/>
-          <a:p>
-            <a:pPr algn="ctr"/>
-            <a:r>
-              <a:rPr sz="1200" b="1">
-                <a:solidFill>
-                  <a:srgbClr val="1D1D1F"/>
-                </a:solidFill>
-                <a:latin typeface="Calibri"/>
-              </a:rPr>
-              <a:t>₹199 extension</a:t>
-            </a:r>
-          </a:p>
-        </p:txBody>
-      </p:sp>
-      <p:sp>
-        <p:nvSpPr>
-          <p:cNvPr id="7" name="Rounded Rectangle 6"/>
-          <p:cNvSpPr/>
-          <p:nvPr/>
-        </p:nvSpPr>
-        <p:spPr>
-          <a:xfrm>
-            <a:off x="5030571" y="5806440"/>
-            <a:ext cx="1078992" cy="384048"/>
-          </a:xfrm>
-          <a:prstGeom prst="roundRect">
-            <a:avLst/>
-          </a:prstGeom>
-          <a:solidFill>
-            <a:srgbClr val="E8E8ED"/>
-          </a:solidFill>
-          <a:ln>
-            <a:noFill/>
-          </a:ln>
-        </p:spPr>
-        <p:style>
-          <a:lnRef idx="1">
-            <a:schemeClr val="accent1"/>
-          </a:lnRef>
-          <a:fillRef idx="3">
-            <a:schemeClr val="accent1"/>
-          </a:fillRef>
-          <a:effectRef idx="2">
-            <a:schemeClr val="accent1"/>
-          </a:effectRef>
-          <a:fontRef idx="minor">
-            <a:schemeClr val="lt1"/>
-          </a:fontRef>
-        </p:style>
-        <p:txBody>
-          <a:bodyPr rtlCol="0" anchor="ctr"/>
-          <a:lstStyle/>
-          <a:p>
-            <a:pPr algn="ctr"/>
-          </a:p>
-        </p:txBody>
-      </p:sp>
-      <p:sp>
-        <p:nvSpPr>
-          <p:cNvPr id="8" name="TextBox 7"/>
-          <p:cNvSpPr txBox="1"/>
-          <p:nvPr/>
-        </p:nvSpPr>
-        <p:spPr>
-          <a:xfrm>
-            <a:off x="5030571" y="5843016"/>
-            <a:ext cx="1078992" cy="329184"/>
-          </a:xfrm>
-          <a:prstGeom prst="rect">
-            <a:avLst/>
-          </a:prstGeom>
-          <a:noFill/>
-        </p:spPr>
-        <p:txBody>
-          <a:bodyPr wrap="square">
-            <a:spAutoFit/>
-          </a:bodyPr>
-          <a:lstStyle/>
-          <a:p>
-            <a:pPr algn="ctr"/>
-            <a:r>
-              <a:rPr sz="1200" b="1">
-                <a:solidFill>
-                  <a:srgbClr val="1D1D1F"/>
-                </a:solidFill>
-                <a:latin typeface="Calibri"/>
-              </a:rPr>
-              <a:t>₹299 app</a:t>
-            </a:r>
-          </a:p>
-        </p:txBody>
-      </p:sp>
-      <p:sp>
-        <p:nvSpPr>
-          <p:cNvPr id="9" name="Rounded Rectangle 8"/>
-          <p:cNvSpPr/>
-          <p:nvPr/>
-        </p:nvSpPr>
-        <p:spPr>
-          <a:xfrm>
-            <a:off x="6274155" y="5806440"/>
-            <a:ext cx="1271016" cy="384048"/>
-          </a:xfrm>
-          <a:prstGeom prst="roundRect">
-            <a:avLst/>
-          </a:prstGeom>
-          <a:solidFill>
-            <a:srgbClr val="E8E8ED"/>
-          </a:solidFill>
-          <a:ln>
-            <a:noFill/>
-          </a:ln>
-        </p:spPr>
-        <p:style>
-          <a:lnRef idx="1">
-            <a:schemeClr val="accent1"/>
-          </a:lnRef>
-          <a:fillRef idx="3">
-            <a:schemeClr val="accent1"/>
-          </a:fillRef>
-          <a:effectRef idx="2">
-            <a:schemeClr val="accent1"/>
-          </a:effectRef>
-          <a:fontRef idx="minor">
-            <a:schemeClr val="lt1"/>
-          </a:fontRef>
-        </p:style>
-        <p:txBody>
-          <a:bodyPr rtlCol="0" anchor="ctr"/>
-          <a:lstStyle/>
-          <a:p>
-            <a:pPr algn="ctr"/>
-          </a:p>
-        </p:txBody>
-      </p:sp>
-      <p:sp>
-        <p:nvSpPr>
-          <p:cNvPr id="10" name="TextBox 9"/>
-          <p:cNvSpPr txBox="1"/>
-          <p:nvPr/>
-        </p:nvSpPr>
-        <p:spPr>
-          <a:xfrm>
-            <a:off x="6274155" y="5843016"/>
-            <a:ext cx="1271016" cy="329184"/>
-          </a:xfrm>
-          <a:prstGeom prst="rect">
-            <a:avLst/>
-          </a:prstGeom>
-          <a:noFill/>
-        </p:spPr>
-        <p:txBody>
-          <a:bodyPr wrap="square">
-            <a:spAutoFit/>
-          </a:bodyPr>
-          <a:lstStyle/>
-          <a:p>
-            <a:pPr algn="ctr"/>
-            <a:r>
-              <a:rPr sz="1200" b="1">
-                <a:solidFill>
-                  <a:srgbClr val="1D1D1F"/>
-                </a:solidFill>
-                <a:latin typeface="Calibri"/>
-              </a:rPr>
-              <a:t>₹499/month</a:t>
-            </a:r>
-          </a:p>
-        </p:txBody>
-      </p:sp>
-      <p:sp>
-        <p:nvSpPr>
-          <p:cNvPr id="11" name="Rounded Rectangle 10"/>
-          <p:cNvSpPr/>
-          <p:nvPr/>
-        </p:nvSpPr>
-        <p:spPr>
-          <a:xfrm>
-            <a:off x="7709763" y="5806440"/>
-            <a:ext cx="1271016" cy="384048"/>
-          </a:xfrm>
-          <a:prstGeom prst="roundRect">
-            <a:avLst/>
-          </a:prstGeom>
-          <a:solidFill>
-            <a:srgbClr val="E8E8ED"/>
-          </a:solidFill>
-          <a:ln>
-            <a:noFill/>
-          </a:ln>
-        </p:spPr>
-        <p:style>
-          <a:lnRef idx="1">
-            <a:schemeClr val="accent1"/>
-          </a:lnRef>
-          <a:fillRef idx="3">
-            <a:schemeClr val="accent1"/>
-          </a:fillRef>
-          <a:effectRef idx="2">
-            <a:schemeClr val="accent1"/>
-          </a:effectRef>
-          <a:fontRef idx="minor">
-            <a:schemeClr val="lt1"/>
-          </a:fontRef>
-        </p:style>
-        <p:txBody>
-          <a:bodyPr rtlCol="0" anchor="ctr"/>
-          <a:lstStyle/>
-          <a:p>
-            <a:pPr algn="ctr"/>
-          </a:p>
-        </p:txBody>
-      </p:sp>
-      <p:sp>
-        <p:nvSpPr>
-          <p:cNvPr id="12" name="TextBox 11"/>
-          <p:cNvSpPr txBox="1"/>
-          <p:nvPr/>
-        </p:nvSpPr>
-        <p:spPr>
-          <a:xfrm>
-            <a:off x="7709763" y="5843016"/>
-            <a:ext cx="1271016" cy="329184"/>
-          </a:xfrm>
-          <a:prstGeom prst="rect">
-            <a:avLst/>
-          </a:prstGeom>
-          <a:noFill/>
-        </p:spPr>
-        <p:txBody>
-          <a:bodyPr wrap="square">
-            <a:spAutoFit/>
-          </a:bodyPr>
-          <a:lstStyle/>
-          <a:p>
-            <a:pPr algn="ctr"/>
-            <a:r>
-              <a:rPr sz="1200" b="1">
-                <a:solidFill>
-                  <a:srgbClr val="1D1D1F"/>
-                </a:solidFill>
-                <a:latin typeface="Calibri"/>
-              </a:rPr>
-              <a:t>Level pack</a:t>
+              <a:t>Likes are not customers.</a:t>
             </a:r>
           </a:p>
         </p:txBody>
@@ -6303,7 +6732,7 @@
         </p:nvSpPr>
         <p:spPr>
           <a:xfrm>
-            <a:off x="640080" y="1783080"/>
+            <a:off x="640080" y="1325880"/>
             <a:ext cx="10881360" cy="1737360"/>
           </a:xfrm>
           <a:prstGeom prst="rect">
@@ -6319,13 +6748,13 @@
           <a:p>
             <a:pPr algn="ctr"/>
             <a:r>
-              <a:rPr sz="3600" b="1">
+              <a:rPr sz="2800" b="1">
                 <a:solidFill>
                   <a:srgbClr val="1D1D1F"/>
                 </a:solidFill>
                 <a:latin typeface="Calibri"/>
               </a:rPr>
-              <a:t>Build anything. Ship something.</a:t>
+              <a:t>Your first paying customer beats another feature.</a:t>
             </a:r>
           </a:p>
         </p:txBody>
@@ -6338,7 +6767,7 @@
         </p:nvSpPr>
         <p:spPr>
           <a:xfrm>
-            <a:off x="640080" y="3566160"/>
+            <a:off x="640080" y="3108960"/>
             <a:ext cx="10881360" cy="777240"/>
           </a:xfrm>
           <a:prstGeom prst="rect">
@@ -6360,319 +6789,7 @@
                 </a:solidFill>
                 <a:latin typeface="Calibri"/>
               </a:rPr>
-              <a:t>Solo or team.</a:t>
-            </a:r>
-          </a:p>
-        </p:txBody>
-      </p:sp>
-      <p:sp>
-        <p:nvSpPr>
-          <p:cNvPr id="5" name="Rounded Rectangle 4"/>
-          <p:cNvSpPr/>
-          <p:nvPr/>
-        </p:nvSpPr>
-        <p:spPr>
-          <a:xfrm>
-            <a:off x="4507077" y="5440680"/>
-            <a:ext cx="694944" cy="384048"/>
-          </a:xfrm>
-          <a:prstGeom prst="roundRect">
-            <a:avLst/>
-          </a:prstGeom>
-          <a:solidFill>
-            <a:srgbClr val="E8E8ED"/>
-          </a:solidFill>
-          <a:ln>
-            <a:noFill/>
-          </a:ln>
-        </p:spPr>
-        <p:style>
-          <a:lnRef idx="1">
-            <a:schemeClr val="accent1"/>
-          </a:lnRef>
-          <a:fillRef idx="3">
-            <a:schemeClr val="accent1"/>
-          </a:fillRef>
-          <a:effectRef idx="2">
-            <a:schemeClr val="accent1"/>
-          </a:effectRef>
-          <a:fontRef idx="minor">
-            <a:schemeClr val="lt1"/>
-          </a:fontRef>
-        </p:style>
-        <p:txBody>
-          <a:bodyPr rtlCol="0" anchor="ctr"/>
-          <a:lstStyle/>
-          <a:p>
-            <a:pPr algn="ctr"/>
-          </a:p>
-        </p:txBody>
-      </p:sp>
-      <p:sp>
-        <p:nvSpPr>
-          <p:cNvPr id="6" name="TextBox 5"/>
-          <p:cNvSpPr txBox="1"/>
-          <p:nvPr/>
-        </p:nvSpPr>
-        <p:spPr>
-          <a:xfrm>
-            <a:off x="4507077" y="5477256"/>
-            <a:ext cx="694944" cy="329184"/>
-          </a:xfrm>
-          <a:prstGeom prst="rect">
-            <a:avLst/>
-          </a:prstGeom>
-          <a:noFill/>
-        </p:spPr>
-        <p:txBody>
-          <a:bodyPr wrap="square">
-            <a:spAutoFit/>
-          </a:bodyPr>
-          <a:lstStyle/>
-          <a:p>
-            <a:pPr algn="ctr"/>
-            <a:r>
-              <a:rPr sz="1200" b="1">
-                <a:solidFill>
-                  <a:srgbClr val="1D1D1F"/>
-                </a:solidFill>
-                <a:latin typeface="Calibri"/>
-              </a:rPr>
-              <a:t>Game</a:t>
-            </a:r>
-          </a:p>
-        </p:txBody>
-      </p:sp>
-      <p:sp>
-        <p:nvSpPr>
-          <p:cNvPr id="7" name="Rounded Rectangle 6"/>
-          <p:cNvSpPr/>
-          <p:nvPr/>
-        </p:nvSpPr>
-        <p:spPr>
-          <a:xfrm>
-            <a:off x="5366613" y="5440680"/>
-            <a:ext cx="598932" cy="384048"/>
-          </a:xfrm>
-          <a:prstGeom prst="roundRect">
-            <a:avLst/>
-          </a:prstGeom>
-          <a:solidFill>
-            <a:srgbClr val="E8E8ED"/>
-          </a:solidFill>
-          <a:ln>
-            <a:noFill/>
-          </a:ln>
-        </p:spPr>
-        <p:style>
-          <a:lnRef idx="1">
-            <a:schemeClr val="accent1"/>
-          </a:lnRef>
-          <a:fillRef idx="3">
-            <a:schemeClr val="accent1"/>
-          </a:fillRef>
-          <a:effectRef idx="2">
-            <a:schemeClr val="accent1"/>
-          </a:effectRef>
-          <a:fontRef idx="minor">
-            <a:schemeClr val="lt1"/>
-          </a:fontRef>
-        </p:style>
-        <p:txBody>
-          <a:bodyPr rtlCol="0" anchor="ctr"/>
-          <a:lstStyle/>
-          <a:p>
-            <a:pPr algn="ctr"/>
-          </a:p>
-        </p:txBody>
-      </p:sp>
-      <p:sp>
-        <p:nvSpPr>
-          <p:cNvPr id="8" name="TextBox 7"/>
-          <p:cNvSpPr txBox="1"/>
-          <p:nvPr/>
-        </p:nvSpPr>
-        <p:spPr>
-          <a:xfrm>
-            <a:off x="5366613" y="5477256"/>
-            <a:ext cx="598932" cy="329184"/>
-          </a:xfrm>
-          <a:prstGeom prst="rect">
-            <a:avLst/>
-          </a:prstGeom>
-          <a:noFill/>
-        </p:spPr>
-        <p:txBody>
-          <a:bodyPr wrap="square">
-            <a:spAutoFit/>
-          </a:bodyPr>
-          <a:lstStyle/>
-          <a:p>
-            <a:pPr algn="ctr"/>
-            <a:r>
-              <a:rPr sz="1200" b="1">
-                <a:solidFill>
-                  <a:srgbClr val="1D1D1F"/>
-                </a:solidFill>
-                <a:latin typeface="Calibri"/>
-              </a:rPr>
-              <a:t>App</a:t>
-            </a:r>
-          </a:p>
-        </p:txBody>
-      </p:sp>
-      <p:sp>
-        <p:nvSpPr>
-          <p:cNvPr id="9" name="Rounded Rectangle 8"/>
-          <p:cNvSpPr/>
-          <p:nvPr/>
-        </p:nvSpPr>
-        <p:spPr>
-          <a:xfrm>
-            <a:off x="6130137" y="5440680"/>
-            <a:ext cx="694944" cy="384048"/>
-          </a:xfrm>
-          <a:prstGeom prst="roundRect">
-            <a:avLst/>
-          </a:prstGeom>
-          <a:solidFill>
-            <a:srgbClr val="E8E8ED"/>
-          </a:solidFill>
-          <a:ln>
-            <a:noFill/>
-          </a:ln>
-        </p:spPr>
-        <p:style>
-          <a:lnRef idx="1">
-            <a:schemeClr val="accent1"/>
-          </a:lnRef>
-          <a:fillRef idx="3">
-            <a:schemeClr val="accent1"/>
-          </a:fillRef>
-          <a:effectRef idx="2">
-            <a:schemeClr val="accent1"/>
-          </a:effectRef>
-          <a:fontRef idx="minor">
-            <a:schemeClr val="lt1"/>
-          </a:fontRef>
-        </p:style>
-        <p:txBody>
-          <a:bodyPr rtlCol="0" anchor="ctr"/>
-          <a:lstStyle/>
-          <a:p>
-            <a:pPr algn="ctr"/>
-          </a:p>
-        </p:txBody>
-      </p:sp>
-      <p:sp>
-        <p:nvSpPr>
-          <p:cNvPr id="10" name="TextBox 9"/>
-          <p:cNvSpPr txBox="1"/>
-          <p:nvPr/>
-        </p:nvSpPr>
-        <p:spPr>
-          <a:xfrm>
-            <a:off x="6130137" y="5477256"/>
-            <a:ext cx="694944" cy="329184"/>
-          </a:xfrm>
-          <a:prstGeom prst="rect">
-            <a:avLst/>
-          </a:prstGeom>
-          <a:noFill/>
-        </p:spPr>
-        <p:txBody>
-          <a:bodyPr wrap="square">
-            <a:spAutoFit/>
-          </a:bodyPr>
-          <a:lstStyle/>
-          <a:p>
-            <a:pPr algn="ctr"/>
-            <a:r>
-              <a:rPr sz="1200" b="1">
-                <a:solidFill>
-                  <a:srgbClr val="1D1D1F"/>
-                </a:solidFill>
-                <a:latin typeface="Calibri"/>
-              </a:rPr>
-              <a:t>Site</a:t>
-            </a:r>
-          </a:p>
-        </p:txBody>
-      </p:sp>
-      <p:sp>
-        <p:nvSpPr>
-          <p:cNvPr id="11" name="Rounded Rectangle 10"/>
-          <p:cNvSpPr/>
-          <p:nvPr/>
-        </p:nvSpPr>
-        <p:spPr>
-          <a:xfrm>
-            <a:off x="6989673" y="5440680"/>
-            <a:ext cx="694944" cy="384048"/>
-          </a:xfrm>
-          <a:prstGeom prst="roundRect">
-            <a:avLst/>
-          </a:prstGeom>
-          <a:solidFill>
-            <a:srgbClr val="E8E8ED"/>
-          </a:solidFill>
-          <a:ln>
-            <a:noFill/>
-          </a:ln>
-        </p:spPr>
-        <p:style>
-          <a:lnRef idx="1">
-            <a:schemeClr val="accent1"/>
-          </a:lnRef>
-          <a:fillRef idx="3">
-            <a:schemeClr val="accent1"/>
-          </a:fillRef>
-          <a:effectRef idx="2">
-            <a:schemeClr val="accent1"/>
-          </a:effectRef>
-          <a:fontRef idx="minor">
-            <a:schemeClr val="lt1"/>
-          </a:fontRef>
-        </p:style>
-        <p:txBody>
-          <a:bodyPr rtlCol="0" anchor="ctr"/>
-          <a:lstStyle/>
-          <a:p>
-            <a:pPr algn="ctr"/>
-          </a:p>
-        </p:txBody>
-      </p:sp>
-      <p:sp>
-        <p:nvSpPr>
-          <p:cNvPr id="12" name="TextBox 11"/>
-          <p:cNvSpPr txBox="1"/>
-          <p:nvPr/>
-        </p:nvSpPr>
-        <p:spPr>
-          <a:xfrm>
-            <a:off x="6989673" y="5477256"/>
-            <a:ext cx="694944" cy="329184"/>
-          </a:xfrm>
-          <a:prstGeom prst="rect">
-            <a:avLst/>
-          </a:prstGeom>
-          <a:noFill/>
-        </p:spPr>
-        <p:txBody>
-          <a:bodyPr wrap="square">
-            <a:spAutoFit/>
-          </a:bodyPr>
-          <a:lstStyle/>
-          <a:p>
-            <a:pPr algn="ctr"/>
-            <a:r>
-              <a:rPr sz="1200" b="1">
-                <a:solidFill>
-                  <a:srgbClr val="1D1D1F"/>
-                </a:solidFill>
-                <a:latin typeface="Calibri"/>
-              </a:rPr>
-              <a:t>Tool</a:t>
+              <a:t>Too simple is why it stays in GitHub.</a:t>
             </a:r>
           </a:p>
         </p:txBody>
@@ -6746,8 +6863,8 @@
         </p:nvSpPr>
         <p:spPr>
           <a:xfrm>
-            <a:off x="640080" y="640080"/>
-            <a:ext cx="10881360" cy="1143000"/>
+            <a:off x="640080" y="1554480"/>
+            <a:ext cx="10881360" cy="1737360"/>
           </a:xfrm>
           <a:prstGeom prst="rect">
             <a:avLst/>
@@ -6762,41 +6879,364 @@
           <a:p>
             <a:pPr algn="ctr"/>
             <a:r>
-              <a:rPr sz="3400" b="1">
+              <a:rPr sz="4000" b="1">
                 <a:solidFill>
                   <a:srgbClr val="1D1D1F"/>
                 </a:solidFill>
                 <a:latin typeface="Calibri"/>
               </a:rPr>
-              <a:t>One sheet. Set Review Ready.</a:t>
-            </a:r>
-          </a:p>
-        </p:txBody>
-      </p:sp>
-      <p:pic>
-        <p:nvPicPr>
-          <p:cNvPr id="4" name="Picture 3" descr="shipaton-sheet-qr.png"/>
-          <p:cNvPicPr>
-            <a:picLocks noChangeAspect="1"/>
-          </p:cNvPicPr>
-          <p:nvPr/>
-        </p:nvPicPr>
-        <p:blipFill>
-          <a:blip r:embed="rId2"/>
-          <a:stretch>
-            <a:fillRect/>
-          </a:stretch>
-        </p:blipFill>
-        <p:spPr>
-          <a:xfrm>
-            <a:off x="4160520" y="1965960"/>
-            <a:ext cx="3840480" cy="3840480"/>
+              <a:t>Five people × ₹199.</a:t>
+            </a:r>
+          </a:p>
+        </p:txBody>
+      </p:sp>
+      <p:sp>
+        <p:nvSpPr>
+          <p:cNvPr id="4" name="TextBox 3"/>
+          <p:cNvSpPr txBox="1"/>
+          <p:nvPr/>
+        </p:nvSpPr>
+        <p:spPr>
+          <a:xfrm>
+            <a:off x="640080" y="3337560"/>
+            <a:ext cx="10881360" cy="777240"/>
           </a:xfrm>
           <a:prstGeom prst="rect">
             <a:avLst/>
           </a:prstGeom>
-        </p:spPr>
-      </p:pic>
+          <a:noFill/>
+        </p:spPr>
+        <p:txBody>
+          <a:bodyPr wrap="square">
+            <a:spAutoFit/>
+          </a:bodyPr>
+          <a:lstStyle/>
+          <a:p>
+            <a:pPr algn="ctr"/>
+            <a:r>
+              <a:rPr sz="2200" b="0">
+                <a:solidFill>
+                  <a:srgbClr val="6E6E73"/>
+                </a:solidFill>
+                <a:latin typeface="Calibri"/>
+              </a:rPr>
+              <a:t>Your first ₹1,000.</a:t>
+            </a:r>
+          </a:p>
+        </p:txBody>
+      </p:sp>
+      <p:sp>
+        <p:nvSpPr>
+          <p:cNvPr id="5" name="Rounded Rectangle 4"/>
+          <p:cNvSpPr/>
+          <p:nvPr/>
+        </p:nvSpPr>
+        <p:spPr>
+          <a:xfrm>
+            <a:off x="3210915" y="5806440"/>
+            <a:ext cx="1655064" cy="384048"/>
+          </a:xfrm>
+          <a:prstGeom prst="roundRect">
+            <a:avLst/>
+          </a:prstGeom>
+          <a:solidFill>
+            <a:srgbClr val="E8E8ED"/>
+          </a:solidFill>
+          <a:ln>
+            <a:noFill/>
+          </a:ln>
+        </p:spPr>
+        <p:style>
+          <a:lnRef idx="1">
+            <a:schemeClr val="accent1"/>
+          </a:lnRef>
+          <a:fillRef idx="3">
+            <a:schemeClr val="accent1"/>
+          </a:fillRef>
+          <a:effectRef idx="2">
+            <a:schemeClr val="accent1"/>
+          </a:effectRef>
+          <a:fontRef idx="minor">
+            <a:schemeClr val="lt1"/>
+          </a:fontRef>
+        </p:style>
+        <p:txBody>
+          <a:bodyPr rtlCol="0" anchor="ctr"/>
+          <a:lstStyle/>
+          <a:p>
+            <a:pPr algn="ctr"/>
+          </a:p>
+        </p:txBody>
+      </p:sp>
+      <p:sp>
+        <p:nvSpPr>
+          <p:cNvPr id="6" name="TextBox 5"/>
+          <p:cNvSpPr txBox="1"/>
+          <p:nvPr/>
+        </p:nvSpPr>
+        <p:spPr>
+          <a:xfrm>
+            <a:off x="3210915" y="5843016"/>
+            <a:ext cx="1655064" cy="329184"/>
+          </a:xfrm>
+          <a:prstGeom prst="rect">
+            <a:avLst/>
+          </a:prstGeom>
+          <a:noFill/>
+        </p:spPr>
+        <p:txBody>
+          <a:bodyPr wrap="square">
+            <a:spAutoFit/>
+          </a:bodyPr>
+          <a:lstStyle/>
+          <a:p>
+            <a:pPr algn="ctr"/>
+            <a:r>
+              <a:rPr sz="1200" b="1">
+                <a:solidFill>
+                  <a:srgbClr val="1D1D1F"/>
+                </a:solidFill>
+                <a:latin typeface="Calibri"/>
+              </a:rPr>
+              <a:t>₹199 extension</a:t>
+            </a:r>
+          </a:p>
+        </p:txBody>
+      </p:sp>
+      <p:sp>
+        <p:nvSpPr>
+          <p:cNvPr id="7" name="Rounded Rectangle 6"/>
+          <p:cNvSpPr/>
+          <p:nvPr/>
+        </p:nvSpPr>
+        <p:spPr>
+          <a:xfrm>
+            <a:off x="5030571" y="5806440"/>
+            <a:ext cx="1078992" cy="384048"/>
+          </a:xfrm>
+          <a:prstGeom prst="roundRect">
+            <a:avLst/>
+          </a:prstGeom>
+          <a:solidFill>
+            <a:srgbClr val="E8E8ED"/>
+          </a:solidFill>
+          <a:ln>
+            <a:noFill/>
+          </a:ln>
+        </p:spPr>
+        <p:style>
+          <a:lnRef idx="1">
+            <a:schemeClr val="accent1"/>
+          </a:lnRef>
+          <a:fillRef idx="3">
+            <a:schemeClr val="accent1"/>
+          </a:fillRef>
+          <a:effectRef idx="2">
+            <a:schemeClr val="accent1"/>
+          </a:effectRef>
+          <a:fontRef idx="minor">
+            <a:schemeClr val="lt1"/>
+          </a:fontRef>
+        </p:style>
+        <p:txBody>
+          <a:bodyPr rtlCol="0" anchor="ctr"/>
+          <a:lstStyle/>
+          <a:p>
+            <a:pPr algn="ctr"/>
+          </a:p>
+        </p:txBody>
+      </p:sp>
+      <p:sp>
+        <p:nvSpPr>
+          <p:cNvPr id="8" name="TextBox 7"/>
+          <p:cNvSpPr txBox="1"/>
+          <p:nvPr/>
+        </p:nvSpPr>
+        <p:spPr>
+          <a:xfrm>
+            <a:off x="5030571" y="5843016"/>
+            <a:ext cx="1078992" cy="329184"/>
+          </a:xfrm>
+          <a:prstGeom prst="rect">
+            <a:avLst/>
+          </a:prstGeom>
+          <a:noFill/>
+        </p:spPr>
+        <p:txBody>
+          <a:bodyPr wrap="square">
+            <a:spAutoFit/>
+          </a:bodyPr>
+          <a:lstStyle/>
+          <a:p>
+            <a:pPr algn="ctr"/>
+            <a:r>
+              <a:rPr sz="1200" b="1">
+                <a:solidFill>
+                  <a:srgbClr val="1D1D1F"/>
+                </a:solidFill>
+                <a:latin typeface="Calibri"/>
+              </a:rPr>
+              <a:t>₹299 app</a:t>
+            </a:r>
+          </a:p>
+        </p:txBody>
+      </p:sp>
+      <p:sp>
+        <p:nvSpPr>
+          <p:cNvPr id="9" name="Rounded Rectangle 8"/>
+          <p:cNvSpPr/>
+          <p:nvPr/>
+        </p:nvSpPr>
+        <p:spPr>
+          <a:xfrm>
+            <a:off x="6274155" y="5806440"/>
+            <a:ext cx="1271016" cy="384048"/>
+          </a:xfrm>
+          <a:prstGeom prst="roundRect">
+            <a:avLst/>
+          </a:prstGeom>
+          <a:solidFill>
+            <a:srgbClr val="E8E8ED"/>
+          </a:solidFill>
+          <a:ln>
+            <a:noFill/>
+          </a:ln>
+        </p:spPr>
+        <p:style>
+          <a:lnRef idx="1">
+            <a:schemeClr val="accent1"/>
+          </a:lnRef>
+          <a:fillRef idx="3">
+            <a:schemeClr val="accent1"/>
+          </a:fillRef>
+          <a:effectRef idx="2">
+            <a:schemeClr val="accent1"/>
+          </a:effectRef>
+          <a:fontRef idx="minor">
+            <a:schemeClr val="lt1"/>
+          </a:fontRef>
+        </p:style>
+        <p:txBody>
+          <a:bodyPr rtlCol="0" anchor="ctr"/>
+          <a:lstStyle/>
+          <a:p>
+            <a:pPr algn="ctr"/>
+          </a:p>
+        </p:txBody>
+      </p:sp>
+      <p:sp>
+        <p:nvSpPr>
+          <p:cNvPr id="10" name="TextBox 9"/>
+          <p:cNvSpPr txBox="1"/>
+          <p:nvPr/>
+        </p:nvSpPr>
+        <p:spPr>
+          <a:xfrm>
+            <a:off x="6274155" y="5843016"/>
+            <a:ext cx="1271016" cy="329184"/>
+          </a:xfrm>
+          <a:prstGeom prst="rect">
+            <a:avLst/>
+          </a:prstGeom>
+          <a:noFill/>
+        </p:spPr>
+        <p:txBody>
+          <a:bodyPr wrap="square">
+            <a:spAutoFit/>
+          </a:bodyPr>
+          <a:lstStyle/>
+          <a:p>
+            <a:pPr algn="ctr"/>
+            <a:r>
+              <a:rPr sz="1200" b="1">
+                <a:solidFill>
+                  <a:srgbClr val="1D1D1F"/>
+                </a:solidFill>
+                <a:latin typeface="Calibri"/>
+              </a:rPr>
+              <a:t>₹499/month</a:t>
+            </a:r>
+          </a:p>
+        </p:txBody>
+      </p:sp>
+      <p:sp>
+        <p:nvSpPr>
+          <p:cNvPr id="11" name="Rounded Rectangle 10"/>
+          <p:cNvSpPr/>
+          <p:nvPr/>
+        </p:nvSpPr>
+        <p:spPr>
+          <a:xfrm>
+            <a:off x="7709763" y="5806440"/>
+            <a:ext cx="1271016" cy="384048"/>
+          </a:xfrm>
+          <a:prstGeom prst="roundRect">
+            <a:avLst/>
+          </a:prstGeom>
+          <a:solidFill>
+            <a:srgbClr val="E8E8ED"/>
+          </a:solidFill>
+          <a:ln>
+            <a:noFill/>
+          </a:ln>
+        </p:spPr>
+        <p:style>
+          <a:lnRef idx="1">
+            <a:schemeClr val="accent1"/>
+          </a:lnRef>
+          <a:fillRef idx="3">
+            <a:schemeClr val="accent1"/>
+          </a:fillRef>
+          <a:effectRef idx="2">
+            <a:schemeClr val="accent1"/>
+          </a:effectRef>
+          <a:fontRef idx="minor">
+            <a:schemeClr val="lt1"/>
+          </a:fontRef>
+        </p:style>
+        <p:txBody>
+          <a:bodyPr rtlCol="0" anchor="ctr"/>
+          <a:lstStyle/>
+          <a:p>
+            <a:pPr algn="ctr"/>
+          </a:p>
+        </p:txBody>
+      </p:sp>
+      <p:sp>
+        <p:nvSpPr>
+          <p:cNvPr id="12" name="TextBox 11"/>
+          <p:cNvSpPr txBox="1"/>
+          <p:nvPr/>
+        </p:nvSpPr>
+        <p:spPr>
+          <a:xfrm>
+            <a:off x="7709763" y="5843016"/>
+            <a:ext cx="1271016" cy="329184"/>
+          </a:xfrm>
+          <a:prstGeom prst="rect">
+            <a:avLst/>
+          </a:prstGeom>
+          <a:noFill/>
+        </p:spPr>
+        <p:txBody>
+          <a:bodyPr wrap="square">
+            <a:spAutoFit/>
+          </a:bodyPr>
+          <a:lstStyle/>
+          <a:p>
+            <a:pPr algn="ctr"/>
+            <a:r>
+              <a:rPr sz="1200" b="1">
+                <a:solidFill>
+                  <a:srgbClr val="1D1D1F"/>
+                </a:solidFill>
+                <a:latin typeface="Calibri"/>
+              </a:rPr>
+              <a:t>Level pack</a:t>
+            </a:r>
+          </a:p>
+        </p:txBody>
+      </p:sp>
     </p:spTree>
   </p:cSld>
   <p:clrMapOvr>
@@ -6866,7 +7306,7 @@
         </p:nvSpPr>
         <p:spPr>
           <a:xfrm>
-            <a:off x="640080" y="1874519"/>
+            <a:off x="640080" y="1783080"/>
             <a:ext cx="10881360" cy="1737360"/>
           </a:xfrm>
           <a:prstGeom prst="rect">
@@ -6882,27 +7322,62 @@
           <a:p>
             <a:pPr algn="ctr"/>
             <a:r>
-              <a:rPr sz="4000" b="1">
+              <a:rPr sz="3600" b="1">
                 <a:solidFill>
                   <a:srgbClr val="1D1D1F"/>
                 </a:solidFill>
                 <a:latin typeface="Calibri"/>
               </a:rPr>
-              <a:t>Thursday. Make it live.</a:t>
-            </a:r>
-          </a:p>
-        </p:txBody>
-      </p:sp>
-      <p:sp>
-        <p:nvSpPr>
-          <p:cNvPr id="4" name="Rounded Rectangle 3"/>
+              <a:t>Build anything. Ship something.</a:t>
+            </a:r>
+          </a:p>
+        </p:txBody>
+      </p:sp>
+      <p:sp>
+        <p:nvSpPr>
+          <p:cNvPr id="4" name="TextBox 3"/>
+          <p:cNvSpPr txBox="1"/>
+          <p:nvPr/>
+        </p:nvSpPr>
+        <p:spPr>
+          <a:xfrm>
+            <a:off x="640080" y="3566160"/>
+            <a:ext cx="10881360" cy="777240"/>
+          </a:xfrm>
+          <a:prstGeom prst="rect">
+            <a:avLst/>
+          </a:prstGeom>
+          <a:noFill/>
+        </p:spPr>
+        <p:txBody>
+          <a:bodyPr wrap="square">
+            <a:spAutoFit/>
+          </a:bodyPr>
+          <a:lstStyle/>
+          <a:p>
+            <a:pPr algn="ctr"/>
+            <a:r>
+              <a:rPr sz="2200" b="0">
+                <a:solidFill>
+                  <a:srgbClr val="6E6E73"/>
+                </a:solidFill>
+                <a:latin typeface="Calibri"/>
+              </a:rPr>
+              <a:t>Solo or team.</a:t>
+            </a:r>
+          </a:p>
+        </p:txBody>
+      </p:sp>
+      <p:sp>
+        <p:nvSpPr>
+          <p:cNvPr id="5" name="Rounded Rectangle 4"/>
           <p:cNvSpPr/>
           <p:nvPr/>
         </p:nvSpPr>
         <p:spPr>
           <a:xfrm>
-            <a:off x="4168749" y="5257800"/>
-            <a:ext cx="1078992" cy="384048"/>
+            <a:off x="4507077" y="5440680"/>
+            <a:ext cx="694944" cy="384048"/>
           </a:xfrm>
           <a:prstGeom prst="roundRect">
             <a:avLst/>
@@ -6938,14 +7413,14 @@
       </p:sp>
       <p:sp>
         <p:nvSpPr>
-          <p:cNvPr id="5" name="TextBox 4"/>
+          <p:cNvPr id="6" name="TextBox 5"/>
           <p:cNvSpPr txBox="1"/>
           <p:nvPr/>
         </p:nvSpPr>
         <p:spPr>
           <a:xfrm>
-            <a:off x="4168749" y="5294376"/>
-            <a:ext cx="1078992" cy="329184"/>
+            <a:off x="4507077" y="5477256"/>
+            <a:ext cx="694944" cy="329184"/>
           </a:xfrm>
           <a:prstGeom prst="rect">
             <a:avLst/>
@@ -6966,21 +7441,21 @@
                 </a:solidFill>
                 <a:latin typeface="Calibri"/>
               </a:rPr>
-              <a:t>Deployed</a:t>
-            </a:r>
-          </a:p>
-        </p:txBody>
-      </p:sp>
-      <p:sp>
-        <p:nvSpPr>
-          <p:cNvPr id="6" name="Rounded Rectangle 5"/>
+              <a:t>Game</a:t>
+            </a:r>
+          </a:p>
+        </p:txBody>
+      </p:sp>
+      <p:sp>
+        <p:nvSpPr>
+          <p:cNvPr id="7" name="Rounded Rectangle 6"/>
           <p:cNvSpPr/>
           <p:nvPr/>
         </p:nvSpPr>
         <p:spPr>
           <a:xfrm>
-            <a:off x="5412333" y="5257800"/>
-            <a:ext cx="886968" cy="384048"/>
+            <a:off x="5366613" y="5440680"/>
+            <a:ext cx="598932" cy="384048"/>
           </a:xfrm>
           <a:prstGeom prst="roundRect">
             <a:avLst/>
@@ -7016,14 +7491,14 @@
       </p:sp>
       <p:sp>
         <p:nvSpPr>
-          <p:cNvPr id="7" name="TextBox 6"/>
+          <p:cNvPr id="8" name="TextBox 7"/>
           <p:cNvSpPr txBox="1"/>
           <p:nvPr/>
         </p:nvSpPr>
         <p:spPr>
           <a:xfrm>
-            <a:off x="5412333" y="5294376"/>
-            <a:ext cx="886968" cy="329184"/>
+            <a:off x="5366613" y="5477256"/>
+            <a:ext cx="598932" cy="329184"/>
           </a:xfrm>
           <a:prstGeom prst="rect">
             <a:avLst/>
@@ -7044,21 +7519,21 @@
                 </a:solidFill>
                 <a:latin typeface="Calibri"/>
               </a:rPr>
-              <a:t>Usable</a:t>
-            </a:r>
-          </a:p>
-        </p:txBody>
-      </p:sp>
-      <p:sp>
-        <p:nvSpPr>
-          <p:cNvPr id="8" name="Rounded Rectangle 7"/>
+              <a:t>App</a:t>
+            </a:r>
+          </a:p>
+        </p:txBody>
+      </p:sp>
+      <p:sp>
+        <p:nvSpPr>
+          <p:cNvPr id="9" name="Rounded Rectangle 8"/>
           <p:cNvSpPr/>
           <p:nvPr/>
         </p:nvSpPr>
         <p:spPr>
           <a:xfrm>
-            <a:off x="6463893" y="5257800"/>
-            <a:ext cx="1559052" cy="384048"/>
+            <a:off x="6130137" y="5440680"/>
+            <a:ext cx="694944" cy="384048"/>
           </a:xfrm>
           <a:prstGeom prst="roundRect">
             <a:avLst/>
@@ -7094,14 +7569,14 @@
       </p:sp>
       <p:sp>
         <p:nvSpPr>
-          <p:cNvPr id="9" name="TextBox 8"/>
+          <p:cNvPr id="10" name="TextBox 9"/>
           <p:cNvSpPr txBox="1"/>
           <p:nvPr/>
         </p:nvSpPr>
         <p:spPr>
           <a:xfrm>
-            <a:off x="6463893" y="5294376"/>
-            <a:ext cx="1559052" cy="329184"/>
+            <a:off x="6130137" y="5477256"/>
+            <a:ext cx="694944" cy="329184"/>
           </a:xfrm>
           <a:prstGeom prst="rect">
             <a:avLst/>
@@ -7122,7 +7597,85 @@
                 </a:solidFill>
                 <a:latin typeface="Calibri"/>
               </a:rPr>
-              <a:t>Payments work</a:t>
+              <a:t>Site</a:t>
+            </a:r>
+          </a:p>
+        </p:txBody>
+      </p:sp>
+      <p:sp>
+        <p:nvSpPr>
+          <p:cNvPr id="11" name="Rounded Rectangle 10"/>
+          <p:cNvSpPr/>
+          <p:nvPr/>
+        </p:nvSpPr>
+        <p:spPr>
+          <a:xfrm>
+            <a:off x="6989673" y="5440680"/>
+            <a:ext cx="694944" cy="384048"/>
+          </a:xfrm>
+          <a:prstGeom prst="roundRect">
+            <a:avLst/>
+          </a:prstGeom>
+          <a:solidFill>
+            <a:srgbClr val="E8E8ED"/>
+          </a:solidFill>
+          <a:ln>
+            <a:noFill/>
+          </a:ln>
+        </p:spPr>
+        <p:style>
+          <a:lnRef idx="1">
+            <a:schemeClr val="accent1"/>
+          </a:lnRef>
+          <a:fillRef idx="3">
+            <a:schemeClr val="accent1"/>
+          </a:fillRef>
+          <a:effectRef idx="2">
+            <a:schemeClr val="accent1"/>
+          </a:effectRef>
+          <a:fontRef idx="minor">
+            <a:schemeClr val="lt1"/>
+          </a:fontRef>
+        </p:style>
+        <p:txBody>
+          <a:bodyPr rtlCol="0" anchor="ctr"/>
+          <a:lstStyle/>
+          <a:p>
+            <a:pPr algn="ctr"/>
+          </a:p>
+        </p:txBody>
+      </p:sp>
+      <p:sp>
+        <p:nvSpPr>
+          <p:cNvPr id="12" name="TextBox 11"/>
+          <p:cNvSpPr txBox="1"/>
+          <p:nvPr/>
+        </p:nvSpPr>
+        <p:spPr>
+          <a:xfrm>
+            <a:off x="6989673" y="5477256"/>
+            <a:ext cx="694944" cy="329184"/>
+          </a:xfrm>
+          <a:prstGeom prst="rect">
+            <a:avLst/>
+          </a:prstGeom>
+          <a:noFill/>
+        </p:spPr>
+        <p:txBody>
+          <a:bodyPr wrap="square">
+            <a:spAutoFit/>
+          </a:bodyPr>
+          <a:lstStyle/>
+          <a:p>
+            <a:pPr algn="ctr"/>
+            <a:r>
+              <a:rPr sz="1200" b="1">
+                <a:solidFill>
+                  <a:srgbClr val="1D1D1F"/>
+                </a:solidFill>
+                <a:latin typeface="Calibri"/>
+              </a:rPr>
+              <a:t>Tool</a:t>
             </a:r>
           </a:p>
         </p:txBody>
@@ -7196,8 +7749,8 @@
         </p:nvSpPr>
         <p:spPr>
           <a:xfrm>
-            <a:off x="640080" y="1051560"/>
-            <a:ext cx="10881360" cy="1005840"/>
+            <a:off x="640080" y="640080"/>
+            <a:ext cx="10881360" cy="1143000"/>
           </a:xfrm>
           <a:prstGeom prst="rect">
             <a:avLst/>
@@ -7212,165 +7765,41 @@
           <a:p>
             <a:pPr algn="ctr"/>
             <a:r>
-              <a:rPr sz="3600" b="1">
+              <a:rPr sz="3400" b="1">
                 <a:solidFill>
                   <a:srgbClr val="1D1D1F"/>
                 </a:solidFill>
                 <a:latin typeface="Calibri"/>
               </a:rPr>
-              <a:t>Ship it. Get reviewed.</a:t>
-            </a:r>
-          </a:p>
-        </p:txBody>
-      </p:sp>
-      <p:sp>
-        <p:nvSpPr>
-          <p:cNvPr id="4" name="TextBox 3"/>
-          <p:cNvSpPr txBox="1"/>
-          <p:nvPr/>
-        </p:nvSpPr>
-        <p:spPr>
-          <a:xfrm>
-            <a:off x="822960" y="2331720"/>
-            <a:ext cx="10515600" cy="1828800"/>
+              <a:t>One sheet. Set Review Ready.</a:t>
+            </a:r>
+          </a:p>
+        </p:txBody>
+      </p:sp>
+      <p:pic>
+        <p:nvPicPr>
+          <p:cNvPr id="4" name="Picture 3" descr="shipaton-sheet-qr.png"/>
+          <p:cNvPicPr>
+            <a:picLocks noChangeAspect="1"/>
+          </p:cNvPicPr>
+          <p:nvPr/>
+        </p:nvPicPr>
+        <p:blipFill>
+          <a:blip r:embed="rId2"/>
+          <a:stretch>
+            <a:fillRect/>
+          </a:stretch>
+        </p:blipFill>
+        <p:spPr>
+          <a:xfrm>
+            <a:off x="4160520" y="1965960"/>
+            <a:ext cx="3840480" cy="3840480"/>
           </a:xfrm>
           <a:prstGeom prst="rect">
             <a:avLst/>
           </a:prstGeom>
-          <a:noFill/>
-        </p:spPr>
-        <p:txBody>
-          <a:bodyPr wrap="square">
-            <a:spAutoFit/>
-          </a:bodyPr>
-          <a:lstStyle/>
-          <a:p>
-            <a:pPr algn="ctr"/>
-            <a:r>
-              <a:rPr sz="2400" b="1">
-                <a:solidFill>
-                  <a:srgbClr val="1D1D1F"/>
-                </a:solidFill>
-                <a:latin typeface="Calibri"/>
-              </a:rPr>
-              <a:t>We're going to see 10 person billion-dollar companies pretty soon.</a:t>
-            </a:r>
-          </a:p>
-        </p:txBody>
-      </p:sp>
-      <p:sp>
-        <p:nvSpPr>
-          <p:cNvPr id="5" name="TextBox 4"/>
-          <p:cNvSpPr txBox="1"/>
-          <p:nvPr/>
-        </p:nvSpPr>
-        <p:spPr>
-          <a:xfrm>
-            <a:off x="640080" y="4297680"/>
-            <a:ext cx="10881360" cy="365760"/>
-          </a:xfrm>
-          <a:prstGeom prst="rect">
-            <a:avLst/>
-          </a:prstGeom>
-          <a:noFill/>
-        </p:spPr>
-        <p:txBody>
-          <a:bodyPr wrap="square">
-            <a:spAutoFit/>
-          </a:bodyPr>
-          <a:lstStyle/>
-          <a:p>
-            <a:pPr algn="ctr"/>
-            <a:r>
-              <a:rPr sz="1400" b="1">
-                <a:solidFill>
-                  <a:srgbClr val="6E6E73"/>
-                </a:solidFill>
-                <a:latin typeface="Calibri"/>
-              </a:rPr>
-              <a:t>Sam Altman</a:t>
-            </a:r>
-          </a:p>
-        </p:txBody>
-      </p:sp>
-      <p:sp>
-        <p:nvSpPr>
-          <p:cNvPr id="6" name="Rounded Rectangle 5"/>
-          <p:cNvSpPr/>
-          <p:nvPr/>
-        </p:nvSpPr>
-        <p:spPr>
-          <a:xfrm>
-            <a:off x="5220309" y="5257800"/>
-            <a:ext cx="1751076" cy="384048"/>
-          </a:xfrm>
-          <a:prstGeom prst="roundRect">
-            <a:avLst/>
-          </a:prstGeom>
-          <a:solidFill>
-            <a:srgbClr val="E8E8ED"/>
-          </a:solidFill>
-          <a:ln>
-            <a:noFill/>
-          </a:ln>
-        </p:spPr>
-        <p:style>
-          <a:lnRef idx="1">
-            <a:schemeClr val="accent1"/>
-          </a:lnRef>
-          <a:fillRef idx="3">
-            <a:schemeClr val="accent1"/>
-          </a:fillRef>
-          <a:effectRef idx="2">
-            <a:schemeClr val="accent1"/>
-          </a:effectRef>
-          <a:fontRef idx="minor">
-            <a:schemeClr val="lt1"/>
-          </a:fontRef>
-        </p:style>
-        <p:txBody>
-          <a:bodyPr rtlCol="0" anchor="ctr"/>
-          <a:lstStyle/>
-          <a:p>
-            <a:pPr algn="ctr"/>
-          </a:p>
-        </p:txBody>
-      </p:sp>
-      <p:sp>
-        <p:nvSpPr>
-          <p:cNvPr id="7" name="TextBox 6"/>
-          <p:cNvSpPr txBox="1"/>
-          <p:nvPr/>
-        </p:nvSpPr>
-        <p:spPr>
-          <a:xfrm>
-            <a:off x="5220309" y="5294376"/>
-            <a:ext cx="1751076" cy="329184"/>
-          </a:xfrm>
-          <a:prstGeom prst="rect">
-            <a:avLst/>
-          </a:prstGeom>
-          <a:noFill/>
-        </p:spPr>
-        <p:txBody>
-          <a:bodyPr wrap="square">
-            <a:spAutoFit/>
-          </a:bodyPr>
-          <a:lstStyle/>
-          <a:p>
-            <a:pPr algn="ctr"/>
-            <a:r>
-              <a:rPr sz="1200" b="1">
-                <a:solidFill>
-                  <a:srgbClr val="1D1D1F"/>
-                </a:solidFill>
-                <a:latin typeface="Calibri"/>
-              </a:rPr>
-              <a:t>DevFest tickets</a:t>
-            </a:r>
-          </a:p>
-        </p:txBody>
-      </p:sp>
+        </p:spPr>
+      </p:pic>
     </p:spTree>
   </p:cSld>
   <p:clrMapOvr>
@@ -7404,7 +7833,7 @@
             <a:avLst/>
           </a:prstGeom>
           <a:solidFill>
-            <a:srgbClr val="070710"/>
+            <a:srgbClr val="F5F5F7"/>
           </a:solidFill>
           <a:ln>
             <a:noFill/>
@@ -7432,30 +7861,275 @@
           </a:p>
         </p:txBody>
       </p:sp>
-      <p:pic>
-        <p:nvPicPr>
-          <p:cNvPr id="3" name="Picture 2" descr="tmpc_aj4z39.png"/>
-          <p:cNvPicPr>
-            <a:picLocks noChangeAspect="1"/>
-          </p:cNvPicPr>
-          <p:nvPr/>
-        </p:nvPicPr>
-        <p:blipFill>
-          <a:blip r:embed="rId2"/>
-          <a:stretch>
-            <a:fillRect/>
-          </a:stretch>
-        </p:blipFill>
-        <p:spPr>
-          <a:xfrm>
-            <a:off x="0" y="381076"/>
-            <a:ext cx="12191695" cy="6095847"/>
+      <p:sp>
+        <p:nvSpPr>
+          <p:cNvPr id="3" name="TextBox 2"/>
+          <p:cNvSpPr txBox="1"/>
+          <p:nvPr/>
+        </p:nvSpPr>
+        <p:spPr>
+          <a:xfrm>
+            <a:off x="640080" y="1874519"/>
+            <a:ext cx="10881360" cy="1737360"/>
           </a:xfrm>
           <a:prstGeom prst="rect">
             <a:avLst/>
           </a:prstGeom>
-        </p:spPr>
-      </p:pic>
+          <a:noFill/>
+        </p:spPr>
+        <p:txBody>
+          <a:bodyPr wrap="square">
+            <a:spAutoFit/>
+          </a:bodyPr>
+          <a:lstStyle/>
+          <a:p>
+            <a:pPr algn="ctr"/>
+            <a:r>
+              <a:rPr sz="4000" b="1">
+                <a:solidFill>
+                  <a:srgbClr val="1D1D1F"/>
+                </a:solidFill>
+                <a:latin typeface="Calibri"/>
+              </a:rPr>
+              <a:t>Thursday. Make it live.</a:t>
+            </a:r>
+          </a:p>
+        </p:txBody>
+      </p:sp>
+      <p:sp>
+        <p:nvSpPr>
+          <p:cNvPr id="4" name="Rounded Rectangle 3"/>
+          <p:cNvSpPr/>
+          <p:nvPr/>
+        </p:nvSpPr>
+        <p:spPr>
+          <a:xfrm>
+            <a:off x="4168749" y="5257800"/>
+            <a:ext cx="1078992" cy="384048"/>
+          </a:xfrm>
+          <a:prstGeom prst="roundRect">
+            <a:avLst/>
+          </a:prstGeom>
+          <a:solidFill>
+            <a:srgbClr val="E8E8ED"/>
+          </a:solidFill>
+          <a:ln>
+            <a:noFill/>
+          </a:ln>
+        </p:spPr>
+        <p:style>
+          <a:lnRef idx="1">
+            <a:schemeClr val="accent1"/>
+          </a:lnRef>
+          <a:fillRef idx="3">
+            <a:schemeClr val="accent1"/>
+          </a:fillRef>
+          <a:effectRef idx="2">
+            <a:schemeClr val="accent1"/>
+          </a:effectRef>
+          <a:fontRef idx="minor">
+            <a:schemeClr val="lt1"/>
+          </a:fontRef>
+        </p:style>
+        <p:txBody>
+          <a:bodyPr rtlCol="0" anchor="ctr"/>
+          <a:lstStyle/>
+          <a:p>
+            <a:pPr algn="ctr"/>
+          </a:p>
+        </p:txBody>
+      </p:sp>
+      <p:sp>
+        <p:nvSpPr>
+          <p:cNvPr id="5" name="TextBox 4"/>
+          <p:cNvSpPr txBox="1"/>
+          <p:nvPr/>
+        </p:nvSpPr>
+        <p:spPr>
+          <a:xfrm>
+            <a:off x="4168749" y="5294376"/>
+            <a:ext cx="1078992" cy="329184"/>
+          </a:xfrm>
+          <a:prstGeom prst="rect">
+            <a:avLst/>
+          </a:prstGeom>
+          <a:noFill/>
+        </p:spPr>
+        <p:txBody>
+          <a:bodyPr wrap="square">
+            <a:spAutoFit/>
+          </a:bodyPr>
+          <a:lstStyle/>
+          <a:p>
+            <a:pPr algn="ctr"/>
+            <a:r>
+              <a:rPr sz="1200" b="1">
+                <a:solidFill>
+                  <a:srgbClr val="1D1D1F"/>
+                </a:solidFill>
+                <a:latin typeface="Calibri"/>
+              </a:rPr>
+              <a:t>Deployed</a:t>
+            </a:r>
+          </a:p>
+        </p:txBody>
+      </p:sp>
+      <p:sp>
+        <p:nvSpPr>
+          <p:cNvPr id="6" name="Rounded Rectangle 5"/>
+          <p:cNvSpPr/>
+          <p:nvPr/>
+        </p:nvSpPr>
+        <p:spPr>
+          <a:xfrm>
+            <a:off x="5412333" y="5257800"/>
+            <a:ext cx="886968" cy="384048"/>
+          </a:xfrm>
+          <a:prstGeom prst="roundRect">
+            <a:avLst/>
+          </a:prstGeom>
+          <a:solidFill>
+            <a:srgbClr val="E8E8ED"/>
+          </a:solidFill>
+          <a:ln>
+            <a:noFill/>
+          </a:ln>
+        </p:spPr>
+        <p:style>
+          <a:lnRef idx="1">
+            <a:schemeClr val="accent1"/>
+          </a:lnRef>
+          <a:fillRef idx="3">
+            <a:schemeClr val="accent1"/>
+          </a:fillRef>
+          <a:effectRef idx="2">
+            <a:schemeClr val="accent1"/>
+          </a:effectRef>
+          <a:fontRef idx="minor">
+            <a:schemeClr val="lt1"/>
+          </a:fontRef>
+        </p:style>
+        <p:txBody>
+          <a:bodyPr rtlCol="0" anchor="ctr"/>
+          <a:lstStyle/>
+          <a:p>
+            <a:pPr algn="ctr"/>
+          </a:p>
+        </p:txBody>
+      </p:sp>
+      <p:sp>
+        <p:nvSpPr>
+          <p:cNvPr id="7" name="TextBox 6"/>
+          <p:cNvSpPr txBox="1"/>
+          <p:nvPr/>
+        </p:nvSpPr>
+        <p:spPr>
+          <a:xfrm>
+            <a:off x="5412333" y="5294376"/>
+            <a:ext cx="886968" cy="329184"/>
+          </a:xfrm>
+          <a:prstGeom prst="rect">
+            <a:avLst/>
+          </a:prstGeom>
+          <a:noFill/>
+        </p:spPr>
+        <p:txBody>
+          <a:bodyPr wrap="square">
+            <a:spAutoFit/>
+          </a:bodyPr>
+          <a:lstStyle/>
+          <a:p>
+            <a:pPr algn="ctr"/>
+            <a:r>
+              <a:rPr sz="1200" b="1">
+                <a:solidFill>
+                  <a:srgbClr val="1D1D1F"/>
+                </a:solidFill>
+                <a:latin typeface="Calibri"/>
+              </a:rPr>
+              <a:t>Usable</a:t>
+            </a:r>
+          </a:p>
+        </p:txBody>
+      </p:sp>
+      <p:sp>
+        <p:nvSpPr>
+          <p:cNvPr id="8" name="Rounded Rectangle 7"/>
+          <p:cNvSpPr/>
+          <p:nvPr/>
+        </p:nvSpPr>
+        <p:spPr>
+          <a:xfrm>
+            <a:off x="6463893" y="5257800"/>
+            <a:ext cx="1559052" cy="384048"/>
+          </a:xfrm>
+          <a:prstGeom prst="roundRect">
+            <a:avLst/>
+          </a:prstGeom>
+          <a:solidFill>
+            <a:srgbClr val="E8E8ED"/>
+          </a:solidFill>
+          <a:ln>
+            <a:noFill/>
+          </a:ln>
+        </p:spPr>
+        <p:style>
+          <a:lnRef idx="1">
+            <a:schemeClr val="accent1"/>
+          </a:lnRef>
+          <a:fillRef idx="3">
+            <a:schemeClr val="accent1"/>
+          </a:fillRef>
+          <a:effectRef idx="2">
+            <a:schemeClr val="accent1"/>
+          </a:effectRef>
+          <a:fontRef idx="minor">
+            <a:schemeClr val="lt1"/>
+          </a:fontRef>
+        </p:style>
+        <p:txBody>
+          <a:bodyPr rtlCol="0" anchor="ctr"/>
+          <a:lstStyle/>
+          <a:p>
+            <a:pPr algn="ctr"/>
+          </a:p>
+        </p:txBody>
+      </p:sp>
+      <p:sp>
+        <p:nvSpPr>
+          <p:cNvPr id="9" name="TextBox 8"/>
+          <p:cNvSpPr txBox="1"/>
+          <p:nvPr/>
+        </p:nvSpPr>
+        <p:spPr>
+          <a:xfrm>
+            <a:off x="6463893" y="5294376"/>
+            <a:ext cx="1559052" cy="329184"/>
+          </a:xfrm>
+          <a:prstGeom prst="rect">
+            <a:avLst/>
+          </a:prstGeom>
+          <a:noFill/>
+        </p:spPr>
+        <p:txBody>
+          <a:bodyPr wrap="square">
+            <a:spAutoFit/>
+          </a:bodyPr>
+          <a:lstStyle/>
+          <a:p>
+            <a:pPr algn="ctr"/>
+            <a:r>
+              <a:rPr sz="1200" b="1">
+                <a:solidFill>
+                  <a:srgbClr val="1D1D1F"/>
+                </a:solidFill>
+                <a:latin typeface="Calibri"/>
+              </a:rPr>
+              <a:t>Payments work</a:t>
+            </a:r>
+          </a:p>
+        </p:txBody>
+      </p:sp>
     </p:spTree>
   </p:cSld>
   <p:clrMapOvr>
@@ -7489,7 +8163,7 @@
             <a:avLst/>
           </a:prstGeom>
           <a:solidFill>
-            <a:srgbClr val="070710"/>
+            <a:srgbClr val="F5F5F7"/>
           </a:solidFill>
           <a:ln>
             <a:noFill/>
@@ -7517,30 +8191,189 @@
           </a:p>
         </p:txBody>
       </p:sp>
-      <p:pic>
-        <p:nvPicPr>
-          <p:cNvPr id="3" name="Picture 2" descr="kug-chennai-banner.jpg"/>
-          <p:cNvPicPr>
-            <a:picLocks noChangeAspect="1"/>
-          </p:cNvPicPr>
-          <p:nvPr/>
-        </p:nvPicPr>
-        <p:blipFill>
-          <a:blip r:embed="rId2"/>
-          <a:stretch>
-            <a:fillRect/>
-          </a:stretch>
-        </p:blipFill>
-        <p:spPr>
-          <a:xfrm>
-            <a:off x="0" y="85"/>
-            <a:ext cx="12191695" cy="6857828"/>
+      <p:sp>
+        <p:nvSpPr>
+          <p:cNvPr id="3" name="TextBox 2"/>
+          <p:cNvSpPr txBox="1"/>
+          <p:nvPr/>
+        </p:nvSpPr>
+        <p:spPr>
+          <a:xfrm>
+            <a:off x="640080" y="1051560"/>
+            <a:ext cx="10881360" cy="1005840"/>
           </a:xfrm>
           <a:prstGeom prst="rect">
             <a:avLst/>
           </a:prstGeom>
-        </p:spPr>
-      </p:pic>
+          <a:noFill/>
+        </p:spPr>
+        <p:txBody>
+          <a:bodyPr wrap="square">
+            <a:spAutoFit/>
+          </a:bodyPr>
+          <a:lstStyle/>
+          <a:p>
+            <a:pPr algn="ctr"/>
+            <a:r>
+              <a:rPr sz="3600" b="1">
+                <a:solidFill>
+                  <a:srgbClr val="1D1D1F"/>
+                </a:solidFill>
+                <a:latin typeface="Calibri"/>
+              </a:rPr>
+              <a:t>Ship it. Get reviewed.</a:t>
+            </a:r>
+          </a:p>
+        </p:txBody>
+      </p:sp>
+      <p:sp>
+        <p:nvSpPr>
+          <p:cNvPr id="4" name="TextBox 3"/>
+          <p:cNvSpPr txBox="1"/>
+          <p:nvPr/>
+        </p:nvSpPr>
+        <p:spPr>
+          <a:xfrm>
+            <a:off x="822960" y="2331720"/>
+            <a:ext cx="10515600" cy="1828800"/>
+          </a:xfrm>
+          <a:prstGeom prst="rect">
+            <a:avLst/>
+          </a:prstGeom>
+          <a:noFill/>
+        </p:spPr>
+        <p:txBody>
+          <a:bodyPr wrap="square">
+            <a:spAutoFit/>
+          </a:bodyPr>
+          <a:lstStyle/>
+          <a:p>
+            <a:pPr algn="ctr"/>
+            <a:r>
+              <a:rPr sz="2400" b="1">
+                <a:solidFill>
+                  <a:srgbClr val="1D1D1F"/>
+                </a:solidFill>
+                <a:latin typeface="Calibri"/>
+              </a:rPr>
+              <a:t>We're going to see 10 person billion-dollar companies pretty soon.</a:t>
+            </a:r>
+          </a:p>
+        </p:txBody>
+      </p:sp>
+      <p:sp>
+        <p:nvSpPr>
+          <p:cNvPr id="5" name="TextBox 4"/>
+          <p:cNvSpPr txBox="1"/>
+          <p:nvPr/>
+        </p:nvSpPr>
+        <p:spPr>
+          <a:xfrm>
+            <a:off x="640080" y="4297680"/>
+            <a:ext cx="10881360" cy="365760"/>
+          </a:xfrm>
+          <a:prstGeom prst="rect">
+            <a:avLst/>
+          </a:prstGeom>
+          <a:noFill/>
+        </p:spPr>
+        <p:txBody>
+          <a:bodyPr wrap="square">
+            <a:spAutoFit/>
+          </a:bodyPr>
+          <a:lstStyle/>
+          <a:p>
+            <a:pPr algn="ctr"/>
+            <a:r>
+              <a:rPr sz="1400" b="1">
+                <a:solidFill>
+                  <a:srgbClr val="6E6E73"/>
+                </a:solidFill>
+                <a:latin typeface="Calibri"/>
+              </a:rPr>
+              <a:t>Sam Altman</a:t>
+            </a:r>
+          </a:p>
+        </p:txBody>
+      </p:sp>
+      <p:sp>
+        <p:nvSpPr>
+          <p:cNvPr id="6" name="Rounded Rectangle 5"/>
+          <p:cNvSpPr/>
+          <p:nvPr/>
+        </p:nvSpPr>
+        <p:spPr>
+          <a:xfrm>
+            <a:off x="5220309" y="5257800"/>
+            <a:ext cx="1751076" cy="384048"/>
+          </a:xfrm>
+          <a:prstGeom prst="roundRect">
+            <a:avLst/>
+          </a:prstGeom>
+          <a:solidFill>
+            <a:srgbClr val="E8E8ED"/>
+          </a:solidFill>
+          <a:ln>
+            <a:noFill/>
+          </a:ln>
+        </p:spPr>
+        <p:style>
+          <a:lnRef idx="1">
+            <a:schemeClr val="accent1"/>
+          </a:lnRef>
+          <a:fillRef idx="3">
+            <a:schemeClr val="accent1"/>
+          </a:fillRef>
+          <a:effectRef idx="2">
+            <a:schemeClr val="accent1"/>
+          </a:effectRef>
+          <a:fontRef idx="minor">
+            <a:schemeClr val="lt1"/>
+          </a:fontRef>
+        </p:style>
+        <p:txBody>
+          <a:bodyPr rtlCol="0" anchor="ctr"/>
+          <a:lstStyle/>
+          <a:p>
+            <a:pPr algn="ctr"/>
+          </a:p>
+        </p:txBody>
+      </p:sp>
+      <p:sp>
+        <p:nvSpPr>
+          <p:cNvPr id="7" name="TextBox 6"/>
+          <p:cNvSpPr txBox="1"/>
+          <p:nvPr/>
+        </p:nvSpPr>
+        <p:spPr>
+          <a:xfrm>
+            <a:off x="5220309" y="5294376"/>
+            <a:ext cx="1751076" cy="329184"/>
+          </a:xfrm>
+          <a:prstGeom prst="rect">
+            <a:avLst/>
+          </a:prstGeom>
+          <a:noFill/>
+        </p:spPr>
+        <p:txBody>
+          <a:bodyPr wrap="square">
+            <a:spAutoFit/>
+          </a:bodyPr>
+          <a:lstStyle/>
+          <a:p>
+            <a:pPr algn="ctr"/>
+            <a:r>
+              <a:rPr sz="1200" b="1">
+                <a:solidFill>
+                  <a:srgbClr val="1D1D1F"/>
+                </a:solidFill>
+                <a:latin typeface="Calibri"/>
+              </a:rPr>
+              <a:t>DevFest tickets</a:t>
+            </a:r>
+          </a:p>
+        </p:txBody>
+      </p:sp>
     </p:spTree>
   </p:cSld>
   <p:clrMapOvr>
@@ -7758,6 +8591,91 @@
 </p:sld>
 </file>
 
+<file path=ppt/slides/slide20.xml><?xml version="1.0" encoding="utf-8"?>
+<p:sld xmlns:a="http://schemas.openxmlformats.org/drawingml/2006/main" xmlns:p="http://schemas.openxmlformats.org/presentationml/2006/main" xmlns:r="http://schemas.openxmlformats.org/officeDocument/2006/relationships">
+  <p:cSld>
+    <p:spTree>
+      <p:nvGrpSpPr>
+        <p:cNvPr id="1" name=""/>
+        <p:cNvGrpSpPr/>
+        <p:nvPr/>
+      </p:nvGrpSpPr>
+      <p:grpSpPr/>
+      <p:sp>
+        <p:nvSpPr>
+          <p:cNvPr id="2" name="Rectangle 1"/>
+          <p:cNvSpPr/>
+          <p:nvPr/>
+        </p:nvSpPr>
+        <p:spPr>
+          <a:xfrm>
+            <a:off x="0" y="0"/>
+            <a:ext cx="12191695" cy="6858000"/>
+          </a:xfrm>
+          <a:prstGeom prst="rect">
+            <a:avLst/>
+          </a:prstGeom>
+          <a:solidFill>
+            <a:srgbClr val="070710"/>
+          </a:solidFill>
+          <a:ln>
+            <a:noFill/>
+          </a:ln>
+        </p:spPr>
+        <p:style>
+          <a:lnRef idx="1">
+            <a:schemeClr val="accent1"/>
+          </a:lnRef>
+          <a:fillRef idx="3">
+            <a:schemeClr val="accent1"/>
+          </a:fillRef>
+          <a:effectRef idx="2">
+            <a:schemeClr val="accent1"/>
+          </a:effectRef>
+          <a:fontRef idx="minor">
+            <a:schemeClr val="lt1"/>
+          </a:fontRef>
+        </p:style>
+        <p:txBody>
+          <a:bodyPr rtlCol="0" anchor="ctr"/>
+          <a:lstStyle/>
+          <a:p>
+            <a:pPr algn="ctr"/>
+          </a:p>
+        </p:txBody>
+      </p:sp>
+      <p:pic>
+        <p:nvPicPr>
+          <p:cNvPr id="3" name="Picture 2" descr="kug-chennai-banner.jpg"/>
+          <p:cNvPicPr>
+            <a:picLocks noChangeAspect="1"/>
+          </p:cNvPicPr>
+          <p:nvPr/>
+        </p:nvPicPr>
+        <p:blipFill>
+          <a:blip r:embed="rId2"/>
+          <a:stretch>
+            <a:fillRect/>
+          </a:stretch>
+        </p:blipFill>
+        <p:spPr>
+          <a:xfrm>
+            <a:off x="0" y="85"/>
+            <a:ext cx="12191695" cy="6857828"/>
+          </a:xfrm>
+          <a:prstGeom prst="rect">
+            <a:avLst/>
+          </a:prstGeom>
+        </p:spPr>
+      </p:pic>
+    </p:spTree>
+  </p:cSld>
+  <p:clrMapOvr>
+    <a:masterClrMapping/>
+  </p:clrMapOvr>
+</p:sld>
+</file>
+
 <file path=ppt/slides/slide3.xml><?xml version="1.0" encoding="utf-8"?>
 <p:sld xmlns:a="http://schemas.openxmlformats.org/drawingml/2006/main" xmlns:p="http://schemas.openxmlformats.org/presentationml/2006/main" xmlns:r="http://schemas.openxmlformats.org/officeDocument/2006/relationships">
   <p:cSld>
@@ -7819,8 +8737,8 @@
         </p:nvSpPr>
         <p:spPr>
           <a:xfrm>
-            <a:off x="640080" y="1691640"/>
-            <a:ext cx="10881360" cy="1737360"/>
+            <a:off x="640080" y="640080"/>
+            <a:ext cx="10881360" cy="1051560"/>
           </a:xfrm>
           <a:prstGeom prst="rect">
             <a:avLst/>
@@ -7841,7 +8759,7 @@
                 </a:solidFill>
                 <a:latin typeface="Calibri"/>
               </a:rPr>
-              <a:t>You don't need a big team.</a:t>
+              <a:t>Take Startup School.</a:t>
             </a:r>
           </a:p>
         </p:txBody>
@@ -7854,8 +8772,8 @@
         </p:nvSpPr>
         <p:spPr>
           <a:xfrm>
-            <a:off x="640080" y="3474720"/>
-            <a:ext cx="10881360" cy="777240"/>
+            <a:off x="640080" y="1737360"/>
+            <a:ext cx="10881360" cy="502920"/>
           </a:xfrm>
           <a:prstGeom prst="rect">
             <a:avLst/>
@@ -7876,167 +8794,35 @@
                 </a:solidFill>
                 <a:latin typeface="Calibri"/>
               </a:rPr>
-              <a:t>Or months. Or an ad budget.</a:t>
-            </a:r>
-          </a:p>
-        </p:txBody>
-      </p:sp>
-      <p:sp>
-        <p:nvSpPr>
-          <p:cNvPr id="5" name="Rounded Rectangle 4"/>
-          <p:cNvSpPr/>
-          <p:nvPr/>
-        </p:nvSpPr>
-        <p:spPr>
-          <a:xfrm>
-            <a:off x="4790541" y="5806440"/>
-            <a:ext cx="1271016" cy="384048"/>
-          </a:xfrm>
-          <a:prstGeom prst="roundRect">
-            <a:avLst/>
-          </a:prstGeom>
-          <a:solidFill>
-            <a:srgbClr val="E8E8ED"/>
-          </a:solidFill>
-          <a:ln>
-            <a:noFill/>
-          </a:ln>
-        </p:spPr>
-        <p:style>
-          <a:lnRef idx="1">
-            <a:schemeClr val="accent1"/>
-          </a:lnRef>
-          <a:fillRef idx="3">
-            <a:schemeClr val="accent1"/>
-          </a:fillRef>
-          <a:effectRef idx="2">
-            <a:schemeClr val="accent1"/>
-          </a:effectRef>
-          <a:fontRef idx="minor">
-            <a:schemeClr val="lt1"/>
-          </a:fontRef>
-        </p:style>
-        <p:txBody>
-          <a:bodyPr rtlCol="0" anchor="ctr"/>
-          <a:lstStyle/>
-          <a:p>
-            <a:pPr algn="ctr"/>
-          </a:p>
-        </p:txBody>
-      </p:sp>
-      <p:sp>
-        <p:nvSpPr>
-          <p:cNvPr id="6" name="TextBox 5"/>
-          <p:cNvSpPr txBox="1"/>
-          <p:nvPr/>
-        </p:nvSpPr>
-        <p:spPr>
-          <a:xfrm>
-            <a:off x="4790541" y="5843016"/>
-            <a:ext cx="1271016" cy="329184"/>
+              <a:t>Free. Online. From YC.</a:t>
+            </a:r>
+          </a:p>
+        </p:txBody>
+      </p:sp>
+      <p:pic>
+        <p:nvPicPr>
+          <p:cNvPr id="5" name="Picture 4" descr="startup-school-qr.png"/>
+          <p:cNvPicPr>
+            <a:picLocks noChangeAspect="1"/>
+          </p:cNvPicPr>
+          <p:nvPr/>
+        </p:nvPicPr>
+        <p:blipFill>
+          <a:blip r:embed="rId2"/>
+          <a:stretch>
+            <a:fillRect/>
+          </a:stretch>
+        </p:blipFill>
+        <p:spPr>
+          <a:xfrm>
+            <a:off x="4160520" y="2331720"/>
+            <a:ext cx="3840480" cy="3840480"/>
           </a:xfrm>
           <a:prstGeom prst="rect">
             <a:avLst/>
           </a:prstGeom>
-          <a:noFill/>
-        </p:spPr>
-        <p:txBody>
-          <a:bodyPr wrap="square">
-            <a:spAutoFit/>
-          </a:bodyPr>
-          <a:lstStyle/>
-          <a:p>
-            <a:pPr algn="ctr"/>
-            <a:r>
-              <a:rPr sz="1200" b="1">
-                <a:solidFill>
-                  <a:srgbClr val="1D1D1F"/>
-                </a:solidFill>
-                <a:latin typeface="Calibri"/>
-              </a:rPr>
-              <a:t>Super Meme</a:t>
-            </a:r>
-          </a:p>
-        </p:txBody>
-      </p:sp>
-      <p:sp>
-        <p:nvSpPr>
-          <p:cNvPr id="7" name="Rounded Rectangle 6"/>
-          <p:cNvSpPr/>
-          <p:nvPr/>
-        </p:nvSpPr>
-        <p:spPr>
-          <a:xfrm>
-            <a:off x="6226149" y="5806440"/>
-            <a:ext cx="1175004" cy="384048"/>
-          </a:xfrm>
-          <a:prstGeom prst="roundRect">
-            <a:avLst/>
-          </a:prstGeom>
-          <a:solidFill>
-            <a:srgbClr val="E8E8ED"/>
-          </a:solidFill>
-          <a:ln>
-            <a:noFill/>
-          </a:ln>
-        </p:spPr>
-        <p:style>
-          <a:lnRef idx="1">
-            <a:schemeClr val="accent1"/>
-          </a:lnRef>
-          <a:fillRef idx="3">
-            <a:schemeClr val="accent1"/>
-          </a:fillRef>
-          <a:effectRef idx="2">
-            <a:schemeClr val="accent1"/>
-          </a:effectRef>
-          <a:fontRef idx="minor">
-            <a:schemeClr val="lt1"/>
-          </a:fontRef>
-        </p:style>
-        <p:txBody>
-          <a:bodyPr rtlCol="0" anchor="ctr"/>
-          <a:lstStyle/>
-          <a:p>
-            <a:pPr algn="ctr"/>
-          </a:p>
-        </p:txBody>
-      </p:sp>
-      <p:sp>
-        <p:nvSpPr>
-          <p:cNvPr id="8" name="TextBox 7"/>
-          <p:cNvSpPr txBox="1"/>
-          <p:nvPr/>
-        </p:nvSpPr>
-        <p:spPr>
-          <a:xfrm>
-            <a:off x="6226149" y="5843016"/>
-            <a:ext cx="1175004" cy="329184"/>
-          </a:xfrm>
-          <a:prstGeom prst="rect">
-            <a:avLst/>
-          </a:prstGeom>
-          <a:noFill/>
-        </p:spPr>
-        <p:txBody>
-          <a:bodyPr wrap="square">
-            <a:spAutoFit/>
-          </a:bodyPr>
-          <a:lstStyle/>
-          <a:p>
-            <a:pPr algn="ctr"/>
-            <a:r>
-              <a:rPr sz="1200" b="1">
-                <a:solidFill>
-                  <a:srgbClr val="1D1D1F"/>
-                </a:solidFill>
-                <a:latin typeface="Calibri"/>
-              </a:rPr>
-              <a:t>DroidClaw</a:t>
-            </a:r>
-          </a:p>
-        </p:txBody>
-      </p:sp>
+        </p:spPr>
+      </p:pic>
     </p:spTree>
   </p:cSld>
   <p:clrMapOvr>
@@ -8106,7 +8892,7 @@
         </p:nvSpPr>
         <p:spPr>
           <a:xfrm>
-            <a:off x="640080" y="1554480"/>
+            <a:off x="640080" y="502920"/>
             <a:ext cx="10881360" cy="1737360"/>
           </a:xfrm>
           <a:prstGeom prst="rect">
@@ -8122,13 +8908,13 @@
           <a:p>
             <a:pPr algn="ctr"/>
             <a:r>
-              <a:rPr sz="3400" b="1">
+              <a:rPr sz="3200" b="1">
                 <a:solidFill>
                   <a:srgbClr val="1D1D1F"/>
                 </a:solidFill>
                 <a:latin typeface="Calibri"/>
               </a:rPr>
-              <a:t>You don't need the next Instagram.</a:t>
+              <a:t>You don't need a big team.</a:t>
             </a:r>
           </a:p>
         </p:txBody>
@@ -8141,7 +8927,7 @@
         </p:nvSpPr>
         <p:spPr>
           <a:xfrm>
-            <a:off x="640080" y="3337560"/>
+            <a:off x="640080" y="2286000"/>
             <a:ext cx="10881360" cy="777240"/>
           </a:xfrm>
           <a:prstGeom prst="rect">
@@ -8163,21 +8949,69 @@
                 </a:solidFill>
                 <a:latin typeface="Calibri"/>
               </a:rPr>
-              <a:t>One problem. A few people.</a:t>
-            </a:r>
-          </a:p>
-        </p:txBody>
-      </p:sp>
-      <p:sp>
-        <p:nvSpPr>
-          <p:cNvPr id="5" name="Rounded Rectangle 4"/>
+              <a:t>Or months. Or an ad budget.</a:t>
+            </a:r>
+          </a:p>
+        </p:txBody>
+      </p:sp>
+      <p:pic>
+        <p:nvPicPr>
+          <p:cNvPr id="5" name="Picture 4" descr="shot-supermeme.jpg"/>
+          <p:cNvPicPr>
+            <a:picLocks noChangeAspect="1"/>
+          </p:cNvPicPr>
+          <p:nvPr/>
+        </p:nvPicPr>
+        <p:blipFill>
+          <a:blip r:embed="rId2"/>
+          <a:stretch>
+            <a:fillRect/>
+          </a:stretch>
+        </p:blipFill>
+        <p:spPr>
+          <a:xfrm>
+            <a:off x="1990191" y="3246120"/>
+            <a:ext cx="4023360" cy="1874519"/>
+          </a:xfrm>
+          <a:prstGeom prst="rect">
+            <a:avLst/>
+          </a:prstGeom>
+        </p:spPr>
+      </p:pic>
+      <p:pic>
+        <p:nvPicPr>
+          <p:cNvPr id="6" name="Picture 5" descr="shot-droidclaw.jpg"/>
+          <p:cNvPicPr>
+            <a:picLocks noChangeAspect="1"/>
+          </p:cNvPicPr>
+          <p:nvPr/>
+        </p:nvPicPr>
+        <p:blipFill>
+          <a:blip r:embed="rId3"/>
+          <a:stretch>
+            <a:fillRect/>
+          </a:stretch>
+        </p:blipFill>
+        <p:spPr>
+          <a:xfrm>
+            <a:off x="6178143" y="3246120"/>
+            <a:ext cx="4023360" cy="1874519"/>
+          </a:xfrm>
+          <a:prstGeom prst="rect">
+            <a:avLst/>
+          </a:prstGeom>
+        </p:spPr>
+      </p:pic>
+      <p:sp>
+        <p:nvSpPr>
+          <p:cNvPr id="7" name="Rounded Rectangle 6"/>
           <p:cNvSpPr/>
           <p:nvPr/>
         </p:nvSpPr>
         <p:spPr>
           <a:xfrm>
-            <a:off x="2538831" y="5074920"/>
-            <a:ext cx="1367028" cy="384048"/>
+            <a:off x="4790541" y="5806440"/>
+            <a:ext cx="1271016" cy="384048"/>
           </a:xfrm>
           <a:prstGeom prst="roundRect">
             <a:avLst/>
@@ -8213,14 +9047,14 @@
       </p:sp>
       <p:sp>
         <p:nvSpPr>
-          <p:cNvPr id="6" name="TextBox 5"/>
+          <p:cNvPr id="8" name="TextBox 7"/>
           <p:cNvSpPr txBox="1"/>
           <p:nvPr/>
         </p:nvSpPr>
         <p:spPr>
           <a:xfrm>
-            <a:off x="2538831" y="5111496"/>
-            <a:ext cx="1367028" cy="329184"/>
+            <a:off x="4790541" y="5843016"/>
+            <a:ext cx="1271016" cy="329184"/>
           </a:xfrm>
           <a:prstGeom prst="rect">
             <a:avLst/>
@@ -8241,21 +9075,21 @@
                 </a:solidFill>
                 <a:latin typeface="Calibri"/>
               </a:rPr>
-              <a:t>Puzzle game</a:t>
-            </a:r>
-          </a:p>
-        </p:txBody>
-      </p:sp>
-      <p:sp>
-        <p:nvSpPr>
-          <p:cNvPr id="7" name="Rounded Rectangle 6"/>
+              <a:t>Super Meme</a:t>
+            </a:r>
+          </a:p>
+        </p:txBody>
+      </p:sp>
+      <p:sp>
+        <p:nvSpPr>
+          <p:cNvPr id="9" name="Rounded Rectangle 8"/>
           <p:cNvSpPr/>
           <p:nvPr/>
         </p:nvSpPr>
         <p:spPr>
           <a:xfrm>
-            <a:off x="4070451" y="5074920"/>
-            <a:ext cx="1847088" cy="384048"/>
+            <a:off x="6226149" y="5806440"/>
+            <a:ext cx="1175004" cy="384048"/>
           </a:xfrm>
           <a:prstGeom prst="roundRect">
             <a:avLst/>
@@ -8291,14 +9125,14 @@
       </p:sp>
       <p:sp>
         <p:nvSpPr>
-          <p:cNvPr id="8" name="TextBox 7"/>
+          <p:cNvPr id="10" name="TextBox 9"/>
           <p:cNvSpPr txBox="1"/>
           <p:nvPr/>
         </p:nvSpPr>
         <p:spPr>
           <a:xfrm>
-            <a:off x="4070451" y="5111496"/>
-            <a:ext cx="1847088" cy="329184"/>
+            <a:off x="6226149" y="5843016"/>
+            <a:ext cx="1175004" cy="329184"/>
           </a:xfrm>
           <a:prstGeom prst="rect">
             <a:avLst/>
@@ -8319,163 +9153,7 @@
                 </a:solidFill>
                 <a:latin typeface="Calibri"/>
               </a:rPr>
-              <a:t>Resume formatter</a:t>
-            </a:r>
-          </a:p>
-        </p:txBody>
-      </p:sp>
-      <p:sp>
-        <p:nvSpPr>
-          <p:cNvPr id="9" name="Rounded Rectangle 8"/>
-          <p:cNvSpPr/>
-          <p:nvPr/>
-        </p:nvSpPr>
-        <p:spPr>
-          <a:xfrm>
-            <a:off x="6082131" y="5074920"/>
-            <a:ext cx="1943100" cy="384048"/>
-          </a:xfrm>
-          <a:prstGeom prst="roundRect">
-            <a:avLst/>
-          </a:prstGeom>
-          <a:solidFill>
-            <a:srgbClr val="E8E8ED"/>
-          </a:solidFill>
-          <a:ln>
-            <a:noFill/>
-          </a:ln>
-        </p:spPr>
-        <p:style>
-          <a:lnRef idx="1">
-            <a:schemeClr val="accent1"/>
-          </a:lnRef>
-          <a:fillRef idx="3">
-            <a:schemeClr val="accent1"/>
-          </a:fillRef>
-          <a:effectRef idx="2">
-            <a:schemeClr val="accent1"/>
-          </a:effectRef>
-          <a:fontRef idx="minor">
-            <a:schemeClr val="lt1"/>
-          </a:fontRef>
-        </p:style>
-        <p:txBody>
-          <a:bodyPr rtlCol="0" anchor="ctr"/>
-          <a:lstStyle/>
-          <a:p>
-            <a:pPr algn="ctr"/>
-          </a:p>
-        </p:txBody>
-      </p:sp>
-      <p:sp>
-        <p:nvSpPr>
-          <p:cNvPr id="10" name="TextBox 9"/>
-          <p:cNvSpPr txBox="1"/>
-          <p:nvPr/>
-        </p:nvSpPr>
-        <p:spPr>
-          <a:xfrm>
-            <a:off x="6082131" y="5111496"/>
-            <a:ext cx="1943100" cy="329184"/>
-          </a:xfrm>
-          <a:prstGeom prst="rect">
-            <a:avLst/>
-          </a:prstGeom>
-          <a:noFill/>
-        </p:spPr>
-        <p:txBody>
-          <a:bodyPr wrap="square">
-            <a:spAutoFit/>
-          </a:bodyPr>
-          <a:lstStyle/>
-          <a:p>
-            <a:pPr algn="ctr"/>
-            <a:r>
-              <a:rPr sz="1200" b="1">
-                <a:solidFill>
-                  <a:srgbClr val="1D1D1F"/>
-                </a:solidFill>
-                <a:latin typeface="Calibri"/>
-              </a:rPr>
-              <a:t>Invoice reminders</a:t>
-            </a:r>
-          </a:p>
-        </p:txBody>
-      </p:sp>
-      <p:sp>
-        <p:nvSpPr>
-          <p:cNvPr id="11" name="Rounded Rectangle 10"/>
-          <p:cNvSpPr/>
-          <p:nvPr/>
-        </p:nvSpPr>
-        <p:spPr>
-          <a:xfrm>
-            <a:off x="8189823" y="5074920"/>
-            <a:ext cx="1463040" cy="384048"/>
-          </a:xfrm>
-          <a:prstGeom prst="roundRect">
-            <a:avLst/>
-          </a:prstGeom>
-          <a:solidFill>
-            <a:srgbClr val="E8E8ED"/>
-          </a:solidFill>
-          <a:ln>
-            <a:noFill/>
-          </a:ln>
-        </p:spPr>
-        <p:style>
-          <a:lnRef idx="1">
-            <a:schemeClr val="accent1"/>
-          </a:lnRef>
-          <a:fillRef idx="3">
-            <a:schemeClr val="accent1"/>
-          </a:fillRef>
-          <a:effectRef idx="2">
-            <a:schemeClr val="accent1"/>
-          </a:effectRef>
-          <a:fontRef idx="minor">
-            <a:schemeClr val="lt1"/>
-          </a:fontRef>
-        </p:style>
-        <p:txBody>
-          <a:bodyPr rtlCol="0" anchor="ctr"/>
-          <a:lstStyle/>
-          <a:p>
-            <a:pPr algn="ctr"/>
-          </a:p>
-        </p:txBody>
-      </p:sp>
-      <p:sp>
-        <p:nvSpPr>
-          <p:cNvPr id="12" name="TextBox 11"/>
-          <p:cNvSpPr txBox="1"/>
-          <p:nvPr/>
-        </p:nvSpPr>
-        <p:spPr>
-          <a:xfrm>
-            <a:off x="8189823" y="5111496"/>
-            <a:ext cx="1463040" cy="329184"/>
-          </a:xfrm>
-          <a:prstGeom prst="rect">
-            <a:avLst/>
-          </a:prstGeom>
-          <a:noFill/>
-        </p:spPr>
-        <p:txBody>
-          <a:bodyPr wrap="square">
-            <a:spAutoFit/>
-          </a:bodyPr>
-          <a:lstStyle/>
-          <a:p>
-            <a:pPr algn="ctr"/>
-            <a:r>
-              <a:rPr sz="1200" b="1">
-                <a:solidFill>
-                  <a:srgbClr val="1D1D1F"/>
-                </a:solidFill>
-                <a:latin typeface="Calibri"/>
-              </a:rPr>
-              <a:t>CI dashboard</a:t>
+              <a:t>DroidClaw</a:t>
             </a:r>
           </a:p>
         </p:txBody>
@@ -8549,7 +9227,7 @@
         </p:nvSpPr>
         <p:spPr>
           <a:xfrm>
-            <a:off x="640080" y="2148840"/>
+            <a:off x="640080" y="1554480"/>
             <a:ext cx="10881360" cy="1737360"/>
           </a:xfrm>
           <a:prstGeom prst="rect">
@@ -8565,13 +9243,13 @@
           <a:p>
             <a:pPr algn="ctr"/>
             <a:r>
-              <a:rPr sz="3600" b="1">
+              <a:rPr sz="3400" b="1">
                 <a:solidFill>
                   <a:srgbClr val="1D1D1F"/>
                 </a:solidFill>
                 <a:latin typeface="Calibri"/>
               </a:rPr>
-              <a:t>These already exist.</a:t>
+              <a:t>You don't need the next Instagram.</a:t>
             </a:r>
           </a:p>
         </p:txBody>
@@ -8584,7 +9262,7 @@
         </p:nvSpPr>
         <p:spPr>
           <a:xfrm>
-            <a:off x="640080" y="3931920"/>
+            <a:off x="640080" y="3337560"/>
             <a:ext cx="10881360" cy="777240"/>
           </a:xfrm>
           <a:prstGeom prst="rect">
@@ -8606,7 +9284,7 @@
                 </a:solidFill>
                 <a:latin typeface="Calibri"/>
               </a:rPr>
-              <a:t>One job. A real price.</a:t>
+              <a:t>One problem. A few people.</a:t>
             </a:r>
           </a:p>
         </p:txBody>
@@ -8619,8 +9297,8 @@
         </p:nvSpPr>
         <p:spPr>
           <a:xfrm>
-            <a:off x="4504791" y="5623560"/>
-            <a:ext cx="694944" cy="384048"/>
+            <a:off x="2538831" y="5074920"/>
+            <a:ext cx="1367028" cy="384048"/>
           </a:xfrm>
           <a:prstGeom prst="roundRect">
             <a:avLst/>
@@ -8662,8 +9340,8 @@
         </p:nvSpPr>
         <p:spPr>
           <a:xfrm>
-            <a:off x="4504791" y="5660136"/>
-            <a:ext cx="694944" cy="329184"/>
+            <a:off x="2538831" y="5111496"/>
+            <a:ext cx="1367028" cy="329184"/>
           </a:xfrm>
           <a:prstGeom prst="rect">
             <a:avLst/>
@@ -8684,7 +9362,7 @@
                 </a:solidFill>
                 <a:latin typeface="Calibri"/>
               </a:rPr>
-              <a:t>Maaa</a:t>
+              <a:t>Puzzle game</a:t>
             </a:r>
           </a:p>
         </p:txBody>
@@ -8697,8 +9375,8 @@
         </p:nvSpPr>
         <p:spPr>
           <a:xfrm>
-            <a:off x="5364327" y="5623560"/>
-            <a:ext cx="1367028" cy="384048"/>
+            <a:off x="4070451" y="5074920"/>
+            <a:ext cx="1847088" cy="384048"/>
           </a:xfrm>
           <a:prstGeom prst="roundRect">
             <a:avLst/>
@@ -8740,8 +9418,8 @@
         </p:nvSpPr>
         <p:spPr>
           <a:xfrm>
-            <a:off x="5364327" y="5660136"/>
-            <a:ext cx="1367028" cy="329184"/>
+            <a:off x="4070451" y="5111496"/>
+            <a:ext cx="1847088" cy="329184"/>
           </a:xfrm>
           <a:prstGeom prst="rect">
             <a:avLst/>
@@ -8762,7 +9440,7 @@
                 </a:solidFill>
                 <a:latin typeface="Calibri"/>
               </a:rPr>
-              <a:t>Lucky Charm</a:t>
+              <a:t>Resume formatter</a:t>
             </a:r>
           </a:p>
         </p:txBody>
@@ -8775,8 +9453,8 @@
         </p:nvSpPr>
         <p:spPr>
           <a:xfrm>
-            <a:off x="6895947" y="5623560"/>
-            <a:ext cx="790956" cy="384048"/>
+            <a:off x="6082131" y="5074920"/>
+            <a:ext cx="1943100" cy="384048"/>
           </a:xfrm>
           <a:prstGeom prst="roundRect">
             <a:avLst/>
@@ -8818,8 +9496,8 @@
         </p:nvSpPr>
         <p:spPr>
           <a:xfrm>
-            <a:off x="6895947" y="5660136"/>
-            <a:ext cx="790956" cy="329184"/>
+            <a:off x="6082131" y="5111496"/>
+            <a:ext cx="1943100" cy="329184"/>
           </a:xfrm>
           <a:prstGeom prst="rect">
             <a:avLst/>
@@ -8840,7 +9518,85 @@
                 </a:solidFill>
                 <a:latin typeface="Calibri"/>
               </a:rPr>
-              <a:t>Carrd</a:t>
+              <a:t>Invoice reminders</a:t>
+            </a:r>
+          </a:p>
+        </p:txBody>
+      </p:sp>
+      <p:sp>
+        <p:nvSpPr>
+          <p:cNvPr id="11" name="Rounded Rectangle 10"/>
+          <p:cNvSpPr/>
+          <p:nvPr/>
+        </p:nvSpPr>
+        <p:spPr>
+          <a:xfrm>
+            <a:off x="8189823" y="5074920"/>
+            <a:ext cx="1463040" cy="384048"/>
+          </a:xfrm>
+          <a:prstGeom prst="roundRect">
+            <a:avLst/>
+          </a:prstGeom>
+          <a:solidFill>
+            <a:srgbClr val="E8E8ED"/>
+          </a:solidFill>
+          <a:ln>
+            <a:noFill/>
+          </a:ln>
+        </p:spPr>
+        <p:style>
+          <a:lnRef idx="1">
+            <a:schemeClr val="accent1"/>
+          </a:lnRef>
+          <a:fillRef idx="3">
+            <a:schemeClr val="accent1"/>
+          </a:fillRef>
+          <a:effectRef idx="2">
+            <a:schemeClr val="accent1"/>
+          </a:effectRef>
+          <a:fontRef idx="minor">
+            <a:schemeClr val="lt1"/>
+          </a:fontRef>
+        </p:style>
+        <p:txBody>
+          <a:bodyPr rtlCol="0" anchor="ctr"/>
+          <a:lstStyle/>
+          <a:p>
+            <a:pPr algn="ctr"/>
+          </a:p>
+        </p:txBody>
+      </p:sp>
+      <p:sp>
+        <p:nvSpPr>
+          <p:cNvPr id="12" name="TextBox 11"/>
+          <p:cNvSpPr txBox="1"/>
+          <p:nvPr/>
+        </p:nvSpPr>
+        <p:spPr>
+          <a:xfrm>
+            <a:off x="8189823" y="5111496"/>
+            <a:ext cx="1463040" cy="329184"/>
+          </a:xfrm>
+          <a:prstGeom prst="rect">
+            <a:avLst/>
+          </a:prstGeom>
+          <a:noFill/>
+        </p:spPr>
+        <p:txBody>
+          <a:bodyPr wrap="square">
+            <a:spAutoFit/>
+          </a:bodyPr>
+          <a:lstStyle/>
+          <a:p>
+            <a:pPr algn="ctr"/>
+            <a:r>
+              <a:rPr sz="1200" b="1">
+                <a:solidFill>
+                  <a:srgbClr val="1D1D1F"/>
+                </a:solidFill>
+                <a:latin typeface="Calibri"/>
+              </a:rPr>
+              <a:t>CI dashboard</a:t>
             </a:r>
           </a:p>
         </p:txBody>
@@ -8914,7 +9670,7 @@
         </p:nvSpPr>
         <p:spPr>
           <a:xfrm>
-            <a:off x="640080" y="1965960"/>
+            <a:off x="640080" y="411480"/>
             <a:ext cx="10881360" cy="1737360"/>
           </a:xfrm>
           <a:prstGeom prst="rect">
@@ -8930,13 +9686,13 @@
           <a:p>
             <a:pPr algn="ctr"/>
             <a:r>
-              <a:rPr sz="3600" b="1">
+              <a:rPr sz="3200" b="1">
                 <a:solidFill>
                   <a:srgbClr val="1D1D1F"/>
                 </a:solidFill>
                 <a:latin typeface="Calibri"/>
               </a:rPr>
-              <a:t>You don't have to invent it.</a:t>
+              <a:t>These already exist.</a:t>
             </a:r>
           </a:p>
         </p:txBody>
@@ -8949,7 +9705,7 @@
         </p:nvSpPr>
         <p:spPr>
           <a:xfrm>
-            <a:off x="640080" y="3749039"/>
+            <a:off x="640080" y="2194560"/>
             <a:ext cx="10881360" cy="777240"/>
           </a:xfrm>
           <a:prstGeom prst="rect">
@@ -8971,7 +9727,313 @@
                 </a:solidFill>
                 <a:latin typeface="Calibri"/>
               </a:rPr>
-              <a:t>A better version is enough.</a:t>
+              <a:t>One job. A real price.</a:t>
+            </a:r>
+          </a:p>
+        </p:txBody>
+      </p:sp>
+      <p:pic>
+        <p:nvPicPr>
+          <p:cNvPr id="5" name="Picture 4" descr="shot-maaa.jpg"/>
+          <p:cNvPicPr>
+            <a:picLocks noChangeAspect="1"/>
+          </p:cNvPicPr>
+          <p:nvPr/>
+        </p:nvPicPr>
+        <p:blipFill>
+          <a:blip r:embed="rId2"/>
+          <a:stretch>
+            <a:fillRect/>
+          </a:stretch>
+        </p:blipFill>
+        <p:spPr>
+          <a:xfrm>
+            <a:off x="1062075" y="3154680"/>
+            <a:ext cx="3246120" cy="1783080"/>
+          </a:xfrm>
+          <a:prstGeom prst="rect">
+            <a:avLst/>
+          </a:prstGeom>
+        </p:spPr>
+      </p:pic>
+      <p:pic>
+        <p:nvPicPr>
+          <p:cNvPr id="6" name="Picture 5" descr="shot-luckycharm.jpg"/>
+          <p:cNvPicPr>
+            <a:picLocks noChangeAspect="1"/>
+          </p:cNvPicPr>
+          <p:nvPr/>
+        </p:nvPicPr>
+        <p:blipFill>
+          <a:blip r:embed="rId3"/>
+          <a:stretch>
+            <a:fillRect/>
+          </a:stretch>
+        </p:blipFill>
+        <p:spPr>
+          <a:xfrm>
+            <a:off x="4472787" y="3154680"/>
+            <a:ext cx="3246120" cy="1783080"/>
+          </a:xfrm>
+          <a:prstGeom prst="rect">
+            <a:avLst/>
+          </a:prstGeom>
+        </p:spPr>
+      </p:pic>
+      <p:pic>
+        <p:nvPicPr>
+          <p:cNvPr id="7" name="Picture 6" descr="shot-carrd.jpg"/>
+          <p:cNvPicPr>
+            <a:picLocks noChangeAspect="1"/>
+          </p:cNvPicPr>
+          <p:nvPr/>
+        </p:nvPicPr>
+        <p:blipFill>
+          <a:blip r:embed="rId4"/>
+          <a:stretch>
+            <a:fillRect/>
+          </a:stretch>
+        </p:blipFill>
+        <p:spPr>
+          <a:xfrm>
+            <a:off x="7883499" y="3154680"/>
+            <a:ext cx="3246120" cy="1783080"/>
+          </a:xfrm>
+          <a:prstGeom prst="rect">
+            <a:avLst/>
+          </a:prstGeom>
+        </p:spPr>
+      </p:pic>
+      <p:sp>
+        <p:nvSpPr>
+          <p:cNvPr id="8" name="Rounded Rectangle 7"/>
+          <p:cNvSpPr/>
+          <p:nvPr/>
+        </p:nvSpPr>
+        <p:spPr>
+          <a:xfrm>
+            <a:off x="4504791" y="5806440"/>
+            <a:ext cx="694944" cy="384048"/>
+          </a:xfrm>
+          <a:prstGeom prst="roundRect">
+            <a:avLst/>
+          </a:prstGeom>
+          <a:solidFill>
+            <a:srgbClr val="E8E8ED"/>
+          </a:solidFill>
+          <a:ln>
+            <a:noFill/>
+          </a:ln>
+        </p:spPr>
+        <p:style>
+          <a:lnRef idx="1">
+            <a:schemeClr val="accent1"/>
+          </a:lnRef>
+          <a:fillRef idx="3">
+            <a:schemeClr val="accent1"/>
+          </a:fillRef>
+          <a:effectRef idx="2">
+            <a:schemeClr val="accent1"/>
+          </a:effectRef>
+          <a:fontRef idx="minor">
+            <a:schemeClr val="lt1"/>
+          </a:fontRef>
+        </p:style>
+        <p:txBody>
+          <a:bodyPr rtlCol="0" anchor="ctr"/>
+          <a:lstStyle/>
+          <a:p>
+            <a:pPr algn="ctr"/>
+          </a:p>
+        </p:txBody>
+      </p:sp>
+      <p:sp>
+        <p:nvSpPr>
+          <p:cNvPr id="9" name="TextBox 8"/>
+          <p:cNvSpPr txBox="1"/>
+          <p:nvPr/>
+        </p:nvSpPr>
+        <p:spPr>
+          <a:xfrm>
+            <a:off x="4504791" y="5843016"/>
+            <a:ext cx="694944" cy="329184"/>
+          </a:xfrm>
+          <a:prstGeom prst="rect">
+            <a:avLst/>
+          </a:prstGeom>
+          <a:noFill/>
+        </p:spPr>
+        <p:txBody>
+          <a:bodyPr wrap="square">
+            <a:spAutoFit/>
+          </a:bodyPr>
+          <a:lstStyle/>
+          <a:p>
+            <a:pPr algn="ctr"/>
+            <a:r>
+              <a:rPr sz="1200" b="1">
+                <a:solidFill>
+                  <a:srgbClr val="1D1D1F"/>
+                </a:solidFill>
+                <a:latin typeface="Calibri"/>
+              </a:rPr>
+              <a:t>Maaa</a:t>
+            </a:r>
+          </a:p>
+        </p:txBody>
+      </p:sp>
+      <p:sp>
+        <p:nvSpPr>
+          <p:cNvPr id="10" name="Rounded Rectangle 9"/>
+          <p:cNvSpPr/>
+          <p:nvPr/>
+        </p:nvSpPr>
+        <p:spPr>
+          <a:xfrm>
+            <a:off x="5364327" y="5806440"/>
+            <a:ext cx="1367028" cy="384048"/>
+          </a:xfrm>
+          <a:prstGeom prst="roundRect">
+            <a:avLst/>
+          </a:prstGeom>
+          <a:solidFill>
+            <a:srgbClr val="E8E8ED"/>
+          </a:solidFill>
+          <a:ln>
+            <a:noFill/>
+          </a:ln>
+        </p:spPr>
+        <p:style>
+          <a:lnRef idx="1">
+            <a:schemeClr val="accent1"/>
+          </a:lnRef>
+          <a:fillRef idx="3">
+            <a:schemeClr val="accent1"/>
+          </a:fillRef>
+          <a:effectRef idx="2">
+            <a:schemeClr val="accent1"/>
+          </a:effectRef>
+          <a:fontRef idx="minor">
+            <a:schemeClr val="lt1"/>
+          </a:fontRef>
+        </p:style>
+        <p:txBody>
+          <a:bodyPr rtlCol="0" anchor="ctr"/>
+          <a:lstStyle/>
+          <a:p>
+            <a:pPr algn="ctr"/>
+          </a:p>
+        </p:txBody>
+      </p:sp>
+      <p:sp>
+        <p:nvSpPr>
+          <p:cNvPr id="11" name="TextBox 10"/>
+          <p:cNvSpPr txBox="1"/>
+          <p:nvPr/>
+        </p:nvSpPr>
+        <p:spPr>
+          <a:xfrm>
+            <a:off x="5364327" y="5843016"/>
+            <a:ext cx="1367028" cy="329184"/>
+          </a:xfrm>
+          <a:prstGeom prst="rect">
+            <a:avLst/>
+          </a:prstGeom>
+          <a:noFill/>
+        </p:spPr>
+        <p:txBody>
+          <a:bodyPr wrap="square">
+            <a:spAutoFit/>
+          </a:bodyPr>
+          <a:lstStyle/>
+          <a:p>
+            <a:pPr algn="ctr"/>
+            <a:r>
+              <a:rPr sz="1200" b="1">
+                <a:solidFill>
+                  <a:srgbClr val="1D1D1F"/>
+                </a:solidFill>
+                <a:latin typeface="Calibri"/>
+              </a:rPr>
+              <a:t>Lucky Charm</a:t>
+            </a:r>
+          </a:p>
+        </p:txBody>
+      </p:sp>
+      <p:sp>
+        <p:nvSpPr>
+          <p:cNvPr id="12" name="Rounded Rectangle 11"/>
+          <p:cNvSpPr/>
+          <p:nvPr/>
+        </p:nvSpPr>
+        <p:spPr>
+          <a:xfrm>
+            <a:off x="6895947" y="5806440"/>
+            <a:ext cx="790956" cy="384048"/>
+          </a:xfrm>
+          <a:prstGeom prst="roundRect">
+            <a:avLst/>
+          </a:prstGeom>
+          <a:solidFill>
+            <a:srgbClr val="E8E8ED"/>
+          </a:solidFill>
+          <a:ln>
+            <a:noFill/>
+          </a:ln>
+        </p:spPr>
+        <p:style>
+          <a:lnRef idx="1">
+            <a:schemeClr val="accent1"/>
+          </a:lnRef>
+          <a:fillRef idx="3">
+            <a:schemeClr val="accent1"/>
+          </a:fillRef>
+          <a:effectRef idx="2">
+            <a:schemeClr val="accent1"/>
+          </a:effectRef>
+          <a:fontRef idx="minor">
+            <a:schemeClr val="lt1"/>
+          </a:fontRef>
+        </p:style>
+        <p:txBody>
+          <a:bodyPr rtlCol="0" anchor="ctr"/>
+          <a:lstStyle/>
+          <a:p>
+            <a:pPr algn="ctr"/>
+          </a:p>
+        </p:txBody>
+      </p:sp>
+      <p:sp>
+        <p:nvSpPr>
+          <p:cNvPr id="13" name="TextBox 12"/>
+          <p:cNvSpPr txBox="1"/>
+          <p:nvPr/>
+        </p:nvSpPr>
+        <p:spPr>
+          <a:xfrm>
+            <a:off x="6895947" y="5843016"/>
+            <a:ext cx="790956" cy="329184"/>
+          </a:xfrm>
+          <a:prstGeom prst="rect">
+            <a:avLst/>
+          </a:prstGeom>
+          <a:noFill/>
+        </p:spPr>
+        <p:txBody>
+          <a:bodyPr wrap="square">
+            <a:spAutoFit/>
+          </a:bodyPr>
+          <a:lstStyle/>
+          <a:p>
+            <a:pPr algn="ctr"/>
+            <a:r>
+              <a:rPr sz="1200" b="1">
+                <a:solidFill>
+                  <a:srgbClr val="1D1D1F"/>
+                </a:solidFill>
+                <a:latin typeface="Calibri"/>
+              </a:rPr>
+              <a:t>Carrd</a:t>
             </a:r>
           </a:p>
         </p:txBody>
@@ -9045,7 +10107,7 @@
         </p:nvSpPr>
         <p:spPr>
           <a:xfrm>
-            <a:off x="640080" y="1051560"/>
+            <a:off x="640080" y="502920"/>
             <a:ext cx="10881360" cy="1737360"/>
           </a:xfrm>
           <a:prstGeom prst="rect">
@@ -9061,13 +10123,13 @@
           <a:p>
             <a:pPr algn="ctr"/>
             <a:r>
-              <a:rPr sz="3600" b="1">
+              <a:rPr sz="3200" b="1">
                 <a:solidFill>
                   <a:srgbClr val="1D1D1F"/>
                 </a:solidFill>
                 <a:latin typeface="Calibri"/>
               </a:rPr>
-              <a:t>Start with the product.</a:t>
+              <a:t>You don't have to invent it.</a:t>
             </a:r>
           </a:p>
         </p:txBody>
@@ -9080,7 +10142,7 @@
         </p:nvSpPr>
         <p:spPr>
           <a:xfrm>
-            <a:off x="640080" y="2834639"/>
+            <a:off x="640080" y="2286000"/>
             <a:ext cx="10881360" cy="777240"/>
           </a:xfrm>
           <a:prstGeom prst="rect">
@@ -9102,218 +10164,35 @@
                 </a:solidFill>
                 <a:latin typeface="Calibri"/>
               </a:rPr>
-              <a:t>A game, a charm, or a tiny app.</a:t>
-            </a:r>
-          </a:p>
-        </p:txBody>
-      </p:sp>
-      <p:sp>
-        <p:nvSpPr>
-          <p:cNvPr id="5" name="Rounded Rectangle 4"/>
-          <p:cNvSpPr/>
-          <p:nvPr/>
-        </p:nvSpPr>
-        <p:spPr>
-          <a:xfrm>
-            <a:off x="5623560" y="3703320"/>
-            <a:ext cx="960120" cy="1417320"/>
-          </a:xfrm>
-          <a:prstGeom prst="roundRect">
-            <a:avLst/>
-          </a:prstGeom>
-          <a:noFill/>
-          <a:ln w="27940">
-            <a:solidFill>
-              <a:srgbClr val="7C5CFF"/>
-            </a:solidFill>
-          </a:ln>
-        </p:spPr>
-        <p:style>
-          <a:lnRef idx="1">
-            <a:schemeClr val="accent1"/>
-          </a:lnRef>
-          <a:fillRef idx="3">
-            <a:schemeClr val="accent1"/>
-          </a:fillRef>
-          <a:effectRef idx="2">
-            <a:schemeClr val="accent1"/>
-          </a:effectRef>
-          <a:fontRef idx="minor">
-            <a:schemeClr val="lt1"/>
-          </a:fontRef>
-        </p:style>
-        <p:txBody>
-          <a:bodyPr rtlCol="0" anchor="ctr"/>
-          <a:lstStyle/>
-          <a:p>
-            <a:pPr algn="ctr"/>
-          </a:p>
-        </p:txBody>
-      </p:sp>
-      <p:sp>
-        <p:nvSpPr>
-          <p:cNvPr id="6" name="Rounded Rectangle 5"/>
-          <p:cNvSpPr/>
-          <p:nvPr/>
-        </p:nvSpPr>
-        <p:spPr>
-          <a:xfrm>
-            <a:off x="5779008" y="3886200"/>
-            <a:ext cx="649224" cy="868680"/>
-          </a:xfrm>
-          <a:prstGeom prst="roundRect">
-            <a:avLst/>
-          </a:prstGeom>
-          <a:noFill/>
-          <a:ln w="22860">
-            <a:solidFill>
-              <a:srgbClr val="1EC8E6"/>
-            </a:solidFill>
-          </a:ln>
-        </p:spPr>
-        <p:style>
-          <a:lnRef idx="1">
-            <a:schemeClr val="accent1"/>
-          </a:lnRef>
-          <a:fillRef idx="3">
-            <a:schemeClr val="accent1"/>
-          </a:fillRef>
-          <a:effectRef idx="2">
-            <a:schemeClr val="accent1"/>
-          </a:effectRef>
-          <a:fontRef idx="minor">
-            <a:schemeClr val="lt1"/>
-          </a:fontRef>
-        </p:style>
-        <p:txBody>
-          <a:bodyPr rtlCol="0" anchor="ctr"/>
-          <a:lstStyle/>
-          <a:p>
-            <a:pPr algn="ctr"/>
-          </a:p>
-        </p:txBody>
-      </p:sp>
-      <p:sp>
-        <p:nvSpPr>
-          <p:cNvPr id="7" name="Oval 6"/>
-          <p:cNvSpPr/>
-          <p:nvPr/>
-        </p:nvSpPr>
-        <p:spPr>
-          <a:xfrm>
-            <a:off x="6016752" y="4828032"/>
-            <a:ext cx="164592" cy="164592"/>
-          </a:xfrm>
-          <a:prstGeom prst="ellipse">
-            <a:avLst/>
-          </a:prstGeom>
-          <a:solidFill>
-            <a:srgbClr val="7C5CFF"/>
-          </a:solidFill>
-          <a:ln>
-            <a:noFill/>
-          </a:ln>
-        </p:spPr>
-        <p:style>
-          <a:lnRef idx="1">
-            <a:schemeClr val="accent1"/>
-          </a:lnRef>
-          <a:fillRef idx="3">
-            <a:schemeClr val="accent1"/>
-          </a:fillRef>
-          <a:effectRef idx="2">
-            <a:schemeClr val="accent1"/>
-          </a:effectRef>
-          <a:fontRef idx="minor">
-            <a:schemeClr val="lt1"/>
-          </a:fontRef>
-        </p:style>
-        <p:txBody>
-          <a:bodyPr rtlCol="0" anchor="ctr"/>
-          <a:lstStyle/>
-          <a:p>
-            <a:pPr algn="ctr"/>
-          </a:p>
-        </p:txBody>
-      </p:sp>
-      <p:sp>
-        <p:nvSpPr>
-          <p:cNvPr id="8" name="Oval 7"/>
-          <p:cNvSpPr/>
-          <p:nvPr/>
-        </p:nvSpPr>
-        <p:spPr>
-          <a:xfrm>
-            <a:off x="4709160" y="4160520"/>
-            <a:ext cx="502920" cy="502920"/>
-          </a:xfrm>
-          <a:prstGeom prst="ellipse">
-            <a:avLst/>
-          </a:prstGeom>
-          <a:noFill/>
-          <a:ln w="25400">
-            <a:solidFill>
-              <a:srgbClr val="7C5CFF"/>
-            </a:solidFill>
-          </a:ln>
-        </p:spPr>
-        <p:style>
-          <a:lnRef idx="1">
-            <a:schemeClr val="accent1"/>
-          </a:lnRef>
-          <a:fillRef idx="3">
-            <a:schemeClr val="accent1"/>
-          </a:fillRef>
-          <a:effectRef idx="2">
-            <a:schemeClr val="accent1"/>
-          </a:effectRef>
-          <a:fontRef idx="minor">
-            <a:schemeClr val="lt1"/>
-          </a:fontRef>
-        </p:style>
-        <p:txBody>
-          <a:bodyPr rtlCol="0" anchor="ctr"/>
-          <a:lstStyle/>
-          <a:p>
-            <a:pPr algn="ctr"/>
-          </a:p>
-        </p:txBody>
-      </p:sp>
-      <p:cxnSp>
-        <p:nvCxnSpPr>
-          <p:cNvPr id="9" name="Connector 8"/>
-          <p:cNvCxnSpPr/>
-          <p:nvPr/>
-        </p:nvCxnSpPr>
-        <p:spPr>
-          <a:xfrm>
-            <a:off x="4956048" y="3767328"/>
-            <a:ext cx="0" cy="393192"/>
-          </a:xfrm>
-          <a:prstGeom prst="line">
-            <a:avLst/>
-          </a:prstGeom>
-          <a:ln w="25400">
-            <a:solidFill>
-              <a:srgbClr val="1EC8E6"/>
-            </a:solidFill>
-          </a:ln>
-        </p:spPr>
-        <p:style>
-          <a:lnRef idx="2">
-            <a:schemeClr val="accent1"/>
-          </a:lnRef>
-          <a:fillRef idx="0">
-            <a:schemeClr val="accent1"/>
-          </a:fillRef>
-          <a:effectRef idx="1">
-            <a:schemeClr val="accent1"/>
-          </a:effectRef>
-          <a:fontRef idx="minor">
-            <a:schemeClr val="tx1"/>
-          </a:fontRef>
-        </p:style>
-      </p:cxnSp>
+              <a:t>A better version is enough.</a:t>
+            </a:r>
+          </a:p>
+        </p:txBody>
+      </p:sp>
+      <p:pic>
+        <p:nvPicPr>
+          <p:cNvPr id="5" name="Picture 4" descr="shot-dunsocial.jpg"/>
+          <p:cNvPicPr>
+            <a:picLocks noChangeAspect="1"/>
+          </p:cNvPicPr>
+          <p:nvPr/>
+        </p:nvPicPr>
+        <p:blipFill>
+          <a:blip r:embed="rId2"/>
+          <a:stretch>
+            <a:fillRect/>
+          </a:stretch>
+        </p:blipFill>
+        <p:spPr>
+          <a:xfrm>
+            <a:off x="3626967" y="3063240"/>
+            <a:ext cx="4937760" cy="2148840"/>
+          </a:xfrm>
+          <a:prstGeom prst="rect">
+            <a:avLst/>
+          </a:prstGeom>
+        </p:spPr>
+      </p:pic>
     </p:spTree>
   </p:cSld>
   <p:clrMapOvr>
@@ -9383,7 +10262,7 @@
         </p:nvSpPr>
         <p:spPr>
           <a:xfrm>
-            <a:off x="640080" y="1051560"/>
+            <a:off x="640080" y="411480"/>
             <a:ext cx="10881360" cy="1737360"/>
           </a:xfrm>
           <a:prstGeom prst="rect">
@@ -9399,13 +10278,13 @@
           <a:p>
             <a:pPr algn="ctr"/>
             <a:r>
-              <a:rPr sz="3600" b="1">
+              <a:rPr sz="3200" b="1">
                 <a:solidFill>
                   <a:srgbClr val="1D1D1F"/>
                 </a:solidFill>
                 <a:latin typeface="Calibri"/>
               </a:rPr>
-              <a:t>Then take payment.</a:t>
+              <a:t>One job. People know these.</a:t>
             </a:r>
           </a:p>
         </p:txBody>
@@ -9418,7 +10297,7 @@
         </p:nvSpPr>
         <p:spPr>
           <a:xfrm>
-            <a:off x="640080" y="2834639"/>
+            <a:off x="640080" y="2194560"/>
             <a:ext cx="10881360" cy="777240"/>
           </a:xfrm>
           <a:prstGeom prst="rect">
@@ -9440,334 +10319,83 @@
                 </a:solidFill>
                 <a:latin typeface="Calibri"/>
               </a:rPr>
-              <a:t>One price. One checkout.</a:t>
-            </a:r>
-          </a:p>
-        </p:txBody>
-      </p:sp>
-      <p:sp>
-        <p:nvSpPr>
-          <p:cNvPr id="5" name="Rounded Rectangle 4"/>
-          <p:cNvSpPr/>
-          <p:nvPr/>
-        </p:nvSpPr>
-        <p:spPr>
-          <a:xfrm>
-            <a:off x="4617720" y="3794760"/>
-            <a:ext cx="2926080" cy="1234440"/>
-          </a:xfrm>
-          <a:prstGeom prst="roundRect">
-            <a:avLst/>
-          </a:prstGeom>
-          <a:noFill/>
-          <a:ln w="27940">
-            <a:solidFill>
-              <a:srgbClr val="7C5CFF"/>
-            </a:solidFill>
-          </a:ln>
-        </p:spPr>
-        <p:style>
-          <a:lnRef idx="1">
-            <a:schemeClr val="accent1"/>
-          </a:lnRef>
-          <a:fillRef idx="3">
-            <a:schemeClr val="accent1"/>
-          </a:fillRef>
-          <a:effectRef idx="2">
-            <a:schemeClr val="accent1"/>
-          </a:effectRef>
-          <a:fontRef idx="minor">
-            <a:schemeClr val="lt1"/>
-          </a:fontRef>
-        </p:style>
-        <p:txBody>
-          <a:bodyPr rtlCol="0" anchor="ctr"/>
-          <a:lstStyle/>
-          <a:p>
-            <a:pPr algn="ctr"/>
-          </a:p>
-        </p:txBody>
-      </p:sp>
-      <p:sp>
-        <p:nvSpPr>
-          <p:cNvPr id="6" name="Rounded Rectangle 5"/>
-          <p:cNvSpPr/>
-          <p:nvPr/>
-        </p:nvSpPr>
-        <p:spPr>
-          <a:xfrm>
-            <a:off x="4617720" y="3794760"/>
-            <a:ext cx="2926080" cy="292608"/>
-          </a:xfrm>
-          <a:prstGeom prst="roundRect">
-            <a:avLst/>
-          </a:prstGeom>
-          <a:solidFill>
-            <a:srgbClr val="1EC8E6">
-              <a:lumMod val="45000"/>
-              <a:lumOff val="55000"/>
-            </a:srgbClr>
-          </a:solidFill>
-          <a:ln>
-            <a:noFill/>
-          </a:ln>
-        </p:spPr>
-        <p:style>
-          <a:lnRef idx="1">
-            <a:schemeClr val="accent1"/>
-          </a:lnRef>
-          <a:fillRef idx="3">
-            <a:schemeClr val="accent1"/>
-          </a:fillRef>
-          <a:effectRef idx="2">
-            <a:schemeClr val="accent1"/>
-          </a:effectRef>
-          <a:fontRef idx="minor">
-            <a:schemeClr val="lt1"/>
-          </a:fontRef>
-        </p:style>
-        <p:txBody>
-          <a:bodyPr rtlCol="0" anchor="ctr"/>
-          <a:lstStyle/>
-          <a:p>
-            <a:pPr algn="ctr"/>
-          </a:p>
-        </p:txBody>
-      </p:sp>
-      <p:cxnSp>
-        <p:nvCxnSpPr>
-          <p:cNvPr id="7" name="Connector 6"/>
-          <p:cNvCxnSpPr/>
-          <p:nvPr/>
-        </p:nvCxnSpPr>
-        <p:spPr>
-          <a:xfrm>
-            <a:off x="4937760" y="4617720"/>
-            <a:ext cx="868680" cy="0"/>
-          </a:xfrm>
-          <a:prstGeom prst="line">
-            <a:avLst/>
-          </a:prstGeom>
-          <a:ln w="27940">
-            <a:solidFill>
-              <a:srgbClr val="1EC8E6"/>
-            </a:solidFill>
-          </a:ln>
-        </p:spPr>
-        <p:style>
-          <a:lnRef idx="2">
-            <a:schemeClr val="accent1"/>
-          </a:lnRef>
-          <a:fillRef idx="0">
-            <a:schemeClr val="accent1"/>
-          </a:fillRef>
-          <a:effectRef idx="1">
-            <a:schemeClr val="accent1"/>
-          </a:effectRef>
-          <a:fontRef idx="minor">
-            <a:schemeClr val="tx1"/>
-          </a:fontRef>
-        </p:style>
-      </p:cxnSp>
-      <p:sp>
-        <p:nvSpPr>
-          <p:cNvPr id="8" name="Oval 7"/>
-          <p:cNvSpPr/>
-          <p:nvPr/>
-        </p:nvSpPr>
-        <p:spPr>
-          <a:xfrm>
-            <a:off x="6903720" y="4315968"/>
-            <a:ext cx="384048" cy="384048"/>
-          </a:xfrm>
-          <a:prstGeom prst="ellipse">
-            <a:avLst/>
-          </a:prstGeom>
-          <a:noFill/>
-          <a:ln w="25400">
-            <a:solidFill>
-              <a:srgbClr val="7C5CFF"/>
-            </a:solidFill>
-          </a:ln>
-        </p:spPr>
-        <p:style>
-          <a:lnRef idx="1">
-            <a:schemeClr val="accent1"/>
-          </a:lnRef>
-          <a:fillRef idx="3">
-            <a:schemeClr val="accent1"/>
-          </a:fillRef>
-          <a:effectRef idx="2">
-            <a:schemeClr val="accent1"/>
-          </a:effectRef>
-          <a:fontRef idx="minor">
-            <a:schemeClr val="lt1"/>
-          </a:fontRef>
-        </p:style>
-        <p:txBody>
-          <a:bodyPr rtlCol="0" anchor="ctr"/>
-          <a:lstStyle/>
-          <a:p>
-            <a:pPr algn="ctr"/>
-          </a:p>
-        </p:txBody>
-      </p:sp>
-      <p:sp>
-        <p:nvSpPr>
-          <p:cNvPr id="9" name="Rounded Rectangle 8"/>
-          <p:cNvSpPr/>
-          <p:nvPr/>
-        </p:nvSpPr>
-        <p:spPr>
-          <a:xfrm>
-            <a:off x="4838547" y="5806440"/>
-            <a:ext cx="1078992" cy="384048"/>
-          </a:xfrm>
-          <a:prstGeom prst="roundRect">
-            <a:avLst/>
-          </a:prstGeom>
-          <a:solidFill>
-            <a:srgbClr val="E8E8ED"/>
-          </a:solidFill>
-          <a:ln>
-            <a:noFill/>
-          </a:ln>
-        </p:spPr>
-        <p:style>
-          <a:lnRef idx="1">
-            <a:schemeClr val="accent1"/>
-          </a:lnRef>
-          <a:fillRef idx="3">
-            <a:schemeClr val="accent1"/>
-          </a:fillRef>
-          <a:effectRef idx="2">
-            <a:schemeClr val="accent1"/>
-          </a:effectRef>
-          <a:fontRef idx="minor">
-            <a:schemeClr val="lt1"/>
-          </a:fontRef>
-        </p:style>
-        <p:txBody>
-          <a:bodyPr rtlCol="0" anchor="ctr"/>
-          <a:lstStyle/>
-          <a:p>
-            <a:pPr algn="ctr"/>
-          </a:p>
-        </p:txBody>
-      </p:sp>
-      <p:sp>
-        <p:nvSpPr>
-          <p:cNvPr id="10" name="TextBox 9"/>
-          <p:cNvSpPr txBox="1"/>
-          <p:nvPr/>
-        </p:nvSpPr>
-        <p:spPr>
-          <a:xfrm>
-            <a:off x="4838547" y="5843016"/>
-            <a:ext cx="1078992" cy="329184"/>
+              <a:t>A launcher. An editor. A store.</a:t>
+            </a:r>
+          </a:p>
+        </p:txBody>
+      </p:sp>
+      <p:pic>
+        <p:nvPicPr>
+          <p:cNvPr id="5" name="Picture 4" descr="shot-raycast.jpg"/>
+          <p:cNvPicPr>
+            <a:picLocks noChangeAspect="1"/>
+          </p:cNvPicPr>
+          <p:nvPr/>
+        </p:nvPicPr>
+        <p:blipFill>
+          <a:blip r:embed="rId2"/>
+          <a:stretch>
+            <a:fillRect/>
+          </a:stretch>
+        </p:blipFill>
+        <p:spPr>
+          <a:xfrm>
+            <a:off x="1062075" y="3154680"/>
+            <a:ext cx="3246120" cy="1783080"/>
           </a:xfrm>
           <a:prstGeom prst="rect">
             <a:avLst/>
           </a:prstGeom>
-          <a:noFill/>
-        </p:spPr>
-        <p:txBody>
-          <a:bodyPr wrap="square">
-            <a:spAutoFit/>
-          </a:bodyPr>
-          <a:lstStyle/>
-          <a:p>
-            <a:pPr algn="ctr"/>
-            <a:r>
-              <a:rPr sz="1200" b="1">
-                <a:solidFill>
-                  <a:srgbClr val="1D1D1F"/>
-                </a:solidFill>
-                <a:latin typeface="Calibri"/>
-              </a:rPr>
-              <a:t>₹99–₹499</a:t>
-            </a:r>
-          </a:p>
-        </p:txBody>
-      </p:sp>
-      <p:sp>
-        <p:nvSpPr>
-          <p:cNvPr id="11" name="Rounded Rectangle 10"/>
-          <p:cNvSpPr/>
-          <p:nvPr/>
-        </p:nvSpPr>
-        <p:spPr>
-          <a:xfrm>
-            <a:off x="6082131" y="5806440"/>
-            <a:ext cx="1271016" cy="384048"/>
-          </a:xfrm>
-          <a:prstGeom prst="roundRect">
-            <a:avLst/>
-          </a:prstGeom>
-          <a:solidFill>
-            <a:srgbClr val="E8E8ED"/>
-          </a:solidFill>
-          <a:ln>
-            <a:noFill/>
-          </a:ln>
-        </p:spPr>
-        <p:style>
-          <a:lnRef idx="1">
-            <a:schemeClr val="accent1"/>
-          </a:lnRef>
-          <a:fillRef idx="3">
-            <a:schemeClr val="accent1"/>
-          </a:fillRef>
-          <a:effectRef idx="2">
-            <a:schemeClr val="accent1"/>
-          </a:effectRef>
-          <a:fontRef idx="minor">
-            <a:schemeClr val="lt1"/>
-          </a:fontRef>
-        </p:style>
-        <p:txBody>
-          <a:bodyPr rtlCol="0" anchor="ctr"/>
-          <a:lstStyle/>
-          <a:p>
-            <a:pPr algn="ctr"/>
-          </a:p>
-        </p:txBody>
-      </p:sp>
-      <p:sp>
-        <p:nvSpPr>
-          <p:cNvPr id="12" name="TextBox 11"/>
-          <p:cNvSpPr txBox="1"/>
-          <p:nvPr/>
-        </p:nvSpPr>
-        <p:spPr>
-          <a:xfrm>
-            <a:off x="6082131" y="5843016"/>
-            <a:ext cx="1271016" cy="329184"/>
+        </p:spPr>
+      </p:pic>
+      <p:pic>
+        <p:nvPicPr>
+          <p:cNvPr id="6" name="Picture 5" descr="shot-photopea.jpg"/>
+          <p:cNvPicPr>
+            <a:picLocks noChangeAspect="1"/>
+          </p:cNvPicPr>
+          <p:nvPr/>
+        </p:nvPicPr>
+        <p:blipFill>
+          <a:blip r:embed="rId3"/>
+          <a:stretch>
+            <a:fillRect/>
+          </a:stretch>
+        </p:blipFill>
+        <p:spPr>
+          <a:xfrm>
+            <a:off x="4472787" y="3154680"/>
+            <a:ext cx="3246120" cy="1783080"/>
           </a:xfrm>
           <a:prstGeom prst="rect">
             <a:avLst/>
           </a:prstGeom>
-          <a:noFill/>
-        </p:spPr>
-        <p:txBody>
-          <a:bodyPr wrap="square">
-            <a:spAutoFit/>
-          </a:bodyPr>
-          <a:lstStyle/>
-          <a:p>
-            <a:pPr algn="ctr"/>
-            <a:r>
-              <a:rPr sz="1200" b="1">
-                <a:solidFill>
-                  <a:srgbClr val="1D1D1F"/>
-                </a:solidFill>
-                <a:latin typeface="Calibri"/>
-              </a:rPr>
-              <a:t>₹199/month</a:t>
-            </a:r>
-          </a:p>
-        </p:txBody>
-      </p:sp>
+        </p:spPr>
+      </p:pic>
+      <p:pic>
+        <p:nvPicPr>
+          <p:cNvPr id="7" name="Picture 6" descr="shot-gumroad.jpg"/>
+          <p:cNvPicPr>
+            <a:picLocks noChangeAspect="1"/>
+          </p:cNvPicPr>
+          <p:nvPr/>
+        </p:nvPicPr>
+        <p:blipFill>
+          <a:blip r:embed="rId4"/>
+          <a:stretch>
+            <a:fillRect/>
+          </a:stretch>
+        </p:blipFill>
+        <p:spPr>
+          <a:xfrm>
+            <a:off x="7883499" y="3154680"/>
+            <a:ext cx="3246120" cy="1783080"/>
+          </a:xfrm>
+          <a:prstGeom prst="rect">
+            <a:avLst/>
+          </a:prstGeom>
+        </p:spPr>
+      </p:pic>
     </p:spTree>
   </p:cSld>
   <p:clrMapOvr>
@@ -9859,7 +10487,7 @@
                 </a:solidFill>
                 <a:latin typeface="Calibri"/>
               </a:rPr>
-              <a:t>Then watch what they do.</a:t>
+              <a:t>Start with the product.</a:t>
             </a:r>
           </a:p>
         </p:txBody>
@@ -9894,28 +10522,200 @@
                 </a:solidFill>
                 <a:latin typeface="Calibri"/>
               </a:rPr>
-              <a:t>One analytics tool is enough.</a:t>
-            </a:r>
-          </a:p>
-        </p:txBody>
-      </p:sp>
-      <p:cxnSp>
-        <p:nvCxnSpPr>
-          <p:cNvPr id="5" name="Connector 4"/>
-          <p:cNvCxnSpPr/>
-          <p:nvPr/>
-        </p:nvCxnSpPr>
-        <p:spPr>
-          <a:xfrm>
-            <a:off x="4709160" y="3794760"/>
-            <a:ext cx="0" cy="1280160"/>
-          </a:xfrm>
-          <a:prstGeom prst="line">
-            <a:avLst/>
-          </a:prstGeom>
+              <a:t>A game, a charm, or a tiny app.</a:t>
+            </a:r>
+          </a:p>
+        </p:txBody>
+      </p:sp>
+      <p:sp>
+        <p:nvSpPr>
+          <p:cNvPr id="5" name="Rounded Rectangle 4"/>
+          <p:cNvSpPr/>
+          <p:nvPr/>
+        </p:nvSpPr>
+        <p:spPr>
+          <a:xfrm>
+            <a:off x="5623560" y="3703320"/>
+            <a:ext cx="960120" cy="1417320"/>
+          </a:xfrm>
+          <a:prstGeom prst="roundRect">
+            <a:avLst/>
+          </a:prstGeom>
+          <a:noFill/>
+          <a:ln w="27940">
+            <a:solidFill>
+              <a:srgbClr val="7C5CFF"/>
+            </a:solidFill>
+          </a:ln>
+        </p:spPr>
+        <p:style>
+          <a:lnRef idx="1">
+            <a:schemeClr val="accent1"/>
+          </a:lnRef>
+          <a:fillRef idx="3">
+            <a:schemeClr val="accent1"/>
+          </a:fillRef>
+          <a:effectRef idx="2">
+            <a:schemeClr val="accent1"/>
+          </a:effectRef>
+          <a:fontRef idx="minor">
+            <a:schemeClr val="lt1"/>
+          </a:fontRef>
+        </p:style>
+        <p:txBody>
+          <a:bodyPr rtlCol="0" anchor="ctr"/>
+          <a:lstStyle/>
+          <a:p>
+            <a:pPr algn="ctr"/>
+          </a:p>
+        </p:txBody>
+      </p:sp>
+      <p:sp>
+        <p:nvSpPr>
+          <p:cNvPr id="6" name="Rounded Rectangle 5"/>
+          <p:cNvSpPr/>
+          <p:nvPr/>
+        </p:nvSpPr>
+        <p:spPr>
+          <a:xfrm>
+            <a:off x="5779008" y="3886200"/>
+            <a:ext cx="649224" cy="868680"/>
+          </a:xfrm>
+          <a:prstGeom prst="roundRect">
+            <a:avLst/>
+          </a:prstGeom>
+          <a:noFill/>
+          <a:ln w="22860">
+            <a:solidFill>
+              <a:srgbClr val="1EC8E6"/>
+            </a:solidFill>
+          </a:ln>
+        </p:spPr>
+        <p:style>
+          <a:lnRef idx="1">
+            <a:schemeClr val="accent1"/>
+          </a:lnRef>
+          <a:fillRef idx="3">
+            <a:schemeClr val="accent1"/>
+          </a:fillRef>
+          <a:effectRef idx="2">
+            <a:schemeClr val="accent1"/>
+          </a:effectRef>
+          <a:fontRef idx="minor">
+            <a:schemeClr val="lt1"/>
+          </a:fontRef>
+        </p:style>
+        <p:txBody>
+          <a:bodyPr rtlCol="0" anchor="ctr"/>
+          <a:lstStyle/>
+          <a:p>
+            <a:pPr algn="ctr"/>
+          </a:p>
+        </p:txBody>
+      </p:sp>
+      <p:sp>
+        <p:nvSpPr>
+          <p:cNvPr id="7" name="Oval 6"/>
+          <p:cNvSpPr/>
+          <p:nvPr/>
+        </p:nvSpPr>
+        <p:spPr>
+          <a:xfrm>
+            <a:off x="6016752" y="4828032"/>
+            <a:ext cx="164592" cy="164592"/>
+          </a:xfrm>
+          <a:prstGeom prst="ellipse">
+            <a:avLst/>
+          </a:prstGeom>
+          <a:solidFill>
+            <a:srgbClr val="7C5CFF"/>
+          </a:solidFill>
+          <a:ln>
+            <a:noFill/>
+          </a:ln>
+        </p:spPr>
+        <p:style>
+          <a:lnRef idx="1">
+            <a:schemeClr val="accent1"/>
+          </a:lnRef>
+          <a:fillRef idx="3">
+            <a:schemeClr val="accent1"/>
+          </a:fillRef>
+          <a:effectRef idx="2">
+            <a:schemeClr val="accent1"/>
+          </a:effectRef>
+          <a:fontRef idx="minor">
+            <a:schemeClr val="lt1"/>
+          </a:fontRef>
+        </p:style>
+        <p:txBody>
+          <a:bodyPr rtlCol="0" anchor="ctr"/>
+          <a:lstStyle/>
+          <a:p>
+            <a:pPr algn="ctr"/>
+          </a:p>
+        </p:txBody>
+      </p:sp>
+      <p:sp>
+        <p:nvSpPr>
+          <p:cNvPr id="8" name="Oval 7"/>
+          <p:cNvSpPr/>
+          <p:nvPr/>
+        </p:nvSpPr>
+        <p:spPr>
+          <a:xfrm>
+            <a:off x="4709160" y="4160520"/>
+            <a:ext cx="502920" cy="502920"/>
+          </a:xfrm>
+          <a:prstGeom prst="ellipse">
+            <a:avLst/>
+          </a:prstGeom>
+          <a:noFill/>
           <a:ln w="25400">
             <a:solidFill>
               <a:srgbClr val="7C5CFF"/>
+            </a:solidFill>
+          </a:ln>
+        </p:spPr>
+        <p:style>
+          <a:lnRef idx="1">
+            <a:schemeClr val="accent1"/>
+          </a:lnRef>
+          <a:fillRef idx="3">
+            <a:schemeClr val="accent1"/>
+          </a:fillRef>
+          <a:effectRef idx="2">
+            <a:schemeClr val="accent1"/>
+          </a:effectRef>
+          <a:fontRef idx="minor">
+            <a:schemeClr val="lt1"/>
+          </a:fontRef>
+        </p:style>
+        <p:txBody>
+          <a:bodyPr rtlCol="0" anchor="ctr"/>
+          <a:lstStyle/>
+          <a:p>
+            <a:pPr algn="ctr"/>
+          </a:p>
+        </p:txBody>
+      </p:sp>
+      <p:cxnSp>
+        <p:nvCxnSpPr>
+          <p:cNvPr id="9" name="Connector 8"/>
+          <p:cNvCxnSpPr/>
+          <p:nvPr/>
+        </p:nvCxnSpPr>
+        <p:spPr>
+          <a:xfrm>
+            <a:off x="4956048" y="3767328"/>
+            <a:ext cx="0" cy="393192"/>
+          </a:xfrm>
+          <a:prstGeom prst="line">
+            <a:avLst/>
+          </a:prstGeom>
+          <a:ln w="25400">
+            <a:solidFill>
+              <a:srgbClr val="1EC8E6"/>
             </a:solidFill>
           </a:ln>
         </p:spPr>
@@ -9934,303 +10734,6 @@
           </a:fontRef>
         </p:style>
       </p:cxnSp>
-      <p:cxnSp>
-        <p:nvCxnSpPr>
-          <p:cNvPr id="6" name="Connector 5"/>
-          <p:cNvCxnSpPr/>
-          <p:nvPr/>
-        </p:nvCxnSpPr>
-        <p:spPr>
-          <a:xfrm>
-            <a:off x="4709160" y="5074920"/>
-            <a:ext cx="2788919" cy="0"/>
-          </a:xfrm>
-          <a:prstGeom prst="line">
-            <a:avLst/>
-          </a:prstGeom>
-          <a:ln w="25400">
-            <a:solidFill>
-              <a:srgbClr val="7C5CFF"/>
-            </a:solidFill>
-          </a:ln>
-        </p:spPr>
-        <p:style>
-          <a:lnRef idx="2">
-            <a:schemeClr val="accent1"/>
-          </a:lnRef>
-          <a:fillRef idx="0">
-            <a:schemeClr val="accent1"/>
-          </a:fillRef>
-          <a:effectRef idx="1">
-            <a:schemeClr val="accent1"/>
-          </a:effectRef>
-          <a:fontRef idx="minor">
-            <a:schemeClr val="tx1"/>
-          </a:fontRef>
-        </p:style>
-      </p:cxnSp>
-      <p:sp>
-        <p:nvSpPr>
-          <p:cNvPr id="7" name="Rounded Rectangle 6"/>
-          <p:cNvSpPr/>
-          <p:nvPr/>
-        </p:nvSpPr>
-        <p:spPr>
-          <a:xfrm>
-            <a:off x="4937760" y="4617720"/>
-            <a:ext cx="347472" cy="502920"/>
-          </a:xfrm>
-          <a:prstGeom prst="roundRect">
-            <a:avLst/>
-          </a:prstGeom>
-          <a:solidFill>
-            <a:srgbClr val="1EC8E6">
-              <a:lumMod val="65000"/>
-              <a:lumOff val="35000"/>
-            </a:srgbClr>
-          </a:solidFill>
-          <a:ln>
-            <a:noFill/>
-          </a:ln>
-        </p:spPr>
-        <p:style>
-          <a:lnRef idx="1">
-            <a:schemeClr val="accent1"/>
-          </a:lnRef>
-          <a:fillRef idx="3">
-            <a:schemeClr val="accent1"/>
-          </a:fillRef>
-          <a:effectRef idx="2">
-            <a:schemeClr val="accent1"/>
-          </a:effectRef>
-          <a:fontRef idx="minor">
-            <a:schemeClr val="lt1"/>
-          </a:fontRef>
-        </p:style>
-        <p:txBody>
-          <a:bodyPr rtlCol="0" anchor="ctr"/>
-          <a:lstStyle/>
-          <a:p>
-            <a:pPr algn="ctr"/>
-          </a:p>
-        </p:txBody>
-      </p:sp>
-      <p:sp>
-        <p:nvSpPr>
-          <p:cNvPr id="8" name="Rounded Rectangle 7"/>
-          <p:cNvSpPr/>
-          <p:nvPr/>
-        </p:nvSpPr>
-        <p:spPr>
-          <a:xfrm>
-            <a:off x="5623560" y="4297680"/>
-            <a:ext cx="347472" cy="777240"/>
-          </a:xfrm>
-          <a:prstGeom prst="roundRect">
-            <a:avLst/>
-          </a:prstGeom>
-          <a:solidFill>
-            <a:srgbClr val="7C5CFF">
-              <a:lumMod val="65000"/>
-              <a:lumOff val="35000"/>
-            </a:srgbClr>
-          </a:solidFill>
-          <a:ln>
-            <a:noFill/>
-          </a:ln>
-        </p:spPr>
-        <p:style>
-          <a:lnRef idx="1">
-            <a:schemeClr val="accent1"/>
-          </a:lnRef>
-          <a:fillRef idx="3">
-            <a:schemeClr val="accent1"/>
-          </a:fillRef>
-          <a:effectRef idx="2">
-            <a:schemeClr val="accent1"/>
-          </a:effectRef>
-          <a:fontRef idx="minor">
-            <a:schemeClr val="lt1"/>
-          </a:fontRef>
-        </p:style>
-        <p:txBody>
-          <a:bodyPr rtlCol="0" anchor="ctr"/>
-          <a:lstStyle/>
-          <a:p>
-            <a:pPr algn="ctr"/>
-          </a:p>
-        </p:txBody>
-      </p:sp>
-      <p:sp>
-        <p:nvSpPr>
-          <p:cNvPr id="9" name="Rounded Rectangle 8"/>
-          <p:cNvSpPr/>
-          <p:nvPr/>
-        </p:nvSpPr>
-        <p:spPr>
-          <a:xfrm>
-            <a:off x="6309360" y="4480560"/>
-            <a:ext cx="347472" cy="594360"/>
-          </a:xfrm>
-          <a:prstGeom prst="roundRect">
-            <a:avLst/>
-          </a:prstGeom>
-          <a:solidFill>
-            <a:srgbClr val="1EC8E6">
-              <a:lumMod val="65000"/>
-              <a:lumOff val="35000"/>
-            </a:srgbClr>
-          </a:solidFill>
-          <a:ln>
-            <a:noFill/>
-          </a:ln>
-        </p:spPr>
-        <p:style>
-          <a:lnRef idx="1">
-            <a:schemeClr val="accent1"/>
-          </a:lnRef>
-          <a:fillRef idx="3">
-            <a:schemeClr val="accent1"/>
-          </a:fillRef>
-          <a:effectRef idx="2">
-            <a:schemeClr val="accent1"/>
-          </a:effectRef>
-          <a:fontRef idx="minor">
-            <a:schemeClr val="lt1"/>
-          </a:fontRef>
-        </p:style>
-        <p:txBody>
-          <a:bodyPr rtlCol="0" anchor="ctr"/>
-          <a:lstStyle/>
-          <a:p>
-            <a:pPr algn="ctr"/>
-          </a:p>
-        </p:txBody>
-      </p:sp>
-      <p:sp>
-        <p:nvSpPr>
-          <p:cNvPr id="10" name="Rounded Rectangle 9"/>
-          <p:cNvSpPr/>
-          <p:nvPr/>
-        </p:nvSpPr>
-        <p:spPr>
-          <a:xfrm>
-            <a:off x="6995160" y="4023360"/>
-            <a:ext cx="347472" cy="1051560"/>
-          </a:xfrm>
-          <a:prstGeom prst="roundRect">
-            <a:avLst/>
-          </a:prstGeom>
-          <a:solidFill>
-            <a:srgbClr val="7C5CFF">
-              <a:lumMod val="65000"/>
-              <a:lumOff val="35000"/>
-            </a:srgbClr>
-          </a:solidFill>
-          <a:ln>
-            <a:noFill/>
-          </a:ln>
-        </p:spPr>
-        <p:style>
-          <a:lnRef idx="1">
-            <a:schemeClr val="accent1"/>
-          </a:lnRef>
-          <a:fillRef idx="3">
-            <a:schemeClr val="accent1"/>
-          </a:fillRef>
-          <a:effectRef idx="2">
-            <a:schemeClr val="accent1"/>
-          </a:effectRef>
-          <a:fontRef idx="minor">
-            <a:schemeClr val="lt1"/>
-          </a:fontRef>
-        </p:style>
-        <p:txBody>
-          <a:bodyPr rtlCol="0" anchor="ctr"/>
-          <a:lstStyle/>
-          <a:p>
-            <a:pPr algn="ctr"/>
-          </a:p>
-        </p:txBody>
-      </p:sp>
-      <p:sp>
-        <p:nvSpPr>
-          <p:cNvPr id="11" name="Rounded Rectangle 10"/>
-          <p:cNvSpPr/>
-          <p:nvPr/>
-        </p:nvSpPr>
-        <p:spPr>
-          <a:xfrm>
-            <a:off x="5604357" y="5806440"/>
-            <a:ext cx="982980" cy="384048"/>
-          </a:xfrm>
-          <a:prstGeom prst="roundRect">
-            <a:avLst/>
-          </a:prstGeom>
-          <a:solidFill>
-            <a:srgbClr val="E8E8ED"/>
-          </a:solidFill>
-          <a:ln>
-            <a:noFill/>
-          </a:ln>
-        </p:spPr>
-        <p:style>
-          <a:lnRef idx="1">
-            <a:schemeClr val="accent1"/>
-          </a:lnRef>
-          <a:fillRef idx="3">
-            <a:schemeClr val="accent1"/>
-          </a:fillRef>
-          <a:effectRef idx="2">
-            <a:schemeClr val="accent1"/>
-          </a:effectRef>
-          <a:fontRef idx="minor">
-            <a:schemeClr val="lt1"/>
-          </a:fontRef>
-        </p:style>
-        <p:txBody>
-          <a:bodyPr rtlCol="0" anchor="ctr"/>
-          <a:lstStyle/>
-          <a:p>
-            <a:pPr algn="ctr"/>
-          </a:p>
-        </p:txBody>
-      </p:sp>
-      <p:sp>
-        <p:nvSpPr>
-          <p:cNvPr id="12" name="TextBox 11"/>
-          <p:cNvSpPr txBox="1"/>
-          <p:nvPr/>
-        </p:nvSpPr>
-        <p:spPr>
-          <a:xfrm>
-            <a:off x="5604357" y="5843016"/>
-            <a:ext cx="982980" cy="329184"/>
-          </a:xfrm>
-          <a:prstGeom prst="rect">
-            <a:avLst/>
-          </a:prstGeom>
-          <a:noFill/>
-        </p:spPr>
-        <p:txBody>
-          <a:bodyPr wrap="square">
-            <a:spAutoFit/>
-          </a:bodyPr>
-          <a:lstStyle/>
-          <a:p>
-            <a:pPr algn="ctr"/>
-            <a:r>
-              <a:rPr sz="1200" b="1">
-                <a:solidFill>
-                  <a:srgbClr val="1D1D1F"/>
-                </a:solidFill>
-                <a:latin typeface="Calibri"/>
-              </a:rPr>
-              <a:t>PostHog</a:t>
-            </a:r>
-          </a:p>
-        </p:txBody>
-      </p:sp>
     </p:spTree>
   </p:cSld>
   <p:clrMapOvr>

--- a/talks/shipaton-kug-chennai-2026/shipaton-kug-chennai-2026.pptx
+++ b/talks/shipaton-kug-chennai-2026/shipaton-kug-chennai-2026.pptx
@@ -23,6 +23,7 @@
     <p:sldId id="271" r:id="rId22"/>
     <p:sldId id="272" r:id="rId23"/>
     <p:sldId id="273" r:id="rId24"/>
+    <p:sldId id="274" r:id="rId25"/>
   </p:sldIdLst>
   <p:sldSz cx="12191695" cy="6858000" type="screen4x3"/>
   <p:notesSz cx="6858000" cy="9144000"/>
@@ -519,32 +520,17 @@
           <a:lstStyle/>
           <a:p>
             <a:r>
-              <a:t>Tanglish: Build panna theriyum. Pay vaangardhu dhaan kashtam. Adhukku resilience venum.</a:t>
-            </a:r>
-          </a:p>
-          <a:p>
-            <a:r>
-              <a:t>Vibe coding is easy. Getting someone to pay takes resilience.</a:t>
-            </a:r>
-          </a:p>
-          <a:p>
-            <a:r>
-              <a:t>Ask people just out of college to take YC Startup School (free, online). Say “early Startup School lessons.” Do not invent a lesson number.</a:t>
-            </a:r>
-          </a:p>
-          <a:p>
-            <a:r>
-              <a:t>https://www.startupschool.org/</a:t>
-            </a:r>
-          </a:p>
-          <a:p>
-            <a:r>
-              <a:t>https://www.youtube.com/watch?v=BUE-icVYRFU</a:t>
-            </a:r>
-          </a:p>
-          <a:p>
-            <a:r>
-              <a:t>https://www.youtube.com/watch?v=BJjsfNO5JTo</a:t>
+              <a:t>Tanglish: Vanakkam. Indha card-ah vechi vidunga.</a:t>
+            </a:r>
+          </a:p>
+          <a:p>
+            <a:r>
+              <a:t>Leave the card up. The art already names the talk, Shangeeth Sivan, and KUG Chennai. Do not read a second title over it.</a:t>
+            </a:r>
+          </a:p>
+          <a:p>
+            <a:r>
+              <a:t>https://luma.com/mprx0ocg</a:t>
             </a:r>
           </a:p>
         </p:txBody>
@@ -614,17 +600,17 @@
           <a:lstStyle/>
           <a:p>
             <a:r>
-              <a:t>Tanglish: Like count customer illa. Problem solve panna, people trust pannuvaanga.</a:t>
-            </a:r>
-          </a:p>
-          <a:p>
-            <a:r>
-              <a:t>The owner's DunSocial observation, spoken lightly: posts he saw had about 5 or 10 likes. The projected line is the lesson, not the number.</a:t>
-            </a:r>
-          </a:p>
-          <a:p>
-            <a:r>
-              <a:t>https://dunsocial.com/</a:t>
+              <a:t>Tanglish: Support-ku Discord pothum. Periya team venam.</a:t>
+            </a:r>
+          </a:p>
+          <a:p>
+            <a:r>
+              <a:t>Discord, email, or GitHub Discussions. Nobody needs a support org.</a:t>
+            </a:r>
+          </a:p>
+          <a:p>
+            <a:r>
+              <a:t>https://discord.com/</a:t>
             </a:r>
           </a:p>
         </p:txBody>
@@ -694,27 +680,17 @@
           <a:lstStyle/>
           <a:p>
             <a:r>
-              <a:t>Tanglish: Innoru feature kedayadhu. First paying customer dhaan matter. Simple-nu ninaichu GitHub-la vechutaanga.</a:t>
-            </a:r>
-          </a:p>
-          <a:p>
-            <a:r>
-              <a:t>Talk to customers. Show pricing early. Preorders. Paid pilot. Clear refund and delivery policy.</a:t>
-            </a:r>
-          </a:p>
-          <a:p>
-            <a:r>
-              <a:t>Validate demand. Smallest version someone will pay for. Turn the product into a business. Organic growth. An exit is possible later on https://acquire.com/</a:t>
-            </a:r>
-          </a:p>
-          <a:p>
-            <a:r>
-              <a:t>Prices are examples. Razorpay: https://razorpay.com/docs/</a:t>
-            </a:r>
-          </a:p>
-          <a:p>
-            <a:r>
-              <a:t>Stripe where available. Crowdfunding is not guaranteed funding.</a:t>
+              <a:t>Tanglish: Like count customer illa. Problem solve panna, people trust pannuvaanga.</a:t>
+            </a:r>
+          </a:p>
+          <a:p>
+            <a:r>
+              <a:t>The owner's DunSocial observation, spoken lightly: posts he saw had about 5 or 10 likes. The projected line is the lesson, not the number.</a:t>
+            </a:r>
+          </a:p>
+          <a:p>
+            <a:r>
+              <a:t>https://dunsocial.com/</a:t>
             </a:r>
           </a:p>
         </p:txBody>
@@ -784,32 +760,27 @@
           <a:lstStyle/>
           <a:p>
             <a:r>
-              <a:t>Tanglish: Anju per ₹199 kudutha, almost thousand. Gross idhu — tax, fees illa. PMF illa, willingness to pay.</a:t>
-            </a:r>
-          </a:p>
-          <a:p>
-            <a:r>
-              <a:t>7-step path: painful problem → smallest useful solution → landing + pricing → payment method → share → measure → improve from behavior.</a:t>
-            </a:r>
-          </a:p>
-          <a:p>
-            <a:r>
-              <a:t>Loop: Launch → Analytics → Feedback → Improvements → Retention → Revenue.</a:t>
-            </a:r>
-          </a:p>
-          <a:p>
-            <a:r>
-              <a:t>PostHog, Firebase Analytics, Mixpanel, Plausible, Discord, GitHub Discussions, email, X, LinkedIn, Reddit, Product Hunt, YouTube, Instagram, SEO, Sentry, Crashlytics. Nobody needs every tool.</a:t>
-            </a:r>
-          </a:p>
-          <a:p>
-            <a:r>
-              <a:t>Payment is evidence someone will pay. It is not product-market fit.</a:t>
-            </a:r>
-          </a:p>
-          <a:p>
-            <a:r>
-              <a:t>https://razorpay.com/docs/</a:t>
+              <a:t>Tanglish: Innoru feature kedayadhu. First paying customer dhaan matter. Simple-nu ninaichu GitHub-la vechutaanga.</a:t>
+            </a:r>
+          </a:p>
+          <a:p>
+            <a:r>
+              <a:t>Talk to customers. Show pricing early. Preorders. Paid pilot. Clear refund and delivery policy.</a:t>
+            </a:r>
+          </a:p>
+          <a:p>
+            <a:r>
+              <a:t>Validate demand. Smallest version someone will pay for. Turn the product into a business. Organic growth. An exit is possible later on https://acquire.com/</a:t>
+            </a:r>
+          </a:p>
+          <a:p>
+            <a:r>
+              <a:t>Prices are examples. Razorpay: https://razorpay.com/docs/</a:t>
+            </a:r>
+          </a:p>
+          <a:p>
+            <a:r>
+              <a:t>Stripe where available. Crowdfunding is not guaranteed funding.</a:t>
             </a:r>
           </a:p>
         </p:txBody>
@@ -879,22 +850,32 @@
           <a:lstStyle/>
           <a:p>
             <a:r>
-              <a:t>Tanglish: Team venum-na team. Solo-va irundha, solo. Build anything. Ship something.</a:t>
-            </a:r>
-          </a:p>
-          <a:p>
-            <a:r>
-              <a:t>Individuals and teams. New ideas and existing products. Any stack. Any policy-compliant payment provider.</a:t>
-            </a:r>
-          </a:p>
-          <a:p>
-            <a:r>
-              <a:t>RevenueCat is a Luma collaborator, not a requirement. A workable way to charge counts. Big revenue during the event is not required.</a:t>
-            </a:r>
-          </a:p>
-          <a:p>
-            <a:r>
-              <a:t>https://luma.com/mprx0ocg</a:t>
+              <a:t>Tanglish: Anju per ₹199 kudutha, almost thousand. Gross idhu — tax, fees illa. PMF illa, willingness to pay.</a:t>
+            </a:r>
+          </a:p>
+          <a:p>
+            <a:r>
+              <a:t>7-step path: painful problem → smallest useful solution → landing + pricing → payment method → share → measure → improve from behavior.</a:t>
+            </a:r>
+          </a:p>
+          <a:p>
+            <a:r>
+              <a:t>Loop: Launch → Analytics → Feedback → Improvements → Retention → Revenue.</a:t>
+            </a:r>
+          </a:p>
+          <a:p>
+            <a:r>
+              <a:t>PostHog, Firebase Analytics, Mixpanel, Plausible, Discord, GitHub Discussions, email, X, LinkedIn, Reddit, Product Hunt, YouTube, Instagram, SEO, Sentry, Crashlytics. Nobody needs every tool.</a:t>
+            </a:r>
+          </a:p>
+          <a:p>
+            <a:r>
+              <a:t>Payment is evidence someone will pay. It is not product-market fit.</a:t>
+            </a:r>
+          </a:p>
+          <a:p>
+            <a:r>
+              <a:t>https://razorpay.com/docs/</a:t>
             </a:r>
           </a:p>
         </p:txBody>
@@ -964,22 +945,22 @@
           <a:lstStyle/>
           <a:p>
             <a:r>
-              <a:t>Tanglish: Sheet-la fill pannunga. Review Ready-ku maathunga. Organizers dhaan paathu review pannuvaanga.</a:t>
-            </a:r>
-          </a:p>
-          <a:p>
-            <a:r>
-              <a:t>Sheet: https://docs.google.com/spreadsheets/d/1DZ7OSphlY8llxWisVc_FcLGeu9Psj_fvfxR2F7ohxcM/edit?usp=sharing</a:t>
-            </a:r>
-          </a:p>
-          <a:p>
-            <a:r>
-              <a:t>Columns: Product Name, Creator / Team, Product Category, Demo / Product URL, Repository URL, Monetization Model, Payment Integration, Deployment Status, Review Status, Production Ready by Thursday, Notes.</a:t>
-            </a:r>
-          </a:p>
-          <a:p>
-            <a:r>
-              <a:t>Workflow: fill the sheet, update URLs, the participant sets Review Status to Review Ready, organizers review. Review Ready is not approval.</a:t>
+              <a:t>Tanglish: Team venum-na team. Solo-va irundha, solo. Build anything. Ship something.</a:t>
+            </a:r>
+          </a:p>
+          <a:p>
+            <a:r>
+              <a:t>Individuals and teams. New ideas and existing products. Any stack. Any policy-compliant payment provider.</a:t>
+            </a:r>
+          </a:p>
+          <a:p>
+            <a:r>
+              <a:t>RevenueCat is a Luma collaborator, not a requirement. A workable way to charge counts. Big revenue during the event is not required.</a:t>
+            </a:r>
+          </a:p>
+          <a:p>
+            <a:r>
+              <a:t>https://luma.com/mprx0ocg</a:t>
             </a:r>
           </a:p>
         </p:txBody>
@@ -1049,37 +1030,22 @@
           <a:lstStyle/>
           <a:p>
             <a:r>
-              <a:t>Tanglish: Thursday-kku live aaganum. Review Ready-na ‘paathu videoonga.’ Production Ready-na users use panna ready.</a:t>
-            </a:r>
-          </a:p>
-          <a:p>
-            <a:r>
-              <a:t>Say Thursday. Do not print a calendar date.</a:t>
-            </a:r>
-          </a:p>
-          <a:p>
-            <a:r>
-              <a:t>Production Ready by Thursday = deployed and usable. Review Ready = please review.</a:t>
-            </a:r>
-          </a:p>
-          <a:p>
-            <a:r>
-              <a:t>Checklist: production URL; core flow works; usable onboarding; no critical blockers; a clear way to charge; payment flow works when they charge; basic analytics or feedback; enough for organizers to test.</a:t>
-            </a:r>
-          </a:p>
-          <a:p>
-            <a:r>
-              <a:t>Extra DevFest prize eligibility, not an automatic win.</a:t>
-            </a:r>
-          </a:p>
-          <a:p>
-            <a:r>
-              <a:t>https://luma.com/mprx0ocg</a:t>
-            </a:r>
-          </a:p>
-          <a:p>
-            <a:r>
-              <a:t>https://devfest.gdgchennai.in/</a:t>
+              <a:t>Tanglish: Sheet-la fill pannunga. Review Ready-ku maathunga. Organizers dhaan paathu review pannuvaanga.</a:t>
+            </a:r>
+          </a:p>
+          <a:p>
+            <a:r>
+              <a:t>Sheet: https://docs.google.com/spreadsheets/d/1DZ7OSphlY8llxWisVc_FcLGeu9Psj_fvfxR2F7ohxcM/edit?usp=sharing</a:t>
+            </a:r>
+          </a:p>
+          <a:p>
+            <a:r>
+              <a:t>Columns: Product Name, Creator / Team, Product Category, Demo / Product URL, Repository URL, Monetization Model, Payment Integration, Deployment Status, Review Status, Production Ready by Thursday, Notes.</a:t>
+            </a:r>
+          </a:p>
+          <a:p>
+            <a:r>
+              <a:t>Workflow: fill the sheet, update URLs, the participant sets Review Status to Review Ready, organizers review. Review Ready is not approval.</a:t>
             </a:r>
           </a:p>
         </p:txBody>
@@ -1149,37 +1115,32 @@
           <a:lstStyle/>
           <a:p>
             <a:r>
-              <a:t>Tanglish: Ship pannunga. Review aaganum. Ticket-na bonus — guarantee illa.</a:t>
-            </a:r>
-          </a:p>
-          <a:p>
-            <a:r>
-              <a:t>On the slide, attributed to Sam Altman: We're going to see 10 person billion-dollar companies pretty soon.</a:t>
-            </a:r>
-          </a:p>
-          <a:p>
-            <a:r>
-              <a:t>Fuller reported line: We're going to see 10-person companies with billion-dollar valuations pretty soon.</a:t>
-            </a:r>
-          </a:p>
-          <a:p>
-            <a:r>
-              <a:t>https://www.forbes.com/sites/michaelashley/2025/02/17/the-future-is-solo-ai-is-creating-billion-dollar-one-person-companies/</a:t>
-            </a:r>
-          </a:p>
-          <a:p>
-            <a:r>
-              <a:t>Organizers review. Selected winners get DevFest Chennai tickets. Prizes also at DevFest, Sat 17 Oct 2026, IITM Research Park. Thursday production-ready teams are considered for an additional prize — not a guarantee.</a:t>
-            </a:r>
-          </a:p>
-          <a:p>
-            <a:r>
-              <a:t>Judging themes only: usefulness, execution, UX, monetization potential, real deployment, learning. Do not invent amounts, winner counts, or weights.</a:t>
-            </a:r>
-          </a:p>
-          <a:p>
-            <a:r>
-              <a:t>Close: Don't just build another side project. Build something people can use, ship it to the world, and see if someone is willing to pay for it.</a:t>
+              <a:t>Tanglish: Thursday-kku live aaganum. Review Ready-na ‘paathu videoonga.’ Production Ready-na users use panna ready.</a:t>
+            </a:r>
+          </a:p>
+          <a:p>
+            <a:r>
+              <a:t>Say Thursday. Do not print a calendar date.</a:t>
+            </a:r>
+          </a:p>
+          <a:p>
+            <a:r>
+              <a:t>Production Ready by Thursday = deployed and usable. Review Ready = please review.</a:t>
+            </a:r>
+          </a:p>
+          <a:p>
+            <a:r>
+              <a:t>Checklist: production URL; core flow works; usable onboarding; no critical blockers; a clear way to charge; payment flow works when they charge; basic analytics or feedback; enough for organizers to test.</a:t>
+            </a:r>
+          </a:p>
+          <a:p>
+            <a:r>
+              <a:t>Extra DevFest prize eligibility, not an automatic win.</a:t>
+            </a:r>
+          </a:p>
+          <a:p>
+            <a:r>
+              <a:t>https://luma.com/mprx0ocg</a:t>
             </a:r>
           </a:p>
           <a:p>
@@ -1254,22 +1215,42 @@
           <a:lstStyle/>
           <a:p>
             <a:r>
-              <a:t>Tanglish: Banner-ah vechi vidunga. DevFest-ku point pannunga. QR invent pannaathinga.</a:t>
-            </a:r>
-          </a:p>
-          <a:p>
-            <a:r>
-              <a:t>Leave the banner up. Point people to DevFest.</a:t>
+              <a:t>Tanglish: Ship pannunga. Review aaganum. Ticket-na bonus — guarantee illa.</a:t>
+            </a:r>
+          </a:p>
+          <a:p>
+            <a:r>
+              <a:t>On the slide, attributed to Sam Altman: We're going to see 10 person billion-dollar companies pretty soon.</a:t>
+            </a:r>
+          </a:p>
+          <a:p>
+            <a:r>
+              <a:t>Fuller reported line: We're going to see 10-person companies with billion-dollar valuations pretty soon.</a:t>
+            </a:r>
+          </a:p>
+          <a:p>
+            <a:r>
+              <a:t>https://www.forbes.com/sites/michaelashley/2025/02/17/the-future-is-solo-ai-is-creating-billion-dollar-one-person-companies/</a:t>
+            </a:r>
+          </a:p>
+          <a:p>
+            <a:r>
+              <a:t>Organizers review. Selected winners get DevFest Chennai tickets. Prizes also at DevFest, Sat 17 Oct 2026, IITM Research Park. Thursday production-ready teams are considered for an additional prize — not a guarantee.</a:t>
+            </a:r>
+          </a:p>
+          <a:p>
+            <a:r>
+              <a:t>Judging themes only: usefulness, execution, UX, monetization potential, real deployment, learning. Do not invent amounts, winner counts, or weights.</a:t>
+            </a:r>
+          </a:p>
+          <a:p>
+            <a:r>
+              <a:t>Close: Don't just build another side project. Build something people can use, ship it to the world, and see if someone is willing to pay for it.</a:t>
             </a:r>
           </a:p>
           <a:p>
             <a:r>
               <a:t>https://devfest.gdgchennai.in/</a:t>
-            </a:r>
-          </a:p>
-          <a:p>
-            <a:r>
-              <a:t>https://devfest.gdgchennai.in/banner/main.webp</a:t>
             </a:r>
           </a:p>
         </p:txBody>
@@ -1339,6 +1320,91 @@
           <a:lstStyle/>
           <a:p>
             <a:r>
+              <a:t>Tanglish: Banner-ah vechi vidunga. DevFest-ku point pannunga. QR invent pannaathinga.</a:t>
+            </a:r>
+          </a:p>
+          <a:p>
+            <a:r>
+              <a:t>Leave the banner up. Point people to DevFest.</a:t>
+            </a:r>
+          </a:p>
+          <a:p>
+            <a:r>
+              <a:t>https://devfest.gdgchennai.in/</a:t>
+            </a:r>
+          </a:p>
+          <a:p>
+            <a:r>
+              <a:t>https://devfest.gdgchennai.in/banner/main.webp</a:t>
+            </a:r>
+          </a:p>
+        </p:txBody>
+      </p:sp>
+      <p:sp>
+        <p:nvSpPr>
+          <p:cNvPr id="4" name="Slide Number Placeholder 3"/>
+          <p:cNvSpPr>
+            <a:spLocks noGrp="1"/>
+          </p:cNvSpPr>
+          <p:nvPr>
+            <p:ph type="sldNum" idx="5" sz="quarter"/>
+          </p:nvPr>
+        </p:nvSpPr>
+        <p:spPr/>
+      </p:sp>
+    </p:spTree>
+  </p:cSld>
+  <p:clrMapOvr>
+    <a:masterClrMapping/>
+  </p:clrMapOvr>
+</p:notes>
+</file>
+
+<file path=ppt/notesSlides/notesSlide19.xml><?xml version="1.0" encoding="utf-8"?>
+<p:notes xmlns:a="http://schemas.openxmlformats.org/drawingml/2006/main" xmlns:p="http://schemas.openxmlformats.org/presentationml/2006/main" xmlns:r="http://schemas.openxmlformats.org/officeDocument/2006/relationships">
+  <p:cSld>
+    <p:spTree>
+      <p:nvGrpSpPr>
+        <p:cNvPr id="1" name=""/>
+        <p:cNvGrpSpPr/>
+        <p:nvPr/>
+      </p:nvGrpSpPr>
+      <p:grpSpPr>
+        <a:xfrm>
+          <a:off x="0" y="0"/>
+          <a:ext cx="0" cy="0"/>
+          <a:chOff x="0" y="0"/>
+          <a:chExt cx="0" cy="0"/>
+        </a:xfrm>
+      </p:grpSpPr>
+      <p:sp>
+        <p:nvSpPr>
+          <p:cNvPr id="2" name="Slide Image Placeholder 1"/>
+          <p:cNvSpPr>
+            <a:spLocks noGrp="1"/>
+          </p:cNvSpPr>
+          <p:nvPr>
+            <p:ph type="sldImg" idx="2"/>
+          </p:nvPr>
+        </p:nvSpPr>
+        <p:spPr/>
+      </p:sp>
+      <p:sp>
+        <p:nvSpPr>
+          <p:cNvPr id="3" name="Notes Placeholder 2"/>
+          <p:cNvSpPr>
+            <a:spLocks noGrp="1"/>
+          </p:cNvSpPr>
+          <p:nvPr>
+            <p:ph type="body" idx="3" sz="quarter"/>
+          </p:nvPr>
+        </p:nvSpPr>
+        <p:spPr/>
+        <p:txBody>
+          <a:bodyPr/>
+          <a:lstStyle/>
+          <a:p>
+            <a:r>
               <a:t>Tanglish: Indha banner-ah vechi vidunga. Scan panna mudiyala-na DevFest site-ku point pannunga.</a:t>
             </a:r>
           </a:p>
@@ -1424,27 +1490,32 @@
           <a:lstStyle/>
           <a:p>
             <a:r>
-              <a:t>Tanglish: Periya team venam. Months venam. Ad budget-um venam.</a:t>
-            </a:r>
-          </a:p>
-          <a:p>
-            <a:r>
-              <a:t>Credit Sanjeev NC, DevFest 2024 for the tiny-team, no-ad-budget, ship-before-polish point. Super Meme is the spoken example — inspiration only. No revenue, ARR, or size claims. Same for DroidClaw.</a:t>
-            </a:r>
-          </a:p>
-          <a:p>
-            <a:r>
-              <a:t>https://supermeme.ai/</a:t>
-            </a:r>
-          </a:p>
-          <a:p>
-            <a:r>
-              <a:t>https://droidclaw.ai/</a:t>
-            </a:r>
-          </a:p>
-          <a:p>
-            <a:r>
-              <a:t>Do not invent a YouTube id for Sanjeev's talk.</a:t>
+              <a:t>Tanglish: Build panna theriyum. Pay vaangardhu dhaan kashtam. Adhukku resilience venum.</a:t>
+            </a:r>
+          </a:p>
+          <a:p>
+            <a:r>
+              <a:t>Vibe coding is easy. Getting someone to pay takes resilience.</a:t>
+            </a:r>
+          </a:p>
+          <a:p>
+            <a:r>
+              <a:t>Ask people just out of college to take YC Startup School (free, online). Say “early Startup School lessons.” Do not invent a lesson number.</a:t>
+            </a:r>
+          </a:p>
+          <a:p>
+            <a:r>
+              <a:t>https://www.startupschool.org/</a:t>
+            </a:r>
+          </a:p>
+          <a:p>
+            <a:r>
+              <a:t>https://www.youtube.com/watch?v=BUE-icVYRFU</a:t>
+            </a:r>
+          </a:p>
+          <a:p>
+            <a:r>
+              <a:t>https://www.youtube.com/watch?v=BJjsfNO5JTo</a:t>
             </a:r>
           </a:p>
         </p:txBody>
@@ -1514,22 +1585,27 @@
           <a:lstStyle/>
           <a:p>
             <a:r>
-              <a:t>Tanglish: Instagram venam. Oru problem. Konjam per. Adhu pothum.</a:t>
-            </a:r>
-          </a:p>
-          <a:p>
-            <a:r>
-              <a:t>These are small products. Also: word game, quiz, browser game, PDF utilities, expense widget, social scheduling, inventory, booking reminders, productivity dashboards, Android performance report, API testing, log analysis.</a:t>
-            </a:r>
-          </a:p>
-          <a:p>
-            <a:r>
-              <a:t>Illustrative monetization: paid levels, one-time, credits, subscription, hosted plan, license.</a:t>
-            </a:r>
-          </a:p>
-          <a:p>
-            <a:r>
-              <a:t>https://luma.com/mprx0ocg</a:t>
+              <a:t>Tanglish: Periya team venam. Months venam. Ad budget-um venam.</a:t>
+            </a:r>
+          </a:p>
+          <a:p>
+            <a:r>
+              <a:t>Credit Sanjeev NC, DevFest 2024 for the tiny-team, no-ad-budget, ship-before-polish point. Super Meme is the spoken example — inspiration only. No revenue, ARR, or size claims. Same for DroidClaw.</a:t>
+            </a:r>
+          </a:p>
+          <a:p>
+            <a:r>
+              <a:t>https://supermeme.ai/</a:t>
+            </a:r>
+          </a:p>
+          <a:p>
+            <a:r>
+              <a:t>https://droidclaw.ai/</a:t>
+            </a:r>
+          </a:p>
+          <a:p>
+            <a:r>
+              <a:t>Do not invent a YouTube id for Sanjeev's talk.</a:t>
             </a:r>
           </a:p>
         </p:txBody>
@@ -1599,27 +1675,22 @@
           <a:lstStyle/>
           <a:p>
             <a:r>
-              <a:t>Tanglish: Puthiya invention venam. Oru job. Oru price. Adhu pothum.</a:t>
-            </a:r>
-          </a:p>
-          <a:p>
-            <a:r>
-              <a:t>Maaa is a Mac notch reminder. Pro is $2.99 once for two computers. https://www.maaa.app/</a:t>
-            </a:r>
-          </a:p>
-          <a:p>
-            <a:r>
-              <a:t>Lucky Charm hangs a charm on the desktop. https://luckycharm.kraftostech.com/</a:t>
-            </a:r>
-          </a:p>
-          <a:p>
-            <a:r>
-              <a:t>Carrd is one-page sites. https://carrd.co/</a:t>
-            </a:r>
-          </a:p>
-          <a:p>
-            <a:r>
-              <a:t>No revenue or popularity counts.</a:t>
+              <a:t>Tanglish: Instagram venam. Oru problem. Konjam per. Adhu pothum.</a:t>
+            </a:r>
+          </a:p>
+          <a:p>
+            <a:r>
+              <a:t>These are small products. Also: word game, quiz, browser game, PDF utilities, expense widget, social scheduling, inventory, booking reminders, productivity dashboards, Android performance report, API testing, log analysis.</a:t>
+            </a:r>
+          </a:p>
+          <a:p>
+            <a:r>
+              <a:t>Illustrative monetization: paid levels, one-time, credits, subscription, hosted plan, license.</a:t>
+            </a:r>
+          </a:p>
+          <a:p>
+            <a:r>
+              <a:t>https://luma.com/mprx0ocg</a:t>
             </a:r>
           </a:p>
         </p:txBody>
@@ -1689,22 +1760,27 @@
           <a:lstStyle/>
           <a:p>
             <a:r>
-              <a:t>Tanglish: Copycat-nu ninaikadheenga. Better version pothum. Market already irukku.</a:t>
-            </a:r>
-          </a:p>
-          <a:p>
-            <a:r>
-              <a:t>DunSocial is one more scheduler in a market that already has them. Public list price is $20/month — not a success claim. https://dunsocial.com/</a:t>
-            </a:r>
-          </a:p>
-          <a:p>
-            <a:r>
-              <a:t>The owner talked to the founder, who did not want an interview. What he did say: people trust you when you solve a problem, and he studies competitors.</a:t>
-            </a:r>
-          </a:p>
-          <a:p>
-            <a:r>
-              <a:t>The easiest test of a market is to ship a better version of something that already exists. Do not put a like count on this slide.</a:t>
+              <a:t>Tanglish: Puthiya invention venam. Oru job. Oru price. Adhu pothum.</a:t>
+            </a:r>
+          </a:p>
+          <a:p>
+            <a:r>
+              <a:t>Maaa is a Mac notch reminder. Pro is $2.99 once for two computers. https://www.maaa.app/</a:t>
+            </a:r>
+          </a:p>
+          <a:p>
+            <a:r>
+              <a:t>Lucky Charm hangs a charm on the desktop. https://luckycharm.kraftostech.com/</a:t>
+            </a:r>
+          </a:p>
+          <a:p>
+            <a:r>
+              <a:t>Carrd is one-page sites. https://carrd.co/</a:t>
+            </a:r>
+          </a:p>
+          <a:p>
+            <a:r>
+              <a:t>No revenue or popularity counts.</a:t>
             </a:r>
           </a:p>
         </p:txBody>
@@ -1774,17 +1850,22 @@
           <a:lstStyle/>
           <a:p>
             <a:r>
-              <a:t>Tanglish: First product. Game, charm, oru chinna app. Oruthan finish panna mudiyumnu irukanum.</a:t>
-            </a:r>
-          </a:p>
-          <a:p>
-            <a:r>
-              <a:t>The first part of the recipe is something one person can finish. Examples stay the ones already named.</a:t>
-            </a:r>
-          </a:p>
-          <a:p>
-            <a:r>
-              <a:t>https://www.maaa.app/</a:t>
+              <a:t>Tanglish: Copycat-nu ninaikadheenga. Better version pothum. Market already irukku.</a:t>
+            </a:r>
+          </a:p>
+          <a:p>
+            <a:r>
+              <a:t>DunSocial is one more scheduler in a market that already has them. Public list price is $20/month — not a success claim. https://dunsocial.com/</a:t>
+            </a:r>
+          </a:p>
+          <a:p>
+            <a:r>
+              <a:t>The owner talked to the founder, who did not want an interview. What he did say: people trust you when you solve a problem, and he studies competitors.</a:t>
+            </a:r>
+          </a:p>
+          <a:p>
+            <a:r>
+              <a:t>The easiest test of a market is to ship a better version of something that already exists. Do not put a like count on this slide.</a:t>
             </a:r>
           </a:p>
         </p:txBody>
@@ -1854,17 +1935,17 @@
           <a:lstStyle/>
           <a:p>
             <a:r>
-              <a:t>Tanglish: Oru price. Oru checkout. Adhu dhaan payment.</a:t>
-            </a:r>
-          </a:p>
-          <a:p>
-            <a:r>
-              <a:t>Prices are examples. Razorpay: https://razorpay.com/docs/</a:t>
-            </a:r>
-          </a:p>
-          <a:p>
-            <a:r>
-              <a:t>Stripe where available. Crowdfunding is not guaranteed funding.</a:t>
+              <a:t>Tanglish: First product. Game, charm, oru chinna app. Oruthan finish panna mudiyumnu irukanum.</a:t>
+            </a:r>
+          </a:p>
+          <a:p>
+            <a:r>
+              <a:t>The first part of the recipe is something one person can finish. Examples stay the ones already named.</a:t>
+            </a:r>
+          </a:p>
+          <a:p>
+            <a:r>
+              <a:t>https://www.maaa.app/</a:t>
             </a:r>
           </a:p>
         </p:txBody>
@@ -1934,22 +2015,17 @@
           <a:lstStyle/>
           <a:p>
             <a:r>
-              <a:t>Tanglish: Analytics-ku oru tool pothum. Ella logo-um venam.</a:t>
-            </a:r>
-          </a:p>
-          <a:p>
-            <a:r>
-              <a:t>PostHog: https://posthog.com/</a:t>
-            </a:r>
-          </a:p>
-          <a:p>
-            <a:r>
-              <a:t>Also name Plausible, Firebase Analytics, and Mixpanel, and say pick one.</a:t>
-            </a:r>
-          </a:p>
-          <a:p>
-            <a:r>
-              <a:t>Track visitors, activation, retention, paid conversion, churn.</a:t>
+              <a:t>Tanglish: Oru price. Oru checkout. Adhu dhaan payment.</a:t>
+            </a:r>
+          </a:p>
+          <a:p>
+            <a:r>
+              <a:t>Prices are examples. Razorpay: https://razorpay.com/docs/</a:t>
+            </a:r>
+          </a:p>
+          <a:p>
+            <a:r>
+              <a:t>Stripe where available. Crowdfunding is not guaranteed funding.</a:t>
             </a:r>
           </a:p>
         </p:txBody>
@@ -2019,17 +2095,22 @@
           <a:lstStyle/>
           <a:p>
             <a:r>
-              <a:t>Tanglish: Support-ku Discord pothum. Periya team venam.</a:t>
-            </a:r>
-          </a:p>
-          <a:p>
-            <a:r>
-              <a:t>Discord, email, or GitHub Discussions. Nobody needs a support org.</a:t>
-            </a:r>
-          </a:p>
-          <a:p>
-            <a:r>
-              <a:t>https://discord.com/</a:t>
+              <a:t>Tanglish: Analytics-ku oru tool pothum. Ella logo-um venam.</a:t>
+            </a:r>
+          </a:p>
+          <a:p>
+            <a:r>
+              <a:t>PostHog: https://posthog.com/</a:t>
+            </a:r>
+          </a:p>
+          <a:p>
+            <a:r>
+              <a:t>Also name Plausible, Firebase Analytics, and Mixpanel, and say pick one.</a:t>
+            </a:r>
+          </a:p>
+          <a:p>
+            <a:r>
+              <a:t>Track visitors, activation, retention, paid conversion, churn.</a:t>
             </a:r>
           </a:p>
         </p:txBody>
@@ -5050,7 +5131,7 @@
             <a:avLst/>
           </a:prstGeom>
           <a:solidFill>
-            <a:srgbClr val="F5F5F7"/>
+            <a:srgbClr val="070710"/>
           </a:solidFill>
           <a:ln>
             <a:noFill/>
@@ -5078,154 +5159,30 @@
           </a:p>
         </p:txBody>
       </p:sp>
-      <p:sp>
-        <p:nvSpPr>
-          <p:cNvPr id="3" name="TextBox 2"/>
-          <p:cNvSpPr txBox="1"/>
-          <p:nvPr/>
-        </p:nvSpPr>
-        <p:spPr>
-          <a:xfrm>
-            <a:off x="640080" y="1417320"/>
-            <a:ext cx="10881360" cy="1737360"/>
+      <p:pic>
+        <p:nvPicPr>
+          <p:cNvPr id="3" name="Picture 2" descr="shipaton-title-card.png"/>
+          <p:cNvPicPr>
+            <a:picLocks noChangeAspect="1"/>
+          </p:cNvPicPr>
+          <p:nvPr/>
+        </p:nvPicPr>
+        <p:blipFill>
+          <a:blip r:embed="rId2"/>
+          <a:stretch>
+            <a:fillRect/>
+          </a:stretch>
+        </p:blipFill>
+        <p:spPr>
+          <a:xfrm>
+            <a:off x="0" y="85"/>
+            <a:ext cx="12191695" cy="6857828"/>
           </a:xfrm>
           <a:prstGeom prst="rect">
             <a:avLst/>
           </a:prstGeom>
-          <a:noFill/>
-        </p:spPr>
-        <p:txBody>
-          <a:bodyPr wrap="square">
-            <a:spAutoFit/>
-          </a:bodyPr>
-          <a:lstStyle/>
-          <a:p>
-            <a:pPr algn="ctr"/>
-            <a:r>
-              <a:rPr sz="3600" b="1">
-                <a:solidFill>
-                  <a:srgbClr val="1D1D1F"/>
-                </a:solidFill>
-                <a:latin typeface="Calibri"/>
-              </a:rPr>
-              <a:t>What's stopping us from getting paid?</a:t>
-            </a:r>
-          </a:p>
-        </p:txBody>
-      </p:sp>
-      <p:sp>
-        <p:nvSpPr>
-          <p:cNvPr id="4" name="TextBox 3"/>
-          <p:cNvSpPr txBox="1"/>
-          <p:nvPr/>
-        </p:nvSpPr>
-        <p:spPr>
-          <a:xfrm>
-            <a:off x="640080" y="3200400"/>
-            <a:ext cx="10881360" cy="777240"/>
-          </a:xfrm>
-          <a:prstGeom prst="rect">
-            <a:avLst/>
-          </a:prstGeom>
-          <a:noFill/>
-        </p:spPr>
-        <p:txBody>
-          <a:bodyPr wrap="square">
-            <a:spAutoFit/>
-          </a:bodyPr>
-          <a:lstStyle/>
-          <a:p>
-            <a:pPr algn="ctr"/>
-            <a:r>
-              <a:rPr sz="2200" b="0">
-                <a:solidFill>
-                  <a:srgbClr val="6E6E73"/>
-                </a:solidFill>
-                <a:latin typeface="Calibri"/>
-              </a:rPr>
-              <a:t>We know how to build.</a:t>
-            </a:r>
-          </a:p>
-        </p:txBody>
-      </p:sp>
-      <p:sp>
-        <p:nvSpPr>
-          <p:cNvPr id="5" name="Rounded Rectangle 4"/>
-          <p:cNvSpPr/>
-          <p:nvPr/>
-        </p:nvSpPr>
-        <p:spPr>
-          <a:xfrm>
-            <a:off x="4548225" y="5349240"/>
-            <a:ext cx="3095244" cy="384048"/>
-          </a:xfrm>
-          <a:prstGeom prst="roundRect">
-            <a:avLst/>
-          </a:prstGeom>
-          <a:solidFill>
-            <a:srgbClr val="E8E8ED"/>
-          </a:solidFill>
-          <a:ln>
-            <a:noFill/>
-          </a:ln>
-        </p:spPr>
-        <p:style>
-          <a:lnRef idx="1">
-            <a:schemeClr val="accent1"/>
-          </a:lnRef>
-          <a:fillRef idx="3">
-            <a:schemeClr val="accent1"/>
-          </a:fillRef>
-          <a:effectRef idx="2">
-            <a:schemeClr val="accent1"/>
-          </a:effectRef>
-          <a:fontRef idx="minor">
-            <a:schemeClr val="lt1"/>
-          </a:fontRef>
-        </p:style>
-        <p:txBody>
-          <a:bodyPr rtlCol="0" anchor="ctr"/>
-          <a:lstStyle/>
-          <a:p>
-            <a:pPr algn="ctr"/>
-          </a:p>
-        </p:txBody>
-      </p:sp>
-      <p:sp>
-        <p:nvSpPr>
-          <p:cNvPr id="6" name="TextBox 5"/>
-          <p:cNvSpPr txBox="1"/>
-          <p:nvPr/>
-        </p:nvSpPr>
-        <p:spPr>
-          <a:xfrm>
-            <a:off x="4548225" y="5385816"/>
-            <a:ext cx="3095244" cy="329184"/>
-          </a:xfrm>
-          <a:prstGeom prst="rect">
-            <a:avLst/>
-          </a:prstGeom>
-          <a:noFill/>
-        </p:spPr>
-        <p:txBody>
-          <a:bodyPr wrap="square">
-            <a:spAutoFit/>
-          </a:bodyPr>
-          <a:lstStyle/>
-          <a:p>
-            <a:pPr algn="ctr"/>
-            <a:r>
-              <a:rPr sz="1200" b="1">
-                <a:solidFill>
-                  <a:srgbClr val="1D1D1F"/>
-                </a:solidFill>
-                <a:latin typeface="Calibri"/>
-              </a:rPr>
-              <a:t>Getting paid takes resilience</a:t>
-            </a:r>
-          </a:p>
-        </p:txBody>
-      </p:sp>
+        </p:spPr>
+      </p:pic>
     </p:spTree>
   </p:cSld>
   <p:clrMapOvr>
@@ -5295,7 +5252,7 @@
         </p:nvSpPr>
         <p:spPr>
           <a:xfrm>
-            <a:off x="640080" y="1874519"/>
+            <a:off x="640080" y="1143000"/>
             <a:ext cx="10881360" cy="1737360"/>
           </a:xfrm>
           <a:prstGeom prst="rect">
@@ -5311,13 +5268,13 @@
           <a:p>
             <a:pPr algn="ctr"/>
             <a:r>
-              <a:rPr sz="3000" b="1">
+              <a:rPr sz="3200" b="1">
                 <a:solidFill>
                   <a:srgbClr val="1D1D1F"/>
                 </a:solidFill>
                 <a:latin typeface="Calibri"/>
               </a:rPr>
-              <a:t>They stay when you solve the next problem.</a:t>
+              <a:t>Then give them a place to talk.</a:t>
             </a:r>
           </a:p>
         </p:txBody>
@@ -5330,7 +5287,7 @@
         </p:nvSpPr>
         <p:spPr>
           <a:xfrm>
-            <a:off x="640080" y="3657600"/>
+            <a:off x="640080" y="2926080"/>
             <a:ext cx="10881360" cy="777240"/>
           </a:xfrm>
           <a:prstGeom prst="rect">
@@ -5352,8 +5309,223 @@
                 </a:solidFill>
                 <a:latin typeface="Calibri"/>
               </a:rPr>
-              <a:t>Likes are not customers.</a:t>
-            </a:r>
+              <a:t>Discord is enough.</a:t>
+            </a:r>
+          </a:p>
+        </p:txBody>
+      </p:sp>
+      <p:sp>
+        <p:nvSpPr>
+          <p:cNvPr id="5" name="Rounded Rectangle 4"/>
+          <p:cNvSpPr/>
+          <p:nvPr/>
+        </p:nvSpPr>
+        <p:spPr>
+          <a:xfrm>
+            <a:off x="4709160" y="3794760"/>
+            <a:ext cx="1554480" cy="777240"/>
+          </a:xfrm>
+          <a:prstGeom prst="roundRect">
+            <a:avLst/>
+          </a:prstGeom>
+          <a:noFill/>
+          <a:ln w="27940">
+            <a:solidFill>
+              <a:srgbClr val="7C5CFF"/>
+            </a:solidFill>
+          </a:ln>
+        </p:spPr>
+        <p:style>
+          <a:lnRef idx="1">
+            <a:schemeClr val="accent1"/>
+          </a:lnRef>
+          <a:fillRef idx="3">
+            <a:schemeClr val="accent1"/>
+          </a:fillRef>
+          <a:effectRef idx="2">
+            <a:schemeClr val="accent1"/>
+          </a:effectRef>
+          <a:fontRef idx="minor">
+            <a:schemeClr val="lt1"/>
+          </a:fontRef>
+        </p:style>
+        <p:txBody>
+          <a:bodyPr rtlCol="0" anchor="ctr"/>
+          <a:lstStyle/>
+          <a:p>
+            <a:pPr algn="ctr"/>
+          </a:p>
+        </p:txBody>
+      </p:sp>
+      <p:sp>
+        <p:nvSpPr>
+          <p:cNvPr id="6" name="Rounded Rectangle 5"/>
+          <p:cNvSpPr/>
+          <p:nvPr/>
+        </p:nvSpPr>
+        <p:spPr>
+          <a:xfrm>
+            <a:off x="5943600" y="4434840"/>
+            <a:ext cx="1554480" cy="658368"/>
+          </a:xfrm>
+          <a:prstGeom prst="roundRect">
+            <a:avLst/>
+          </a:prstGeom>
+          <a:noFill/>
+          <a:ln w="27940">
+            <a:solidFill>
+              <a:srgbClr val="1EC8E6"/>
+            </a:solidFill>
+          </a:ln>
+        </p:spPr>
+        <p:style>
+          <a:lnRef idx="1">
+            <a:schemeClr val="accent1"/>
+          </a:lnRef>
+          <a:fillRef idx="3">
+            <a:schemeClr val="accent1"/>
+          </a:fillRef>
+          <a:effectRef idx="2">
+            <a:schemeClr val="accent1"/>
+          </a:effectRef>
+          <a:fontRef idx="minor">
+            <a:schemeClr val="lt1"/>
+          </a:fontRef>
+        </p:style>
+        <p:txBody>
+          <a:bodyPr rtlCol="0" anchor="ctr"/>
+          <a:lstStyle/>
+          <a:p>
+            <a:pPr algn="ctr"/>
+          </a:p>
+        </p:txBody>
+      </p:sp>
+      <p:sp>
+        <p:nvSpPr>
+          <p:cNvPr id="7" name="Oval 6"/>
+          <p:cNvSpPr/>
+          <p:nvPr/>
+        </p:nvSpPr>
+        <p:spPr>
+          <a:xfrm>
+            <a:off x="4983480" y="4069080"/>
+            <a:ext cx="164592" cy="164592"/>
+          </a:xfrm>
+          <a:prstGeom prst="ellipse">
+            <a:avLst/>
+          </a:prstGeom>
+          <a:solidFill>
+            <a:srgbClr val="1EC8E6"/>
+          </a:solidFill>
+          <a:ln>
+            <a:noFill/>
+          </a:ln>
+        </p:spPr>
+        <p:style>
+          <a:lnRef idx="1">
+            <a:schemeClr val="accent1"/>
+          </a:lnRef>
+          <a:fillRef idx="3">
+            <a:schemeClr val="accent1"/>
+          </a:fillRef>
+          <a:effectRef idx="2">
+            <a:schemeClr val="accent1"/>
+          </a:effectRef>
+          <a:fontRef idx="minor">
+            <a:schemeClr val="lt1"/>
+          </a:fontRef>
+        </p:style>
+        <p:txBody>
+          <a:bodyPr rtlCol="0" anchor="ctr"/>
+          <a:lstStyle/>
+          <a:p>
+            <a:pPr algn="ctr"/>
+          </a:p>
+        </p:txBody>
+      </p:sp>
+      <p:sp>
+        <p:nvSpPr>
+          <p:cNvPr id="8" name="Oval 7"/>
+          <p:cNvSpPr/>
+          <p:nvPr/>
+        </p:nvSpPr>
+        <p:spPr>
+          <a:xfrm>
+            <a:off x="5276088" y="4069080"/>
+            <a:ext cx="164592" cy="164592"/>
+          </a:xfrm>
+          <a:prstGeom prst="ellipse">
+            <a:avLst/>
+          </a:prstGeom>
+          <a:solidFill>
+            <a:srgbClr val="7C5CFF"/>
+          </a:solidFill>
+          <a:ln>
+            <a:noFill/>
+          </a:ln>
+        </p:spPr>
+        <p:style>
+          <a:lnRef idx="1">
+            <a:schemeClr val="accent1"/>
+          </a:lnRef>
+          <a:fillRef idx="3">
+            <a:schemeClr val="accent1"/>
+          </a:fillRef>
+          <a:effectRef idx="2">
+            <a:schemeClr val="accent1"/>
+          </a:effectRef>
+          <a:fontRef idx="minor">
+            <a:schemeClr val="lt1"/>
+          </a:fontRef>
+        </p:style>
+        <p:txBody>
+          <a:bodyPr rtlCol="0" anchor="ctr"/>
+          <a:lstStyle/>
+          <a:p>
+            <a:pPr algn="ctr"/>
+          </a:p>
+        </p:txBody>
+      </p:sp>
+      <p:sp>
+        <p:nvSpPr>
+          <p:cNvPr id="9" name="Oval 8"/>
+          <p:cNvSpPr/>
+          <p:nvPr/>
+        </p:nvSpPr>
+        <p:spPr>
+          <a:xfrm>
+            <a:off x="5568696" y="4069080"/>
+            <a:ext cx="164592" cy="164592"/>
+          </a:xfrm>
+          <a:prstGeom prst="ellipse">
+            <a:avLst/>
+          </a:prstGeom>
+          <a:solidFill>
+            <a:srgbClr val="1EC8E6"/>
+          </a:solidFill>
+          <a:ln>
+            <a:noFill/>
+          </a:ln>
+        </p:spPr>
+        <p:style>
+          <a:lnRef idx="1">
+            <a:schemeClr val="accent1"/>
+          </a:lnRef>
+          <a:fillRef idx="3">
+            <a:schemeClr val="accent1"/>
+          </a:fillRef>
+          <a:effectRef idx="2">
+            <a:schemeClr val="accent1"/>
+          </a:effectRef>
+          <a:fontRef idx="minor">
+            <a:schemeClr val="lt1"/>
+          </a:fontRef>
+        </p:style>
+        <p:txBody>
+          <a:bodyPr rtlCol="0" anchor="ctr"/>
+          <a:lstStyle/>
+          <a:p>
+            <a:pPr algn="ctr"/>
           </a:p>
         </p:txBody>
       </p:sp>
@@ -5426,7 +5598,7 @@
         </p:nvSpPr>
         <p:spPr>
           <a:xfrm>
-            <a:off x="640080" y="1325880"/>
+            <a:off x="640080" y="1874519"/>
             <a:ext cx="10881360" cy="1737360"/>
           </a:xfrm>
           <a:prstGeom prst="rect">
@@ -5442,13 +5614,13 @@
           <a:p>
             <a:pPr algn="ctr"/>
             <a:r>
-              <a:rPr sz="2800" b="1">
+              <a:rPr sz="3000" b="1">
                 <a:solidFill>
                   <a:srgbClr val="1D1D1F"/>
                 </a:solidFill>
                 <a:latin typeface="Calibri"/>
               </a:rPr>
-              <a:t>Your first paying customer beats another feature.</a:t>
+              <a:t>They stay when you solve the next problem.</a:t>
             </a:r>
           </a:p>
         </p:txBody>
@@ -5461,7 +5633,7 @@
         </p:nvSpPr>
         <p:spPr>
           <a:xfrm>
-            <a:off x="640080" y="3108960"/>
+            <a:off x="640080" y="3657600"/>
             <a:ext cx="10881360" cy="777240"/>
           </a:xfrm>
           <a:prstGeom prst="rect">
@@ -5483,7 +5655,7 @@
                 </a:solidFill>
                 <a:latin typeface="Calibri"/>
               </a:rPr>
-              <a:t>Too simple is why it stays in GitHub.</a:t>
+              <a:t>Likes are not customers.</a:t>
             </a:r>
           </a:p>
         </p:txBody>
@@ -5557,7 +5729,7 @@
         </p:nvSpPr>
         <p:spPr>
           <a:xfrm>
-            <a:off x="640080" y="1554480"/>
+            <a:off x="640080" y="1325880"/>
             <a:ext cx="10881360" cy="1737360"/>
           </a:xfrm>
           <a:prstGeom prst="rect">
@@ -5573,13 +5745,13 @@
           <a:p>
             <a:pPr algn="ctr"/>
             <a:r>
-              <a:rPr sz="4000" b="1">
+              <a:rPr sz="2800" b="1">
                 <a:solidFill>
                   <a:srgbClr val="1D1D1F"/>
                 </a:solidFill>
                 <a:latin typeface="Calibri"/>
               </a:rPr>
-              <a:t>Five people × ₹199.</a:t>
+              <a:t>Your first paying customer beats another feature.</a:t>
             </a:r>
           </a:p>
         </p:txBody>
@@ -5592,7 +5764,7 @@
         </p:nvSpPr>
         <p:spPr>
           <a:xfrm>
-            <a:off x="640080" y="3337560"/>
+            <a:off x="640080" y="3108960"/>
             <a:ext cx="10881360" cy="777240"/>
           </a:xfrm>
           <a:prstGeom prst="rect">
@@ -5614,319 +5786,7 @@
                 </a:solidFill>
                 <a:latin typeface="Calibri"/>
               </a:rPr>
-              <a:t>Your first ₹1,000.</a:t>
-            </a:r>
-          </a:p>
-        </p:txBody>
-      </p:sp>
-      <p:sp>
-        <p:nvSpPr>
-          <p:cNvPr id="5" name="Rounded Rectangle 4"/>
-          <p:cNvSpPr/>
-          <p:nvPr/>
-        </p:nvSpPr>
-        <p:spPr>
-          <a:xfrm>
-            <a:off x="3210915" y="5806440"/>
-            <a:ext cx="1655064" cy="384048"/>
-          </a:xfrm>
-          <a:prstGeom prst="roundRect">
-            <a:avLst/>
-          </a:prstGeom>
-          <a:solidFill>
-            <a:srgbClr val="E8E8ED"/>
-          </a:solidFill>
-          <a:ln>
-            <a:noFill/>
-          </a:ln>
-        </p:spPr>
-        <p:style>
-          <a:lnRef idx="1">
-            <a:schemeClr val="accent1"/>
-          </a:lnRef>
-          <a:fillRef idx="3">
-            <a:schemeClr val="accent1"/>
-          </a:fillRef>
-          <a:effectRef idx="2">
-            <a:schemeClr val="accent1"/>
-          </a:effectRef>
-          <a:fontRef idx="minor">
-            <a:schemeClr val="lt1"/>
-          </a:fontRef>
-        </p:style>
-        <p:txBody>
-          <a:bodyPr rtlCol="0" anchor="ctr"/>
-          <a:lstStyle/>
-          <a:p>
-            <a:pPr algn="ctr"/>
-          </a:p>
-        </p:txBody>
-      </p:sp>
-      <p:sp>
-        <p:nvSpPr>
-          <p:cNvPr id="6" name="TextBox 5"/>
-          <p:cNvSpPr txBox="1"/>
-          <p:nvPr/>
-        </p:nvSpPr>
-        <p:spPr>
-          <a:xfrm>
-            <a:off x="3210915" y="5843016"/>
-            <a:ext cx="1655064" cy="329184"/>
-          </a:xfrm>
-          <a:prstGeom prst="rect">
-            <a:avLst/>
-          </a:prstGeom>
-          <a:noFill/>
-        </p:spPr>
-        <p:txBody>
-          <a:bodyPr wrap="square">
-            <a:spAutoFit/>
-          </a:bodyPr>
-          <a:lstStyle/>
-          <a:p>
-            <a:pPr algn="ctr"/>
-            <a:r>
-              <a:rPr sz="1200" b="1">
-                <a:solidFill>
-                  <a:srgbClr val="1D1D1F"/>
-                </a:solidFill>
-                <a:latin typeface="Calibri"/>
-              </a:rPr>
-              <a:t>₹199 extension</a:t>
-            </a:r>
-          </a:p>
-        </p:txBody>
-      </p:sp>
-      <p:sp>
-        <p:nvSpPr>
-          <p:cNvPr id="7" name="Rounded Rectangle 6"/>
-          <p:cNvSpPr/>
-          <p:nvPr/>
-        </p:nvSpPr>
-        <p:spPr>
-          <a:xfrm>
-            <a:off x="5030571" y="5806440"/>
-            <a:ext cx="1078992" cy="384048"/>
-          </a:xfrm>
-          <a:prstGeom prst="roundRect">
-            <a:avLst/>
-          </a:prstGeom>
-          <a:solidFill>
-            <a:srgbClr val="E8E8ED"/>
-          </a:solidFill>
-          <a:ln>
-            <a:noFill/>
-          </a:ln>
-        </p:spPr>
-        <p:style>
-          <a:lnRef idx="1">
-            <a:schemeClr val="accent1"/>
-          </a:lnRef>
-          <a:fillRef idx="3">
-            <a:schemeClr val="accent1"/>
-          </a:fillRef>
-          <a:effectRef idx="2">
-            <a:schemeClr val="accent1"/>
-          </a:effectRef>
-          <a:fontRef idx="minor">
-            <a:schemeClr val="lt1"/>
-          </a:fontRef>
-        </p:style>
-        <p:txBody>
-          <a:bodyPr rtlCol="0" anchor="ctr"/>
-          <a:lstStyle/>
-          <a:p>
-            <a:pPr algn="ctr"/>
-          </a:p>
-        </p:txBody>
-      </p:sp>
-      <p:sp>
-        <p:nvSpPr>
-          <p:cNvPr id="8" name="TextBox 7"/>
-          <p:cNvSpPr txBox="1"/>
-          <p:nvPr/>
-        </p:nvSpPr>
-        <p:spPr>
-          <a:xfrm>
-            <a:off x="5030571" y="5843016"/>
-            <a:ext cx="1078992" cy="329184"/>
-          </a:xfrm>
-          <a:prstGeom prst="rect">
-            <a:avLst/>
-          </a:prstGeom>
-          <a:noFill/>
-        </p:spPr>
-        <p:txBody>
-          <a:bodyPr wrap="square">
-            <a:spAutoFit/>
-          </a:bodyPr>
-          <a:lstStyle/>
-          <a:p>
-            <a:pPr algn="ctr"/>
-            <a:r>
-              <a:rPr sz="1200" b="1">
-                <a:solidFill>
-                  <a:srgbClr val="1D1D1F"/>
-                </a:solidFill>
-                <a:latin typeface="Calibri"/>
-              </a:rPr>
-              <a:t>₹299 app</a:t>
-            </a:r>
-          </a:p>
-        </p:txBody>
-      </p:sp>
-      <p:sp>
-        <p:nvSpPr>
-          <p:cNvPr id="9" name="Rounded Rectangle 8"/>
-          <p:cNvSpPr/>
-          <p:nvPr/>
-        </p:nvSpPr>
-        <p:spPr>
-          <a:xfrm>
-            <a:off x="6274155" y="5806440"/>
-            <a:ext cx="1271016" cy="384048"/>
-          </a:xfrm>
-          <a:prstGeom prst="roundRect">
-            <a:avLst/>
-          </a:prstGeom>
-          <a:solidFill>
-            <a:srgbClr val="E8E8ED"/>
-          </a:solidFill>
-          <a:ln>
-            <a:noFill/>
-          </a:ln>
-        </p:spPr>
-        <p:style>
-          <a:lnRef idx="1">
-            <a:schemeClr val="accent1"/>
-          </a:lnRef>
-          <a:fillRef idx="3">
-            <a:schemeClr val="accent1"/>
-          </a:fillRef>
-          <a:effectRef idx="2">
-            <a:schemeClr val="accent1"/>
-          </a:effectRef>
-          <a:fontRef idx="minor">
-            <a:schemeClr val="lt1"/>
-          </a:fontRef>
-        </p:style>
-        <p:txBody>
-          <a:bodyPr rtlCol="0" anchor="ctr"/>
-          <a:lstStyle/>
-          <a:p>
-            <a:pPr algn="ctr"/>
-          </a:p>
-        </p:txBody>
-      </p:sp>
-      <p:sp>
-        <p:nvSpPr>
-          <p:cNvPr id="10" name="TextBox 9"/>
-          <p:cNvSpPr txBox="1"/>
-          <p:nvPr/>
-        </p:nvSpPr>
-        <p:spPr>
-          <a:xfrm>
-            <a:off x="6274155" y="5843016"/>
-            <a:ext cx="1271016" cy="329184"/>
-          </a:xfrm>
-          <a:prstGeom prst="rect">
-            <a:avLst/>
-          </a:prstGeom>
-          <a:noFill/>
-        </p:spPr>
-        <p:txBody>
-          <a:bodyPr wrap="square">
-            <a:spAutoFit/>
-          </a:bodyPr>
-          <a:lstStyle/>
-          <a:p>
-            <a:pPr algn="ctr"/>
-            <a:r>
-              <a:rPr sz="1200" b="1">
-                <a:solidFill>
-                  <a:srgbClr val="1D1D1F"/>
-                </a:solidFill>
-                <a:latin typeface="Calibri"/>
-              </a:rPr>
-              <a:t>₹499/month</a:t>
-            </a:r>
-          </a:p>
-        </p:txBody>
-      </p:sp>
-      <p:sp>
-        <p:nvSpPr>
-          <p:cNvPr id="11" name="Rounded Rectangle 10"/>
-          <p:cNvSpPr/>
-          <p:nvPr/>
-        </p:nvSpPr>
-        <p:spPr>
-          <a:xfrm>
-            <a:off x="7709763" y="5806440"/>
-            <a:ext cx="1271016" cy="384048"/>
-          </a:xfrm>
-          <a:prstGeom prst="roundRect">
-            <a:avLst/>
-          </a:prstGeom>
-          <a:solidFill>
-            <a:srgbClr val="E8E8ED"/>
-          </a:solidFill>
-          <a:ln>
-            <a:noFill/>
-          </a:ln>
-        </p:spPr>
-        <p:style>
-          <a:lnRef idx="1">
-            <a:schemeClr val="accent1"/>
-          </a:lnRef>
-          <a:fillRef idx="3">
-            <a:schemeClr val="accent1"/>
-          </a:fillRef>
-          <a:effectRef idx="2">
-            <a:schemeClr val="accent1"/>
-          </a:effectRef>
-          <a:fontRef idx="minor">
-            <a:schemeClr val="lt1"/>
-          </a:fontRef>
-        </p:style>
-        <p:txBody>
-          <a:bodyPr rtlCol="0" anchor="ctr"/>
-          <a:lstStyle/>
-          <a:p>
-            <a:pPr algn="ctr"/>
-          </a:p>
-        </p:txBody>
-      </p:sp>
-      <p:sp>
-        <p:nvSpPr>
-          <p:cNvPr id="12" name="TextBox 11"/>
-          <p:cNvSpPr txBox="1"/>
-          <p:nvPr/>
-        </p:nvSpPr>
-        <p:spPr>
-          <a:xfrm>
-            <a:off x="7709763" y="5843016"/>
-            <a:ext cx="1271016" cy="329184"/>
-          </a:xfrm>
-          <a:prstGeom prst="rect">
-            <a:avLst/>
-          </a:prstGeom>
-          <a:noFill/>
-        </p:spPr>
-        <p:txBody>
-          <a:bodyPr wrap="square">
-            <a:spAutoFit/>
-          </a:bodyPr>
-          <a:lstStyle/>
-          <a:p>
-            <a:pPr algn="ctr"/>
-            <a:r>
-              <a:rPr sz="1200" b="1">
-                <a:solidFill>
-                  <a:srgbClr val="1D1D1F"/>
-                </a:solidFill>
-                <a:latin typeface="Calibri"/>
-              </a:rPr>
-              <a:t>Level pack</a:t>
+              <a:t>Too simple is why it stays in GitHub.</a:t>
             </a:r>
           </a:p>
         </p:txBody>
@@ -6000,7 +5860,7 @@
         </p:nvSpPr>
         <p:spPr>
           <a:xfrm>
-            <a:off x="640080" y="1783080"/>
+            <a:off x="640080" y="1554480"/>
             <a:ext cx="10881360" cy="1737360"/>
           </a:xfrm>
           <a:prstGeom prst="rect">
@@ -6016,13 +5876,13 @@
           <a:p>
             <a:pPr algn="ctr"/>
             <a:r>
-              <a:rPr sz="3600" b="1">
+              <a:rPr sz="4000" b="1">
                 <a:solidFill>
                   <a:srgbClr val="1D1D1F"/>
                 </a:solidFill>
                 <a:latin typeface="Calibri"/>
               </a:rPr>
-              <a:t>Build anything. Ship something.</a:t>
+              <a:t>Five people × ₹199.</a:t>
             </a:r>
           </a:p>
         </p:txBody>
@@ -6035,7 +5895,7 @@
         </p:nvSpPr>
         <p:spPr>
           <a:xfrm>
-            <a:off x="640080" y="3566160"/>
+            <a:off x="640080" y="3337560"/>
             <a:ext cx="10881360" cy="777240"/>
           </a:xfrm>
           <a:prstGeom prst="rect">
@@ -6057,7 +5917,7 @@
                 </a:solidFill>
                 <a:latin typeface="Calibri"/>
               </a:rPr>
-              <a:t>Solo or team.</a:t>
+              <a:t>Your first ₹1,000.</a:t>
             </a:r>
           </a:p>
         </p:txBody>
@@ -6070,8 +5930,8 @@
         </p:nvSpPr>
         <p:spPr>
           <a:xfrm>
-            <a:off x="4507077" y="5440680"/>
-            <a:ext cx="694944" cy="384048"/>
+            <a:off x="3210915" y="5806440"/>
+            <a:ext cx="1655064" cy="384048"/>
           </a:xfrm>
           <a:prstGeom prst="roundRect">
             <a:avLst/>
@@ -6113,8 +5973,8 @@
         </p:nvSpPr>
         <p:spPr>
           <a:xfrm>
-            <a:off x="4507077" y="5477256"/>
-            <a:ext cx="694944" cy="329184"/>
+            <a:off x="3210915" y="5843016"/>
+            <a:ext cx="1655064" cy="329184"/>
           </a:xfrm>
           <a:prstGeom prst="rect">
             <a:avLst/>
@@ -6135,7 +5995,7 @@
                 </a:solidFill>
                 <a:latin typeface="Calibri"/>
               </a:rPr>
-              <a:t>Game</a:t>
+              <a:t>₹199 extension</a:t>
             </a:r>
           </a:p>
         </p:txBody>
@@ -6148,8 +6008,8 @@
         </p:nvSpPr>
         <p:spPr>
           <a:xfrm>
-            <a:off x="5366613" y="5440680"/>
-            <a:ext cx="598932" cy="384048"/>
+            <a:off x="5030571" y="5806440"/>
+            <a:ext cx="1078992" cy="384048"/>
           </a:xfrm>
           <a:prstGeom prst="roundRect">
             <a:avLst/>
@@ -6191,8 +6051,8 @@
         </p:nvSpPr>
         <p:spPr>
           <a:xfrm>
-            <a:off x="5366613" y="5477256"/>
-            <a:ext cx="598932" cy="329184"/>
+            <a:off x="5030571" y="5843016"/>
+            <a:ext cx="1078992" cy="329184"/>
           </a:xfrm>
           <a:prstGeom prst="rect">
             <a:avLst/>
@@ -6213,7 +6073,7 @@
                 </a:solidFill>
                 <a:latin typeface="Calibri"/>
               </a:rPr>
-              <a:t>App</a:t>
+              <a:t>₹299 app</a:t>
             </a:r>
           </a:p>
         </p:txBody>
@@ -6226,8 +6086,8 @@
         </p:nvSpPr>
         <p:spPr>
           <a:xfrm>
-            <a:off x="6130137" y="5440680"/>
-            <a:ext cx="694944" cy="384048"/>
+            <a:off x="6274155" y="5806440"/>
+            <a:ext cx="1271016" cy="384048"/>
           </a:xfrm>
           <a:prstGeom prst="roundRect">
             <a:avLst/>
@@ -6269,8 +6129,8 @@
         </p:nvSpPr>
         <p:spPr>
           <a:xfrm>
-            <a:off x="6130137" y="5477256"/>
-            <a:ext cx="694944" cy="329184"/>
+            <a:off x="6274155" y="5843016"/>
+            <a:ext cx="1271016" cy="329184"/>
           </a:xfrm>
           <a:prstGeom prst="rect">
             <a:avLst/>
@@ -6291,7 +6151,7 @@
                 </a:solidFill>
                 <a:latin typeface="Calibri"/>
               </a:rPr>
-              <a:t>Site</a:t>
+              <a:t>₹499/month</a:t>
             </a:r>
           </a:p>
         </p:txBody>
@@ -6304,8 +6164,8 @@
         </p:nvSpPr>
         <p:spPr>
           <a:xfrm>
-            <a:off x="6989673" y="5440680"/>
-            <a:ext cx="694944" cy="384048"/>
+            <a:off x="7709763" y="5806440"/>
+            <a:ext cx="1271016" cy="384048"/>
           </a:xfrm>
           <a:prstGeom prst="roundRect">
             <a:avLst/>
@@ -6347,8 +6207,8 @@
         </p:nvSpPr>
         <p:spPr>
           <a:xfrm>
-            <a:off x="6989673" y="5477256"/>
-            <a:ext cx="694944" cy="329184"/>
+            <a:off x="7709763" y="5843016"/>
+            <a:ext cx="1271016" cy="329184"/>
           </a:xfrm>
           <a:prstGeom prst="rect">
             <a:avLst/>
@@ -6369,7 +6229,7 @@
                 </a:solidFill>
                 <a:latin typeface="Calibri"/>
               </a:rPr>
-              <a:t>Tool</a:t>
+              <a:t>Level pack</a:t>
             </a:r>
           </a:p>
         </p:txBody>
@@ -6443,8 +6303,8 @@
         </p:nvSpPr>
         <p:spPr>
           <a:xfrm>
-            <a:off x="640080" y="640080"/>
-            <a:ext cx="10881360" cy="1143000"/>
+            <a:off x="640080" y="1783080"/>
+            <a:ext cx="10881360" cy="1737360"/>
           </a:xfrm>
           <a:prstGeom prst="rect">
             <a:avLst/>
@@ -6459,41 +6319,364 @@
           <a:p>
             <a:pPr algn="ctr"/>
             <a:r>
-              <a:rPr sz="3400" b="1">
+              <a:rPr sz="3600" b="1">
                 <a:solidFill>
                   <a:srgbClr val="1D1D1F"/>
                 </a:solidFill>
                 <a:latin typeface="Calibri"/>
               </a:rPr>
-              <a:t>One sheet. Set Review Ready.</a:t>
-            </a:r>
-          </a:p>
-        </p:txBody>
-      </p:sp>
-      <p:pic>
-        <p:nvPicPr>
-          <p:cNvPr id="4" name="Picture 3" descr="shipaton-sheet-qr.png"/>
-          <p:cNvPicPr>
-            <a:picLocks noChangeAspect="1"/>
-          </p:cNvPicPr>
-          <p:nvPr/>
-        </p:nvPicPr>
-        <p:blipFill>
-          <a:blip r:embed="rId2"/>
-          <a:stretch>
-            <a:fillRect/>
-          </a:stretch>
-        </p:blipFill>
-        <p:spPr>
-          <a:xfrm>
-            <a:off x="4160520" y="1965960"/>
-            <a:ext cx="3840480" cy="3840480"/>
+              <a:t>Build anything. Ship something.</a:t>
+            </a:r>
+          </a:p>
+        </p:txBody>
+      </p:sp>
+      <p:sp>
+        <p:nvSpPr>
+          <p:cNvPr id="4" name="TextBox 3"/>
+          <p:cNvSpPr txBox="1"/>
+          <p:nvPr/>
+        </p:nvSpPr>
+        <p:spPr>
+          <a:xfrm>
+            <a:off x="640080" y="3566160"/>
+            <a:ext cx="10881360" cy="777240"/>
           </a:xfrm>
           <a:prstGeom prst="rect">
             <a:avLst/>
           </a:prstGeom>
-        </p:spPr>
-      </p:pic>
+          <a:noFill/>
+        </p:spPr>
+        <p:txBody>
+          <a:bodyPr wrap="square">
+            <a:spAutoFit/>
+          </a:bodyPr>
+          <a:lstStyle/>
+          <a:p>
+            <a:pPr algn="ctr"/>
+            <a:r>
+              <a:rPr sz="2200" b="0">
+                <a:solidFill>
+                  <a:srgbClr val="6E6E73"/>
+                </a:solidFill>
+                <a:latin typeface="Calibri"/>
+              </a:rPr>
+              <a:t>Solo or team.</a:t>
+            </a:r>
+          </a:p>
+        </p:txBody>
+      </p:sp>
+      <p:sp>
+        <p:nvSpPr>
+          <p:cNvPr id="5" name="Rounded Rectangle 4"/>
+          <p:cNvSpPr/>
+          <p:nvPr/>
+        </p:nvSpPr>
+        <p:spPr>
+          <a:xfrm>
+            <a:off x="4507077" y="5440680"/>
+            <a:ext cx="694944" cy="384048"/>
+          </a:xfrm>
+          <a:prstGeom prst="roundRect">
+            <a:avLst/>
+          </a:prstGeom>
+          <a:solidFill>
+            <a:srgbClr val="E8E8ED"/>
+          </a:solidFill>
+          <a:ln>
+            <a:noFill/>
+          </a:ln>
+        </p:spPr>
+        <p:style>
+          <a:lnRef idx="1">
+            <a:schemeClr val="accent1"/>
+          </a:lnRef>
+          <a:fillRef idx="3">
+            <a:schemeClr val="accent1"/>
+          </a:fillRef>
+          <a:effectRef idx="2">
+            <a:schemeClr val="accent1"/>
+          </a:effectRef>
+          <a:fontRef idx="minor">
+            <a:schemeClr val="lt1"/>
+          </a:fontRef>
+        </p:style>
+        <p:txBody>
+          <a:bodyPr rtlCol="0" anchor="ctr"/>
+          <a:lstStyle/>
+          <a:p>
+            <a:pPr algn="ctr"/>
+          </a:p>
+        </p:txBody>
+      </p:sp>
+      <p:sp>
+        <p:nvSpPr>
+          <p:cNvPr id="6" name="TextBox 5"/>
+          <p:cNvSpPr txBox="1"/>
+          <p:nvPr/>
+        </p:nvSpPr>
+        <p:spPr>
+          <a:xfrm>
+            <a:off x="4507077" y="5477256"/>
+            <a:ext cx="694944" cy="329184"/>
+          </a:xfrm>
+          <a:prstGeom prst="rect">
+            <a:avLst/>
+          </a:prstGeom>
+          <a:noFill/>
+        </p:spPr>
+        <p:txBody>
+          <a:bodyPr wrap="square">
+            <a:spAutoFit/>
+          </a:bodyPr>
+          <a:lstStyle/>
+          <a:p>
+            <a:pPr algn="ctr"/>
+            <a:r>
+              <a:rPr sz="1200" b="1">
+                <a:solidFill>
+                  <a:srgbClr val="1D1D1F"/>
+                </a:solidFill>
+                <a:latin typeface="Calibri"/>
+              </a:rPr>
+              <a:t>Game</a:t>
+            </a:r>
+          </a:p>
+        </p:txBody>
+      </p:sp>
+      <p:sp>
+        <p:nvSpPr>
+          <p:cNvPr id="7" name="Rounded Rectangle 6"/>
+          <p:cNvSpPr/>
+          <p:nvPr/>
+        </p:nvSpPr>
+        <p:spPr>
+          <a:xfrm>
+            <a:off x="5366613" y="5440680"/>
+            <a:ext cx="598932" cy="384048"/>
+          </a:xfrm>
+          <a:prstGeom prst="roundRect">
+            <a:avLst/>
+          </a:prstGeom>
+          <a:solidFill>
+            <a:srgbClr val="E8E8ED"/>
+          </a:solidFill>
+          <a:ln>
+            <a:noFill/>
+          </a:ln>
+        </p:spPr>
+        <p:style>
+          <a:lnRef idx="1">
+            <a:schemeClr val="accent1"/>
+          </a:lnRef>
+          <a:fillRef idx="3">
+            <a:schemeClr val="accent1"/>
+          </a:fillRef>
+          <a:effectRef idx="2">
+            <a:schemeClr val="accent1"/>
+          </a:effectRef>
+          <a:fontRef idx="minor">
+            <a:schemeClr val="lt1"/>
+          </a:fontRef>
+        </p:style>
+        <p:txBody>
+          <a:bodyPr rtlCol="0" anchor="ctr"/>
+          <a:lstStyle/>
+          <a:p>
+            <a:pPr algn="ctr"/>
+          </a:p>
+        </p:txBody>
+      </p:sp>
+      <p:sp>
+        <p:nvSpPr>
+          <p:cNvPr id="8" name="TextBox 7"/>
+          <p:cNvSpPr txBox="1"/>
+          <p:nvPr/>
+        </p:nvSpPr>
+        <p:spPr>
+          <a:xfrm>
+            <a:off x="5366613" y="5477256"/>
+            <a:ext cx="598932" cy="329184"/>
+          </a:xfrm>
+          <a:prstGeom prst="rect">
+            <a:avLst/>
+          </a:prstGeom>
+          <a:noFill/>
+        </p:spPr>
+        <p:txBody>
+          <a:bodyPr wrap="square">
+            <a:spAutoFit/>
+          </a:bodyPr>
+          <a:lstStyle/>
+          <a:p>
+            <a:pPr algn="ctr"/>
+            <a:r>
+              <a:rPr sz="1200" b="1">
+                <a:solidFill>
+                  <a:srgbClr val="1D1D1F"/>
+                </a:solidFill>
+                <a:latin typeface="Calibri"/>
+              </a:rPr>
+              <a:t>App</a:t>
+            </a:r>
+          </a:p>
+        </p:txBody>
+      </p:sp>
+      <p:sp>
+        <p:nvSpPr>
+          <p:cNvPr id="9" name="Rounded Rectangle 8"/>
+          <p:cNvSpPr/>
+          <p:nvPr/>
+        </p:nvSpPr>
+        <p:spPr>
+          <a:xfrm>
+            <a:off x="6130137" y="5440680"/>
+            <a:ext cx="694944" cy="384048"/>
+          </a:xfrm>
+          <a:prstGeom prst="roundRect">
+            <a:avLst/>
+          </a:prstGeom>
+          <a:solidFill>
+            <a:srgbClr val="E8E8ED"/>
+          </a:solidFill>
+          <a:ln>
+            <a:noFill/>
+          </a:ln>
+        </p:spPr>
+        <p:style>
+          <a:lnRef idx="1">
+            <a:schemeClr val="accent1"/>
+          </a:lnRef>
+          <a:fillRef idx="3">
+            <a:schemeClr val="accent1"/>
+          </a:fillRef>
+          <a:effectRef idx="2">
+            <a:schemeClr val="accent1"/>
+          </a:effectRef>
+          <a:fontRef idx="minor">
+            <a:schemeClr val="lt1"/>
+          </a:fontRef>
+        </p:style>
+        <p:txBody>
+          <a:bodyPr rtlCol="0" anchor="ctr"/>
+          <a:lstStyle/>
+          <a:p>
+            <a:pPr algn="ctr"/>
+          </a:p>
+        </p:txBody>
+      </p:sp>
+      <p:sp>
+        <p:nvSpPr>
+          <p:cNvPr id="10" name="TextBox 9"/>
+          <p:cNvSpPr txBox="1"/>
+          <p:nvPr/>
+        </p:nvSpPr>
+        <p:spPr>
+          <a:xfrm>
+            <a:off x="6130137" y="5477256"/>
+            <a:ext cx="694944" cy="329184"/>
+          </a:xfrm>
+          <a:prstGeom prst="rect">
+            <a:avLst/>
+          </a:prstGeom>
+          <a:noFill/>
+        </p:spPr>
+        <p:txBody>
+          <a:bodyPr wrap="square">
+            <a:spAutoFit/>
+          </a:bodyPr>
+          <a:lstStyle/>
+          <a:p>
+            <a:pPr algn="ctr"/>
+            <a:r>
+              <a:rPr sz="1200" b="1">
+                <a:solidFill>
+                  <a:srgbClr val="1D1D1F"/>
+                </a:solidFill>
+                <a:latin typeface="Calibri"/>
+              </a:rPr>
+              <a:t>Site</a:t>
+            </a:r>
+          </a:p>
+        </p:txBody>
+      </p:sp>
+      <p:sp>
+        <p:nvSpPr>
+          <p:cNvPr id="11" name="Rounded Rectangle 10"/>
+          <p:cNvSpPr/>
+          <p:nvPr/>
+        </p:nvSpPr>
+        <p:spPr>
+          <a:xfrm>
+            <a:off x="6989673" y="5440680"/>
+            <a:ext cx="694944" cy="384048"/>
+          </a:xfrm>
+          <a:prstGeom prst="roundRect">
+            <a:avLst/>
+          </a:prstGeom>
+          <a:solidFill>
+            <a:srgbClr val="E8E8ED"/>
+          </a:solidFill>
+          <a:ln>
+            <a:noFill/>
+          </a:ln>
+        </p:spPr>
+        <p:style>
+          <a:lnRef idx="1">
+            <a:schemeClr val="accent1"/>
+          </a:lnRef>
+          <a:fillRef idx="3">
+            <a:schemeClr val="accent1"/>
+          </a:fillRef>
+          <a:effectRef idx="2">
+            <a:schemeClr val="accent1"/>
+          </a:effectRef>
+          <a:fontRef idx="minor">
+            <a:schemeClr val="lt1"/>
+          </a:fontRef>
+        </p:style>
+        <p:txBody>
+          <a:bodyPr rtlCol="0" anchor="ctr"/>
+          <a:lstStyle/>
+          <a:p>
+            <a:pPr algn="ctr"/>
+          </a:p>
+        </p:txBody>
+      </p:sp>
+      <p:sp>
+        <p:nvSpPr>
+          <p:cNvPr id="12" name="TextBox 11"/>
+          <p:cNvSpPr txBox="1"/>
+          <p:nvPr/>
+        </p:nvSpPr>
+        <p:spPr>
+          <a:xfrm>
+            <a:off x="6989673" y="5477256"/>
+            <a:ext cx="694944" cy="329184"/>
+          </a:xfrm>
+          <a:prstGeom prst="rect">
+            <a:avLst/>
+          </a:prstGeom>
+          <a:noFill/>
+        </p:spPr>
+        <p:txBody>
+          <a:bodyPr wrap="square">
+            <a:spAutoFit/>
+          </a:bodyPr>
+          <a:lstStyle/>
+          <a:p>
+            <a:pPr algn="ctr"/>
+            <a:r>
+              <a:rPr sz="1200" b="1">
+                <a:solidFill>
+                  <a:srgbClr val="1D1D1F"/>
+                </a:solidFill>
+                <a:latin typeface="Calibri"/>
+              </a:rPr>
+              <a:t>Tool</a:t>
+            </a:r>
+          </a:p>
+        </p:txBody>
+      </p:sp>
     </p:spTree>
   </p:cSld>
   <p:clrMapOvr>
@@ -6563,8 +6746,8 @@
         </p:nvSpPr>
         <p:spPr>
           <a:xfrm>
-            <a:off x="640080" y="1874519"/>
-            <a:ext cx="10881360" cy="1737360"/>
+            <a:off x="640080" y="640080"/>
+            <a:ext cx="10881360" cy="1143000"/>
           </a:xfrm>
           <a:prstGeom prst="rect">
             <a:avLst/>
@@ -6579,251 +6762,41 @@
           <a:p>
             <a:pPr algn="ctr"/>
             <a:r>
-              <a:rPr sz="4000" b="1">
+              <a:rPr sz="3400" b="1">
                 <a:solidFill>
                   <a:srgbClr val="1D1D1F"/>
                 </a:solidFill>
                 <a:latin typeface="Calibri"/>
               </a:rPr>
-              <a:t>Thursday. Make it live.</a:t>
-            </a:r>
-          </a:p>
-        </p:txBody>
-      </p:sp>
-      <p:sp>
-        <p:nvSpPr>
-          <p:cNvPr id="4" name="Rounded Rectangle 3"/>
-          <p:cNvSpPr/>
-          <p:nvPr/>
-        </p:nvSpPr>
-        <p:spPr>
-          <a:xfrm>
-            <a:off x="4168749" y="5257800"/>
-            <a:ext cx="1078992" cy="384048"/>
-          </a:xfrm>
-          <a:prstGeom prst="roundRect">
-            <a:avLst/>
-          </a:prstGeom>
-          <a:solidFill>
-            <a:srgbClr val="E8E8ED"/>
-          </a:solidFill>
-          <a:ln>
-            <a:noFill/>
-          </a:ln>
-        </p:spPr>
-        <p:style>
-          <a:lnRef idx="1">
-            <a:schemeClr val="accent1"/>
-          </a:lnRef>
-          <a:fillRef idx="3">
-            <a:schemeClr val="accent1"/>
-          </a:fillRef>
-          <a:effectRef idx="2">
-            <a:schemeClr val="accent1"/>
-          </a:effectRef>
-          <a:fontRef idx="minor">
-            <a:schemeClr val="lt1"/>
-          </a:fontRef>
-        </p:style>
-        <p:txBody>
-          <a:bodyPr rtlCol="0" anchor="ctr"/>
-          <a:lstStyle/>
-          <a:p>
-            <a:pPr algn="ctr"/>
-          </a:p>
-        </p:txBody>
-      </p:sp>
-      <p:sp>
-        <p:nvSpPr>
-          <p:cNvPr id="5" name="TextBox 4"/>
-          <p:cNvSpPr txBox="1"/>
-          <p:nvPr/>
-        </p:nvSpPr>
-        <p:spPr>
-          <a:xfrm>
-            <a:off x="4168749" y="5294376"/>
-            <a:ext cx="1078992" cy="329184"/>
+              <a:t>One sheet. Set Review Ready.</a:t>
+            </a:r>
+          </a:p>
+        </p:txBody>
+      </p:sp>
+      <p:pic>
+        <p:nvPicPr>
+          <p:cNvPr id="4" name="Picture 3" descr="shipaton-sheet-qr.png"/>
+          <p:cNvPicPr>
+            <a:picLocks noChangeAspect="1"/>
+          </p:cNvPicPr>
+          <p:nvPr/>
+        </p:nvPicPr>
+        <p:blipFill>
+          <a:blip r:embed="rId2"/>
+          <a:stretch>
+            <a:fillRect/>
+          </a:stretch>
+        </p:blipFill>
+        <p:spPr>
+          <a:xfrm>
+            <a:off x="4160520" y="1965960"/>
+            <a:ext cx="3840480" cy="3840480"/>
           </a:xfrm>
           <a:prstGeom prst="rect">
             <a:avLst/>
           </a:prstGeom>
-          <a:noFill/>
-        </p:spPr>
-        <p:txBody>
-          <a:bodyPr wrap="square">
-            <a:spAutoFit/>
-          </a:bodyPr>
-          <a:lstStyle/>
-          <a:p>
-            <a:pPr algn="ctr"/>
-            <a:r>
-              <a:rPr sz="1200" b="1">
-                <a:solidFill>
-                  <a:srgbClr val="1D1D1F"/>
-                </a:solidFill>
-                <a:latin typeface="Calibri"/>
-              </a:rPr>
-              <a:t>Deployed</a:t>
-            </a:r>
-          </a:p>
-        </p:txBody>
-      </p:sp>
-      <p:sp>
-        <p:nvSpPr>
-          <p:cNvPr id="6" name="Rounded Rectangle 5"/>
-          <p:cNvSpPr/>
-          <p:nvPr/>
-        </p:nvSpPr>
-        <p:spPr>
-          <a:xfrm>
-            <a:off x="5412333" y="5257800"/>
-            <a:ext cx="886968" cy="384048"/>
-          </a:xfrm>
-          <a:prstGeom prst="roundRect">
-            <a:avLst/>
-          </a:prstGeom>
-          <a:solidFill>
-            <a:srgbClr val="E8E8ED"/>
-          </a:solidFill>
-          <a:ln>
-            <a:noFill/>
-          </a:ln>
-        </p:spPr>
-        <p:style>
-          <a:lnRef idx="1">
-            <a:schemeClr val="accent1"/>
-          </a:lnRef>
-          <a:fillRef idx="3">
-            <a:schemeClr val="accent1"/>
-          </a:fillRef>
-          <a:effectRef idx="2">
-            <a:schemeClr val="accent1"/>
-          </a:effectRef>
-          <a:fontRef idx="minor">
-            <a:schemeClr val="lt1"/>
-          </a:fontRef>
-        </p:style>
-        <p:txBody>
-          <a:bodyPr rtlCol="0" anchor="ctr"/>
-          <a:lstStyle/>
-          <a:p>
-            <a:pPr algn="ctr"/>
-          </a:p>
-        </p:txBody>
-      </p:sp>
-      <p:sp>
-        <p:nvSpPr>
-          <p:cNvPr id="7" name="TextBox 6"/>
-          <p:cNvSpPr txBox="1"/>
-          <p:nvPr/>
-        </p:nvSpPr>
-        <p:spPr>
-          <a:xfrm>
-            <a:off x="5412333" y="5294376"/>
-            <a:ext cx="886968" cy="329184"/>
-          </a:xfrm>
-          <a:prstGeom prst="rect">
-            <a:avLst/>
-          </a:prstGeom>
-          <a:noFill/>
-        </p:spPr>
-        <p:txBody>
-          <a:bodyPr wrap="square">
-            <a:spAutoFit/>
-          </a:bodyPr>
-          <a:lstStyle/>
-          <a:p>
-            <a:pPr algn="ctr"/>
-            <a:r>
-              <a:rPr sz="1200" b="1">
-                <a:solidFill>
-                  <a:srgbClr val="1D1D1F"/>
-                </a:solidFill>
-                <a:latin typeface="Calibri"/>
-              </a:rPr>
-              <a:t>Usable</a:t>
-            </a:r>
-          </a:p>
-        </p:txBody>
-      </p:sp>
-      <p:sp>
-        <p:nvSpPr>
-          <p:cNvPr id="8" name="Rounded Rectangle 7"/>
-          <p:cNvSpPr/>
-          <p:nvPr/>
-        </p:nvSpPr>
-        <p:spPr>
-          <a:xfrm>
-            <a:off x="6463893" y="5257800"/>
-            <a:ext cx="1559052" cy="384048"/>
-          </a:xfrm>
-          <a:prstGeom prst="roundRect">
-            <a:avLst/>
-          </a:prstGeom>
-          <a:solidFill>
-            <a:srgbClr val="E8E8ED"/>
-          </a:solidFill>
-          <a:ln>
-            <a:noFill/>
-          </a:ln>
-        </p:spPr>
-        <p:style>
-          <a:lnRef idx="1">
-            <a:schemeClr val="accent1"/>
-          </a:lnRef>
-          <a:fillRef idx="3">
-            <a:schemeClr val="accent1"/>
-          </a:fillRef>
-          <a:effectRef idx="2">
-            <a:schemeClr val="accent1"/>
-          </a:effectRef>
-          <a:fontRef idx="minor">
-            <a:schemeClr val="lt1"/>
-          </a:fontRef>
-        </p:style>
-        <p:txBody>
-          <a:bodyPr rtlCol="0" anchor="ctr"/>
-          <a:lstStyle/>
-          <a:p>
-            <a:pPr algn="ctr"/>
-          </a:p>
-        </p:txBody>
-      </p:sp>
-      <p:sp>
-        <p:nvSpPr>
-          <p:cNvPr id="9" name="TextBox 8"/>
-          <p:cNvSpPr txBox="1"/>
-          <p:nvPr/>
-        </p:nvSpPr>
-        <p:spPr>
-          <a:xfrm>
-            <a:off x="6463893" y="5294376"/>
-            <a:ext cx="1559052" cy="329184"/>
-          </a:xfrm>
-          <a:prstGeom prst="rect">
-            <a:avLst/>
-          </a:prstGeom>
-          <a:noFill/>
-        </p:spPr>
-        <p:txBody>
-          <a:bodyPr wrap="square">
-            <a:spAutoFit/>
-          </a:bodyPr>
-          <a:lstStyle/>
-          <a:p>
-            <a:pPr algn="ctr"/>
-            <a:r>
-              <a:rPr sz="1200" b="1">
-                <a:solidFill>
-                  <a:srgbClr val="1D1D1F"/>
-                </a:solidFill>
-                <a:latin typeface="Calibri"/>
-              </a:rPr>
-              <a:t>Payments work</a:t>
-            </a:r>
-          </a:p>
-        </p:txBody>
-      </p:sp>
+        </p:spPr>
+      </p:pic>
     </p:spTree>
   </p:cSld>
   <p:clrMapOvr>
@@ -6893,8 +6866,8 @@
         </p:nvSpPr>
         <p:spPr>
           <a:xfrm>
-            <a:off x="640080" y="1051560"/>
-            <a:ext cx="10881360" cy="1005840"/>
+            <a:off x="640080" y="1874519"/>
+            <a:ext cx="10881360" cy="1737360"/>
           </a:xfrm>
           <a:prstGeom prst="rect">
             <a:avLst/>
@@ -6909,97 +6882,27 @@
           <a:p>
             <a:pPr algn="ctr"/>
             <a:r>
-              <a:rPr sz="3600" b="1">
+              <a:rPr sz="4000" b="1">
                 <a:solidFill>
                   <a:srgbClr val="1D1D1F"/>
                 </a:solidFill>
                 <a:latin typeface="Calibri"/>
               </a:rPr>
-              <a:t>Ship it. Get reviewed.</a:t>
-            </a:r>
-          </a:p>
-        </p:txBody>
-      </p:sp>
-      <p:sp>
-        <p:nvSpPr>
-          <p:cNvPr id="4" name="TextBox 3"/>
-          <p:cNvSpPr txBox="1"/>
-          <p:nvPr/>
-        </p:nvSpPr>
-        <p:spPr>
-          <a:xfrm>
-            <a:off x="822960" y="2331720"/>
-            <a:ext cx="10515600" cy="1828800"/>
-          </a:xfrm>
-          <a:prstGeom prst="rect">
-            <a:avLst/>
-          </a:prstGeom>
-          <a:noFill/>
-        </p:spPr>
-        <p:txBody>
-          <a:bodyPr wrap="square">
-            <a:spAutoFit/>
-          </a:bodyPr>
-          <a:lstStyle/>
-          <a:p>
-            <a:pPr algn="ctr"/>
-            <a:r>
-              <a:rPr sz="2400" b="1">
-                <a:solidFill>
-                  <a:srgbClr val="1D1D1F"/>
-                </a:solidFill>
-                <a:latin typeface="Calibri"/>
-              </a:rPr>
-              <a:t>We're going to see 10 person billion-dollar companies pretty soon.</a:t>
-            </a:r>
-          </a:p>
-        </p:txBody>
-      </p:sp>
-      <p:sp>
-        <p:nvSpPr>
-          <p:cNvPr id="5" name="TextBox 4"/>
-          <p:cNvSpPr txBox="1"/>
-          <p:nvPr/>
-        </p:nvSpPr>
-        <p:spPr>
-          <a:xfrm>
-            <a:off x="640080" y="4297680"/>
-            <a:ext cx="10881360" cy="365760"/>
-          </a:xfrm>
-          <a:prstGeom prst="rect">
-            <a:avLst/>
-          </a:prstGeom>
-          <a:noFill/>
-        </p:spPr>
-        <p:txBody>
-          <a:bodyPr wrap="square">
-            <a:spAutoFit/>
-          </a:bodyPr>
-          <a:lstStyle/>
-          <a:p>
-            <a:pPr algn="ctr"/>
-            <a:r>
-              <a:rPr sz="1400" b="1">
-                <a:solidFill>
-                  <a:srgbClr val="6E6E73"/>
-                </a:solidFill>
-                <a:latin typeface="Calibri"/>
-              </a:rPr>
-              <a:t>Sam Altman</a:t>
-            </a:r>
-          </a:p>
-        </p:txBody>
-      </p:sp>
-      <p:sp>
-        <p:nvSpPr>
-          <p:cNvPr id="6" name="Rounded Rectangle 5"/>
+              <a:t>Thursday. Make it live.</a:t>
+            </a:r>
+          </a:p>
+        </p:txBody>
+      </p:sp>
+      <p:sp>
+        <p:nvSpPr>
+          <p:cNvPr id="4" name="Rounded Rectangle 3"/>
           <p:cNvSpPr/>
           <p:nvPr/>
         </p:nvSpPr>
         <p:spPr>
           <a:xfrm>
-            <a:off x="5220309" y="5257800"/>
-            <a:ext cx="1751076" cy="384048"/>
+            <a:off x="4168749" y="5257800"/>
+            <a:ext cx="1078992" cy="384048"/>
           </a:xfrm>
           <a:prstGeom prst="roundRect">
             <a:avLst/>
@@ -7035,14 +6938,14 @@
       </p:sp>
       <p:sp>
         <p:nvSpPr>
-          <p:cNvPr id="7" name="TextBox 6"/>
+          <p:cNvPr id="5" name="TextBox 4"/>
           <p:cNvSpPr txBox="1"/>
           <p:nvPr/>
         </p:nvSpPr>
         <p:spPr>
           <a:xfrm>
-            <a:off x="5220309" y="5294376"/>
-            <a:ext cx="1751076" cy="329184"/>
+            <a:off x="4168749" y="5294376"/>
+            <a:ext cx="1078992" cy="329184"/>
           </a:xfrm>
           <a:prstGeom prst="rect">
             <a:avLst/>
@@ -7063,7 +6966,163 @@
                 </a:solidFill>
                 <a:latin typeface="Calibri"/>
               </a:rPr>
-              <a:t>DevFest tickets</a:t>
+              <a:t>Deployed</a:t>
+            </a:r>
+          </a:p>
+        </p:txBody>
+      </p:sp>
+      <p:sp>
+        <p:nvSpPr>
+          <p:cNvPr id="6" name="Rounded Rectangle 5"/>
+          <p:cNvSpPr/>
+          <p:nvPr/>
+        </p:nvSpPr>
+        <p:spPr>
+          <a:xfrm>
+            <a:off x="5412333" y="5257800"/>
+            <a:ext cx="886968" cy="384048"/>
+          </a:xfrm>
+          <a:prstGeom prst="roundRect">
+            <a:avLst/>
+          </a:prstGeom>
+          <a:solidFill>
+            <a:srgbClr val="E8E8ED"/>
+          </a:solidFill>
+          <a:ln>
+            <a:noFill/>
+          </a:ln>
+        </p:spPr>
+        <p:style>
+          <a:lnRef idx="1">
+            <a:schemeClr val="accent1"/>
+          </a:lnRef>
+          <a:fillRef idx="3">
+            <a:schemeClr val="accent1"/>
+          </a:fillRef>
+          <a:effectRef idx="2">
+            <a:schemeClr val="accent1"/>
+          </a:effectRef>
+          <a:fontRef idx="minor">
+            <a:schemeClr val="lt1"/>
+          </a:fontRef>
+        </p:style>
+        <p:txBody>
+          <a:bodyPr rtlCol="0" anchor="ctr"/>
+          <a:lstStyle/>
+          <a:p>
+            <a:pPr algn="ctr"/>
+          </a:p>
+        </p:txBody>
+      </p:sp>
+      <p:sp>
+        <p:nvSpPr>
+          <p:cNvPr id="7" name="TextBox 6"/>
+          <p:cNvSpPr txBox="1"/>
+          <p:nvPr/>
+        </p:nvSpPr>
+        <p:spPr>
+          <a:xfrm>
+            <a:off x="5412333" y="5294376"/>
+            <a:ext cx="886968" cy="329184"/>
+          </a:xfrm>
+          <a:prstGeom prst="rect">
+            <a:avLst/>
+          </a:prstGeom>
+          <a:noFill/>
+        </p:spPr>
+        <p:txBody>
+          <a:bodyPr wrap="square">
+            <a:spAutoFit/>
+          </a:bodyPr>
+          <a:lstStyle/>
+          <a:p>
+            <a:pPr algn="ctr"/>
+            <a:r>
+              <a:rPr sz="1200" b="1">
+                <a:solidFill>
+                  <a:srgbClr val="1D1D1F"/>
+                </a:solidFill>
+                <a:latin typeface="Calibri"/>
+              </a:rPr>
+              <a:t>Usable</a:t>
+            </a:r>
+          </a:p>
+        </p:txBody>
+      </p:sp>
+      <p:sp>
+        <p:nvSpPr>
+          <p:cNvPr id="8" name="Rounded Rectangle 7"/>
+          <p:cNvSpPr/>
+          <p:nvPr/>
+        </p:nvSpPr>
+        <p:spPr>
+          <a:xfrm>
+            <a:off x="6463893" y="5257800"/>
+            <a:ext cx="1559052" cy="384048"/>
+          </a:xfrm>
+          <a:prstGeom prst="roundRect">
+            <a:avLst/>
+          </a:prstGeom>
+          <a:solidFill>
+            <a:srgbClr val="E8E8ED"/>
+          </a:solidFill>
+          <a:ln>
+            <a:noFill/>
+          </a:ln>
+        </p:spPr>
+        <p:style>
+          <a:lnRef idx="1">
+            <a:schemeClr val="accent1"/>
+          </a:lnRef>
+          <a:fillRef idx="3">
+            <a:schemeClr val="accent1"/>
+          </a:fillRef>
+          <a:effectRef idx="2">
+            <a:schemeClr val="accent1"/>
+          </a:effectRef>
+          <a:fontRef idx="minor">
+            <a:schemeClr val="lt1"/>
+          </a:fontRef>
+        </p:style>
+        <p:txBody>
+          <a:bodyPr rtlCol="0" anchor="ctr"/>
+          <a:lstStyle/>
+          <a:p>
+            <a:pPr algn="ctr"/>
+          </a:p>
+        </p:txBody>
+      </p:sp>
+      <p:sp>
+        <p:nvSpPr>
+          <p:cNvPr id="9" name="TextBox 8"/>
+          <p:cNvSpPr txBox="1"/>
+          <p:nvPr/>
+        </p:nvSpPr>
+        <p:spPr>
+          <a:xfrm>
+            <a:off x="6463893" y="5294376"/>
+            <a:ext cx="1559052" cy="329184"/>
+          </a:xfrm>
+          <a:prstGeom prst="rect">
+            <a:avLst/>
+          </a:prstGeom>
+          <a:noFill/>
+        </p:spPr>
+        <p:txBody>
+          <a:bodyPr wrap="square">
+            <a:spAutoFit/>
+          </a:bodyPr>
+          <a:lstStyle/>
+          <a:p>
+            <a:pPr algn="ctr"/>
+            <a:r>
+              <a:rPr sz="1200" b="1">
+                <a:solidFill>
+                  <a:srgbClr val="1D1D1F"/>
+                </a:solidFill>
+                <a:latin typeface="Calibri"/>
+              </a:rPr>
+              <a:t>Payments work</a:t>
             </a:r>
           </a:p>
         </p:txBody>
@@ -7101,6 +7160,250 @@
             <a:avLst/>
           </a:prstGeom>
           <a:solidFill>
+            <a:srgbClr val="F5F5F7"/>
+          </a:solidFill>
+          <a:ln>
+            <a:noFill/>
+          </a:ln>
+        </p:spPr>
+        <p:style>
+          <a:lnRef idx="1">
+            <a:schemeClr val="accent1"/>
+          </a:lnRef>
+          <a:fillRef idx="3">
+            <a:schemeClr val="accent1"/>
+          </a:fillRef>
+          <a:effectRef idx="2">
+            <a:schemeClr val="accent1"/>
+          </a:effectRef>
+          <a:fontRef idx="minor">
+            <a:schemeClr val="lt1"/>
+          </a:fontRef>
+        </p:style>
+        <p:txBody>
+          <a:bodyPr rtlCol="0" anchor="ctr"/>
+          <a:lstStyle/>
+          <a:p>
+            <a:pPr algn="ctr"/>
+          </a:p>
+        </p:txBody>
+      </p:sp>
+      <p:sp>
+        <p:nvSpPr>
+          <p:cNvPr id="3" name="TextBox 2"/>
+          <p:cNvSpPr txBox="1"/>
+          <p:nvPr/>
+        </p:nvSpPr>
+        <p:spPr>
+          <a:xfrm>
+            <a:off x="640080" y="1051560"/>
+            <a:ext cx="10881360" cy="1005840"/>
+          </a:xfrm>
+          <a:prstGeom prst="rect">
+            <a:avLst/>
+          </a:prstGeom>
+          <a:noFill/>
+        </p:spPr>
+        <p:txBody>
+          <a:bodyPr wrap="square">
+            <a:spAutoFit/>
+          </a:bodyPr>
+          <a:lstStyle/>
+          <a:p>
+            <a:pPr algn="ctr"/>
+            <a:r>
+              <a:rPr sz="3600" b="1">
+                <a:solidFill>
+                  <a:srgbClr val="1D1D1F"/>
+                </a:solidFill>
+                <a:latin typeface="Calibri"/>
+              </a:rPr>
+              <a:t>Ship it. Get reviewed.</a:t>
+            </a:r>
+          </a:p>
+        </p:txBody>
+      </p:sp>
+      <p:sp>
+        <p:nvSpPr>
+          <p:cNvPr id="4" name="TextBox 3"/>
+          <p:cNvSpPr txBox="1"/>
+          <p:nvPr/>
+        </p:nvSpPr>
+        <p:spPr>
+          <a:xfrm>
+            <a:off x="822960" y="2331720"/>
+            <a:ext cx="10515600" cy="1828800"/>
+          </a:xfrm>
+          <a:prstGeom prst="rect">
+            <a:avLst/>
+          </a:prstGeom>
+          <a:noFill/>
+        </p:spPr>
+        <p:txBody>
+          <a:bodyPr wrap="square">
+            <a:spAutoFit/>
+          </a:bodyPr>
+          <a:lstStyle/>
+          <a:p>
+            <a:pPr algn="ctr"/>
+            <a:r>
+              <a:rPr sz="2400" b="1">
+                <a:solidFill>
+                  <a:srgbClr val="1D1D1F"/>
+                </a:solidFill>
+                <a:latin typeface="Calibri"/>
+              </a:rPr>
+              <a:t>We're going to see 10 person billion-dollar companies pretty soon.</a:t>
+            </a:r>
+          </a:p>
+        </p:txBody>
+      </p:sp>
+      <p:sp>
+        <p:nvSpPr>
+          <p:cNvPr id="5" name="TextBox 4"/>
+          <p:cNvSpPr txBox="1"/>
+          <p:nvPr/>
+        </p:nvSpPr>
+        <p:spPr>
+          <a:xfrm>
+            <a:off x="640080" y="4297680"/>
+            <a:ext cx="10881360" cy="365760"/>
+          </a:xfrm>
+          <a:prstGeom prst="rect">
+            <a:avLst/>
+          </a:prstGeom>
+          <a:noFill/>
+        </p:spPr>
+        <p:txBody>
+          <a:bodyPr wrap="square">
+            <a:spAutoFit/>
+          </a:bodyPr>
+          <a:lstStyle/>
+          <a:p>
+            <a:pPr algn="ctr"/>
+            <a:r>
+              <a:rPr sz="1400" b="1">
+                <a:solidFill>
+                  <a:srgbClr val="6E6E73"/>
+                </a:solidFill>
+                <a:latin typeface="Calibri"/>
+              </a:rPr>
+              <a:t>Sam Altman</a:t>
+            </a:r>
+          </a:p>
+        </p:txBody>
+      </p:sp>
+      <p:sp>
+        <p:nvSpPr>
+          <p:cNvPr id="6" name="Rounded Rectangle 5"/>
+          <p:cNvSpPr/>
+          <p:nvPr/>
+        </p:nvSpPr>
+        <p:spPr>
+          <a:xfrm>
+            <a:off x="5220309" y="5257800"/>
+            <a:ext cx="1751076" cy="384048"/>
+          </a:xfrm>
+          <a:prstGeom prst="roundRect">
+            <a:avLst/>
+          </a:prstGeom>
+          <a:solidFill>
+            <a:srgbClr val="E8E8ED"/>
+          </a:solidFill>
+          <a:ln>
+            <a:noFill/>
+          </a:ln>
+        </p:spPr>
+        <p:style>
+          <a:lnRef idx="1">
+            <a:schemeClr val="accent1"/>
+          </a:lnRef>
+          <a:fillRef idx="3">
+            <a:schemeClr val="accent1"/>
+          </a:fillRef>
+          <a:effectRef idx="2">
+            <a:schemeClr val="accent1"/>
+          </a:effectRef>
+          <a:fontRef idx="minor">
+            <a:schemeClr val="lt1"/>
+          </a:fontRef>
+        </p:style>
+        <p:txBody>
+          <a:bodyPr rtlCol="0" anchor="ctr"/>
+          <a:lstStyle/>
+          <a:p>
+            <a:pPr algn="ctr"/>
+          </a:p>
+        </p:txBody>
+      </p:sp>
+      <p:sp>
+        <p:nvSpPr>
+          <p:cNvPr id="7" name="TextBox 6"/>
+          <p:cNvSpPr txBox="1"/>
+          <p:nvPr/>
+        </p:nvSpPr>
+        <p:spPr>
+          <a:xfrm>
+            <a:off x="5220309" y="5294376"/>
+            <a:ext cx="1751076" cy="329184"/>
+          </a:xfrm>
+          <a:prstGeom prst="rect">
+            <a:avLst/>
+          </a:prstGeom>
+          <a:noFill/>
+        </p:spPr>
+        <p:txBody>
+          <a:bodyPr wrap="square">
+            <a:spAutoFit/>
+          </a:bodyPr>
+          <a:lstStyle/>
+          <a:p>
+            <a:pPr algn="ctr"/>
+            <a:r>
+              <a:rPr sz="1200" b="1">
+                <a:solidFill>
+                  <a:srgbClr val="1D1D1F"/>
+                </a:solidFill>
+                <a:latin typeface="Calibri"/>
+              </a:rPr>
+              <a:t>DevFest tickets</a:t>
+            </a:r>
+          </a:p>
+        </p:txBody>
+      </p:sp>
+    </p:spTree>
+  </p:cSld>
+  <p:clrMapOvr>
+    <a:masterClrMapping/>
+  </p:clrMapOvr>
+</p:sld>
+</file>
+
+<file path=ppt/slides/slide18.xml><?xml version="1.0" encoding="utf-8"?>
+<p:sld xmlns:a="http://schemas.openxmlformats.org/drawingml/2006/main" xmlns:p="http://schemas.openxmlformats.org/presentationml/2006/main" xmlns:r="http://schemas.openxmlformats.org/officeDocument/2006/relationships">
+  <p:cSld>
+    <p:spTree>
+      <p:nvGrpSpPr>
+        <p:cNvPr id="1" name=""/>
+        <p:cNvGrpSpPr/>
+        <p:nvPr/>
+      </p:nvGrpSpPr>
+      <p:grpSpPr/>
+      <p:sp>
+        <p:nvSpPr>
+          <p:cNvPr id="2" name="Rectangle 1"/>
+          <p:cNvSpPr/>
+          <p:nvPr/>
+        </p:nvSpPr>
+        <p:spPr>
+          <a:xfrm>
+            <a:off x="0" y="0"/>
+            <a:ext cx="12191695" cy="6858000"/>
+          </a:xfrm>
+          <a:prstGeom prst="rect">
+            <a:avLst/>
+          </a:prstGeom>
+          <a:solidFill>
             <a:srgbClr val="070710"/>
           </a:solidFill>
           <a:ln>
@@ -7131,7 +7434,7 @@
       </p:sp>
       <p:pic>
         <p:nvPicPr>
-          <p:cNvPr id="3" name="Picture 2" descr="tmp5s_lp2nt.png"/>
+          <p:cNvPr id="3" name="Picture 2" descr="tmpc_aj4z39.png"/>
           <p:cNvPicPr>
             <a:picLocks noChangeAspect="1"/>
           </p:cNvPicPr>
@@ -7161,7 +7464,7 @@
 </p:sld>
 </file>
 
-<file path=ppt/slides/slide18.xml><?xml version="1.0" encoding="utf-8"?>
+<file path=ppt/slides/slide19.xml><?xml version="1.0" encoding="utf-8"?>
 <p:sld xmlns:a="http://schemas.openxmlformats.org/drawingml/2006/main" xmlns:p="http://schemas.openxmlformats.org/presentationml/2006/main" xmlns:r="http://schemas.openxmlformats.org/officeDocument/2006/relationships">
   <p:cSld>
     <p:spTree>
@@ -7307,7 +7610,7 @@
         </p:nvSpPr>
         <p:spPr>
           <a:xfrm>
-            <a:off x="640080" y="1691640"/>
+            <a:off x="640080" y="1417320"/>
             <a:ext cx="10881360" cy="1737360"/>
           </a:xfrm>
           <a:prstGeom prst="rect">
@@ -7329,7 +7632,7 @@
                 </a:solidFill>
                 <a:latin typeface="Calibri"/>
               </a:rPr>
-              <a:t>You don't need a big team.</a:t>
+              <a:t>What's stopping us from getting paid?</a:t>
             </a:r>
           </a:p>
         </p:txBody>
@@ -7342,7 +7645,7 @@
         </p:nvSpPr>
         <p:spPr>
           <a:xfrm>
-            <a:off x="640080" y="3474720"/>
+            <a:off x="640080" y="3200400"/>
             <a:ext cx="10881360" cy="777240"/>
           </a:xfrm>
           <a:prstGeom prst="rect">
@@ -7364,7 +7667,7 @@
                 </a:solidFill>
                 <a:latin typeface="Calibri"/>
               </a:rPr>
-              <a:t>Or months. Or an ad budget.</a:t>
+              <a:t>We know how to build.</a:t>
             </a:r>
           </a:p>
         </p:txBody>
@@ -7377,8 +7680,8 @@
         </p:nvSpPr>
         <p:spPr>
           <a:xfrm>
-            <a:off x="4790541" y="5806440"/>
-            <a:ext cx="1271016" cy="384048"/>
+            <a:off x="4548225" y="5349240"/>
+            <a:ext cx="3095244" cy="384048"/>
           </a:xfrm>
           <a:prstGeom prst="roundRect">
             <a:avLst/>
@@ -7420,8 +7723,8 @@
         </p:nvSpPr>
         <p:spPr>
           <a:xfrm>
-            <a:off x="4790541" y="5843016"/>
-            <a:ext cx="1271016" cy="329184"/>
+            <a:off x="4548225" y="5385816"/>
+            <a:ext cx="3095244" cy="329184"/>
           </a:xfrm>
           <a:prstGeom prst="rect">
             <a:avLst/>
@@ -7442,85 +7745,7 @@
                 </a:solidFill>
                 <a:latin typeface="Calibri"/>
               </a:rPr>
-              <a:t>Super Meme</a:t>
-            </a:r>
-          </a:p>
-        </p:txBody>
-      </p:sp>
-      <p:sp>
-        <p:nvSpPr>
-          <p:cNvPr id="7" name="Rounded Rectangle 6"/>
-          <p:cNvSpPr/>
-          <p:nvPr/>
-        </p:nvSpPr>
-        <p:spPr>
-          <a:xfrm>
-            <a:off x="6226149" y="5806440"/>
-            <a:ext cx="1175004" cy="384048"/>
-          </a:xfrm>
-          <a:prstGeom prst="roundRect">
-            <a:avLst/>
-          </a:prstGeom>
-          <a:solidFill>
-            <a:srgbClr val="E8E8ED"/>
-          </a:solidFill>
-          <a:ln>
-            <a:noFill/>
-          </a:ln>
-        </p:spPr>
-        <p:style>
-          <a:lnRef idx="1">
-            <a:schemeClr val="accent1"/>
-          </a:lnRef>
-          <a:fillRef idx="3">
-            <a:schemeClr val="accent1"/>
-          </a:fillRef>
-          <a:effectRef idx="2">
-            <a:schemeClr val="accent1"/>
-          </a:effectRef>
-          <a:fontRef idx="minor">
-            <a:schemeClr val="lt1"/>
-          </a:fontRef>
-        </p:style>
-        <p:txBody>
-          <a:bodyPr rtlCol="0" anchor="ctr"/>
-          <a:lstStyle/>
-          <a:p>
-            <a:pPr algn="ctr"/>
-          </a:p>
-        </p:txBody>
-      </p:sp>
-      <p:sp>
-        <p:nvSpPr>
-          <p:cNvPr id="8" name="TextBox 7"/>
-          <p:cNvSpPr txBox="1"/>
-          <p:nvPr/>
-        </p:nvSpPr>
-        <p:spPr>
-          <a:xfrm>
-            <a:off x="6226149" y="5843016"/>
-            <a:ext cx="1175004" cy="329184"/>
-          </a:xfrm>
-          <a:prstGeom prst="rect">
-            <a:avLst/>
-          </a:prstGeom>
-          <a:noFill/>
-        </p:spPr>
-        <p:txBody>
-          <a:bodyPr wrap="square">
-            <a:spAutoFit/>
-          </a:bodyPr>
-          <a:lstStyle/>
-          <a:p>
-            <a:pPr algn="ctr"/>
-            <a:r>
-              <a:rPr sz="1200" b="1">
-                <a:solidFill>
-                  <a:srgbClr val="1D1D1F"/>
-                </a:solidFill>
-                <a:latin typeface="Calibri"/>
-              </a:rPr>
-              <a:t>DroidClaw</a:t>
+              <a:t>Getting paid takes resilience</a:t>
             </a:r>
           </a:p>
         </p:txBody>
@@ -7594,7 +7819,7 @@
         </p:nvSpPr>
         <p:spPr>
           <a:xfrm>
-            <a:off x="640080" y="1554480"/>
+            <a:off x="640080" y="1691640"/>
             <a:ext cx="10881360" cy="1737360"/>
           </a:xfrm>
           <a:prstGeom prst="rect">
@@ -7610,13 +7835,13 @@
           <a:p>
             <a:pPr algn="ctr"/>
             <a:r>
-              <a:rPr sz="3400" b="1">
+              <a:rPr sz="3600" b="1">
                 <a:solidFill>
                   <a:srgbClr val="1D1D1F"/>
                 </a:solidFill>
                 <a:latin typeface="Calibri"/>
               </a:rPr>
-              <a:t>You don't need the next Instagram.</a:t>
+              <a:t>You don't need a big team.</a:t>
             </a:r>
           </a:p>
         </p:txBody>
@@ -7629,7 +7854,7 @@
         </p:nvSpPr>
         <p:spPr>
           <a:xfrm>
-            <a:off x="640080" y="3337560"/>
+            <a:off x="640080" y="3474720"/>
             <a:ext cx="10881360" cy="777240"/>
           </a:xfrm>
           <a:prstGeom prst="rect">
@@ -7651,7 +7876,7 @@
                 </a:solidFill>
                 <a:latin typeface="Calibri"/>
               </a:rPr>
-              <a:t>One problem. A few people.</a:t>
+              <a:t>Or months. Or an ad budget.</a:t>
             </a:r>
           </a:p>
         </p:txBody>
@@ -7664,8 +7889,8 @@
         </p:nvSpPr>
         <p:spPr>
           <a:xfrm>
-            <a:off x="2538831" y="5074920"/>
-            <a:ext cx="1367028" cy="384048"/>
+            <a:off x="4790541" y="5806440"/>
+            <a:ext cx="1271016" cy="384048"/>
           </a:xfrm>
           <a:prstGeom prst="roundRect">
             <a:avLst/>
@@ -7707,8 +7932,8 @@
         </p:nvSpPr>
         <p:spPr>
           <a:xfrm>
-            <a:off x="2538831" y="5111496"/>
-            <a:ext cx="1367028" cy="329184"/>
+            <a:off x="4790541" y="5843016"/>
+            <a:ext cx="1271016" cy="329184"/>
           </a:xfrm>
           <a:prstGeom prst="rect">
             <a:avLst/>
@@ -7729,7 +7954,7 @@
                 </a:solidFill>
                 <a:latin typeface="Calibri"/>
               </a:rPr>
-              <a:t>Puzzle game</a:t>
+              <a:t>Super Meme</a:t>
             </a:r>
           </a:p>
         </p:txBody>
@@ -7742,8 +7967,8 @@
         </p:nvSpPr>
         <p:spPr>
           <a:xfrm>
-            <a:off x="4070451" y="5074920"/>
-            <a:ext cx="1847088" cy="384048"/>
+            <a:off x="6226149" y="5806440"/>
+            <a:ext cx="1175004" cy="384048"/>
           </a:xfrm>
           <a:prstGeom prst="roundRect">
             <a:avLst/>
@@ -7785,8 +8010,8 @@
         </p:nvSpPr>
         <p:spPr>
           <a:xfrm>
-            <a:off x="4070451" y="5111496"/>
-            <a:ext cx="1847088" cy="329184"/>
+            <a:off x="6226149" y="5843016"/>
+            <a:ext cx="1175004" cy="329184"/>
           </a:xfrm>
           <a:prstGeom prst="rect">
             <a:avLst/>
@@ -7807,163 +8032,7 @@
                 </a:solidFill>
                 <a:latin typeface="Calibri"/>
               </a:rPr>
-              <a:t>Resume formatter</a:t>
-            </a:r>
-          </a:p>
-        </p:txBody>
-      </p:sp>
-      <p:sp>
-        <p:nvSpPr>
-          <p:cNvPr id="9" name="Rounded Rectangle 8"/>
-          <p:cNvSpPr/>
-          <p:nvPr/>
-        </p:nvSpPr>
-        <p:spPr>
-          <a:xfrm>
-            <a:off x="6082131" y="5074920"/>
-            <a:ext cx="1943100" cy="384048"/>
-          </a:xfrm>
-          <a:prstGeom prst="roundRect">
-            <a:avLst/>
-          </a:prstGeom>
-          <a:solidFill>
-            <a:srgbClr val="E8E8ED"/>
-          </a:solidFill>
-          <a:ln>
-            <a:noFill/>
-          </a:ln>
-        </p:spPr>
-        <p:style>
-          <a:lnRef idx="1">
-            <a:schemeClr val="accent1"/>
-          </a:lnRef>
-          <a:fillRef idx="3">
-            <a:schemeClr val="accent1"/>
-          </a:fillRef>
-          <a:effectRef idx="2">
-            <a:schemeClr val="accent1"/>
-          </a:effectRef>
-          <a:fontRef idx="minor">
-            <a:schemeClr val="lt1"/>
-          </a:fontRef>
-        </p:style>
-        <p:txBody>
-          <a:bodyPr rtlCol="0" anchor="ctr"/>
-          <a:lstStyle/>
-          <a:p>
-            <a:pPr algn="ctr"/>
-          </a:p>
-        </p:txBody>
-      </p:sp>
-      <p:sp>
-        <p:nvSpPr>
-          <p:cNvPr id="10" name="TextBox 9"/>
-          <p:cNvSpPr txBox="1"/>
-          <p:nvPr/>
-        </p:nvSpPr>
-        <p:spPr>
-          <a:xfrm>
-            <a:off x="6082131" y="5111496"/>
-            <a:ext cx="1943100" cy="329184"/>
-          </a:xfrm>
-          <a:prstGeom prst="rect">
-            <a:avLst/>
-          </a:prstGeom>
-          <a:noFill/>
-        </p:spPr>
-        <p:txBody>
-          <a:bodyPr wrap="square">
-            <a:spAutoFit/>
-          </a:bodyPr>
-          <a:lstStyle/>
-          <a:p>
-            <a:pPr algn="ctr"/>
-            <a:r>
-              <a:rPr sz="1200" b="1">
-                <a:solidFill>
-                  <a:srgbClr val="1D1D1F"/>
-                </a:solidFill>
-                <a:latin typeface="Calibri"/>
-              </a:rPr>
-              <a:t>Invoice reminders</a:t>
-            </a:r>
-          </a:p>
-        </p:txBody>
-      </p:sp>
-      <p:sp>
-        <p:nvSpPr>
-          <p:cNvPr id="11" name="Rounded Rectangle 10"/>
-          <p:cNvSpPr/>
-          <p:nvPr/>
-        </p:nvSpPr>
-        <p:spPr>
-          <a:xfrm>
-            <a:off x="8189823" y="5074920"/>
-            <a:ext cx="1463040" cy="384048"/>
-          </a:xfrm>
-          <a:prstGeom prst="roundRect">
-            <a:avLst/>
-          </a:prstGeom>
-          <a:solidFill>
-            <a:srgbClr val="E8E8ED"/>
-          </a:solidFill>
-          <a:ln>
-            <a:noFill/>
-          </a:ln>
-        </p:spPr>
-        <p:style>
-          <a:lnRef idx="1">
-            <a:schemeClr val="accent1"/>
-          </a:lnRef>
-          <a:fillRef idx="3">
-            <a:schemeClr val="accent1"/>
-          </a:fillRef>
-          <a:effectRef idx="2">
-            <a:schemeClr val="accent1"/>
-          </a:effectRef>
-          <a:fontRef idx="minor">
-            <a:schemeClr val="lt1"/>
-          </a:fontRef>
-        </p:style>
-        <p:txBody>
-          <a:bodyPr rtlCol="0" anchor="ctr"/>
-          <a:lstStyle/>
-          <a:p>
-            <a:pPr algn="ctr"/>
-          </a:p>
-        </p:txBody>
-      </p:sp>
-      <p:sp>
-        <p:nvSpPr>
-          <p:cNvPr id="12" name="TextBox 11"/>
-          <p:cNvSpPr txBox="1"/>
-          <p:nvPr/>
-        </p:nvSpPr>
-        <p:spPr>
-          <a:xfrm>
-            <a:off x="8189823" y="5111496"/>
-            <a:ext cx="1463040" cy="329184"/>
-          </a:xfrm>
-          <a:prstGeom prst="rect">
-            <a:avLst/>
-          </a:prstGeom>
-          <a:noFill/>
-        </p:spPr>
-        <p:txBody>
-          <a:bodyPr wrap="square">
-            <a:spAutoFit/>
-          </a:bodyPr>
-          <a:lstStyle/>
-          <a:p>
-            <a:pPr algn="ctr"/>
-            <a:r>
-              <a:rPr sz="1200" b="1">
-                <a:solidFill>
-                  <a:srgbClr val="1D1D1F"/>
-                </a:solidFill>
-                <a:latin typeface="Calibri"/>
-              </a:rPr>
-              <a:t>CI dashboard</a:t>
+              <a:t>DroidClaw</a:t>
             </a:r>
           </a:p>
         </p:txBody>
@@ -8037,7 +8106,7 @@
         </p:nvSpPr>
         <p:spPr>
           <a:xfrm>
-            <a:off x="640080" y="2148840"/>
+            <a:off x="640080" y="1554480"/>
             <a:ext cx="10881360" cy="1737360"/>
           </a:xfrm>
           <a:prstGeom prst="rect">
@@ -8053,13 +8122,13 @@
           <a:p>
             <a:pPr algn="ctr"/>
             <a:r>
-              <a:rPr sz="3600" b="1">
+              <a:rPr sz="3400" b="1">
                 <a:solidFill>
                   <a:srgbClr val="1D1D1F"/>
                 </a:solidFill>
                 <a:latin typeface="Calibri"/>
               </a:rPr>
-              <a:t>These already exist.</a:t>
+              <a:t>You don't need the next Instagram.</a:t>
             </a:r>
           </a:p>
         </p:txBody>
@@ -8072,7 +8141,7 @@
         </p:nvSpPr>
         <p:spPr>
           <a:xfrm>
-            <a:off x="640080" y="3931920"/>
+            <a:off x="640080" y="3337560"/>
             <a:ext cx="10881360" cy="777240"/>
           </a:xfrm>
           <a:prstGeom prst="rect">
@@ -8094,7 +8163,7 @@
                 </a:solidFill>
                 <a:latin typeface="Calibri"/>
               </a:rPr>
-              <a:t>One job. A real price.</a:t>
+              <a:t>One problem. A few people.</a:t>
             </a:r>
           </a:p>
         </p:txBody>
@@ -8107,8 +8176,8 @@
         </p:nvSpPr>
         <p:spPr>
           <a:xfrm>
-            <a:off x="4504791" y="5623560"/>
-            <a:ext cx="694944" cy="384048"/>
+            <a:off x="2538831" y="5074920"/>
+            <a:ext cx="1367028" cy="384048"/>
           </a:xfrm>
           <a:prstGeom prst="roundRect">
             <a:avLst/>
@@ -8150,8 +8219,8 @@
         </p:nvSpPr>
         <p:spPr>
           <a:xfrm>
-            <a:off x="4504791" y="5660136"/>
-            <a:ext cx="694944" cy="329184"/>
+            <a:off x="2538831" y="5111496"/>
+            <a:ext cx="1367028" cy="329184"/>
           </a:xfrm>
           <a:prstGeom prst="rect">
             <a:avLst/>
@@ -8172,7 +8241,7 @@
                 </a:solidFill>
                 <a:latin typeface="Calibri"/>
               </a:rPr>
-              <a:t>Maaa</a:t>
+              <a:t>Puzzle game</a:t>
             </a:r>
           </a:p>
         </p:txBody>
@@ -8185,8 +8254,8 @@
         </p:nvSpPr>
         <p:spPr>
           <a:xfrm>
-            <a:off x="5364327" y="5623560"/>
-            <a:ext cx="1367028" cy="384048"/>
+            <a:off x="4070451" y="5074920"/>
+            <a:ext cx="1847088" cy="384048"/>
           </a:xfrm>
           <a:prstGeom prst="roundRect">
             <a:avLst/>
@@ -8228,8 +8297,8 @@
         </p:nvSpPr>
         <p:spPr>
           <a:xfrm>
-            <a:off x="5364327" y="5660136"/>
-            <a:ext cx="1367028" cy="329184"/>
+            <a:off x="4070451" y="5111496"/>
+            <a:ext cx="1847088" cy="329184"/>
           </a:xfrm>
           <a:prstGeom prst="rect">
             <a:avLst/>
@@ -8250,7 +8319,7 @@
                 </a:solidFill>
                 <a:latin typeface="Calibri"/>
               </a:rPr>
-              <a:t>Lucky Charm</a:t>
+              <a:t>Resume formatter</a:t>
             </a:r>
           </a:p>
         </p:txBody>
@@ -8263,8 +8332,8 @@
         </p:nvSpPr>
         <p:spPr>
           <a:xfrm>
-            <a:off x="6895947" y="5623560"/>
-            <a:ext cx="790956" cy="384048"/>
+            <a:off x="6082131" y="5074920"/>
+            <a:ext cx="1943100" cy="384048"/>
           </a:xfrm>
           <a:prstGeom prst="roundRect">
             <a:avLst/>
@@ -8306,8 +8375,8 @@
         </p:nvSpPr>
         <p:spPr>
           <a:xfrm>
-            <a:off x="6895947" y="5660136"/>
-            <a:ext cx="790956" cy="329184"/>
+            <a:off x="6082131" y="5111496"/>
+            <a:ext cx="1943100" cy="329184"/>
           </a:xfrm>
           <a:prstGeom prst="rect">
             <a:avLst/>
@@ -8328,7 +8397,85 @@
                 </a:solidFill>
                 <a:latin typeface="Calibri"/>
               </a:rPr>
-              <a:t>Carrd</a:t>
+              <a:t>Invoice reminders</a:t>
+            </a:r>
+          </a:p>
+        </p:txBody>
+      </p:sp>
+      <p:sp>
+        <p:nvSpPr>
+          <p:cNvPr id="11" name="Rounded Rectangle 10"/>
+          <p:cNvSpPr/>
+          <p:nvPr/>
+        </p:nvSpPr>
+        <p:spPr>
+          <a:xfrm>
+            <a:off x="8189823" y="5074920"/>
+            <a:ext cx="1463040" cy="384048"/>
+          </a:xfrm>
+          <a:prstGeom prst="roundRect">
+            <a:avLst/>
+          </a:prstGeom>
+          <a:solidFill>
+            <a:srgbClr val="E8E8ED"/>
+          </a:solidFill>
+          <a:ln>
+            <a:noFill/>
+          </a:ln>
+        </p:spPr>
+        <p:style>
+          <a:lnRef idx="1">
+            <a:schemeClr val="accent1"/>
+          </a:lnRef>
+          <a:fillRef idx="3">
+            <a:schemeClr val="accent1"/>
+          </a:fillRef>
+          <a:effectRef idx="2">
+            <a:schemeClr val="accent1"/>
+          </a:effectRef>
+          <a:fontRef idx="minor">
+            <a:schemeClr val="lt1"/>
+          </a:fontRef>
+        </p:style>
+        <p:txBody>
+          <a:bodyPr rtlCol="0" anchor="ctr"/>
+          <a:lstStyle/>
+          <a:p>
+            <a:pPr algn="ctr"/>
+          </a:p>
+        </p:txBody>
+      </p:sp>
+      <p:sp>
+        <p:nvSpPr>
+          <p:cNvPr id="12" name="TextBox 11"/>
+          <p:cNvSpPr txBox="1"/>
+          <p:nvPr/>
+        </p:nvSpPr>
+        <p:spPr>
+          <a:xfrm>
+            <a:off x="8189823" y="5111496"/>
+            <a:ext cx="1463040" cy="329184"/>
+          </a:xfrm>
+          <a:prstGeom prst="rect">
+            <a:avLst/>
+          </a:prstGeom>
+          <a:noFill/>
+        </p:spPr>
+        <p:txBody>
+          <a:bodyPr wrap="square">
+            <a:spAutoFit/>
+          </a:bodyPr>
+          <a:lstStyle/>
+          <a:p>
+            <a:pPr algn="ctr"/>
+            <a:r>
+              <a:rPr sz="1200" b="1">
+                <a:solidFill>
+                  <a:srgbClr val="1D1D1F"/>
+                </a:solidFill>
+                <a:latin typeface="Calibri"/>
+              </a:rPr>
+              <a:t>CI dashboard</a:t>
             </a:r>
           </a:p>
         </p:txBody>
@@ -8402,7 +8549,7 @@
         </p:nvSpPr>
         <p:spPr>
           <a:xfrm>
-            <a:off x="640080" y="1965960"/>
+            <a:off x="640080" y="2148840"/>
             <a:ext cx="10881360" cy="1737360"/>
           </a:xfrm>
           <a:prstGeom prst="rect">
@@ -8424,7 +8571,7 @@
                 </a:solidFill>
                 <a:latin typeface="Calibri"/>
               </a:rPr>
-              <a:t>You don't have to invent it.</a:t>
+              <a:t>These already exist.</a:t>
             </a:r>
           </a:p>
         </p:txBody>
@@ -8437,7 +8584,7 @@
         </p:nvSpPr>
         <p:spPr>
           <a:xfrm>
-            <a:off x="640080" y="3749039"/>
+            <a:off x="640080" y="3931920"/>
             <a:ext cx="10881360" cy="777240"/>
           </a:xfrm>
           <a:prstGeom prst="rect">
@@ -8459,7 +8606,241 @@
                 </a:solidFill>
                 <a:latin typeface="Calibri"/>
               </a:rPr>
-              <a:t>A better version is enough.</a:t>
+              <a:t>One job. A real price.</a:t>
+            </a:r>
+          </a:p>
+        </p:txBody>
+      </p:sp>
+      <p:sp>
+        <p:nvSpPr>
+          <p:cNvPr id="5" name="Rounded Rectangle 4"/>
+          <p:cNvSpPr/>
+          <p:nvPr/>
+        </p:nvSpPr>
+        <p:spPr>
+          <a:xfrm>
+            <a:off x="4504791" y="5623560"/>
+            <a:ext cx="694944" cy="384048"/>
+          </a:xfrm>
+          <a:prstGeom prst="roundRect">
+            <a:avLst/>
+          </a:prstGeom>
+          <a:solidFill>
+            <a:srgbClr val="E8E8ED"/>
+          </a:solidFill>
+          <a:ln>
+            <a:noFill/>
+          </a:ln>
+        </p:spPr>
+        <p:style>
+          <a:lnRef idx="1">
+            <a:schemeClr val="accent1"/>
+          </a:lnRef>
+          <a:fillRef idx="3">
+            <a:schemeClr val="accent1"/>
+          </a:fillRef>
+          <a:effectRef idx="2">
+            <a:schemeClr val="accent1"/>
+          </a:effectRef>
+          <a:fontRef idx="minor">
+            <a:schemeClr val="lt1"/>
+          </a:fontRef>
+        </p:style>
+        <p:txBody>
+          <a:bodyPr rtlCol="0" anchor="ctr"/>
+          <a:lstStyle/>
+          <a:p>
+            <a:pPr algn="ctr"/>
+          </a:p>
+        </p:txBody>
+      </p:sp>
+      <p:sp>
+        <p:nvSpPr>
+          <p:cNvPr id="6" name="TextBox 5"/>
+          <p:cNvSpPr txBox="1"/>
+          <p:nvPr/>
+        </p:nvSpPr>
+        <p:spPr>
+          <a:xfrm>
+            <a:off x="4504791" y="5660136"/>
+            <a:ext cx="694944" cy="329184"/>
+          </a:xfrm>
+          <a:prstGeom prst="rect">
+            <a:avLst/>
+          </a:prstGeom>
+          <a:noFill/>
+        </p:spPr>
+        <p:txBody>
+          <a:bodyPr wrap="square">
+            <a:spAutoFit/>
+          </a:bodyPr>
+          <a:lstStyle/>
+          <a:p>
+            <a:pPr algn="ctr"/>
+            <a:r>
+              <a:rPr sz="1200" b="1">
+                <a:solidFill>
+                  <a:srgbClr val="1D1D1F"/>
+                </a:solidFill>
+                <a:latin typeface="Calibri"/>
+              </a:rPr>
+              <a:t>Maaa</a:t>
+            </a:r>
+          </a:p>
+        </p:txBody>
+      </p:sp>
+      <p:sp>
+        <p:nvSpPr>
+          <p:cNvPr id="7" name="Rounded Rectangle 6"/>
+          <p:cNvSpPr/>
+          <p:nvPr/>
+        </p:nvSpPr>
+        <p:spPr>
+          <a:xfrm>
+            <a:off x="5364327" y="5623560"/>
+            <a:ext cx="1367028" cy="384048"/>
+          </a:xfrm>
+          <a:prstGeom prst="roundRect">
+            <a:avLst/>
+          </a:prstGeom>
+          <a:solidFill>
+            <a:srgbClr val="E8E8ED"/>
+          </a:solidFill>
+          <a:ln>
+            <a:noFill/>
+          </a:ln>
+        </p:spPr>
+        <p:style>
+          <a:lnRef idx="1">
+            <a:schemeClr val="accent1"/>
+          </a:lnRef>
+          <a:fillRef idx="3">
+            <a:schemeClr val="accent1"/>
+          </a:fillRef>
+          <a:effectRef idx="2">
+            <a:schemeClr val="accent1"/>
+          </a:effectRef>
+          <a:fontRef idx="minor">
+            <a:schemeClr val="lt1"/>
+          </a:fontRef>
+        </p:style>
+        <p:txBody>
+          <a:bodyPr rtlCol="0" anchor="ctr"/>
+          <a:lstStyle/>
+          <a:p>
+            <a:pPr algn="ctr"/>
+          </a:p>
+        </p:txBody>
+      </p:sp>
+      <p:sp>
+        <p:nvSpPr>
+          <p:cNvPr id="8" name="TextBox 7"/>
+          <p:cNvSpPr txBox="1"/>
+          <p:nvPr/>
+        </p:nvSpPr>
+        <p:spPr>
+          <a:xfrm>
+            <a:off x="5364327" y="5660136"/>
+            <a:ext cx="1367028" cy="329184"/>
+          </a:xfrm>
+          <a:prstGeom prst="rect">
+            <a:avLst/>
+          </a:prstGeom>
+          <a:noFill/>
+        </p:spPr>
+        <p:txBody>
+          <a:bodyPr wrap="square">
+            <a:spAutoFit/>
+          </a:bodyPr>
+          <a:lstStyle/>
+          <a:p>
+            <a:pPr algn="ctr"/>
+            <a:r>
+              <a:rPr sz="1200" b="1">
+                <a:solidFill>
+                  <a:srgbClr val="1D1D1F"/>
+                </a:solidFill>
+                <a:latin typeface="Calibri"/>
+              </a:rPr>
+              <a:t>Lucky Charm</a:t>
+            </a:r>
+          </a:p>
+        </p:txBody>
+      </p:sp>
+      <p:sp>
+        <p:nvSpPr>
+          <p:cNvPr id="9" name="Rounded Rectangle 8"/>
+          <p:cNvSpPr/>
+          <p:nvPr/>
+        </p:nvSpPr>
+        <p:spPr>
+          <a:xfrm>
+            <a:off x="6895947" y="5623560"/>
+            <a:ext cx="790956" cy="384048"/>
+          </a:xfrm>
+          <a:prstGeom prst="roundRect">
+            <a:avLst/>
+          </a:prstGeom>
+          <a:solidFill>
+            <a:srgbClr val="E8E8ED"/>
+          </a:solidFill>
+          <a:ln>
+            <a:noFill/>
+          </a:ln>
+        </p:spPr>
+        <p:style>
+          <a:lnRef idx="1">
+            <a:schemeClr val="accent1"/>
+          </a:lnRef>
+          <a:fillRef idx="3">
+            <a:schemeClr val="accent1"/>
+          </a:fillRef>
+          <a:effectRef idx="2">
+            <a:schemeClr val="accent1"/>
+          </a:effectRef>
+          <a:fontRef idx="minor">
+            <a:schemeClr val="lt1"/>
+          </a:fontRef>
+        </p:style>
+        <p:txBody>
+          <a:bodyPr rtlCol="0" anchor="ctr"/>
+          <a:lstStyle/>
+          <a:p>
+            <a:pPr algn="ctr"/>
+          </a:p>
+        </p:txBody>
+      </p:sp>
+      <p:sp>
+        <p:nvSpPr>
+          <p:cNvPr id="10" name="TextBox 9"/>
+          <p:cNvSpPr txBox="1"/>
+          <p:nvPr/>
+        </p:nvSpPr>
+        <p:spPr>
+          <a:xfrm>
+            <a:off x="6895947" y="5660136"/>
+            <a:ext cx="790956" cy="329184"/>
+          </a:xfrm>
+          <a:prstGeom prst="rect">
+            <a:avLst/>
+          </a:prstGeom>
+          <a:noFill/>
+        </p:spPr>
+        <p:txBody>
+          <a:bodyPr wrap="square">
+            <a:spAutoFit/>
+          </a:bodyPr>
+          <a:lstStyle/>
+          <a:p>
+            <a:pPr algn="ctr"/>
+            <a:r>
+              <a:rPr sz="1200" b="1">
+                <a:solidFill>
+                  <a:srgbClr val="1D1D1F"/>
+                </a:solidFill>
+                <a:latin typeface="Calibri"/>
+              </a:rPr>
+              <a:t>Carrd</a:t>
             </a:r>
           </a:p>
         </p:txBody>
@@ -8533,7 +8914,7 @@
         </p:nvSpPr>
         <p:spPr>
           <a:xfrm>
-            <a:off x="640080" y="1051560"/>
+            <a:off x="640080" y="1965960"/>
             <a:ext cx="10881360" cy="1737360"/>
           </a:xfrm>
           <a:prstGeom prst="rect">
@@ -8555,7 +8936,7 @@
                 </a:solidFill>
                 <a:latin typeface="Calibri"/>
               </a:rPr>
-              <a:t>Start with the product.</a:t>
+              <a:t>You don't have to invent it.</a:t>
             </a:r>
           </a:p>
         </p:txBody>
@@ -8568,7 +8949,7 @@
         </p:nvSpPr>
         <p:spPr>
           <a:xfrm>
-            <a:off x="640080" y="2834639"/>
+            <a:off x="640080" y="3749039"/>
             <a:ext cx="10881360" cy="777240"/>
           </a:xfrm>
           <a:prstGeom prst="rect">
@@ -8590,218 +8971,11 @@
                 </a:solidFill>
                 <a:latin typeface="Calibri"/>
               </a:rPr>
-              <a:t>A game, a charm, or a tiny app.</a:t>
-            </a:r>
-          </a:p>
-        </p:txBody>
-      </p:sp>
-      <p:sp>
-        <p:nvSpPr>
-          <p:cNvPr id="5" name="Rounded Rectangle 4"/>
-          <p:cNvSpPr/>
-          <p:nvPr/>
-        </p:nvSpPr>
-        <p:spPr>
-          <a:xfrm>
-            <a:off x="5623560" y="3703320"/>
-            <a:ext cx="960120" cy="1417320"/>
-          </a:xfrm>
-          <a:prstGeom prst="roundRect">
-            <a:avLst/>
-          </a:prstGeom>
-          <a:noFill/>
-          <a:ln w="27940">
-            <a:solidFill>
-              <a:srgbClr val="7C5CFF"/>
-            </a:solidFill>
-          </a:ln>
-        </p:spPr>
-        <p:style>
-          <a:lnRef idx="1">
-            <a:schemeClr val="accent1"/>
-          </a:lnRef>
-          <a:fillRef idx="3">
-            <a:schemeClr val="accent1"/>
-          </a:fillRef>
-          <a:effectRef idx="2">
-            <a:schemeClr val="accent1"/>
-          </a:effectRef>
-          <a:fontRef idx="minor">
-            <a:schemeClr val="lt1"/>
-          </a:fontRef>
-        </p:style>
-        <p:txBody>
-          <a:bodyPr rtlCol="0" anchor="ctr"/>
-          <a:lstStyle/>
-          <a:p>
-            <a:pPr algn="ctr"/>
-          </a:p>
-        </p:txBody>
-      </p:sp>
-      <p:sp>
-        <p:nvSpPr>
-          <p:cNvPr id="6" name="Rounded Rectangle 5"/>
-          <p:cNvSpPr/>
-          <p:nvPr/>
-        </p:nvSpPr>
-        <p:spPr>
-          <a:xfrm>
-            <a:off x="5779008" y="3886200"/>
-            <a:ext cx="649224" cy="868680"/>
-          </a:xfrm>
-          <a:prstGeom prst="roundRect">
-            <a:avLst/>
-          </a:prstGeom>
-          <a:noFill/>
-          <a:ln w="22860">
-            <a:solidFill>
-              <a:srgbClr val="1EC8E6"/>
-            </a:solidFill>
-          </a:ln>
-        </p:spPr>
-        <p:style>
-          <a:lnRef idx="1">
-            <a:schemeClr val="accent1"/>
-          </a:lnRef>
-          <a:fillRef idx="3">
-            <a:schemeClr val="accent1"/>
-          </a:fillRef>
-          <a:effectRef idx="2">
-            <a:schemeClr val="accent1"/>
-          </a:effectRef>
-          <a:fontRef idx="minor">
-            <a:schemeClr val="lt1"/>
-          </a:fontRef>
-        </p:style>
-        <p:txBody>
-          <a:bodyPr rtlCol="0" anchor="ctr"/>
-          <a:lstStyle/>
-          <a:p>
-            <a:pPr algn="ctr"/>
-          </a:p>
-        </p:txBody>
-      </p:sp>
-      <p:sp>
-        <p:nvSpPr>
-          <p:cNvPr id="7" name="Oval 6"/>
-          <p:cNvSpPr/>
-          <p:nvPr/>
-        </p:nvSpPr>
-        <p:spPr>
-          <a:xfrm>
-            <a:off x="6016752" y="4828032"/>
-            <a:ext cx="164592" cy="164592"/>
-          </a:xfrm>
-          <a:prstGeom prst="ellipse">
-            <a:avLst/>
-          </a:prstGeom>
-          <a:solidFill>
-            <a:srgbClr val="7C5CFF"/>
-          </a:solidFill>
-          <a:ln>
-            <a:noFill/>
-          </a:ln>
-        </p:spPr>
-        <p:style>
-          <a:lnRef idx="1">
-            <a:schemeClr val="accent1"/>
-          </a:lnRef>
-          <a:fillRef idx="3">
-            <a:schemeClr val="accent1"/>
-          </a:fillRef>
-          <a:effectRef idx="2">
-            <a:schemeClr val="accent1"/>
-          </a:effectRef>
-          <a:fontRef idx="minor">
-            <a:schemeClr val="lt1"/>
-          </a:fontRef>
-        </p:style>
-        <p:txBody>
-          <a:bodyPr rtlCol="0" anchor="ctr"/>
-          <a:lstStyle/>
-          <a:p>
-            <a:pPr algn="ctr"/>
-          </a:p>
-        </p:txBody>
-      </p:sp>
-      <p:sp>
-        <p:nvSpPr>
-          <p:cNvPr id="8" name="Oval 7"/>
-          <p:cNvSpPr/>
-          <p:nvPr/>
-        </p:nvSpPr>
-        <p:spPr>
-          <a:xfrm>
-            <a:off x="4709160" y="4160520"/>
-            <a:ext cx="502920" cy="502920"/>
-          </a:xfrm>
-          <a:prstGeom prst="ellipse">
-            <a:avLst/>
-          </a:prstGeom>
-          <a:noFill/>
-          <a:ln w="25400">
-            <a:solidFill>
-              <a:srgbClr val="7C5CFF"/>
-            </a:solidFill>
-          </a:ln>
-        </p:spPr>
-        <p:style>
-          <a:lnRef idx="1">
-            <a:schemeClr val="accent1"/>
-          </a:lnRef>
-          <a:fillRef idx="3">
-            <a:schemeClr val="accent1"/>
-          </a:fillRef>
-          <a:effectRef idx="2">
-            <a:schemeClr val="accent1"/>
-          </a:effectRef>
-          <a:fontRef idx="minor">
-            <a:schemeClr val="lt1"/>
-          </a:fontRef>
-        </p:style>
-        <p:txBody>
-          <a:bodyPr rtlCol="0" anchor="ctr"/>
-          <a:lstStyle/>
-          <a:p>
-            <a:pPr algn="ctr"/>
-          </a:p>
-        </p:txBody>
-      </p:sp>
-      <p:cxnSp>
-        <p:nvCxnSpPr>
-          <p:cNvPr id="9" name="Connector 8"/>
-          <p:cNvCxnSpPr/>
-          <p:nvPr/>
-        </p:nvCxnSpPr>
-        <p:spPr>
-          <a:xfrm>
-            <a:off x="4956048" y="3767328"/>
-            <a:ext cx="0" cy="393192"/>
-          </a:xfrm>
-          <a:prstGeom prst="line">
-            <a:avLst/>
-          </a:prstGeom>
-          <a:ln w="25400">
-            <a:solidFill>
-              <a:srgbClr val="1EC8E6"/>
-            </a:solidFill>
-          </a:ln>
-        </p:spPr>
-        <p:style>
-          <a:lnRef idx="2">
-            <a:schemeClr val="accent1"/>
-          </a:lnRef>
-          <a:fillRef idx="0">
-            <a:schemeClr val="accent1"/>
-          </a:fillRef>
-          <a:effectRef idx="1">
-            <a:schemeClr val="accent1"/>
-          </a:effectRef>
-          <a:fontRef idx="minor">
-            <a:schemeClr val="tx1"/>
-          </a:fontRef>
-        </p:style>
-      </p:cxnSp>
+              <a:t>A better version is enough.</a:t>
+            </a:r>
+          </a:p>
+        </p:txBody>
+      </p:sp>
     </p:spTree>
   </p:cSld>
   <p:clrMapOvr>
@@ -8893,7 +9067,7 @@
                 </a:solidFill>
                 <a:latin typeface="Calibri"/>
               </a:rPr>
-              <a:t>Then take payment.</a:t>
+              <a:t>Start with the product.</a:t>
             </a:r>
           </a:p>
         </p:txBody>
@@ -8928,7 +9102,7 @@
                 </a:solidFill>
                 <a:latin typeface="Calibri"/>
               </a:rPr>
-              <a:t>One price. One checkout.</a:t>
+              <a:t>A game, a charm, or a tiny app.</a:t>
             </a:r>
           </a:p>
         </p:txBody>
@@ -8941,8 +9115,8 @@
         </p:nvSpPr>
         <p:spPr>
           <a:xfrm>
-            <a:off x="4617720" y="3794760"/>
-            <a:ext cx="2926080" cy="1234440"/>
+            <a:off x="5623560" y="3703320"/>
+            <a:ext cx="960120" cy="1417320"/>
           </a:xfrm>
           <a:prstGeom prst="roundRect">
             <a:avLst/>
@@ -8984,20 +9158,17 @@
         </p:nvSpPr>
         <p:spPr>
           <a:xfrm>
-            <a:off x="4617720" y="3794760"/>
-            <a:ext cx="2926080" cy="292608"/>
+            <a:off x="5779008" y="3886200"/>
+            <a:ext cx="649224" cy="868680"/>
           </a:xfrm>
           <a:prstGeom prst="roundRect">
             <a:avLst/>
           </a:prstGeom>
-          <a:solidFill>
-            <a:srgbClr val="1EC8E6">
-              <a:lumMod val="45000"/>
-              <a:lumOff val="55000"/>
-            </a:srgbClr>
-          </a:solidFill>
-          <a:ln>
-            <a:noFill/>
+          <a:noFill/>
+          <a:ln w="22860">
+            <a:solidFill>
+              <a:srgbClr val="1EC8E6"/>
+            </a:solidFill>
           </a:ln>
         </p:spPr>
         <p:style>
@@ -9022,21 +9193,107 @@
           </a:p>
         </p:txBody>
       </p:sp>
+      <p:sp>
+        <p:nvSpPr>
+          <p:cNvPr id="7" name="Oval 6"/>
+          <p:cNvSpPr/>
+          <p:nvPr/>
+        </p:nvSpPr>
+        <p:spPr>
+          <a:xfrm>
+            <a:off x="6016752" y="4828032"/>
+            <a:ext cx="164592" cy="164592"/>
+          </a:xfrm>
+          <a:prstGeom prst="ellipse">
+            <a:avLst/>
+          </a:prstGeom>
+          <a:solidFill>
+            <a:srgbClr val="7C5CFF"/>
+          </a:solidFill>
+          <a:ln>
+            <a:noFill/>
+          </a:ln>
+        </p:spPr>
+        <p:style>
+          <a:lnRef idx="1">
+            <a:schemeClr val="accent1"/>
+          </a:lnRef>
+          <a:fillRef idx="3">
+            <a:schemeClr val="accent1"/>
+          </a:fillRef>
+          <a:effectRef idx="2">
+            <a:schemeClr val="accent1"/>
+          </a:effectRef>
+          <a:fontRef idx="minor">
+            <a:schemeClr val="lt1"/>
+          </a:fontRef>
+        </p:style>
+        <p:txBody>
+          <a:bodyPr rtlCol="0" anchor="ctr"/>
+          <a:lstStyle/>
+          <a:p>
+            <a:pPr algn="ctr"/>
+          </a:p>
+        </p:txBody>
+      </p:sp>
+      <p:sp>
+        <p:nvSpPr>
+          <p:cNvPr id="8" name="Oval 7"/>
+          <p:cNvSpPr/>
+          <p:nvPr/>
+        </p:nvSpPr>
+        <p:spPr>
+          <a:xfrm>
+            <a:off x="4709160" y="4160520"/>
+            <a:ext cx="502920" cy="502920"/>
+          </a:xfrm>
+          <a:prstGeom prst="ellipse">
+            <a:avLst/>
+          </a:prstGeom>
+          <a:noFill/>
+          <a:ln w="25400">
+            <a:solidFill>
+              <a:srgbClr val="7C5CFF"/>
+            </a:solidFill>
+          </a:ln>
+        </p:spPr>
+        <p:style>
+          <a:lnRef idx="1">
+            <a:schemeClr val="accent1"/>
+          </a:lnRef>
+          <a:fillRef idx="3">
+            <a:schemeClr val="accent1"/>
+          </a:fillRef>
+          <a:effectRef idx="2">
+            <a:schemeClr val="accent1"/>
+          </a:effectRef>
+          <a:fontRef idx="minor">
+            <a:schemeClr val="lt1"/>
+          </a:fontRef>
+        </p:style>
+        <p:txBody>
+          <a:bodyPr rtlCol="0" anchor="ctr"/>
+          <a:lstStyle/>
+          <a:p>
+            <a:pPr algn="ctr"/>
+          </a:p>
+        </p:txBody>
+      </p:sp>
       <p:cxnSp>
         <p:nvCxnSpPr>
-          <p:cNvPr id="7" name="Connector 6"/>
+          <p:cNvPr id="9" name="Connector 8"/>
           <p:cNvCxnSpPr/>
           <p:nvPr/>
         </p:nvCxnSpPr>
         <p:spPr>
           <a:xfrm>
-            <a:off x="4937760" y="4617720"/>
-            <a:ext cx="868680" cy="0"/>
+            <a:off x="4956048" y="3767328"/>
+            <a:ext cx="0" cy="393192"/>
           </a:xfrm>
           <a:prstGeom prst="line">
             <a:avLst/>
           </a:prstGeom>
-          <a:ln w="27940">
+          <a:ln w="25400">
             <a:solidFill>
               <a:srgbClr val="1EC8E6"/>
             </a:solidFill>
@@ -9057,205 +9314,6 @@
           </a:fontRef>
         </p:style>
       </p:cxnSp>
-      <p:sp>
-        <p:nvSpPr>
-          <p:cNvPr id="8" name="Oval 7"/>
-          <p:cNvSpPr/>
-          <p:nvPr/>
-        </p:nvSpPr>
-        <p:spPr>
-          <a:xfrm>
-            <a:off x="6903720" y="4315968"/>
-            <a:ext cx="384048" cy="384048"/>
-          </a:xfrm>
-          <a:prstGeom prst="ellipse">
-            <a:avLst/>
-          </a:prstGeom>
-          <a:noFill/>
-          <a:ln w="25400">
-            <a:solidFill>
-              <a:srgbClr val="7C5CFF"/>
-            </a:solidFill>
-          </a:ln>
-        </p:spPr>
-        <p:style>
-          <a:lnRef idx="1">
-            <a:schemeClr val="accent1"/>
-          </a:lnRef>
-          <a:fillRef idx="3">
-            <a:schemeClr val="accent1"/>
-          </a:fillRef>
-          <a:effectRef idx="2">
-            <a:schemeClr val="accent1"/>
-          </a:effectRef>
-          <a:fontRef idx="minor">
-            <a:schemeClr val="lt1"/>
-          </a:fontRef>
-        </p:style>
-        <p:txBody>
-          <a:bodyPr rtlCol="0" anchor="ctr"/>
-          <a:lstStyle/>
-          <a:p>
-            <a:pPr algn="ctr"/>
-          </a:p>
-        </p:txBody>
-      </p:sp>
-      <p:sp>
-        <p:nvSpPr>
-          <p:cNvPr id="9" name="Rounded Rectangle 8"/>
-          <p:cNvSpPr/>
-          <p:nvPr/>
-        </p:nvSpPr>
-        <p:spPr>
-          <a:xfrm>
-            <a:off x="4838547" y="5806440"/>
-            <a:ext cx="1078992" cy="384048"/>
-          </a:xfrm>
-          <a:prstGeom prst="roundRect">
-            <a:avLst/>
-          </a:prstGeom>
-          <a:solidFill>
-            <a:srgbClr val="E8E8ED"/>
-          </a:solidFill>
-          <a:ln>
-            <a:noFill/>
-          </a:ln>
-        </p:spPr>
-        <p:style>
-          <a:lnRef idx="1">
-            <a:schemeClr val="accent1"/>
-          </a:lnRef>
-          <a:fillRef idx="3">
-            <a:schemeClr val="accent1"/>
-          </a:fillRef>
-          <a:effectRef idx="2">
-            <a:schemeClr val="accent1"/>
-          </a:effectRef>
-          <a:fontRef idx="minor">
-            <a:schemeClr val="lt1"/>
-          </a:fontRef>
-        </p:style>
-        <p:txBody>
-          <a:bodyPr rtlCol="0" anchor="ctr"/>
-          <a:lstStyle/>
-          <a:p>
-            <a:pPr algn="ctr"/>
-          </a:p>
-        </p:txBody>
-      </p:sp>
-      <p:sp>
-        <p:nvSpPr>
-          <p:cNvPr id="10" name="TextBox 9"/>
-          <p:cNvSpPr txBox="1"/>
-          <p:nvPr/>
-        </p:nvSpPr>
-        <p:spPr>
-          <a:xfrm>
-            <a:off x="4838547" y="5843016"/>
-            <a:ext cx="1078992" cy="329184"/>
-          </a:xfrm>
-          <a:prstGeom prst="rect">
-            <a:avLst/>
-          </a:prstGeom>
-          <a:noFill/>
-        </p:spPr>
-        <p:txBody>
-          <a:bodyPr wrap="square">
-            <a:spAutoFit/>
-          </a:bodyPr>
-          <a:lstStyle/>
-          <a:p>
-            <a:pPr algn="ctr"/>
-            <a:r>
-              <a:rPr sz="1200" b="1">
-                <a:solidFill>
-                  <a:srgbClr val="1D1D1F"/>
-                </a:solidFill>
-                <a:latin typeface="Calibri"/>
-              </a:rPr>
-              <a:t>₹99–₹499</a:t>
-            </a:r>
-          </a:p>
-        </p:txBody>
-      </p:sp>
-      <p:sp>
-        <p:nvSpPr>
-          <p:cNvPr id="11" name="Rounded Rectangle 10"/>
-          <p:cNvSpPr/>
-          <p:nvPr/>
-        </p:nvSpPr>
-        <p:spPr>
-          <a:xfrm>
-            <a:off x="6082131" y="5806440"/>
-            <a:ext cx="1271016" cy="384048"/>
-          </a:xfrm>
-          <a:prstGeom prst="roundRect">
-            <a:avLst/>
-          </a:prstGeom>
-          <a:solidFill>
-            <a:srgbClr val="E8E8ED"/>
-          </a:solidFill>
-          <a:ln>
-            <a:noFill/>
-          </a:ln>
-        </p:spPr>
-        <p:style>
-          <a:lnRef idx="1">
-            <a:schemeClr val="accent1"/>
-          </a:lnRef>
-          <a:fillRef idx="3">
-            <a:schemeClr val="accent1"/>
-          </a:fillRef>
-          <a:effectRef idx="2">
-            <a:schemeClr val="accent1"/>
-          </a:effectRef>
-          <a:fontRef idx="minor">
-            <a:schemeClr val="lt1"/>
-          </a:fontRef>
-        </p:style>
-        <p:txBody>
-          <a:bodyPr rtlCol="0" anchor="ctr"/>
-          <a:lstStyle/>
-          <a:p>
-            <a:pPr algn="ctr"/>
-          </a:p>
-        </p:txBody>
-      </p:sp>
-      <p:sp>
-        <p:nvSpPr>
-          <p:cNvPr id="12" name="TextBox 11"/>
-          <p:cNvSpPr txBox="1"/>
-          <p:nvPr/>
-        </p:nvSpPr>
-        <p:spPr>
-          <a:xfrm>
-            <a:off x="6082131" y="5843016"/>
-            <a:ext cx="1271016" cy="329184"/>
-          </a:xfrm>
-          <a:prstGeom prst="rect">
-            <a:avLst/>
-          </a:prstGeom>
-          <a:noFill/>
-        </p:spPr>
-        <p:txBody>
-          <a:bodyPr wrap="square">
-            <a:spAutoFit/>
-          </a:bodyPr>
-          <a:lstStyle/>
-          <a:p>
-            <a:pPr algn="ctr"/>
-            <a:r>
-              <a:rPr sz="1200" b="1">
-                <a:solidFill>
-                  <a:srgbClr val="1D1D1F"/>
-                </a:solidFill>
-                <a:latin typeface="Calibri"/>
-              </a:rPr>
-              <a:t>₹199/month</a:t>
-            </a:r>
-          </a:p>
-        </p:txBody>
-      </p:sp>
     </p:spTree>
   </p:cSld>
   <p:clrMapOvr>
@@ -9347,7 +9405,7 @@
                 </a:solidFill>
                 <a:latin typeface="Calibri"/>
               </a:rPr>
-              <a:t>Then watch what they do.</a:t>
+              <a:t>Then take payment.</a:t>
             </a:r>
           </a:p>
         </p:txBody>
@@ -9382,28 +9440,117 @@
                 </a:solidFill>
                 <a:latin typeface="Calibri"/>
               </a:rPr>
-              <a:t>One analytics tool is enough.</a:t>
-            </a:r>
+              <a:t>One price. One checkout.</a:t>
+            </a:r>
+          </a:p>
+        </p:txBody>
+      </p:sp>
+      <p:sp>
+        <p:nvSpPr>
+          <p:cNvPr id="5" name="Rounded Rectangle 4"/>
+          <p:cNvSpPr/>
+          <p:nvPr/>
+        </p:nvSpPr>
+        <p:spPr>
+          <a:xfrm>
+            <a:off x="4617720" y="3794760"/>
+            <a:ext cx="2926080" cy="1234440"/>
+          </a:xfrm>
+          <a:prstGeom prst="roundRect">
+            <a:avLst/>
+          </a:prstGeom>
+          <a:noFill/>
+          <a:ln w="27940">
+            <a:solidFill>
+              <a:srgbClr val="7C5CFF"/>
+            </a:solidFill>
+          </a:ln>
+        </p:spPr>
+        <p:style>
+          <a:lnRef idx="1">
+            <a:schemeClr val="accent1"/>
+          </a:lnRef>
+          <a:fillRef idx="3">
+            <a:schemeClr val="accent1"/>
+          </a:fillRef>
+          <a:effectRef idx="2">
+            <a:schemeClr val="accent1"/>
+          </a:effectRef>
+          <a:fontRef idx="minor">
+            <a:schemeClr val="lt1"/>
+          </a:fontRef>
+        </p:style>
+        <p:txBody>
+          <a:bodyPr rtlCol="0" anchor="ctr"/>
+          <a:lstStyle/>
+          <a:p>
+            <a:pPr algn="ctr"/>
+          </a:p>
+        </p:txBody>
+      </p:sp>
+      <p:sp>
+        <p:nvSpPr>
+          <p:cNvPr id="6" name="Rounded Rectangle 5"/>
+          <p:cNvSpPr/>
+          <p:nvPr/>
+        </p:nvSpPr>
+        <p:spPr>
+          <a:xfrm>
+            <a:off x="4617720" y="3794760"/>
+            <a:ext cx="2926080" cy="292608"/>
+          </a:xfrm>
+          <a:prstGeom prst="roundRect">
+            <a:avLst/>
+          </a:prstGeom>
+          <a:solidFill>
+            <a:srgbClr val="1EC8E6">
+              <a:lumMod val="45000"/>
+              <a:lumOff val="55000"/>
+            </a:srgbClr>
+          </a:solidFill>
+          <a:ln>
+            <a:noFill/>
+          </a:ln>
+        </p:spPr>
+        <p:style>
+          <a:lnRef idx="1">
+            <a:schemeClr val="accent1"/>
+          </a:lnRef>
+          <a:fillRef idx="3">
+            <a:schemeClr val="accent1"/>
+          </a:fillRef>
+          <a:effectRef idx="2">
+            <a:schemeClr val="accent1"/>
+          </a:effectRef>
+          <a:fontRef idx="minor">
+            <a:schemeClr val="lt1"/>
+          </a:fontRef>
+        </p:style>
+        <p:txBody>
+          <a:bodyPr rtlCol="0" anchor="ctr"/>
+          <a:lstStyle/>
+          <a:p>
+            <a:pPr algn="ctr"/>
           </a:p>
         </p:txBody>
       </p:sp>
       <p:cxnSp>
         <p:nvCxnSpPr>
-          <p:cNvPr id="5" name="Connector 4"/>
+          <p:cNvPr id="7" name="Connector 6"/>
           <p:cNvCxnSpPr/>
           <p:nvPr/>
         </p:nvCxnSpPr>
         <p:spPr>
           <a:xfrm>
-            <a:off x="4709160" y="3794760"/>
-            <a:ext cx="0" cy="1280160"/>
+            <a:off x="4937760" y="4617720"/>
+            <a:ext cx="868680" cy="0"/>
           </a:xfrm>
           <a:prstGeom prst="line">
             <a:avLst/>
           </a:prstGeom>
-          <a:ln w="25400">
+          <a:ln w="27940">
             <a:solidFill>
-              <a:srgbClr val="7C5CFF"/>
+              <a:srgbClr val="1EC8E6"/>
             </a:solidFill>
           </a:ln>
         </p:spPr>
@@ -9422,20 +9569,21 @@
           </a:fontRef>
         </p:style>
       </p:cxnSp>
-      <p:cxnSp>
-        <p:nvCxnSpPr>
-          <p:cNvPr id="6" name="Connector 5"/>
-          <p:cNvCxnSpPr/>
-          <p:nvPr/>
-        </p:nvCxnSpPr>
-        <p:spPr>
-          <a:xfrm>
-            <a:off x="4709160" y="5074920"/>
-            <a:ext cx="2788919" cy="0"/>
-          </a:xfrm>
-          <a:prstGeom prst="line">
-            <a:avLst/>
-          </a:prstGeom>
+      <p:sp>
+        <p:nvSpPr>
+          <p:cNvPr id="8" name="Oval 7"/>
+          <p:cNvSpPr/>
+          <p:nvPr/>
+        </p:nvSpPr>
+        <p:spPr>
+          <a:xfrm>
+            <a:off x="6903720" y="4315968"/>
+            <a:ext cx="384048" cy="384048"/>
+          </a:xfrm>
+          <a:prstGeom prst="ellipse">
+            <a:avLst/>
+          </a:prstGeom>
+          <a:noFill/>
           <a:ln w="25400">
             <a:solidFill>
               <a:srgbClr val="7C5CFF"/>
@@ -9443,45 +9591,6 @@
           </a:ln>
         </p:spPr>
         <p:style>
-          <a:lnRef idx="2">
-            <a:schemeClr val="accent1"/>
-          </a:lnRef>
-          <a:fillRef idx="0">
-            <a:schemeClr val="accent1"/>
-          </a:fillRef>
-          <a:effectRef idx="1">
-            <a:schemeClr val="accent1"/>
-          </a:effectRef>
-          <a:fontRef idx="minor">
-            <a:schemeClr val="tx1"/>
-          </a:fontRef>
-        </p:style>
-      </p:cxnSp>
-      <p:sp>
-        <p:nvSpPr>
-          <p:cNvPr id="7" name="Rounded Rectangle 6"/>
-          <p:cNvSpPr/>
-          <p:nvPr/>
-        </p:nvSpPr>
-        <p:spPr>
-          <a:xfrm>
-            <a:off x="4937760" y="4617720"/>
-            <a:ext cx="347472" cy="502920"/>
-          </a:xfrm>
-          <a:prstGeom prst="roundRect">
-            <a:avLst/>
-          </a:prstGeom>
-          <a:solidFill>
-            <a:srgbClr val="1EC8E6">
-              <a:lumMod val="65000"/>
-              <a:lumOff val="35000"/>
-            </a:srgbClr>
-          </a:solidFill>
-          <a:ln>
-            <a:noFill/>
-          </a:ln>
-        </p:spPr>
-        <p:style>
           <a:lnRef idx="1">
             <a:schemeClr val="accent1"/>
           </a:lnRef>
@@ -9505,152 +9614,14 @@
       </p:sp>
       <p:sp>
         <p:nvSpPr>
-          <p:cNvPr id="8" name="Rounded Rectangle 7"/>
-          <p:cNvSpPr/>
-          <p:nvPr/>
-        </p:nvSpPr>
-        <p:spPr>
-          <a:xfrm>
-            <a:off x="5623560" y="4297680"/>
-            <a:ext cx="347472" cy="777240"/>
-          </a:xfrm>
-          <a:prstGeom prst="roundRect">
-            <a:avLst/>
-          </a:prstGeom>
-          <a:solidFill>
-            <a:srgbClr val="7C5CFF">
-              <a:lumMod val="65000"/>
-              <a:lumOff val="35000"/>
-            </a:srgbClr>
-          </a:solidFill>
-          <a:ln>
-            <a:noFill/>
-          </a:ln>
-        </p:spPr>
-        <p:style>
-          <a:lnRef idx="1">
-            <a:schemeClr val="accent1"/>
-          </a:lnRef>
-          <a:fillRef idx="3">
-            <a:schemeClr val="accent1"/>
-          </a:fillRef>
-          <a:effectRef idx="2">
-            <a:schemeClr val="accent1"/>
-          </a:effectRef>
-          <a:fontRef idx="minor">
-            <a:schemeClr val="lt1"/>
-          </a:fontRef>
-        </p:style>
-        <p:txBody>
-          <a:bodyPr rtlCol="0" anchor="ctr"/>
-          <a:lstStyle/>
-          <a:p>
-            <a:pPr algn="ctr"/>
-          </a:p>
-        </p:txBody>
-      </p:sp>
-      <p:sp>
-        <p:nvSpPr>
           <p:cNvPr id="9" name="Rounded Rectangle 8"/>
           <p:cNvSpPr/>
           <p:nvPr/>
         </p:nvSpPr>
         <p:spPr>
           <a:xfrm>
-            <a:off x="6309360" y="4480560"/>
-            <a:ext cx="347472" cy="594360"/>
-          </a:xfrm>
-          <a:prstGeom prst="roundRect">
-            <a:avLst/>
-          </a:prstGeom>
-          <a:solidFill>
-            <a:srgbClr val="1EC8E6">
-              <a:lumMod val="65000"/>
-              <a:lumOff val="35000"/>
-            </a:srgbClr>
-          </a:solidFill>
-          <a:ln>
-            <a:noFill/>
-          </a:ln>
-        </p:spPr>
-        <p:style>
-          <a:lnRef idx="1">
-            <a:schemeClr val="accent1"/>
-          </a:lnRef>
-          <a:fillRef idx="3">
-            <a:schemeClr val="accent1"/>
-          </a:fillRef>
-          <a:effectRef idx="2">
-            <a:schemeClr val="accent1"/>
-          </a:effectRef>
-          <a:fontRef idx="minor">
-            <a:schemeClr val="lt1"/>
-          </a:fontRef>
-        </p:style>
-        <p:txBody>
-          <a:bodyPr rtlCol="0" anchor="ctr"/>
-          <a:lstStyle/>
-          <a:p>
-            <a:pPr algn="ctr"/>
-          </a:p>
-        </p:txBody>
-      </p:sp>
-      <p:sp>
-        <p:nvSpPr>
-          <p:cNvPr id="10" name="Rounded Rectangle 9"/>
-          <p:cNvSpPr/>
-          <p:nvPr/>
-        </p:nvSpPr>
-        <p:spPr>
-          <a:xfrm>
-            <a:off x="6995160" y="4023360"/>
-            <a:ext cx="347472" cy="1051560"/>
-          </a:xfrm>
-          <a:prstGeom prst="roundRect">
-            <a:avLst/>
-          </a:prstGeom>
-          <a:solidFill>
-            <a:srgbClr val="7C5CFF">
-              <a:lumMod val="65000"/>
-              <a:lumOff val="35000"/>
-            </a:srgbClr>
-          </a:solidFill>
-          <a:ln>
-            <a:noFill/>
-          </a:ln>
-        </p:spPr>
-        <p:style>
-          <a:lnRef idx="1">
-            <a:schemeClr val="accent1"/>
-          </a:lnRef>
-          <a:fillRef idx="3">
-            <a:schemeClr val="accent1"/>
-          </a:fillRef>
-          <a:effectRef idx="2">
-            <a:schemeClr val="accent1"/>
-          </a:effectRef>
-          <a:fontRef idx="minor">
-            <a:schemeClr val="lt1"/>
-          </a:fontRef>
-        </p:style>
-        <p:txBody>
-          <a:bodyPr rtlCol="0" anchor="ctr"/>
-          <a:lstStyle/>
-          <a:p>
-            <a:pPr algn="ctr"/>
-          </a:p>
-        </p:txBody>
-      </p:sp>
-      <p:sp>
-        <p:nvSpPr>
-          <p:cNvPr id="11" name="Rounded Rectangle 10"/>
-          <p:cNvSpPr/>
-          <p:nvPr/>
-        </p:nvSpPr>
-        <p:spPr>
-          <a:xfrm>
-            <a:off x="5604357" y="5806440"/>
-            <a:ext cx="982980" cy="384048"/>
+            <a:off x="4838547" y="5806440"/>
+            <a:ext cx="1078992" cy="384048"/>
           </a:xfrm>
           <a:prstGeom prst="roundRect">
             <a:avLst/>
@@ -9686,14 +9657,14 @@
       </p:sp>
       <p:sp>
         <p:nvSpPr>
-          <p:cNvPr id="12" name="TextBox 11"/>
+          <p:cNvPr id="10" name="TextBox 9"/>
           <p:cNvSpPr txBox="1"/>
           <p:nvPr/>
         </p:nvSpPr>
         <p:spPr>
           <a:xfrm>
-            <a:off x="5604357" y="5843016"/>
-            <a:ext cx="982980" cy="329184"/>
+            <a:off x="4838547" y="5843016"/>
+            <a:ext cx="1078992" cy="329184"/>
           </a:xfrm>
           <a:prstGeom prst="rect">
             <a:avLst/>
@@ -9714,7 +9685,85 @@
                 </a:solidFill>
                 <a:latin typeface="Calibri"/>
               </a:rPr>
-              <a:t>PostHog</a:t>
+              <a:t>₹99–₹499</a:t>
+            </a:r>
+          </a:p>
+        </p:txBody>
+      </p:sp>
+      <p:sp>
+        <p:nvSpPr>
+          <p:cNvPr id="11" name="Rounded Rectangle 10"/>
+          <p:cNvSpPr/>
+          <p:nvPr/>
+        </p:nvSpPr>
+        <p:spPr>
+          <a:xfrm>
+            <a:off x="6082131" y="5806440"/>
+            <a:ext cx="1271016" cy="384048"/>
+          </a:xfrm>
+          <a:prstGeom prst="roundRect">
+            <a:avLst/>
+          </a:prstGeom>
+          <a:solidFill>
+            <a:srgbClr val="E8E8ED"/>
+          </a:solidFill>
+          <a:ln>
+            <a:noFill/>
+          </a:ln>
+        </p:spPr>
+        <p:style>
+          <a:lnRef idx="1">
+            <a:schemeClr val="accent1"/>
+          </a:lnRef>
+          <a:fillRef idx="3">
+            <a:schemeClr val="accent1"/>
+          </a:fillRef>
+          <a:effectRef idx="2">
+            <a:schemeClr val="accent1"/>
+          </a:effectRef>
+          <a:fontRef idx="minor">
+            <a:schemeClr val="lt1"/>
+          </a:fontRef>
+        </p:style>
+        <p:txBody>
+          <a:bodyPr rtlCol="0" anchor="ctr"/>
+          <a:lstStyle/>
+          <a:p>
+            <a:pPr algn="ctr"/>
+          </a:p>
+        </p:txBody>
+      </p:sp>
+      <p:sp>
+        <p:nvSpPr>
+          <p:cNvPr id="12" name="TextBox 11"/>
+          <p:cNvSpPr txBox="1"/>
+          <p:nvPr/>
+        </p:nvSpPr>
+        <p:spPr>
+          <a:xfrm>
+            <a:off x="6082131" y="5843016"/>
+            <a:ext cx="1271016" cy="329184"/>
+          </a:xfrm>
+          <a:prstGeom prst="rect">
+            <a:avLst/>
+          </a:prstGeom>
+          <a:noFill/>
+        </p:spPr>
+        <p:txBody>
+          <a:bodyPr wrap="square">
+            <a:spAutoFit/>
+          </a:bodyPr>
+          <a:lstStyle/>
+          <a:p>
+            <a:pPr algn="ctr"/>
+            <a:r>
+              <a:rPr sz="1200" b="1">
+                <a:solidFill>
+                  <a:srgbClr val="1D1D1F"/>
+                </a:solidFill>
+                <a:latin typeface="Calibri"/>
+              </a:rPr>
+              <a:t>₹199/month</a:t>
             </a:r>
           </a:p>
         </p:txBody>
@@ -9788,7 +9837,7 @@
         </p:nvSpPr>
         <p:spPr>
           <a:xfrm>
-            <a:off x="640080" y="1143000"/>
+            <a:off x="640080" y="1051560"/>
             <a:ext cx="10881360" cy="1737360"/>
           </a:xfrm>
           <a:prstGeom prst="rect">
@@ -9804,13 +9853,13 @@
           <a:p>
             <a:pPr algn="ctr"/>
             <a:r>
-              <a:rPr sz="3200" b="1">
+              <a:rPr sz="3600" b="1">
                 <a:solidFill>
                   <a:srgbClr val="1D1D1F"/>
                 </a:solidFill>
                 <a:latin typeface="Calibri"/>
               </a:rPr>
-              <a:t>Then give them a place to talk.</a:t>
+              <a:t>Then watch what they do.</a:t>
             </a:r>
           </a:p>
         </p:txBody>
@@ -9823,7 +9872,7 @@
         </p:nvSpPr>
         <p:spPr>
           <a:xfrm>
-            <a:off x="640080" y="2926080"/>
+            <a:off x="640080" y="2834639"/>
             <a:ext cx="10881360" cy="777240"/>
           </a:xfrm>
           <a:prstGeom prst="rect">
@@ -9845,30 +9894,103 @@
                 </a:solidFill>
                 <a:latin typeface="Calibri"/>
               </a:rPr>
-              <a:t>Discord is enough.</a:t>
-            </a:r>
-          </a:p>
-        </p:txBody>
-      </p:sp>
-      <p:sp>
-        <p:nvSpPr>
-          <p:cNvPr id="5" name="Rounded Rectangle 4"/>
-          <p:cNvSpPr/>
-          <p:nvPr/>
-        </p:nvSpPr>
+              <a:t>One analytics tool is enough.</a:t>
+            </a:r>
+          </a:p>
+        </p:txBody>
+      </p:sp>
+      <p:cxnSp>
+        <p:nvCxnSpPr>
+          <p:cNvPr id="5" name="Connector 4"/>
+          <p:cNvCxnSpPr/>
+          <p:nvPr/>
+        </p:nvCxnSpPr>
         <p:spPr>
           <a:xfrm>
             <a:off x="4709160" y="3794760"/>
-            <a:ext cx="1554480" cy="777240"/>
-          </a:xfrm>
-          <a:prstGeom prst="roundRect">
-            <a:avLst/>
-          </a:prstGeom>
-          <a:noFill/>
-          <a:ln w="27940">
+            <a:ext cx="0" cy="1280160"/>
+          </a:xfrm>
+          <a:prstGeom prst="line">
+            <a:avLst/>
+          </a:prstGeom>
+          <a:ln w="25400">
             <a:solidFill>
               <a:srgbClr val="7C5CFF"/>
             </a:solidFill>
+          </a:ln>
+        </p:spPr>
+        <p:style>
+          <a:lnRef idx="2">
+            <a:schemeClr val="accent1"/>
+          </a:lnRef>
+          <a:fillRef idx="0">
+            <a:schemeClr val="accent1"/>
+          </a:fillRef>
+          <a:effectRef idx="1">
+            <a:schemeClr val="accent1"/>
+          </a:effectRef>
+          <a:fontRef idx="minor">
+            <a:schemeClr val="tx1"/>
+          </a:fontRef>
+        </p:style>
+      </p:cxnSp>
+      <p:cxnSp>
+        <p:nvCxnSpPr>
+          <p:cNvPr id="6" name="Connector 5"/>
+          <p:cNvCxnSpPr/>
+          <p:nvPr/>
+        </p:nvCxnSpPr>
+        <p:spPr>
+          <a:xfrm>
+            <a:off x="4709160" y="5074920"/>
+            <a:ext cx="2788919" cy="0"/>
+          </a:xfrm>
+          <a:prstGeom prst="line">
+            <a:avLst/>
+          </a:prstGeom>
+          <a:ln w="25400">
+            <a:solidFill>
+              <a:srgbClr val="7C5CFF"/>
+            </a:solidFill>
+          </a:ln>
+        </p:spPr>
+        <p:style>
+          <a:lnRef idx="2">
+            <a:schemeClr val="accent1"/>
+          </a:lnRef>
+          <a:fillRef idx="0">
+            <a:schemeClr val="accent1"/>
+          </a:fillRef>
+          <a:effectRef idx="1">
+            <a:schemeClr val="accent1"/>
+          </a:effectRef>
+          <a:fontRef idx="minor">
+            <a:schemeClr val="tx1"/>
+          </a:fontRef>
+        </p:style>
+      </p:cxnSp>
+      <p:sp>
+        <p:nvSpPr>
+          <p:cNvPr id="7" name="Rounded Rectangle 6"/>
+          <p:cNvSpPr/>
+          <p:nvPr/>
+        </p:nvSpPr>
+        <p:spPr>
+          <a:xfrm>
+            <a:off x="4937760" y="4617720"/>
+            <a:ext cx="347472" cy="502920"/>
+          </a:xfrm>
+          <a:prstGeom prst="roundRect">
+            <a:avLst/>
+          </a:prstGeom>
+          <a:solidFill>
+            <a:srgbClr val="1EC8E6">
+              <a:lumMod val="65000"/>
+              <a:lumOff val="35000"/>
+            </a:srgbClr>
+          </a:solidFill>
+          <a:ln>
+            <a:noFill/>
           </a:ln>
         </p:spPr>
         <p:style>
@@ -9895,23 +10017,26 @@
       </p:sp>
       <p:sp>
         <p:nvSpPr>
-          <p:cNvPr id="6" name="Rounded Rectangle 5"/>
+          <p:cNvPr id="8" name="Rounded Rectangle 7"/>
           <p:cNvSpPr/>
           <p:nvPr/>
         </p:nvSpPr>
         <p:spPr>
           <a:xfrm>
-            <a:off x="5943600" y="4434840"/>
-            <a:ext cx="1554480" cy="658368"/>
+            <a:off x="5623560" y="4297680"/>
+            <a:ext cx="347472" cy="777240"/>
           </a:xfrm>
           <a:prstGeom prst="roundRect">
             <a:avLst/>
           </a:prstGeom>
-          <a:noFill/>
-          <a:ln w="27940">
-            <a:solidFill>
-              <a:srgbClr val="1EC8E6"/>
-            </a:solidFill>
+          <a:solidFill>
+            <a:srgbClr val="7C5CFF">
+              <a:lumMod val="65000"/>
+              <a:lumOff val="35000"/>
+            </a:srgbClr>
+          </a:solidFill>
+          <a:ln>
+            <a:noFill/>
           </a:ln>
         </p:spPr>
         <p:style>
@@ -9938,20 +10063,23 @@
       </p:sp>
       <p:sp>
         <p:nvSpPr>
-          <p:cNvPr id="7" name="Oval 6"/>
+          <p:cNvPr id="9" name="Rounded Rectangle 8"/>
           <p:cNvSpPr/>
           <p:nvPr/>
         </p:nvSpPr>
         <p:spPr>
           <a:xfrm>
-            <a:off x="4983480" y="4069080"/>
-            <a:ext cx="164592" cy="164592"/>
-          </a:xfrm>
-          <a:prstGeom prst="ellipse">
+            <a:off x="6309360" y="4480560"/>
+            <a:ext cx="347472" cy="594360"/>
+          </a:xfrm>
+          <a:prstGeom prst="roundRect">
             <a:avLst/>
           </a:prstGeom>
           <a:solidFill>
-            <a:srgbClr val="1EC8E6"/>
+            <a:srgbClr val="1EC8E6">
+              <a:lumMod val="65000"/>
+              <a:lumOff val="35000"/>
+            </a:srgbClr>
           </a:solidFill>
           <a:ln>
             <a:noFill/>
@@ -9981,20 +10109,23 @@
       </p:sp>
       <p:sp>
         <p:nvSpPr>
-          <p:cNvPr id="8" name="Oval 7"/>
+          <p:cNvPr id="10" name="Rounded Rectangle 9"/>
           <p:cNvSpPr/>
           <p:nvPr/>
         </p:nvSpPr>
         <p:spPr>
           <a:xfrm>
-            <a:off x="5276088" y="4069080"/>
-            <a:ext cx="164592" cy="164592"/>
-          </a:xfrm>
-          <a:prstGeom prst="ellipse">
+            <a:off x="6995160" y="4023360"/>
+            <a:ext cx="347472" cy="1051560"/>
+          </a:xfrm>
+          <a:prstGeom prst="roundRect">
             <a:avLst/>
           </a:prstGeom>
           <a:solidFill>
-            <a:srgbClr val="7C5CFF"/>
+            <a:srgbClr val="7C5CFF">
+              <a:lumMod val="65000"/>
+              <a:lumOff val="35000"/>
+            </a:srgbClr>
           </a:solidFill>
           <a:ln>
             <a:noFill/>
@@ -10024,20 +10155,20 @@
       </p:sp>
       <p:sp>
         <p:nvSpPr>
-          <p:cNvPr id="9" name="Oval 8"/>
+          <p:cNvPr id="11" name="Rounded Rectangle 10"/>
           <p:cNvSpPr/>
           <p:nvPr/>
         </p:nvSpPr>
         <p:spPr>
           <a:xfrm>
-            <a:off x="5568696" y="4069080"/>
-            <a:ext cx="164592" cy="164592"/>
-          </a:xfrm>
-          <a:prstGeom prst="ellipse">
+            <a:off x="5604357" y="5806440"/>
+            <a:ext cx="982980" cy="384048"/>
+          </a:xfrm>
+          <a:prstGeom prst="roundRect">
             <a:avLst/>
           </a:prstGeom>
           <a:solidFill>
-            <a:srgbClr val="1EC8E6"/>
+            <a:srgbClr val="E8E8ED"/>
           </a:solidFill>
           <a:ln>
             <a:noFill/>
@@ -10062,6 +10193,41 @@
           <a:lstStyle/>
           <a:p>
             <a:pPr algn="ctr"/>
+          </a:p>
+        </p:txBody>
+      </p:sp>
+      <p:sp>
+        <p:nvSpPr>
+          <p:cNvPr id="12" name="TextBox 11"/>
+          <p:cNvSpPr txBox="1"/>
+          <p:nvPr/>
+        </p:nvSpPr>
+        <p:spPr>
+          <a:xfrm>
+            <a:off x="5604357" y="5843016"/>
+            <a:ext cx="982980" cy="329184"/>
+          </a:xfrm>
+          <a:prstGeom prst="rect">
+            <a:avLst/>
+          </a:prstGeom>
+          <a:noFill/>
+        </p:spPr>
+        <p:txBody>
+          <a:bodyPr wrap="square">
+            <a:spAutoFit/>
+          </a:bodyPr>
+          <a:lstStyle/>
+          <a:p>
+            <a:pPr algn="ctr"/>
+            <a:r>
+              <a:rPr sz="1200" b="1">
+                <a:solidFill>
+                  <a:srgbClr val="1D1D1F"/>
+                </a:solidFill>
+                <a:latin typeface="Calibri"/>
+              </a:rPr>
+              <a:t>PostHog</a:t>
+            </a:r>
           </a:p>
         </p:txBody>
       </p:sp>

--- a/talks/shipaton-kug-chennai-2026/shipaton-kug-chennai-2026.pptx
+++ b/talks/shipaton-kug-chennai-2026/shipaton-kug-chennai-2026.pptx
@@ -15,6 +15,14 @@
     <p:sldId id="263" r:id="rId14"/>
     <p:sldId id="264" r:id="rId15"/>
     <p:sldId id="265" r:id="rId16"/>
+    <p:sldId id="266" r:id="rId17"/>
+    <p:sldId id="267" r:id="rId18"/>
+    <p:sldId id="268" r:id="rId19"/>
+    <p:sldId id="269" r:id="rId20"/>
+    <p:sldId id="270" r:id="rId21"/>
+    <p:sldId id="271" r:id="rId22"/>
+    <p:sldId id="272" r:id="rId23"/>
+    <p:sldId id="273" r:id="rId24"/>
   </p:sldIdLst>
   <p:sldSz cx="12191695" cy="6858000" type="screen4x3"/>
   <p:notesSz cx="6858000" cy="9144000"/>
@@ -606,6 +614,646 @@
           <a:lstStyle/>
           <a:p>
             <a:r>
+              <a:t>Tanglish: Like count customer illa. Problem solve panna, people trust pannuvaanga.</a:t>
+            </a:r>
+          </a:p>
+          <a:p>
+            <a:r>
+              <a:t>The owner's DunSocial observation, spoken lightly: posts he saw had about 5 or 10 likes. The projected line is the lesson, not the number.</a:t>
+            </a:r>
+          </a:p>
+          <a:p>
+            <a:r>
+              <a:t>https://dunsocial.com/</a:t>
+            </a:r>
+          </a:p>
+        </p:txBody>
+      </p:sp>
+      <p:sp>
+        <p:nvSpPr>
+          <p:cNvPr id="4" name="Slide Number Placeholder 3"/>
+          <p:cNvSpPr>
+            <a:spLocks noGrp="1"/>
+          </p:cNvSpPr>
+          <p:nvPr>
+            <p:ph type="sldNum" idx="5" sz="quarter"/>
+          </p:nvPr>
+        </p:nvSpPr>
+        <p:spPr/>
+      </p:sp>
+    </p:spTree>
+  </p:cSld>
+  <p:clrMapOvr>
+    <a:masterClrMapping/>
+  </p:clrMapOvr>
+</p:notes>
+</file>
+
+<file path=ppt/notesSlides/notesSlide11.xml><?xml version="1.0" encoding="utf-8"?>
+<p:notes xmlns:a="http://schemas.openxmlformats.org/drawingml/2006/main" xmlns:p="http://schemas.openxmlformats.org/presentationml/2006/main" xmlns:r="http://schemas.openxmlformats.org/officeDocument/2006/relationships">
+  <p:cSld>
+    <p:spTree>
+      <p:nvGrpSpPr>
+        <p:cNvPr id="1" name=""/>
+        <p:cNvGrpSpPr/>
+        <p:nvPr/>
+      </p:nvGrpSpPr>
+      <p:grpSpPr>
+        <a:xfrm>
+          <a:off x="0" y="0"/>
+          <a:ext cx="0" cy="0"/>
+          <a:chOff x="0" y="0"/>
+          <a:chExt cx="0" cy="0"/>
+        </a:xfrm>
+      </p:grpSpPr>
+      <p:sp>
+        <p:nvSpPr>
+          <p:cNvPr id="2" name="Slide Image Placeholder 1"/>
+          <p:cNvSpPr>
+            <a:spLocks noGrp="1"/>
+          </p:cNvSpPr>
+          <p:nvPr>
+            <p:ph type="sldImg" idx="2"/>
+          </p:nvPr>
+        </p:nvSpPr>
+        <p:spPr/>
+      </p:sp>
+      <p:sp>
+        <p:nvSpPr>
+          <p:cNvPr id="3" name="Notes Placeholder 2"/>
+          <p:cNvSpPr>
+            <a:spLocks noGrp="1"/>
+          </p:cNvSpPr>
+          <p:nvPr>
+            <p:ph type="body" idx="3" sz="quarter"/>
+          </p:nvPr>
+        </p:nvSpPr>
+        <p:spPr/>
+        <p:txBody>
+          <a:bodyPr/>
+          <a:lstStyle/>
+          <a:p>
+            <a:r>
+              <a:t>Tanglish: Innoru feature kedayadhu. First paying customer dhaan matter. Simple-nu ninaichu GitHub-la vechutaanga.</a:t>
+            </a:r>
+          </a:p>
+          <a:p>
+            <a:r>
+              <a:t>Talk to customers. Show pricing early. Preorders. Paid pilot. Clear refund and delivery policy.</a:t>
+            </a:r>
+          </a:p>
+          <a:p>
+            <a:r>
+              <a:t>Validate demand. Smallest version someone will pay for. Turn the product into a business. Organic growth. An exit is possible later on https://acquire.com/</a:t>
+            </a:r>
+          </a:p>
+          <a:p>
+            <a:r>
+              <a:t>Prices are examples. Razorpay: https://razorpay.com/docs/</a:t>
+            </a:r>
+          </a:p>
+          <a:p>
+            <a:r>
+              <a:t>Stripe where available. Crowdfunding is not guaranteed funding.</a:t>
+            </a:r>
+          </a:p>
+        </p:txBody>
+      </p:sp>
+      <p:sp>
+        <p:nvSpPr>
+          <p:cNvPr id="4" name="Slide Number Placeholder 3"/>
+          <p:cNvSpPr>
+            <a:spLocks noGrp="1"/>
+          </p:cNvSpPr>
+          <p:nvPr>
+            <p:ph type="sldNum" idx="5" sz="quarter"/>
+          </p:nvPr>
+        </p:nvSpPr>
+        <p:spPr/>
+      </p:sp>
+    </p:spTree>
+  </p:cSld>
+  <p:clrMapOvr>
+    <a:masterClrMapping/>
+  </p:clrMapOvr>
+</p:notes>
+</file>
+
+<file path=ppt/notesSlides/notesSlide12.xml><?xml version="1.0" encoding="utf-8"?>
+<p:notes xmlns:a="http://schemas.openxmlformats.org/drawingml/2006/main" xmlns:p="http://schemas.openxmlformats.org/presentationml/2006/main" xmlns:r="http://schemas.openxmlformats.org/officeDocument/2006/relationships">
+  <p:cSld>
+    <p:spTree>
+      <p:nvGrpSpPr>
+        <p:cNvPr id="1" name=""/>
+        <p:cNvGrpSpPr/>
+        <p:nvPr/>
+      </p:nvGrpSpPr>
+      <p:grpSpPr>
+        <a:xfrm>
+          <a:off x="0" y="0"/>
+          <a:ext cx="0" cy="0"/>
+          <a:chOff x="0" y="0"/>
+          <a:chExt cx="0" cy="0"/>
+        </a:xfrm>
+      </p:grpSpPr>
+      <p:sp>
+        <p:nvSpPr>
+          <p:cNvPr id="2" name="Slide Image Placeholder 1"/>
+          <p:cNvSpPr>
+            <a:spLocks noGrp="1"/>
+          </p:cNvSpPr>
+          <p:nvPr>
+            <p:ph type="sldImg" idx="2"/>
+          </p:nvPr>
+        </p:nvSpPr>
+        <p:spPr/>
+      </p:sp>
+      <p:sp>
+        <p:nvSpPr>
+          <p:cNvPr id="3" name="Notes Placeholder 2"/>
+          <p:cNvSpPr>
+            <a:spLocks noGrp="1"/>
+          </p:cNvSpPr>
+          <p:nvPr>
+            <p:ph type="body" idx="3" sz="quarter"/>
+          </p:nvPr>
+        </p:nvSpPr>
+        <p:spPr/>
+        <p:txBody>
+          <a:bodyPr/>
+          <a:lstStyle/>
+          <a:p>
+            <a:r>
+              <a:t>Tanglish: Anju per ₹199 kudutha, almost thousand. Gross idhu — tax, fees illa. PMF illa, willingness to pay.</a:t>
+            </a:r>
+          </a:p>
+          <a:p>
+            <a:r>
+              <a:t>7-step path: painful problem → smallest useful solution → landing + pricing → payment method → share → measure → improve from behavior.</a:t>
+            </a:r>
+          </a:p>
+          <a:p>
+            <a:r>
+              <a:t>Loop: Launch → Analytics → Feedback → Improvements → Retention → Revenue.</a:t>
+            </a:r>
+          </a:p>
+          <a:p>
+            <a:r>
+              <a:t>PostHog, Firebase Analytics, Mixpanel, Plausible, Discord, GitHub Discussions, email, X, LinkedIn, Reddit, Product Hunt, YouTube, Instagram, SEO, Sentry, Crashlytics. Nobody needs every tool.</a:t>
+            </a:r>
+          </a:p>
+          <a:p>
+            <a:r>
+              <a:t>Payment is evidence someone will pay. It is not product-market fit.</a:t>
+            </a:r>
+          </a:p>
+          <a:p>
+            <a:r>
+              <a:t>https://razorpay.com/docs/</a:t>
+            </a:r>
+          </a:p>
+        </p:txBody>
+      </p:sp>
+      <p:sp>
+        <p:nvSpPr>
+          <p:cNvPr id="4" name="Slide Number Placeholder 3"/>
+          <p:cNvSpPr>
+            <a:spLocks noGrp="1"/>
+          </p:cNvSpPr>
+          <p:nvPr>
+            <p:ph type="sldNum" idx="5" sz="quarter"/>
+          </p:nvPr>
+        </p:nvSpPr>
+        <p:spPr/>
+      </p:sp>
+    </p:spTree>
+  </p:cSld>
+  <p:clrMapOvr>
+    <a:masterClrMapping/>
+  </p:clrMapOvr>
+</p:notes>
+</file>
+
+<file path=ppt/notesSlides/notesSlide13.xml><?xml version="1.0" encoding="utf-8"?>
+<p:notes xmlns:a="http://schemas.openxmlformats.org/drawingml/2006/main" xmlns:p="http://schemas.openxmlformats.org/presentationml/2006/main" xmlns:r="http://schemas.openxmlformats.org/officeDocument/2006/relationships">
+  <p:cSld>
+    <p:spTree>
+      <p:nvGrpSpPr>
+        <p:cNvPr id="1" name=""/>
+        <p:cNvGrpSpPr/>
+        <p:nvPr/>
+      </p:nvGrpSpPr>
+      <p:grpSpPr>
+        <a:xfrm>
+          <a:off x="0" y="0"/>
+          <a:ext cx="0" cy="0"/>
+          <a:chOff x="0" y="0"/>
+          <a:chExt cx="0" cy="0"/>
+        </a:xfrm>
+      </p:grpSpPr>
+      <p:sp>
+        <p:nvSpPr>
+          <p:cNvPr id="2" name="Slide Image Placeholder 1"/>
+          <p:cNvSpPr>
+            <a:spLocks noGrp="1"/>
+          </p:cNvSpPr>
+          <p:nvPr>
+            <p:ph type="sldImg" idx="2"/>
+          </p:nvPr>
+        </p:nvSpPr>
+        <p:spPr/>
+      </p:sp>
+      <p:sp>
+        <p:nvSpPr>
+          <p:cNvPr id="3" name="Notes Placeholder 2"/>
+          <p:cNvSpPr>
+            <a:spLocks noGrp="1"/>
+          </p:cNvSpPr>
+          <p:nvPr>
+            <p:ph type="body" idx="3" sz="quarter"/>
+          </p:nvPr>
+        </p:nvSpPr>
+        <p:spPr/>
+        <p:txBody>
+          <a:bodyPr/>
+          <a:lstStyle/>
+          <a:p>
+            <a:r>
+              <a:t>Tanglish: Team venum-na team. Solo-va irundha, solo. Build anything. Ship something.</a:t>
+            </a:r>
+          </a:p>
+          <a:p>
+            <a:r>
+              <a:t>Individuals and teams. New ideas and existing products. Any stack. Any policy-compliant payment provider.</a:t>
+            </a:r>
+          </a:p>
+          <a:p>
+            <a:r>
+              <a:t>RevenueCat is a Luma collaborator, not a requirement. A workable way to charge counts. Big revenue during the event is not required.</a:t>
+            </a:r>
+          </a:p>
+          <a:p>
+            <a:r>
+              <a:t>https://luma.com/mprx0ocg</a:t>
+            </a:r>
+          </a:p>
+        </p:txBody>
+      </p:sp>
+      <p:sp>
+        <p:nvSpPr>
+          <p:cNvPr id="4" name="Slide Number Placeholder 3"/>
+          <p:cNvSpPr>
+            <a:spLocks noGrp="1"/>
+          </p:cNvSpPr>
+          <p:nvPr>
+            <p:ph type="sldNum" idx="5" sz="quarter"/>
+          </p:nvPr>
+        </p:nvSpPr>
+        <p:spPr/>
+      </p:sp>
+    </p:spTree>
+  </p:cSld>
+  <p:clrMapOvr>
+    <a:masterClrMapping/>
+  </p:clrMapOvr>
+</p:notes>
+</file>
+
+<file path=ppt/notesSlides/notesSlide14.xml><?xml version="1.0" encoding="utf-8"?>
+<p:notes xmlns:a="http://schemas.openxmlformats.org/drawingml/2006/main" xmlns:p="http://schemas.openxmlformats.org/presentationml/2006/main" xmlns:r="http://schemas.openxmlformats.org/officeDocument/2006/relationships">
+  <p:cSld>
+    <p:spTree>
+      <p:nvGrpSpPr>
+        <p:cNvPr id="1" name=""/>
+        <p:cNvGrpSpPr/>
+        <p:nvPr/>
+      </p:nvGrpSpPr>
+      <p:grpSpPr>
+        <a:xfrm>
+          <a:off x="0" y="0"/>
+          <a:ext cx="0" cy="0"/>
+          <a:chOff x="0" y="0"/>
+          <a:chExt cx="0" cy="0"/>
+        </a:xfrm>
+      </p:grpSpPr>
+      <p:sp>
+        <p:nvSpPr>
+          <p:cNvPr id="2" name="Slide Image Placeholder 1"/>
+          <p:cNvSpPr>
+            <a:spLocks noGrp="1"/>
+          </p:cNvSpPr>
+          <p:nvPr>
+            <p:ph type="sldImg" idx="2"/>
+          </p:nvPr>
+        </p:nvSpPr>
+        <p:spPr/>
+      </p:sp>
+      <p:sp>
+        <p:nvSpPr>
+          <p:cNvPr id="3" name="Notes Placeholder 2"/>
+          <p:cNvSpPr>
+            <a:spLocks noGrp="1"/>
+          </p:cNvSpPr>
+          <p:nvPr>
+            <p:ph type="body" idx="3" sz="quarter"/>
+          </p:nvPr>
+        </p:nvSpPr>
+        <p:spPr/>
+        <p:txBody>
+          <a:bodyPr/>
+          <a:lstStyle/>
+          <a:p>
+            <a:r>
+              <a:t>Tanglish: Sheet-la fill pannunga. Review Ready-ku maathunga. Organizers dhaan paathu review pannuvaanga.</a:t>
+            </a:r>
+          </a:p>
+          <a:p>
+            <a:r>
+              <a:t>Sheet: https://docs.google.com/spreadsheets/d/1DZ7OSphlY8llxWisVc_FcLGeu9Psj_fvfxR2F7ohxcM/edit?usp=sharing</a:t>
+            </a:r>
+          </a:p>
+          <a:p>
+            <a:r>
+              <a:t>Columns: Product Name, Creator / Team, Product Category, Demo / Product URL, Repository URL, Monetization Model, Payment Integration, Deployment Status, Review Status, Production Ready by Thursday, Notes.</a:t>
+            </a:r>
+          </a:p>
+          <a:p>
+            <a:r>
+              <a:t>Workflow: fill the sheet, update URLs, the participant sets Review Status to Review Ready, organizers review. Review Ready is not approval.</a:t>
+            </a:r>
+          </a:p>
+        </p:txBody>
+      </p:sp>
+      <p:sp>
+        <p:nvSpPr>
+          <p:cNvPr id="4" name="Slide Number Placeholder 3"/>
+          <p:cNvSpPr>
+            <a:spLocks noGrp="1"/>
+          </p:cNvSpPr>
+          <p:nvPr>
+            <p:ph type="sldNum" idx="5" sz="quarter"/>
+          </p:nvPr>
+        </p:nvSpPr>
+        <p:spPr/>
+      </p:sp>
+    </p:spTree>
+  </p:cSld>
+  <p:clrMapOvr>
+    <a:masterClrMapping/>
+  </p:clrMapOvr>
+</p:notes>
+</file>
+
+<file path=ppt/notesSlides/notesSlide15.xml><?xml version="1.0" encoding="utf-8"?>
+<p:notes xmlns:a="http://schemas.openxmlformats.org/drawingml/2006/main" xmlns:p="http://schemas.openxmlformats.org/presentationml/2006/main" xmlns:r="http://schemas.openxmlformats.org/officeDocument/2006/relationships">
+  <p:cSld>
+    <p:spTree>
+      <p:nvGrpSpPr>
+        <p:cNvPr id="1" name=""/>
+        <p:cNvGrpSpPr/>
+        <p:nvPr/>
+      </p:nvGrpSpPr>
+      <p:grpSpPr>
+        <a:xfrm>
+          <a:off x="0" y="0"/>
+          <a:ext cx="0" cy="0"/>
+          <a:chOff x="0" y="0"/>
+          <a:chExt cx="0" cy="0"/>
+        </a:xfrm>
+      </p:grpSpPr>
+      <p:sp>
+        <p:nvSpPr>
+          <p:cNvPr id="2" name="Slide Image Placeholder 1"/>
+          <p:cNvSpPr>
+            <a:spLocks noGrp="1"/>
+          </p:cNvSpPr>
+          <p:nvPr>
+            <p:ph type="sldImg" idx="2"/>
+          </p:nvPr>
+        </p:nvSpPr>
+        <p:spPr/>
+      </p:sp>
+      <p:sp>
+        <p:nvSpPr>
+          <p:cNvPr id="3" name="Notes Placeholder 2"/>
+          <p:cNvSpPr>
+            <a:spLocks noGrp="1"/>
+          </p:cNvSpPr>
+          <p:nvPr>
+            <p:ph type="body" idx="3" sz="quarter"/>
+          </p:nvPr>
+        </p:nvSpPr>
+        <p:spPr/>
+        <p:txBody>
+          <a:bodyPr/>
+          <a:lstStyle/>
+          <a:p>
+            <a:r>
+              <a:t>Tanglish: Thursday-kku live aaganum. Review Ready-na ‘paathu videoonga.’ Production Ready-na users use panna ready.</a:t>
+            </a:r>
+          </a:p>
+          <a:p>
+            <a:r>
+              <a:t>Say Thursday. Do not print a calendar date.</a:t>
+            </a:r>
+          </a:p>
+          <a:p>
+            <a:r>
+              <a:t>Production Ready by Thursday = deployed and usable. Review Ready = please review.</a:t>
+            </a:r>
+          </a:p>
+          <a:p>
+            <a:r>
+              <a:t>Checklist: production URL; core flow works; usable onboarding; no critical blockers; a clear way to charge; payment flow works when they charge; basic analytics or feedback; enough for organizers to test.</a:t>
+            </a:r>
+          </a:p>
+          <a:p>
+            <a:r>
+              <a:t>Extra DevFest prize eligibility, not an automatic win.</a:t>
+            </a:r>
+          </a:p>
+          <a:p>
+            <a:r>
+              <a:t>https://luma.com/mprx0ocg</a:t>
+            </a:r>
+          </a:p>
+          <a:p>
+            <a:r>
+              <a:t>https://devfest.gdgchennai.in/</a:t>
+            </a:r>
+          </a:p>
+        </p:txBody>
+      </p:sp>
+      <p:sp>
+        <p:nvSpPr>
+          <p:cNvPr id="4" name="Slide Number Placeholder 3"/>
+          <p:cNvSpPr>
+            <a:spLocks noGrp="1"/>
+          </p:cNvSpPr>
+          <p:nvPr>
+            <p:ph type="sldNum" idx="5" sz="quarter"/>
+          </p:nvPr>
+        </p:nvSpPr>
+        <p:spPr/>
+      </p:sp>
+    </p:spTree>
+  </p:cSld>
+  <p:clrMapOvr>
+    <a:masterClrMapping/>
+  </p:clrMapOvr>
+</p:notes>
+</file>
+
+<file path=ppt/notesSlides/notesSlide16.xml><?xml version="1.0" encoding="utf-8"?>
+<p:notes xmlns:a="http://schemas.openxmlformats.org/drawingml/2006/main" xmlns:p="http://schemas.openxmlformats.org/presentationml/2006/main" xmlns:r="http://schemas.openxmlformats.org/officeDocument/2006/relationships">
+  <p:cSld>
+    <p:spTree>
+      <p:nvGrpSpPr>
+        <p:cNvPr id="1" name=""/>
+        <p:cNvGrpSpPr/>
+        <p:nvPr/>
+      </p:nvGrpSpPr>
+      <p:grpSpPr>
+        <a:xfrm>
+          <a:off x="0" y="0"/>
+          <a:ext cx="0" cy="0"/>
+          <a:chOff x="0" y="0"/>
+          <a:chExt cx="0" cy="0"/>
+        </a:xfrm>
+      </p:grpSpPr>
+      <p:sp>
+        <p:nvSpPr>
+          <p:cNvPr id="2" name="Slide Image Placeholder 1"/>
+          <p:cNvSpPr>
+            <a:spLocks noGrp="1"/>
+          </p:cNvSpPr>
+          <p:nvPr>
+            <p:ph type="sldImg" idx="2"/>
+          </p:nvPr>
+        </p:nvSpPr>
+        <p:spPr/>
+      </p:sp>
+      <p:sp>
+        <p:nvSpPr>
+          <p:cNvPr id="3" name="Notes Placeholder 2"/>
+          <p:cNvSpPr>
+            <a:spLocks noGrp="1"/>
+          </p:cNvSpPr>
+          <p:nvPr>
+            <p:ph type="body" idx="3" sz="quarter"/>
+          </p:nvPr>
+        </p:nvSpPr>
+        <p:spPr/>
+        <p:txBody>
+          <a:bodyPr/>
+          <a:lstStyle/>
+          <a:p>
+            <a:r>
+              <a:t>Tanglish: Ship pannunga. Review aaganum. Ticket-na bonus — guarantee illa.</a:t>
+            </a:r>
+          </a:p>
+          <a:p>
+            <a:r>
+              <a:t>On the slide, attributed to Sam Altman: We're going to see 10 person billion-dollar companies pretty soon.</a:t>
+            </a:r>
+          </a:p>
+          <a:p>
+            <a:r>
+              <a:t>Fuller reported line: We're going to see 10-person companies with billion-dollar valuations pretty soon.</a:t>
+            </a:r>
+          </a:p>
+          <a:p>
+            <a:r>
+              <a:t>https://www.forbes.com/sites/michaelashley/2025/02/17/the-future-is-solo-ai-is-creating-billion-dollar-one-person-companies/</a:t>
+            </a:r>
+          </a:p>
+          <a:p>
+            <a:r>
+              <a:t>Organizers review. Selected winners get DevFest Chennai tickets. Prizes also at DevFest, Sat 17 Oct 2026, IITM Research Park. Thursday production-ready teams are considered for an additional prize — not a guarantee.</a:t>
+            </a:r>
+          </a:p>
+          <a:p>
+            <a:r>
+              <a:t>Judging themes only: usefulness, execution, UX, monetization potential, real deployment, learning. Do not invent amounts, winner counts, or weights.</a:t>
+            </a:r>
+          </a:p>
+          <a:p>
+            <a:r>
+              <a:t>Close: Don't just build another side project. Build something people can use, ship it to the world, and see if someone is willing to pay for it.</a:t>
+            </a:r>
+          </a:p>
+          <a:p>
+            <a:r>
+              <a:t>https://devfest.gdgchennai.in/</a:t>
+            </a:r>
+          </a:p>
+        </p:txBody>
+      </p:sp>
+      <p:sp>
+        <p:nvSpPr>
+          <p:cNvPr id="4" name="Slide Number Placeholder 3"/>
+          <p:cNvSpPr>
+            <a:spLocks noGrp="1"/>
+          </p:cNvSpPr>
+          <p:nvPr>
+            <p:ph type="sldNum" idx="5" sz="quarter"/>
+          </p:nvPr>
+        </p:nvSpPr>
+        <p:spPr/>
+      </p:sp>
+    </p:spTree>
+  </p:cSld>
+  <p:clrMapOvr>
+    <a:masterClrMapping/>
+  </p:clrMapOvr>
+</p:notes>
+</file>
+
+<file path=ppt/notesSlides/notesSlide17.xml><?xml version="1.0" encoding="utf-8"?>
+<p:notes xmlns:a="http://schemas.openxmlformats.org/drawingml/2006/main" xmlns:p="http://schemas.openxmlformats.org/presentationml/2006/main" xmlns:r="http://schemas.openxmlformats.org/officeDocument/2006/relationships">
+  <p:cSld>
+    <p:spTree>
+      <p:nvGrpSpPr>
+        <p:cNvPr id="1" name=""/>
+        <p:cNvGrpSpPr/>
+        <p:nvPr/>
+      </p:nvGrpSpPr>
+      <p:grpSpPr>
+        <a:xfrm>
+          <a:off x="0" y="0"/>
+          <a:ext cx="0" cy="0"/>
+          <a:chOff x="0" y="0"/>
+          <a:chExt cx="0" cy="0"/>
+        </a:xfrm>
+      </p:grpSpPr>
+      <p:sp>
+        <p:nvSpPr>
+          <p:cNvPr id="2" name="Slide Image Placeholder 1"/>
+          <p:cNvSpPr>
+            <a:spLocks noGrp="1"/>
+          </p:cNvSpPr>
+          <p:nvPr>
+            <p:ph type="sldImg" idx="2"/>
+          </p:nvPr>
+        </p:nvSpPr>
+        <p:spPr/>
+      </p:sp>
+      <p:sp>
+        <p:nvSpPr>
+          <p:cNvPr id="3" name="Notes Placeholder 2"/>
+          <p:cNvSpPr>
+            <a:spLocks noGrp="1"/>
+          </p:cNvSpPr>
+          <p:nvPr>
+            <p:ph type="body" idx="3" sz="quarter"/>
+          </p:nvPr>
+        </p:nvSpPr>
+        <p:spPr/>
+        <p:txBody>
+          <a:bodyPr/>
+          <a:lstStyle/>
+          <a:p>
+            <a:r>
               <a:t>Tanglish: Banner-ah vechi vidunga. DevFest-ku point pannunga. QR invent pannaathinga.</a:t>
             </a:r>
           </a:p>
@@ -622,6 +1270,86 @@
           <a:p>
             <a:r>
               <a:t>https://devfest.gdgchennai.in/banner/main.webp</a:t>
+            </a:r>
+          </a:p>
+        </p:txBody>
+      </p:sp>
+      <p:sp>
+        <p:nvSpPr>
+          <p:cNvPr id="4" name="Slide Number Placeholder 3"/>
+          <p:cNvSpPr>
+            <a:spLocks noGrp="1"/>
+          </p:cNvSpPr>
+          <p:nvPr>
+            <p:ph type="sldNum" idx="5" sz="quarter"/>
+          </p:nvPr>
+        </p:nvSpPr>
+        <p:spPr/>
+      </p:sp>
+    </p:spTree>
+  </p:cSld>
+  <p:clrMapOvr>
+    <a:masterClrMapping/>
+  </p:clrMapOvr>
+</p:notes>
+</file>
+
+<file path=ppt/notesSlides/notesSlide18.xml><?xml version="1.0" encoding="utf-8"?>
+<p:notes xmlns:a="http://schemas.openxmlformats.org/drawingml/2006/main" xmlns:p="http://schemas.openxmlformats.org/presentationml/2006/main" xmlns:r="http://schemas.openxmlformats.org/officeDocument/2006/relationships">
+  <p:cSld>
+    <p:spTree>
+      <p:nvGrpSpPr>
+        <p:cNvPr id="1" name=""/>
+        <p:cNvGrpSpPr/>
+        <p:nvPr/>
+      </p:nvGrpSpPr>
+      <p:grpSpPr>
+        <a:xfrm>
+          <a:off x="0" y="0"/>
+          <a:ext cx="0" cy="0"/>
+          <a:chOff x="0" y="0"/>
+          <a:chExt cx="0" cy="0"/>
+        </a:xfrm>
+      </p:grpSpPr>
+      <p:sp>
+        <p:nvSpPr>
+          <p:cNvPr id="2" name="Slide Image Placeholder 1"/>
+          <p:cNvSpPr>
+            <a:spLocks noGrp="1"/>
+          </p:cNvSpPr>
+          <p:nvPr>
+            <p:ph type="sldImg" idx="2"/>
+          </p:nvPr>
+        </p:nvSpPr>
+        <p:spPr/>
+      </p:sp>
+      <p:sp>
+        <p:nvSpPr>
+          <p:cNvPr id="3" name="Notes Placeholder 2"/>
+          <p:cNvSpPr>
+            <a:spLocks noGrp="1"/>
+          </p:cNvSpPr>
+          <p:nvPr>
+            <p:ph type="body" idx="3" sz="quarter"/>
+          </p:nvPr>
+        </p:nvSpPr>
+        <p:spPr/>
+        <p:txBody>
+          <a:bodyPr/>
+          <a:lstStyle/>
+          <a:p>
+            <a:r>
+              <a:t>Tanglish: Indha banner-ah vechi vidunga. Scan panna mudiyala-na DevFest site-ku point pannunga.</a:t>
+            </a:r>
+          </a:p>
+          <a:p>
+            <a:r>
+              <a:t>KUG community-partner art. Full image, no crop, no overlay, no second QR drawn on top.</a:t>
+            </a:r>
+          </a:p>
+          <a:p>
+            <a:r>
+              <a:t>The on-art QR did not decode in our check. Use https://devfest.gdgchennai.in/ — do not invent another.</a:t>
             </a:r>
           </a:p>
           <a:p>
@@ -871,27 +1599,27 @@
           <a:lstStyle/>
           <a:p>
             <a:r>
-              <a:t>Tanglish: Innoru feature kedayadhu. First paying customer dhaan matter. Simple-nu ninaichu GitHub-la vechutaanga.</a:t>
-            </a:r>
-          </a:p>
-          <a:p>
-            <a:r>
-              <a:t>Talk to customers. Show pricing early. Preorders. Paid pilot. Clear refund and delivery policy.</a:t>
-            </a:r>
-          </a:p>
-          <a:p>
-            <a:r>
-              <a:t>Validate demand. Smallest version someone will pay for. Turn the product into a business. Organic growth. An exit is possible later on https://acquire.com/</a:t>
-            </a:r>
-          </a:p>
-          <a:p>
-            <a:r>
-              <a:t>Prices are examples. Razorpay: https://razorpay.com/docs/</a:t>
-            </a:r>
-          </a:p>
-          <a:p>
-            <a:r>
-              <a:t>Stripe where available. Crowdfunding is not guaranteed funding.</a:t>
+              <a:t>Tanglish: Puthiya invention venam. Oru job. Oru price. Adhu pothum.</a:t>
+            </a:r>
+          </a:p>
+          <a:p>
+            <a:r>
+              <a:t>Maaa is a Mac notch reminder. Pro is $2.99 once for two computers. https://www.maaa.app/</a:t>
+            </a:r>
+          </a:p>
+          <a:p>
+            <a:r>
+              <a:t>Lucky Charm hangs a charm on the desktop. https://luckycharm.kraftostech.com/</a:t>
+            </a:r>
+          </a:p>
+          <a:p>
+            <a:r>
+              <a:t>Carrd is one-page sites. https://carrd.co/</a:t>
+            </a:r>
+          </a:p>
+          <a:p>
+            <a:r>
+              <a:t>No revenue or popularity counts.</a:t>
             </a:r>
           </a:p>
         </p:txBody>
@@ -961,32 +1689,22 @@
           <a:lstStyle/>
           <a:p>
             <a:r>
-              <a:t>Tanglish: Anju per ₹199 kudutha, almost thousand. Gross idhu — tax, fees illa. PMF illa, willingness to pay.</a:t>
-            </a:r>
-          </a:p>
-          <a:p>
-            <a:r>
-              <a:t>7-step path: painful problem → smallest useful solution → landing + pricing → payment method → share → measure → improve from behavior.</a:t>
-            </a:r>
-          </a:p>
-          <a:p>
-            <a:r>
-              <a:t>Loop: Launch → Analytics → Feedback → Improvements → Retention → Revenue.</a:t>
-            </a:r>
-          </a:p>
-          <a:p>
-            <a:r>
-              <a:t>PostHog, Firebase Analytics, Mixpanel, Plausible, Discord, GitHub Discussions, email, X, LinkedIn, Reddit, Product Hunt, YouTube, Instagram, SEO, Sentry, Crashlytics. Nobody needs every tool.</a:t>
-            </a:r>
-          </a:p>
-          <a:p>
-            <a:r>
-              <a:t>Payment is evidence someone will pay. It is not product-market fit.</a:t>
-            </a:r>
-          </a:p>
-          <a:p>
-            <a:r>
-              <a:t>https://razorpay.com/docs/</a:t>
+              <a:t>Tanglish: Copycat-nu ninaikadheenga. Better version pothum. Market already irukku.</a:t>
+            </a:r>
+          </a:p>
+          <a:p>
+            <a:r>
+              <a:t>DunSocial is one more scheduler in a market that already has them. Public list price is $20/month — not a success claim. https://dunsocial.com/</a:t>
+            </a:r>
+          </a:p>
+          <a:p>
+            <a:r>
+              <a:t>The owner talked to the founder, who did not want an interview. What he did say: people trust you when you solve a problem, and he studies competitors.</a:t>
+            </a:r>
+          </a:p>
+          <a:p>
+            <a:r>
+              <a:t>The easiest test of a market is to ship a better version of something that already exists. Do not put a like count on this slide.</a:t>
             </a:r>
           </a:p>
         </p:txBody>
@@ -1056,22 +1774,17 @@
           <a:lstStyle/>
           <a:p>
             <a:r>
-              <a:t>Tanglish: Team venum-na team. Solo-va irundha, solo. Build anything. Ship something.</a:t>
-            </a:r>
-          </a:p>
-          <a:p>
-            <a:r>
-              <a:t>Individuals and teams. New ideas and existing products. Any stack. Any policy-compliant payment provider.</a:t>
-            </a:r>
-          </a:p>
-          <a:p>
-            <a:r>
-              <a:t>RevenueCat is a Luma collaborator, not a requirement. A workable way to charge counts. Big revenue during the event is not required.</a:t>
-            </a:r>
-          </a:p>
-          <a:p>
-            <a:r>
-              <a:t>https://luma.com/mprx0ocg</a:t>
+              <a:t>Tanglish: First product. Game, charm, oru chinna app. Oruthan finish panna mudiyumnu irukanum.</a:t>
+            </a:r>
+          </a:p>
+          <a:p>
+            <a:r>
+              <a:t>The first part of the recipe is something one person can finish. Examples stay the ones already named.</a:t>
+            </a:r>
+          </a:p>
+          <a:p>
+            <a:r>
+              <a:t>https://www.maaa.app/</a:t>
             </a:r>
           </a:p>
         </p:txBody>
@@ -1141,22 +1854,17 @@
           <a:lstStyle/>
           <a:p>
             <a:r>
-              <a:t>Tanglish: Sheet-la fill pannunga. Review Ready-ku maathunga. Organizers dhaan paathu review pannuvaanga.</a:t>
-            </a:r>
-          </a:p>
-          <a:p>
-            <a:r>
-              <a:t>Sheet: https://docs.google.com/spreadsheets/d/1DZ7OSphlY8llxWisVc_FcLGeu9Psj_fvfxR2F7ohxcM/edit?usp=sharing</a:t>
-            </a:r>
-          </a:p>
-          <a:p>
-            <a:r>
-              <a:t>Columns: Product Name, Creator / Team, Product Category, Demo / Product URL, Repository URL, Monetization Model, Payment Integration, Deployment Status, Review Status, Production Ready by Thursday, Notes.</a:t>
-            </a:r>
-          </a:p>
-          <a:p>
-            <a:r>
-              <a:t>Workflow: fill the sheet, update URLs, the participant sets Review Status to Review Ready, organizers review. Review Ready is not approval.</a:t>
+              <a:t>Tanglish: Oru price. Oru checkout. Adhu dhaan payment.</a:t>
+            </a:r>
+          </a:p>
+          <a:p>
+            <a:r>
+              <a:t>Prices are examples. Razorpay: https://razorpay.com/docs/</a:t>
+            </a:r>
+          </a:p>
+          <a:p>
+            <a:r>
+              <a:t>Stripe where available. Crowdfunding is not guaranteed funding.</a:t>
             </a:r>
           </a:p>
         </p:txBody>
@@ -1226,37 +1934,22 @@
           <a:lstStyle/>
           <a:p>
             <a:r>
-              <a:t>Tanglish: Thursday-kku live aaganum. Review Ready-na ‘paathu videoonga.’ Production Ready-na users use panna ready.</a:t>
-            </a:r>
-          </a:p>
-          <a:p>
-            <a:r>
-              <a:t>Say Thursday. Do not print a calendar date.</a:t>
-            </a:r>
-          </a:p>
-          <a:p>
-            <a:r>
-              <a:t>Production Ready by Thursday = deployed and usable. Review Ready = please review.</a:t>
-            </a:r>
-          </a:p>
-          <a:p>
-            <a:r>
-              <a:t>Checklist: production URL; core flow works; usable onboarding; no critical blockers; a clear way to charge; payment flow works when they charge; basic analytics or feedback; enough for organizers to test.</a:t>
-            </a:r>
-          </a:p>
-          <a:p>
-            <a:r>
-              <a:t>Extra DevFest prize eligibility, not an automatic win.</a:t>
-            </a:r>
-          </a:p>
-          <a:p>
-            <a:r>
-              <a:t>https://luma.com/mprx0ocg</a:t>
-            </a:r>
-          </a:p>
-          <a:p>
-            <a:r>
-              <a:t>https://devfest.gdgchennai.in/</a:t>
+              <a:t>Tanglish: Analytics-ku oru tool pothum. Ella logo-um venam.</a:t>
+            </a:r>
+          </a:p>
+          <a:p>
+            <a:r>
+              <a:t>PostHog: https://posthog.com/</a:t>
+            </a:r>
+          </a:p>
+          <a:p>
+            <a:r>
+              <a:t>Also name Plausible, Firebase Analytics, and Mixpanel, and say pick one.</a:t>
+            </a:r>
+          </a:p>
+          <a:p>
+            <a:r>
+              <a:t>Track visitors, activation, retention, paid conversion, churn.</a:t>
             </a:r>
           </a:p>
         </p:txBody>
@@ -1326,42 +2019,17 @@
           <a:lstStyle/>
           <a:p>
             <a:r>
-              <a:t>Tanglish: Ship pannunga. Review aaganum. Ticket-na bonus — guarantee illa.</a:t>
-            </a:r>
-          </a:p>
-          <a:p>
-            <a:r>
-              <a:t>On the slide, attributed to Sam Altman: We're going to see 10 person billion-dollar companies pretty soon.</a:t>
-            </a:r>
-          </a:p>
-          <a:p>
-            <a:r>
-              <a:t>Fuller reported line: We're going to see 10-person companies with billion-dollar valuations pretty soon.</a:t>
-            </a:r>
-          </a:p>
-          <a:p>
-            <a:r>
-              <a:t>https://www.forbes.com/sites/michaelashley/2025/02/17/the-future-is-solo-ai-is-creating-billion-dollar-one-person-companies/</a:t>
-            </a:r>
-          </a:p>
-          <a:p>
-            <a:r>
-              <a:t>Organizers review. Selected winners get DevFest Chennai tickets. Prizes also at DevFest, Sat 17 Oct 2026, IITM Research Park. Thursday production-ready teams are considered for an additional prize — not a guarantee.</a:t>
-            </a:r>
-          </a:p>
-          <a:p>
-            <a:r>
-              <a:t>Judging themes only: usefulness, execution, UX, monetization potential, real deployment, learning. Do not invent amounts, winner counts, or weights.</a:t>
-            </a:r>
-          </a:p>
-          <a:p>
-            <a:r>
-              <a:t>Close: Don't just build another side project. Build something people can use, ship it to the world, and see if someone is willing to pay for it.</a:t>
-            </a:r>
-          </a:p>
-          <a:p>
-            <a:r>
-              <a:t>https://devfest.gdgchennai.in/</a:t>
+              <a:t>Tanglish: Support-ku Discord pothum. Periya team venam.</a:t>
+            </a:r>
+          </a:p>
+          <a:p>
+            <a:r>
+              <a:t>Discord, email, or GitHub Discussions. Nobody needs a support org.</a:t>
+            </a:r>
+          </a:p>
+          <a:p>
+            <a:r>
+              <a:t>https://discord.com/</a:t>
             </a:r>
           </a:p>
         </p:txBody>
@@ -4418,8 +5086,8 @@
         </p:nvSpPr>
         <p:spPr>
           <a:xfrm>
-            <a:off x="777240" y="1554480"/>
-            <a:ext cx="10607040" cy="2011680"/>
+            <a:off x="640080" y="1417320"/>
+            <a:ext cx="10881360" cy="1737360"/>
           </a:xfrm>
           <a:prstGeom prst="rect">
             <a:avLst/>
@@ -4434,7 +5102,7 @@
           <a:p>
             <a:pPr algn="ctr"/>
             <a:r>
-              <a:rPr sz="4000" b="1">
+              <a:rPr sz="3600" b="1">
                 <a:solidFill>
                   <a:srgbClr val="1D1D1F"/>
                 </a:solidFill>
@@ -4453,8 +5121,8 @@
         </p:nvSpPr>
         <p:spPr>
           <a:xfrm>
-            <a:off x="777240" y="3520439"/>
-            <a:ext cx="10607040" cy="1005840"/>
+            <a:off x="640080" y="3200400"/>
+            <a:ext cx="10881360" cy="777240"/>
           </a:xfrm>
           <a:prstGeom prst="rect">
             <a:avLst/>
@@ -4469,7 +5137,7 @@
           <a:p>
             <a:pPr algn="ctr"/>
             <a:r>
-              <a:rPr sz="2400" b="0">
+              <a:rPr sz="2200" b="0">
                 <a:solidFill>
                   <a:srgbClr val="6E6E73"/>
                 </a:solidFill>
@@ -4488,7 +5156,7 @@
         </p:nvSpPr>
         <p:spPr>
           <a:xfrm>
-            <a:off x="4548225" y="5806440"/>
+            <a:off x="4548225" y="5349240"/>
             <a:ext cx="3095244" cy="384048"/>
           </a:xfrm>
           <a:prstGeom prst="roundRect">
@@ -4531,7 +5199,7 @@
         </p:nvSpPr>
         <p:spPr>
           <a:xfrm>
-            <a:off x="4548225" y="5843016"/>
+            <a:off x="4548225" y="5385816"/>
             <a:ext cx="3095244" cy="329184"/>
           </a:xfrm>
           <a:prstGeom prst="rect">
@@ -4591,7 +5259,7 @@
             <a:avLst/>
           </a:prstGeom>
           <a:solidFill>
-            <a:srgbClr val="070710"/>
+            <a:srgbClr val="F5F5F7"/>
           </a:solidFill>
           <a:ln>
             <a:noFill/>
@@ -4619,9 +5287,1192 @@
           </a:p>
         </p:txBody>
       </p:sp>
+      <p:sp>
+        <p:nvSpPr>
+          <p:cNvPr id="3" name="TextBox 2"/>
+          <p:cNvSpPr txBox="1"/>
+          <p:nvPr/>
+        </p:nvSpPr>
+        <p:spPr>
+          <a:xfrm>
+            <a:off x="640080" y="1874519"/>
+            <a:ext cx="10881360" cy="1737360"/>
+          </a:xfrm>
+          <a:prstGeom prst="rect">
+            <a:avLst/>
+          </a:prstGeom>
+          <a:noFill/>
+        </p:spPr>
+        <p:txBody>
+          <a:bodyPr wrap="square">
+            <a:spAutoFit/>
+          </a:bodyPr>
+          <a:lstStyle/>
+          <a:p>
+            <a:pPr algn="ctr"/>
+            <a:r>
+              <a:rPr sz="3000" b="1">
+                <a:solidFill>
+                  <a:srgbClr val="1D1D1F"/>
+                </a:solidFill>
+                <a:latin typeface="Calibri"/>
+              </a:rPr>
+              <a:t>They stay when you solve the next problem.</a:t>
+            </a:r>
+          </a:p>
+        </p:txBody>
+      </p:sp>
+      <p:sp>
+        <p:nvSpPr>
+          <p:cNvPr id="4" name="TextBox 3"/>
+          <p:cNvSpPr txBox="1"/>
+          <p:nvPr/>
+        </p:nvSpPr>
+        <p:spPr>
+          <a:xfrm>
+            <a:off x="640080" y="3657600"/>
+            <a:ext cx="10881360" cy="777240"/>
+          </a:xfrm>
+          <a:prstGeom prst="rect">
+            <a:avLst/>
+          </a:prstGeom>
+          <a:noFill/>
+        </p:spPr>
+        <p:txBody>
+          <a:bodyPr wrap="square">
+            <a:spAutoFit/>
+          </a:bodyPr>
+          <a:lstStyle/>
+          <a:p>
+            <a:pPr algn="ctr"/>
+            <a:r>
+              <a:rPr sz="2200" b="0">
+                <a:solidFill>
+                  <a:srgbClr val="6E6E73"/>
+                </a:solidFill>
+                <a:latin typeface="Calibri"/>
+              </a:rPr>
+              <a:t>Likes are not customers.</a:t>
+            </a:r>
+          </a:p>
+        </p:txBody>
+      </p:sp>
+    </p:spTree>
+  </p:cSld>
+  <p:clrMapOvr>
+    <a:masterClrMapping/>
+  </p:clrMapOvr>
+</p:sld>
+</file>
+
+<file path=ppt/slides/slide11.xml><?xml version="1.0" encoding="utf-8"?>
+<p:sld xmlns:a="http://schemas.openxmlformats.org/drawingml/2006/main" xmlns:p="http://schemas.openxmlformats.org/presentationml/2006/main" xmlns:r="http://schemas.openxmlformats.org/officeDocument/2006/relationships">
+  <p:cSld>
+    <p:spTree>
+      <p:nvGrpSpPr>
+        <p:cNvPr id="1" name=""/>
+        <p:cNvGrpSpPr/>
+        <p:nvPr/>
+      </p:nvGrpSpPr>
+      <p:grpSpPr/>
+      <p:sp>
+        <p:nvSpPr>
+          <p:cNvPr id="2" name="Rectangle 1"/>
+          <p:cNvSpPr/>
+          <p:nvPr/>
+        </p:nvSpPr>
+        <p:spPr>
+          <a:xfrm>
+            <a:off x="0" y="0"/>
+            <a:ext cx="12191695" cy="6858000"/>
+          </a:xfrm>
+          <a:prstGeom prst="rect">
+            <a:avLst/>
+          </a:prstGeom>
+          <a:solidFill>
+            <a:srgbClr val="F5F5F7"/>
+          </a:solidFill>
+          <a:ln>
+            <a:noFill/>
+          </a:ln>
+        </p:spPr>
+        <p:style>
+          <a:lnRef idx="1">
+            <a:schemeClr val="accent1"/>
+          </a:lnRef>
+          <a:fillRef idx="3">
+            <a:schemeClr val="accent1"/>
+          </a:fillRef>
+          <a:effectRef idx="2">
+            <a:schemeClr val="accent1"/>
+          </a:effectRef>
+          <a:fontRef idx="minor">
+            <a:schemeClr val="lt1"/>
+          </a:fontRef>
+        </p:style>
+        <p:txBody>
+          <a:bodyPr rtlCol="0" anchor="ctr"/>
+          <a:lstStyle/>
+          <a:p>
+            <a:pPr algn="ctr"/>
+          </a:p>
+        </p:txBody>
+      </p:sp>
+      <p:sp>
+        <p:nvSpPr>
+          <p:cNvPr id="3" name="TextBox 2"/>
+          <p:cNvSpPr txBox="1"/>
+          <p:nvPr/>
+        </p:nvSpPr>
+        <p:spPr>
+          <a:xfrm>
+            <a:off x="640080" y="1325880"/>
+            <a:ext cx="10881360" cy="1737360"/>
+          </a:xfrm>
+          <a:prstGeom prst="rect">
+            <a:avLst/>
+          </a:prstGeom>
+          <a:noFill/>
+        </p:spPr>
+        <p:txBody>
+          <a:bodyPr wrap="square">
+            <a:spAutoFit/>
+          </a:bodyPr>
+          <a:lstStyle/>
+          <a:p>
+            <a:pPr algn="ctr"/>
+            <a:r>
+              <a:rPr sz="2800" b="1">
+                <a:solidFill>
+                  <a:srgbClr val="1D1D1F"/>
+                </a:solidFill>
+                <a:latin typeface="Calibri"/>
+              </a:rPr>
+              <a:t>Your first paying customer beats another feature.</a:t>
+            </a:r>
+          </a:p>
+        </p:txBody>
+      </p:sp>
+      <p:sp>
+        <p:nvSpPr>
+          <p:cNvPr id="4" name="TextBox 3"/>
+          <p:cNvSpPr txBox="1"/>
+          <p:nvPr/>
+        </p:nvSpPr>
+        <p:spPr>
+          <a:xfrm>
+            <a:off x="640080" y="3108960"/>
+            <a:ext cx="10881360" cy="777240"/>
+          </a:xfrm>
+          <a:prstGeom prst="rect">
+            <a:avLst/>
+          </a:prstGeom>
+          <a:noFill/>
+        </p:spPr>
+        <p:txBody>
+          <a:bodyPr wrap="square">
+            <a:spAutoFit/>
+          </a:bodyPr>
+          <a:lstStyle/>
+          <a:p>
+            <a:pPr algn="ctr"/>
+            <a:r>
+              <a:rPr sz="2200" b="0">
+                <a:solidFill>
+                  <a:srgbClr val="6E6E73"/>
+                </a:solidFill>
+                <a:latin typeface="Calibri"/>
+              </a:rPr>
+              <a:t>Too simple is why it stays in GitHub.</a:t>
+            </a:r>
+          </a:p>
+        </p:txBody>
+      </p:sp>
+    </p:spTree>
+  </p:cSld>
+  <p:clrMapOvr>
+    <a:masterClrMapping/>
+  </p:clrMapOvr>
+</p:sld>
+</file>
+
+<file path=ppt/slides/slide12.xml><?xml version="1.0" encoding="utf-8"?>
+<p:sld xmlns:a="http://schemas.openxmlformats.org/drawingml/2006/main" xmlns:p="http://schemas.openxmlformats.org/presentationml/2006/main" xmlns:r="http://schemas.openxmlformats.org/officeDocument/2006/relationships">
+  <p:cSld>
+    <p:spTree>
+      <p:nvGrpSpPr>
+        <p:cNvPr id="1" name=""/>
+        <p:cNvGrpSpPr/>
+        <p:nvPr/>
+      </p:nvGrpSpPr>
+      <p:grpSpPr/>
+      <p:sp>
+        <p:nvSpPr>
+          <p:cNvPr id="2" name="Rectangle 1"/>
+          <p:cNvSpPr/>
+          <p:nvPr/>
+        </p:nvSpPr>
+        <p:spPr>
+          <a:xfrm>
+            <a:off x="0" y="0"/>
+            <a:ext cx="12191695" cy="6858000"/>
+          </a:xfrm>
+          <a:prstGeom prst="rect">
+            <a:avLst/>
+          </a:prstGeom>
+          <a:solidFill>
+            <a:srgbClr val="F5F5F7"/>
+          </a:solidFill>
+          <a:ln>
+            <a:noFill/>
+          </a:ln>
+        </p:spPr>
+        <p:style>
+          <a:lnRef idx="1">
+            <a:schemeClr val="accent1"/>
+          </a:lnRef>
+          <a:fillRef idx="3">
+            <a:schemeClr val="accent1"/>
+          </a:fillRef>
+          <a:effectRef idx="2">
+            <a:schemeClr val="accent1"/>
+          </a:effectRef>
+          <a:fontRef idx="minor">
+            <a:schemeClr val="lt1"/>
+          </a:fontRef>
+        </p:style>
+        <p:txBody>
+          <a:bodyPr rtlCol="0" anchor="ctr"/>
+          <a:lstStyle/>
+          <a:p>
+            <a:pPr algn="ctr"/>
+          </a:p>
+        </p:txBody>
+      </p:sp>
+      <p:sp>
+        <p:nvSpPr>
+          <p:cNvPr id="3" name="TextBox 2"/>
+          <p:cNvSpPr txBox="1"/>
+          <p:nvPr/>
+        </p:nvSpPr>
+        <p:spPr>
+          <a:xfrm>
+            <a:off x="640080" y="1554480"/>
+            <a:ext cx="10881360" cy="1737360"/>
+          </a:xfrm>
+          <a:prstGeom prst="rect">
+            <a:avLst/>
+          </a:prstGeom>
+          <a:noFill/>
+        </p:spPr>
+        <p:txBody>
+          <a:bodyPr wrap="square">
+            <a:spAutoFit/>
+          </a:bodyPr>
+          <a:lstStyle/>
+          <a:p>
+            <a:pPr algn="ctr"/>
+            <a:r>
+              <a:rPr sz="4000" b="1">
+                <a:solidFill>
+                  <a:srgbClr val="1D1D1F"/>
+                </a:solidFill>
+                <a:latin typeface="Calibri"/>
+              </a:rPr>
+              <a:t>Five people × ₹199.</a:t>
+            </a:r>
+          </a:p>
+        </p:txBody>
+      </p:sp>
+      <p:sp>
+        <p:nvSpPr>
+          <p:cNvPr id="4" name="TextBox 3"/>
+          <p:cNvSpPr txBox="1"/>
+          <p:nvPr/>
+        </p:nvSpPr>
+        <p:spPr>
+          <a:xfrm>
+            <a:off x="640080" y="3337560"/>
+            <a:ext cx="10881360" cy="777240"/>
+          </a:xfrm>
+          <a:prstGeom prst="rect">
+            <a:avLst/>
+          </a:prstGeom>
+          <a:noFill/>
+        </p:spPr>
+        <p:txBody>
+          <a:bodyPr wrap="square">
+            <a:spAutoFit/>
+          </a:bodyPr>
+          <a:lstStyle/>
+          <a:p>
+            <a:pPr algn="ctr"/>
+            <a:r>
+              <a:rPr sz="2200" b="0">
+                <a:solidFill>
+                  <a:srgbClr val="6E6E73"/>
+                </a:solidFill>
+                <a:latin typeface="Calibri"/>
+              </a:rPr>
+              <a:t>Your first ₹1,000.</a:t>
+            </a:r>
+          </a:p>
+        </p:txBody>
+      </p:sp>
+      <p:sp>
+        <p:nvSpPr>
+          <p:cNvPr id="5" name="Rounded Rectangle 4"/>
+          <p:cNvSpPr/>
+          <p:nvPr/>
+        </p:nvSpPr>
+        <p:spPr>
+          <a:xfrm>
+            <a:off x="3210915" y="5806440"/>
+            <a:ext cx="1655064" cy="384048"/>
+          </a:xfrm>
+          <a:prstGeom prst="roundRect">
+            <a:avLst/>
+          </a:prstGeom>
+          <a:solidFill>
+            <a:srgbClr val="E8E8ED"/>
+          </a:solidFill>
+          <a:ln>
+            <a:noFill/>
+          </a:ln>
+        </p:spPr>
+        <p:style>
+          <a:lnRef idx="1">
+            <a:schemeClr val="accent1"/>
+          </a:lnRef>
+          <a:fillRef idx="3">
+            <a:schemeClr val="accent1"/>
+          </a:fillRef>
+          <a:effectRef idx="2">
+            <a:schemeClr val="accent1"/>
+          </a:effectRef>
+          <a:fontRef idx="minor">
+            <a:schemeClr val="lt1"/>
+          </a:fontRef>
+        </p:style>
+        <p:txBody>
+          <a:bodyPr rtlCol="0" anchor="ctr"/>
+          <a:lstStyle/>
+          <a:p>
+            <a:pPr algn="ctr"/>
+          </a:p>
+        </p:txBody>
+      </p:sp>
+      <p:sp>
+        <p:nvSpPr>
+          <p:cNvPr id="6" name="TextBox 5"/>
+          <p:cNvSpPr txBox="1"/>
+          <p:nvPr/>
+        </p:nvSpPr>
+        <p:spPr>
+          <a:xfrm>
+            <a:off x="3210915" y="5843016"/>
+            <a:ext cx="1655064" cy="329184"/>
+          </a:xfrm>
+          <a:prstGeom prst="rect">
+            <a:avLst/>
+          </a:prstGeom>
+          <a:noFill/>
+        </p:spPr>
+        <p:txBody>
+          <a:bodyPr wrap="square">
+            <a:spAutoFit/>
+          </a:bodyPr>
+          <a:lstStyle/>
+          <a:p>
+            <a:pPr algn="ctr"/>
+            <a:r>
+              <a:rPr sz="1200" b="1">
+                <a:solidFill>
+                  <a:srgbClr val="1D1D1F"/>
+                </a:solidFill>
+                <a:latin typeface="Calibri"/>
+              </a:rPr>
+              <a:t>₹199 extension</a:t>
+            </a:r>
+          </a:p>
+        </p:txBody>
+      </p:sp>
+      <p:sp>
+        <p:nvSpPr>
+          <p:cNvPr id="7" name="Rounded Rectangle 6"/>
+          <p:cNvSpPr/>
+          <p:nvPr/>
+        </p:nvSpPr>
+        <p:spPr>
+          <a:xfrm>
+            <a:off x="5030571" y="5806440"/>
+            <a:ext cx="1078992" cy="384048"/>
+          </a:xfrm>
+          <a:prstGeom prst="roundRect">
+            <a:avLst/>
+          </a:prstGeom>
+          <a:solidFill>
+            <a:srgbClr val="E8E8ED"/>
+          </a:solidFill>
+          <a:ln>
+            <a:noFill/>
+          </a:ln>
+        </p:spPr>
+        <p:style>
+          <a:lnRef idx="1">
+            <a:schemeClr val="accent1"/>
+          </a:lnRef>
+          <a:fillRef idx="3">
+            <a:schemeClr val="accent1"/>
+          </a:fillRef>
+          <a:effectRef idx="2">
+            <a:schemeClr val="accent1"/>
+          </a:effectRef>
+          <a:fontRef idx="minor">
+            <a:schemeClr val="lt1"/>
+          </a:fontRef>
+        </p:style>
+        <p:txBody>
+          <a:bodyPr rtlCol="0" anchor="ctr"/>
+          <a:lstStyle/>
+          <a:p>
+            <a:pPr algn="ctr"/>
+          </a:p>
+        </p:txBody>
+      </p:sp>
+      <p:sp>
+        <p:nvSpPr>
+          <p:cNvPr id="8" name="TextBox 7"/>
+          <p:cNvSpPr txBox="1"/>
+          <p:nvPr/>
+        </p:nvSpPr>
+        <p:spPr>
+          <a:xfrm>
+            <a:off x="5030571" y="5843016"/>
+            <a:ext cx="1078992" cy="329184"/>
+          </a:xfrm>
+          <a:prstGeom prst="rect">
+            <a:avLst/>
+          </a:prstGeom>
+          <a:noFill/>
+        </p:spPr>
+        <p:txBody>
+          <a:bodyPr wrap="square">
+            <a:spAutoFit/>
+          </a:bodyPr>
+          <a:lstStyle/>
+          <a:p>
+            <a:pPr algn="ctr"/>
+            <a:r>
+              <a:rPr sz="1200" b="1">
+                <a:solidFill>
+                  <a:srgbClr val="1D1D1F"/>
+                </a:solidFill>
+                <a:latin typeface="Calibri"/>
+              </a:rPr>
+              <a:t>₹299 app</a:t>
+            </a:r>
+          </a:p>
+        </p:txBody>
+      </p:sp>
+      <p:sp>
+        <p:nvSpPr>
+          <p:cNvPr id="9" name="Rounded Rectangle 8"/>
+          <p:cNvSpPr/>
+          <p:nvPr/>
+        </p:nvSpPr>
+        <p:spPr>
+          <a:xfrm>
+            <a:off x="6274155" y="5806440"/>
+            <a:ext cx="1271016" cy="384048"/>
+          </a:xfrm>
+          <a:prstGeom prst="roundRect">
+            <a:avLst/>
+          </a:prstGeom>
+          <a:solidFill>
+            <a:srgbClr val="E8E8ED"/>
+          </a:solidFill>
+          <a:ln>
+            <a:noFill/>
+          </a:ln>
+        </p:spPr>
+        <p:style>
+          <a:lnRef idx="1">
+            <a:schemeClr val="accent1"/>
+          </a:lnRef>
+          <a:fillRef idx="3">
+            <a:schemeClr val="accent1"/>
+          </a:fillRef>
+          <a:effectRef idx="2">
+            <a:schemeClr val="accent1"/>
+          </a:effectRef>
+          <a:fontRef idx="minor">
+            <a:schemeClr val="lt1"/>
+          </a:fontRef>
+        </p:style>
+        <p:txBody>
+          <a:bodyPr rtlCol="0" anchor="ctr"/>
+          <a:lstStyle/>
+          <a:p>
+            <a:pPr algn="ctr"/>
+          </a:p>
+        </p:txBody>
+      </p:sp>
+      <p:sp>
+        <p:nvSpPr>
+          <p:cNvPr id="10" name="TextBox 9"/>
+          <p:cNvSpPr txBox="1"/>
+          <p:nvPr/>
+        </p:nvSpPr>
+        <p:spPr>
+          <a:xfrm>
+            <a:off x="6274155" y="5843016"/>
+            <a:ext cx="1271016" cy="329184"/>
+          </a:xfrm>
+          <a:prstGeom prst="rect">
+            <a:avLst/>
+          </a:prstGeom>
+          <a:noFill/>
+        </p:spPr>
+        <p:txBody>
+          <a:bodyPr wrap="square">
+            <a:spAutoFit/>
+          </a:bodyPr>
+          <a:lstStyle/>
+          <a:p>
+            <a:pPr algn="ctr"/>
+            <a:r>
+              <a:rPr sz="1200" b="1">
+                <a:solidFill>
+                  <a:srgbClr val="1D1D1F"/>
+                </a:solidFill>
+                <a:latin typeface="Calibri"/>
+              </a:rPr>
+              <a:t>₹499/month</a:t>
+            </a:r>
+          </a:p>
+        </p:txBody>
+      </p:sp>
+      <p:sp>
+        <p:nvSpPr>
+          <p:cNvPr id="11" name="Rounded Rectangle 10"/>
+          <p:cNvSpPr/>
+          <p:nvPr/>
+        </p:nvSpPr>
+        <p:spPr>
+          <a:xfrm>
+            <a:off x="7709763" y="5806440"/>
+            <a:ext cx="1271016" cy="384048"/>
+          </a:xfrm>
+          <a:prstGeom prst="roundRect">
+            <a:avLst/>
+          </a:prstGeom>
+          <a:solidFill>
+            <a:srgbClr val="E8E8ED"/>
+          </a:solidFill>
+          <a:ln>
+            <a:noFill/>
+          </a:ln>
+        </p:spPr>
+        <p:style>
+          <a:lnRef idx="1">
+            <a:schemeClr val="accent1"/>
+          </a:lnRef>
+          <a:fillRef idx="3">
+            <a:schemeClr val="accent1"/>
+          </a:fillRef>
+          <a:effectRef idx="2">
+            <a:schemeClr val="accent1"/>
+          </a:effectRef>
+          <a:fontRef idx="minor">
+            <a:schemeClr val="lt1"/>
+          </a:fontRef>
+        </p:style>
+        <p:txBody>
+          <a:bodyPr rtlCol="0" anchor="ctr"/>
+          <a:lstStyle/>
+          <a:p>
+            <a:pPr algn="ctr"/>
+          </a:p>
+        </p:txBody>
+      </p:sp>
+      <p:sp>
+        <p:nvSpPr>
+          <p:cNvPr id="12" name="TextBox 11"/>
+          <p:cNvSpPr txBox="1"/>
+          <p:nvPr/>
+        </p:nvSpPr>
+        <p:spPr>
+          <a:xfrm>
+            <a:off x="7709763" y="5843016"/>
+            <a:ext cx="1271016" cy="329184"/>
+          </a:xfrm>
+          <a:prstGeom prst="rect">
+            <a:avLst/>
+          </a:prstGeom>
+          <a:noFill/>
+        </p:spPr>
+        <p:txBody>
+          <a:bodyPr wrap="square">
+            <a:spAutoFit/>
+          </a:bodyPr>
+          <a:lstStyle/>
+          <a:p>
+            <a:pPr algn="ctr"/>
+            <a:r>
+              <a:rPr sz="1200" b="1">
+                <a:solidFill>
+                  <a:srgbClr val="1D1D1F"/>
+                </a:solidFill>
+                <a:latin typeface="Calibri"/>
+              </a:rPr>
+              <a:t>Level pack</a:t>
+            </a:r>
+          </a:p>
+        </p:txBody>
+      </p:sp>
+    </p:spTree>
+  </p:cSld>
+  <p:clrMapOvr>
+    <a:masterClrMapping/>
+  </p:clrMapOvr>
+</p:sld>
+</file>
+
+<file path=ppt/slides/slide13.xml><?xml version="1.0" encoding="utf-8"?>
+<p:sld xmlns:a="http://schemas.openxmlformats.org/drawingml/2006/main" xmlns:p="http://schemas.openxmlformats.org/presentationml/2006/main" xmlns:r="http://schemas.openxmlformats.org/officeDocument/2006/relationships">
+  <p:cSld>
+    <p:spTree>
+      <p:nvGrpSpPr>
+        <p:cNvPr id="1" name=""/>
+        <p:cNvGrpSpPr/>
+        <p:nvPr/>
+      </p:nvGrpSpPr>
+      <p:grpSpPr/>
+      <p:sp>
+        <p:nvSpPr>
+          <p:cNvPr id="2" name="Rectangle 1"/>
+          <p:cNvSpPr/>
+          <p:nvPr/>
+        </p:nvSpPr>
+        <p:spPr>
+          <a:xfrm>
+            <a:off x="0" y="0"/>
+            <a:ext cx="12191695" cy="6858000"/>
+          </a:xfrm>
+          <a:prstGeom prst="rect">
+            <a:avLst/>
+          </a:prstGeom>
+          <a:solidFill>
+            <a:srgbClr val="F5F5F7"/>
+          </a:solidFill>
+          <a:ln>
+            <a:noFill/>
+          </a:ln>
+        </p:spPr>
+        <p:style>
+          <a:lnRef idx="1">
+            <a:schemeClr val="accent1"/>
+          </a:lnRef>
+          <a:fillRef idx="3">
+            <a:schemeClr val="accent1"/>
+          </a:fillRef>
+          <a:effectRef idx="2">
+            <a:schemeClr val="accent1"/>
+          </a:effectRef>
+          <a:fontRef idx="minor">
+            <a:schemeClr val="lt1"/>
+          </a:fontRef>
+        </p:style>
+        <p:txBody>
+          <a:bodyPr rtlCol="0" anchor="ctr"/>
+          <a:lstStyle/>
+          <a:p>
+            <a:pPr algn="ctr"/>
+          </a:p>
+        </p:txBody>
+      </p:sp>
+      <p:sp>
+        <p:nvSpPr>
+          <p:cNvPr id="3" name="TextBox 2"/>
+          <p:cNvSpPr txBox="1"/>
+          <p:nvPr/>
+        </p:nvSpPr>
+        <p:spPr>
+          <a:xfrm>
+            <a:off x="640080" y="1783080"/>
+            <a:ext cx="10881360" cy="1737360"/>
+          </a:xfrm>
+          <a:prstGeom prst="rect">
+            <a:avLst/>
+          </a:prstGeom>
+          <a:noFill/>
+        </p:spPr>
+        <p:txBody>
+          <a:bodyPr wrap="square">
+            <a:spAutoFit/>
+          </a:bodyPr>
+          <a:lstStyle/>
+          <a:p>
+            <a:pPr algn="ctr"/>
+            <a:r>
+              <a:rPr sz="3600" b="1">
+                <a:solidFill>
+                  <a:srgbClr val="1D1D1F"/>
+                </a:solidFill>
+                <a:latin typeface="Calibri"/>
+              </a:rPr>
+              <a:t>Build anything. Ship something.</a:t>
+            </a:r>
+          </a:p>
+        </p:txBody>
+      </p:sp>
+      <p:sp>
+        <p:nvSpPr>
+          <p:cNvPr id="4" name="TextBox 3"/>
+          <p:cNvSpPr txBox="1"/>
+          <p:nvPr/>
+        </p:nvSpPr>
+        <p:spPr>
+          <a:xfrm>
+            <a:off x="640080" y="3566160"/>
+            <a:ext cx="10881360" cy="777240"/>
+          </a:xfrm>
+          <a:prstGeom prst="rect">
+            <a:avLst/>
+          </a:prstGeom>
+          <a:noFill/>
+        </p:spPr>
+        <p:txBody>
+          <a:bodyPr wrap="square">
+            <a:spAutoFit/>
+          </a:bodyPr>
+          <a:lstStyle/>
+          <a:p>
+            <a:pPr algn="ctr"/>
+            <a:r>
+              <a:rPr sz="2200" b="0">
+                <a:solidFill>
+                  <a:srgbClr val="6E6E73"/>
+                </a:solidFill>
+                <a:latin typeface="Calibri"/>
+              </a:rPr>
+              <a:t>Solo or team.</a:t>
+            </a:r>
+          </a:p>
+        </p:txBody>
+      </p:sp>
+      <p:sp>
+        <p:nvSpPr>
+          <p:cNvPr id="5" name="Rounded Rectangle 4"/>
+          <p:cNvSpPr/>
+          <p:nvPr/>
+        </p:nvSpPr>
+        <p:spPr>
+          <a:xfrm>
+            <a:off x="4507077" y="5440680"/>
+            <a:ext cx="694944" cy="384048"/>
+          </a:xfrm>
+          <a:prstGeom prst="roundRect">
+            <a:avLst/>
+          </a:prstGeom>
+          <a:solidFill>
+            <a:srgbClr val="E8E8ED"/>
+          </a:solidFill>
+          <a:ln>
+            <a:noFill/>
+          </a:ln>
+        </p:spPr>
+        <p:style>
+          <a:lnRef idx="1">
+            <a:schemeClr val="accent1"/>
+          </a:lnRef>
+          <a:fillRef idx="3">
+            <a:schemeClr val="accent1"/>
+          </a:fillRef>
+          <a:effectRef idx="2">
+            <a:schemeClr val="accent1"/>
+          </a:effectRef>
+          <a:fontRef idx="minor">
+            <a:schemeClr val="lt1"/>
+          </a:fontRef>
+        </p:style>
+        <p:txBody>
+          <a:bodyPr rtlCol="0" anchor="ctr"/>
+          <a:lstStyle/>
+          <a:p>
+            <a:pPr algn="ctr"/>
+          </a:p>
+        </p:txBody>
+      </p:sp>
+      <p:sp>
+        <p:nvSpPr>
+          <p:cNvPr id="6" name="TextBox 5"/>
+          <p:cNvSpPr txBox="1"/>
+          <p:nvPr/>
+        </p:nvSpPr>
+        <p:spPr>
+          <a:xfrm>
+            <a:off x="4507077" y="5477256"/>
+            <a:ext cx="694944" cy="329184"/>
+          </a:xfrm>
+          <a:prstGeom prst="rect">
+            <a:avLst/>
+          </a:prstGeom>
+          <a:noFill/>
+        </p:spPr>
+        <p:txBody>
+          <a:bodyPr wrap="square">
+            <a:spAutoFit/>
+          </a:bodyPr>
+          <a:lstStyle/>
+          <a:p>
+            <a:pPr algn="ctr"/>
+            <a:r>
+              <a:rPr sz="1200" b="1">
+                <a:solidFill>
+                  <a:srgbClr val="1D1D1F"/>
+                </a:solidFill>
+                <a:latin typeface="Calibri"/>
+              </a:rPr>
+              <a:t>Game</a:t>
+            </a:r>
+          </a:p>
+        </p:txBody>
+      </p:sp>
+      <p:sp>
+        <p:nvSpPr>
+          <p:cNvPr id="7" name="Rounded Rectangle 6"/>
+          <p:cNvSpPr/>
+          <p:nvPr/>
+        </p:nvSpPr>
+        <p:spPr>
+          <a:xfrm>
+            <a:off x="5366613" y="5440680"/>
+            <a:ext cx="598932" cy="384048"/>
+          </a:xfrm>
+          <a:prstGeom prst="roundRect">
+            <a:avLst/>
+          </a:prstGeom>
+          <a:solidFill>
+            <a:srgbClr val="E8E8ED"/>
+          </a:solidFill>
+          <a:ln>
+            <a:noFill/>
+          </a:ln>
+        </p:spPr>
+        <p:style>
+          <a:lnRef idx="1">
+            <a:schemeClr val="accent1"/>
+          </a:lnRef>
+          <a:fillRef idx="3">
+            <a:schemeClr val="accent1"/>
+          </a:fillRef>
+          <a:effectRef idx="2">
+            <a:schemeClr val="accent1"/>
+          </a:effectRef>
+          <a:fontRef idx="minor">
+            <a:schemeClr val="lt1"/>
+          </a:fontRef>
+        </p:style>
+        <p:txBody>
+          <a:bodyPr rtlCol="0" anchor="ctr"/>
+          <a:lstStyle/>
+          <a:p>
+            <a:pPr algn="ctr"/>
+          </a:p>
+        </p:txBody>
+      </p:sp>
+      <p:sp>
+        <p:nvSpPr>
+          <p:cNvPr id="8" name="TextBox 7"/>
+          <p:cNvSpPr txBox="1"/>
+          <p:nvPr/>
+        </p:nvSpPr>
+        <p:spPr>
+          <a:xfrm>
+            <a:off x="5366613" y="5477256"/>
+            <a:ext cx="598932" cy="329184"/>
+          </a:xfrm>
+          <a:prstGeom prst="rect">
+            <a:avLst/>
+          </a:prstGeom>
+          <a:noFill/>
+        </p:spPr>
+        <p:txBody>
+          <a:bodyPr wrap="square">
+            <a:spAutoFit/>
+          </a:bodyPr>
+          <a:lstStyle/>
+          <a:p>
+            <a:pPr algn="ctr"/>
+            <a:r>
+              <a:rPr sz="1200" b="1">
+                <a:solidFill>
+                  <a:srgbClr val="1D1D1F"/>
+                </a:solidFill>
+                <a:latin typeface="Calibri"/>
+              </a:rPr>
+              <a:t>App</a:t>
+            </a:r>
+          </a:p>
+        </p:txBody>
+      </p:sp>
+      <p:sp>
+        <p:nvSpPr>
+          <p:cNvPr id="9" name="Rounded Rectangle 8"/>
+          <p:cNvSpPr/>
+          <p:nvPr/>
+        </p:nvSpPr>
+        <p:spPr>
+          <a:xfrm>
+            <a:off x="6130137" y="5440680"/>
+            <a:ext cx="694944" cy="384048"/>
+          </a:xfrm>
+          <a:prstGeom prst="roundRect">
+            <a:avLst/>
+          </a:prstGeom>
+          <a:solidFill>
+            <a:srgbClr val="E8E8ED"/>
+          </a:solidFill>
+          <a:ln>
+            <a:noFill/>
+          </a:ln>
+        </p:spPr>
+        <p:style>
+          <a:lnRef idx="1">
+            <a:schemeClr val="accent1"/>
+          </a:lnRef>
+          <a:fillRef idx="3">
+            <a:schemeClr val="accent1"/>
+          </a:fillRef>
+          <a:effectRef idx="2">
+            <a:schemeClr val="accent1"/>
+          </a:effectRef>
+          <a:fontRef idx="minor">
+            <a:schemeClr val="lt1"/>
+          </a:fontRef>
+        </p:style>
+        <p:txBody>
+          <a:bodyPr rtlCol="0" anchor="ctr"/>
+          <a:lstStyle/>
+          <a:p>
+            <a:pPr algn="ctr"/>
+          </a:p>
+        </p:txBody>
+      </p:sp>
+      <p:sp>
+        <p:nvSpPr>
+          <p:cNvPr id="10" name="TextBox 9"/>
+          <p:cNvSpPr txBox="1"/>
+          <p:nvPr/>
+        </p:nvSpPr>
+        <p:spPr>
+          <a:xfrm>
+            <a:off x="6130137" y="5477256"/>
+            <a:ext cx="694944" cy="329184"/>
+          </a:xfrm>
+          <a:prstGeom prst="rect">
+            <a:avLst/>
+          </a:prstGeom>
+          <a:noFill/>
+        </p:spPr>
+        <p:txBody>
+          <a:bodyPr wrap="square">
+            <a:spAutoFit/>
+          </a:bodyPr>
+          <a:lstStyle/>
+          <a:p>
+            <a:pPr algn="ctr"/>
+            <a:r>
+              <a:rPr sz="1200" b="1">
+                <a:solidFill>
+                  <a:srgbClr val="1D1D1F"/>
+                </a:solidFill>
+                <a:latin typeface="Calibri"/>
+              </a:rPr>
+              <a:t>Site</a:t>
+            </a:r>
+          </a:p>
+        </p:txBody>
+      </p:sp>
+      <p:sp>
+        <p:nvSpPr>
+          <p:cNvPr id="11" name="Rounded Rectangle 10"/>
+          <p:cNvSpPr/>
+          <p:nvPr/>
+        </p:nvSpPr>
+        <p:spPr>
+          <a:xfrm>
+            <a:off x="6989673" y="5440680"/>
+            <a:ext cx="694944" cy="384048"/>
+          </a:xfrm>
+          <a:prstGeom prst="roundRect">
+            <a:avLst/>
+          </a:prstGeom>
+          <a:solidFill>
+            <a:srgbClr val="E8E8ED"/>
+          </a:solidFill>
+          <a:ln>
+            <a:noFill/>
+          </a:ln>
+        </p:spPr>
+        <p:style>
+          <a:lnRef idx="1">
+            <a:schemeClr val="accent1"/>
+          </a:lnRef>
+          <a:fillRef idx="3">
+            <a:schemeClr val="accent1"/>
+          </a:fillRef>
+          <a:effectRef idx="2">
+            <a:schemeClr val="accent1"/>
+          </a:effectRef>
+          <a:fontRef idx="minor">
+            <a:schemeClr val="lt1"/>
+          </a:fontRef>
+        </p:style>
+        <p:txBody>
+          <a:bodyPr rtlCol="0" anchor="ctr"/>
+          <a:lstStyle/>
+          <a:p>
+            <a:pPr algn="ctr"/>
+          </a:p>
+        </p:txBody>
+      </p:sp>
+      <p:sp>
+        <p:nvSpPr>
+          <p:cNvPr id="12" name="TextBox 11"/>
+          <p:cNvSpPr txBox="1"/>
+          <p:nvPr/>
+        </p:nvSpPr>
+        <p:spPr>
+          <a:xfrm>
+            <a:off x="6989673" y="5477256"/>
+            <a:ext cx="694944" cy="329184"/>
+          </a:xfrm>
+          <a:prstGeom prst="rect">
+            <a:avLst/>
+          </a:prstGeom>
+          <a:noFill/>
+        </p:spPr>
+        <p:txBody>
+          <a:bodyPr wrap="square">
+            <a:spAutoFit/>
+          </a:bodyPr>
+          <a:lstStyle/>
+          <a:p>
+            <a:pPr algn="ctr"/>
+            <a:r>
+              <a:rPr sz="1200" b="1">
+                <a:solidFill>
+                  <a:srgbClr val="1D1D1F"/>
+                </a:solidFill>
+                <a:latin typeface="Calibri"/>
+              </a:rPr>
+              <a:t>Tool</a:t>
+            </a:r>
+          </a:p>
+        </p:txBody>
+      </p:sp>
+    </p:spTree>
+  </p:cSld>
+  <p:clrMapOvr>
+    <a:masterClrMapping/>
+  </p:clrMapOvr>
+</p:sld>
+</file>
+
+<file path=ppt/slides/slide14.xml><?xml version="1.0" encoding="utf-8"?>
+<p:sld xmlns:a="http://schemas.openxmlformats.org/drawingml/2006/main" xmlns:p="http://schemas.openxmlformats.org/presentationml/2006/main" xmlns:r="http://schemas.openxmlformats.org/officeDocument/2006/relationships">
+  <p:cSld>
+    <p:spTree>
+      <p:nvGrpSpPr>
+        <p:cNvPr id="1" name=""/>
+        <p:cNvGrpSpPr/>
+        <p:nvPr/>
+      </p:nvGrpSpPr>
+      <p:grpSpPr/>
+      <p:sp>
+        <p:nvSpPr>
+          <p:cNvPr id="2" name="Rectangle 1"/>
+          <p:cNvSpPr/>
+          <p:nvPr/>
+        </p:nvSpPr>
+        <p:spPr>
+          <a:xfrm>
+            <a:off x="0" y="0"/>
+            <a:ext cx="12191695" cy="6858000"/>
+          </a:xfrm>
+          <a:prstGeom prst="rect">
+            <a:avLst/>
+          </a:prstGeom>
+          <a:solidFill>
+            <a:srgbClr val="F5F5F7"/>
+          </a:solidFill>
+          <a:ln>
+            <a:noFill/>
+          </a:ln>
+        </p:spPr>
+        <p:style>
+          <a:lnRef idx="1">
+            <a:schemeClr val="accent1"/>
+          </a:lnRef>
+          <a:fillRef idx="3">
+            <a:schemeClr val="accent1"/>
+          </a:fillRef>
+          <a:effectRef idx="2">
+            <a:schemeClr val="accent1"/>
+          </a:effectRef>
+          <a:fontRef idx="minor">
+            <a:schemeClr val="lt1"/>
+          </a:fontRef>
+        </p:style>
+        <p:txBody>
+          <a:bodyPr rtlCol="0" anchor="ctr"/>
+          <a:lstStyle/>
+          <a:p>
+            <a:pPr algn="ctr"/>
+          </a:p>
+        </p:txBody>
+      </p:sp>
+      <p:sp>
+        <p:nvSpPr>
+          <p:cNvPr id="3" name="TextBox 2"/>
+          <p:cNvSpPr txBox="1"/>
+          <p:nvPr/>
+        </p:nvSpPr>
+        <p:spPr>
+          <a:xfrm>
+            <a:off x="640080" y="640080"/>
+            <a:ext cx="10881360" cy="1143000"/>
+          </a:xfrm>
+          <a:prstGeom prst="rect">
+            <a:avLst/>
+          </a:prstGeom>
+          <a:noFill/>
+        </p:spPr>
+        <p:txBody>
+          <a:bodyPr wrap="square">
+            <a:spAutoFit/>
+          </a:bodyPr>
+          <a:lstStyle/>
+          <a:p>
+            <a:pPr algn="ctr"/>
+            <a:r>
+              <a:rPr sz="3400" b="1">
+                <a:solidFill>
+                  <a:srgbClr val="1D1D1F"/>
+                </a:solidFill>
+                <a:latin typeface="Calibri"/>
+              </a:rPr>
+              <a:t>One sheet. Set Review Ready.</a:t>
+            </a:r>
+          </a:p>
+        </p:txBody>
+      </p:sp>
       <p:pic>
         <p:nvPicPr>
-          <p:cNvPr id="3" name="Picture 2" descr="tmp8he0v5zp.png"/>
+          <p:cNvPr id="4" name="Picture 3" descr="shipaton-sheet-qr.png"/>
           <p:cNvPicPr>
             <a:picLocks noChangeAspect="1"/>
           </p:cNvPicPr>
@@ -4635,8 +6486,752 @@
         </p:blipFill>
         <p:spPr>
           <a:xfrm>
+            <a:off x="4160520" y="1965960"/>
+            <a:ext cx="3840480" cy="3840480"/>
+          </a:xfrm>
+          <a:prstGeom prst="rect">
+            <a:avLst/>
+          </a:prstGeom>
+        </p:spPr>
+      </p:pic>
+    </p:spTree>
+  </p:cSld>
+  <p:clrMapOvr>
+    <a:masterClrMapping/>
+  </p:clrMapOvr>
+</p:sld>
+</file>
+
+<file path=ppt/slides/slide15.xml><?xml version="1.0" encoding="utf-8"?>
+<p:sld xmlns:a="http://schemas.openxmlformats.org/drawingml/2006/main" xmlns:p="http://schemas.openxmlformats.org/presentationml/2006/main" xmlns:r="http://schemas.openxmlformats.org/officeDocument/2006/relationships">
+  <p:cSld>
+    <p:spTree>
+      <p:nvGrpSpPr>
+        <p:cNvPr id="1" name=""/>
+        <p:cNvGrpSpPr/>
+        <p:nvPr/>
+      </p:nvGrpSpPr>
+      <p:grpSpPr/>
+      <p:sp>
+        <p:nvSpPr>
+          <p:cNvPr id="2" name="Rectangle 1"/>
+          <p:cNvSpPr/>
+          <p:nvPr/>
+        </p:nvSpPr>
+        <p:spPr>
+          <a:xfrm>
+            <a:off x="0" y="0"/>
+            <a:ext cx="12191695" cy="6858000"/>
+          </a:xfrm>
+          <a:prstGeom prst="rect">
+            <a:avLst/>
+          </a:prstGeom>
+          <a:solidFill>
+            <a:srgbClr val="F5F5F7"/>
+          </a:solidFill>
+          <a:ln>
+            <a:noFill/>
+          </a:ln>
+        </p:spPr>
+        <p:style>
+          <a:lnRef idx="1">
+            <a:schemeClr val="accent1"/>
+          </a:lnRef>
+          <a:fillRef idx="3">
+            <a:schemeClr val="accent1"/>
+          </a:fillRef>
+          <a:effectRef idx="2">
+            <a:schemeClr val="accent1"/>
+          </a:effectRef>
+          <a:fontRef idx="minor">
+            <a:schemeClr val="lt1"/>
+          </a:fontRef>
+        </p:style>
+        <p:txBody>
+          <a:bodyPr rtlCol="0" anchor="ctr"/>
+          <a:lstStyle/>
+          <a:p>
+            <a:pPr algn="ctr"/>
+          </a:p>
+        </p:txBody>
+      </p:sp>
+      <p:sp>
+        <p:nvSpPr>
+          <p:cNvPr id="3" name="TextBox 2"/>
+          <p:cNvSpPr txBox="1"/>
+          <p:nvPr/>
+        </p:nvSpPr>
+        <p:spPr>
+          <a:xfrm>
+            <a:off x="640080" y="1874519"/>
+            <a:ext cx="10881360" cy="1737360"/>
+          </a:xfrm>
+          <a:prstGeom prst="rect">
+            <a:avLst/>
+          </a:prstGeom>
+          <a:noFill/>
+        </p:spPr>
+        <p:txBody>
+          <a:bodyPr wrap="square">
+            <a:spAutoFit/>
+          </a:bodyPr>
+          <a:lstStyle/>
+          <a:p>
+            <a:pPr algn="ctr"/>
+            <a:r>
+              <a:rPr sz="4000" b="1">
+                <a:solidFill>
+                  <a:srgbClr val="1D1D1F"/>
+                </a:solidFill>
+                <a:latin typeface="Calibri"/>
+              </a:rPr>
+              <a:t>Thursday. Make it live.</a:t>
+            </a:r>
+          </a:p>
+        </p:txBody>
+      </p:sp>
+      <p:sp>
+        <p:nvSpPr>
+          <p:cNvPr id="4" name="Rounded Rectangle 3"/>
+          <p:cNvSpPr/>
+          <p:nvPr/>
+        </p:nvSpPr>
+        <p:spPr>
+          <a:xfrm>
+            <a:off x="4168749" y="5257800"/>
+            <a:ext cx="1078992" cy="384048"/>
+          </a:xfrm>
+          <a:prstGeom prst="roundRect">
+            <a:avLst/>
+          </a:prstGeom>
+          <a:solidFill>
+            <a:srgbClr val="E8E8ED"/>
+          </a:solidFill>
+          <a:ln>
+            <a:noFill/>
+          </a:ln>
+        </p:spPr>
+        <p:style>
+          <a:lnRef idx="1">
+            <a:schemeClr val="accent1"/>
+          </a:lnRef>
+          <a:fillRef idx="3">
+            <a:schemeClr val="accent1"/>
+          </a:fillRef>
+          <a:effectRef idx="2">
+            <a:schemeClr val="accent1"/>
+          </a:effectRef>
+          <a:fontRef idx="minor">
+            <a:schemeClr val="lt1"/>
+          </a:fontRef>
+        </p:style>
+        <p:txBody>
+          <a:bodyPr rtlCol="0" anchor="ctr"/>
+          <a:lstStyle/>
+          <a:p>
+            <a:pPr algn="ctr"/>
+          </a:p>
+        </p:txBody>
+      </p:sp>
+      <p:sp>
+        <p:nvSpPr>
+          <p:cNvPr id="5" name="TextBox 4"/>
+          <p:cNvSpPr txBox="1"/>
+          <p:nvPr/>
+        </p:nvSpPr>
+        <p:spPr>
+          <a:xfrm>
+            <a:off x="4168749" y="5294376"/>
+            <a:ext cx="1078992" cy="329184"/>
+          </a:xfrm>
+          <a:prstGeom prst="rect">
+            <a:avLst/>
+          </a:prstGeom>
+          <a:noFill/>
+        </p:spPr>
+        <p:txBody>
+          <a:bodyPr wrap="square">
+            <a:spAutoFit/>
+          </a:bodyPr>
+          <a:lstStyle/>
+          <a:p>
+            <a:pPr algn="ctr"/>
+            <a:r>
+              <a:rPr sz="1200" b="1">
+                <a:solidFill>
+                  <a:srgbClr val="1D1D1F"/>
+                </a:solidFill>
+                <a:latin typeface="Calibri"/>
+              </a:rPr>
+              <a:t>Deployed</a:t>
+            </a:r>
+          </a:p>
+        </p:txBody>
+      </p:sp>
+      <p:sp>
+        <p:nvSpPr>
+          <p:cNvPr id="6" name="Rounded Rectangle 5"/>
+          <p:cNvSpPr/>
+          <p:nvPr/>
+        </p:nvSpPr>
+        <p:spPr>
+          <a:xfrm>
+            <a:off x="5412333" y="5257800"/>
+            <a:ext cx="886968" cy="384048"/>
+          </a:xfrm>
+          <a:prstGeom prst="roundRect">
+            <a:avLst/>
+          </a:prstGeom>
+          <a:solidFill>
+            <a:srgbClr val="E8E8ED"/>
+          </a:solidFill>
+          <a:ln>
+            <a:noFill/>
+          </a:ln>
+        </p:spPr>
+        <p:style>
+          <a:lnRef idx="1">
+            <a:schemeClr val="accent1"/>
+          </a:lnRef>
+          <a:fillRef idx="3">
+            <a:schemeClr val="accent1"/>
+          </a:fillRef>
+          <a:effectRef idx="2">
+            <a:schemeClr val="accent1"/>
+          </a:effectRef>
+          <a:fontRef idx="minor">
+            <a:schemeClr val="lt1"/>
+          </a:fontRef>
+        </p:style>
+        <p:txBody>
+          <a:bodyPr rtlCol="0" anchor="ctr"/>
+          <a:lstStyle/>
+          <a:p>
+            <a:pPr algn="ctr"/>
+          </a:p>
+        </p:txBody>
+      </p:sp>
+      <p:sp>
+        <p:nvSpPr>
+          <p:cNvPr id="7" name="TextBox 6"/>
+          <p:cNvSpPr txBox="1"/>
+          <p:nvPr/>
+        </p:nvSpPr>
+        <p:spPr>
+          <a:xfrm>
+            <a:off x="5412333" y="5294376"/>
+            <a:ext cx="886968" cy="329184"/>
+          </a:xfrm>
+          <a:prstGeom prst="rect">
+            <a:avLst/>
+          </a:prstGeom>
+          <a:noFill/>
+        </p:spPr>
+        <p:txBody>
+          <a:bodyPr wrap="square">
+            <a:spAutoFit/>
+          </a:bodyPr>
+          <a:lstStyle/>
+          <a:p>
+            <a:pPr algn="ctr"/>
+            <a:r>
+              <a:rPr sz="1200" b="1">
+                <a:solidFill>
+                  <a:srgbClr val="1D1D1F"/>
+                </a:solidFill>
+                <a:latin typeface="Calibri"/>
+              </a:rPr>
+              <a:t>Usable</a:t>
+            </a:r>
+          </a:p>
+        </p:txBody>
+      </p:sp>
+      <p:sp>
+        <p:nvSpPr>
+          <p:cNvPr id="8" name="Rounded Rectangle 7"/>
+          <p:cNvSpPr/>
+          <p:nvPr/>
+        </p:nvSpPr>
+        <p:spPr>
+          <a:xfrm>
+            <a:off x="6463893" y="5257800"/>
+            <a:ext cx="1559052" cy="384048"/>
+          </a:xfrm>
+          <a:prstGeom prst="roundRect">
+            <a:avLst/>
+          </a:prstGeom>
+          <a:solidFill>
+            <a:srgbClr val="E8E8ED"/>
+          </a:solidFill>
+          <a:ln>
+            <a:noFill/>
+          </a:ln>
+        </p:spPr>
+        <p:style>
+          <a:lnRef idx="1">
+            <a:schemeClr val="accent1"/>
+          </a:lnRef>
+          <a:fillRef idx="3">
+            <a:schemeClr val="accent1"/>
+          </a:fillRef>
+          <a:effectRef idx="2">
+            <a:schemeClr val="accent1"/>
+          </a:effectRef>
+          <a:fontRef idx="minor">
+            <a:schemeClr val="lt1"/>
+          </a:fontRef>
+        </p:style>
+        <p:txBody>
+          <a:bodyPr rtlCol="0" anchor="ctr"/>
+          <a:lstStyle/>
+          <a:p>
+            <a:pPr algn="ctr"/>
+          </a:p>
+        </p:txBody>
+      </p:sp>
+      <p:sp>
+        <p:nvSpPr>
+          <p:cNvPr id="9" name="TextBox 8"/>
+          <p:cNvSpPr txBox="1"/>
+          <p:nvPr/>
+        </p:nvSpPr>
+        <p:spPr>
+          <a:xfrm>
+            <a:off x="6463893" y="5294376"/>
+            <a:ext cx="1559052" cy="329184"/>
+          </a:xfrm>
+          <a:prstGeom prst="rect">
+            <a:avLst/>
+          </a:prstGeom>
+          <a:noFill/>
+        </p:spPr>
+        <p:txBody>
+          <a:bodyPr wrap="square">
+            <a:spAutoFit/>
+          </a:bodyPr>
+          <a:lstStyle/>
+          <a:p>
+            <a:pPr algn="ctr"/>
+            <a:r>
+              <a:rPr sz="1200" b="1">
+                <a:solidFill>
+                  <a:srgbClr val="1D1D1F"/>
+                </a:solidFill>
+                <a:latin typeface="Calibri"/>
+              </a:rPr>
+              <a:t>Payments work</a:t>
+            </a:r>
+          </a:p>
+        </p:txBody>
+      </p:sp>
+    </p:spTree>
+  </p:cSld>
+  <p:clrMapOvr>
+    <a:masterClrMapping/>
+  </p:clrMapOvr>
+</p:sld>
+</file>
+
+<file path=ppt/slides/slide16.xml><?xml version="1.0" encoding="utf-8"?>
+<p:sld xmlns:a="http://schemas.openxmlformats.org/drawingml/2006/main" xmlns:p="http://schemas.openxmlformats.org/presentationml/2006/main" xmlns:r="http://schemas.openxmlformats.org/officeDocument/2006/relationships">
+  <p:cSld>
+    <p:spTree>
+      <p:nvGrpSpPr>
+        <p:cNvPr id="1" name=""/>
+        <p:cNvGrpSpPr/>
+        <p:nvPr/>
+      </p:nvGrpSpPr>
+      <p:grpSpPr/>
+      <p:sp>
+        <p:nvSpPr>
+          <p:cNvPr id="2" name="Rectangle 1"/>
+          <p:cNvSpPr/>
+          <p:nvPr/>
+        </p:nvSpPr>
+        <p:spPr>
+          <a:xfrm>
+            <a:off x="0" y="0"/>
+            <a:ext cx="12191695" cy="6858000"/>
+          </a:xfrm>
+          <a:prstGeom prst="rect">
+            <a:avLst/>
+          </a:prstGeom>
+          <a:solidFill>
+            <a:srgbClr val="F5F5F7"/>
+          </a:solidFill>
+          <a:ln>
+            <a:noFill/>
+          </a:ln>
+        </p:spPr>
+        <p:style>
+          <a:lnRef idx="1">
+            <a:schemeClr val="accent1"/>
+          </a:lnRef>
+          <a:fillRef idx="3">
+            <a:schemeClr val="accent1"/>
+          </a:fillRef>
+          <a:effectRef idx="2">
+            <a:schemeClr val="accent1"/>
+          </a:effectRef>
+          <a:fontRef idx="minor">
+            <a:schemeClr val="lt1"/>
+          </a:fontRef>
+        </p:style>
+        <p:txBody>
+          <a:bodyPr rtlCol="0" anchor="ctr"/>
+          <a:lstStyle/>
+          <a:p>
+            <a:pPr algn="ctr"/>
+          </a:p>
+        </p:txBody>
+      </p:sp>
+      <p:sp>
+        <p:nvSpPr>
+          <p:cNvPr id="3" name="TextBox 2"/>
+          <p:cNvSpPr txBox="1"/>
+          <p:nvPr/>
+        </p:nvSpPr>
+        <p:spPr>
+          <a:xfrm>
+            <a:off x="640080" y="1051560"/>
+            <a:ext cx="10881360" cy="1005840"/>
+          </a:xfrm>
+          <a:prstGeom prst="rect">
+            <a:avLst/>
+          </a:prstGeom>
+          <a:noFill/>
+        </p:spPr>
+        <p:txBody>
+          <a:bodyPr wrap="square">
+            <a:spAutoFit/>
+          </a:bodyPr>
+          <a:lstStyle/>
+          <a:p>
+            <a:pPr algn="ctr"/>
+            <a:r>
+              <a:rPr sz="3600" b="1">
+                <a:solidFill>
+                  <a:srgbClr val="1D1D1F"/>
+                </a:solidFill>
+                <a:latin typeface="Calibri"/>
+              </a:rPr>
+              <a:t>Ship it. Get reviewed.</a:t>
+            </a:r>
+          </a:p>
+        </p:txBody>
+      </p:sp>
+      <p:sp>
+        <p:nvSpPr>
+          <p:cNvPr id="4" name="TextBox 3"/>
+          <p:cNvSpPr txBox="1"/>
+          <p:nvPr/>
+        </p:nvSpPr>
+        <p:spPr>
+          <a:xfrm>
+            <a:off x="822960" y="2331720"/>
+            <a:ext cx="10515600" cy="1828800"/>
+          </a:xfrm>
+          <a:prstGeom prst="rect">
+            <a:avLst/>
+          </a:prstGeom>
+          <a:noFill/>
+        </p:spPr>
+        <p:txBody>
+          <a:bodyPr wrap="square">
+            <a:spAutoFit/>
+          </a:bodyPr>
+          <a:lstStyle/>
+          <a:p>
+            <a:pPr algn="ctr"/>
+            <a:r>
+              <a:rPr sz="2400" b="1">
+                <a:solidFill>
+                  <a:srgbClr val="1D1D1F"/>
+                </a:solidFill>
+                <a:latin typeface="Calibri"/>
+              </a:rPr>
+              <a:t>We're going to see 10 person billion-dollar companies pretty soon.</a:t>
+            </a:r>
+          </a:p>
+        </p:txBody>
+      </p:sp>
+      <p:sp>
+        <p:nvSpPr>
+          <p:cNvPr id="5" name="TextBox 4"/>
+          <p:cNvSpPr txBox="1"/>
+          <p:nvPr/>
+        </p:nvSpPr>
+        <p:spPr>
+          <a:xfrm>
+            <a:off x="640080" y="4297680"/>
+            <a:ext cx="10881360" cy="365760"/>
+          </a:xfrm>
+          <a:prstGeom prst="rect">
+            <a:avLst/>
+          </a:prstGeom>
+          <a:noFill/>
+        </p:spPr>
+        <p:txBody>
+          <a:bodyPr wrap="square">
+            <a:spAutoFit/>
+          </a:bodyPr>
+          <a:lstStyle/>
+          <a:p>
+            <a:pPr algn="ctr"/>
+            <a:r>
+              <a:rPr sz="1400" b="1">
+                <a:solidFill>
+                  <a:srgbClr val="6E6E73"/>
+                </a:solidFill>
+                <a:latin typeface="Calibri"/>
+              </a:rPr>
+              <a:t>Sam Altman</a:t>
+            </a:r>
+          </a:p>
+        </p:txBody>
+      </p:sp>
+      <p:sp>
+        <p:nvSpPr>
+          <p:cNvPr id="6" name="Rounded Rectangle 5"/>
+          <p:cNvSpPr/>
+          <p:nvPr/>
+        </p:nvSpPr>
+        <p:spPr>
+          <a:xfrm>
+            <a:off x="5220309" y="5257800"/>
+            <a:ext cx="1751076" cy="384048"/>
+          </a:xfrm>
+          <a:prstGeom prst="roundRect">
+            <a:avLst/>
+          </a:prstGeom>
+          <a:solidFill>
+            <a:srgbClr val="E8E8ED"/>
+          </a:solidFill>
+          <a:ln>
+            <a:noFill/>
+          </a:ln>
+        </p:spPr>
+        <p:style>
+          <a:lnRef idx="1">
+            <a:schemeClr val="accent1"/>
+          </a:lnRef>
+          <a:fillRef idx="3">
+            <a:schemeClr val="accent1"/>
+          </a:fillRef>
+          <a:effectRef idx="2">
+            <a:schemeClr val="accent1"/>
+          </a:effectRef>
+          <a:fontRef idx="minor">
+            <a:schemeClr val="lt1"/>
+          </a:fontRef>
+        </p:style>
+        <p:txBody>
+          <a:bodyPr rtlCol="0" anchor="ctr"/>
+          <a:lstStyle/>
+          <a:p>
+            <a:pPr algn="ctr"/>
+          </a:p>
+        </p:txBody>
+      </p:sp>
+      <p:sp>
+        <p:nvSpPr>
+          <p:cNvPr id="7" name="TextBox 6"/>
+          <p:cNvSpPr txBox="1"/>
+          <p:nvPr/>
+        </p:nvSpPr>
+        <p:spPr>
+          <a:xfrm>
+            <a:off x="5220309" y="5294376"/>
+            <a:ext cx="1751076" cy="329184"/>
+          </a:xfrm>
+          <a:prstGeom prst="rect">
+            <a:avLst/>
+          </a:prstGeom>
+          <a:noFill/>
+        </p:spPr>
+        <p:txBody>
+          <a:bodyPr wrap="square">
+            <a:spAutoFit/>
+          </a:bodyPr>
+          <a:lstStyle/>
+          <a:p>
+            <a:pPr algn="ctr"/>
+            <a:r>
+              <a:rPr sz="1200" b="1">
+                <a:solidFill>
+                  <a:srgbClr val="1D1D1F"/>
+                </a:solidFill>
+                <a:latin typeface="Calibri"/>
+              </a:rPr>
+              <a:t>DevFest tickets</a:t>
+            </a:r>
+          </a:p>
+        </p:txBody>
+      </p:sp>
+    </p:spTree>
+  </p:cSld>
+  <p:clrMapOvr>
+    <a:masterClrMapping/>
+  </p:clrMapOvr>
+</p:sld>
+</file>
+
+<file path=ppt/slides/slide17.xml><?xml version="1.0" encoding="utf-8"?>
+<p:sld xmlns:a="http://schemas.openxmlformats.org/drawingml/2006/main" xmlns:p="http://schemas.openxmlformats.org/presentationml/2006/main" xmlns:r="http://schemas.openxmlformats.org/officeDocument/2006/relationships">
+  <p:cSld>
+    <p:spTree>
+      <p:nvGrpSpPr>
+        <p:cNvPr id="1" name=""/>
+        <p:cNvGrpSpPr/>
+        <p:nvPr/>
+      </p:nvGrpSpPr>
+      <p:grpSpPr/>
+      <p:sp>
+        <p:nvSpPr>
+          <p:cNvPr id="2" name="Rectangle 1"/>
+          <p:cNvSpPr/>
+          <p:nvPr/>
+        </p:nvSpPr>
+        <p:spPr>
+          <a:xfrm>
+            <a:off x="0" y="0"/>
+            <a:ext cx="12191695" cy="6858000"/>
+          </a:xfrm>
+          <a:prstGeom prst="rect">
+            <a:avLst/>
+          </a:prstGeom>
+          <a:solidFill>
+            <a:srgbClr val="070710"/>
+          </a:solidFill>
+          <a:ln>
+            <a:noFill/>
+          </a:ln>
+        </p:spPr>
+        <p:style>
+          <a:lnRef idx="1">
+            <a:schemeClr val="accent1"/>
+          </a:lnRef>
+          <a:fillRef idx="3">
+            <a:schemeClr val="accent1"/>
+          </a:fillRef>
+          <a:effectRef idx="2">
+            <a:schemeClr val="accent1"/>
+          </a:effectRef>
+          <a:fontRef idx="minor">
+            <a:schemeClr val="lt1"/>
+          </a:fontRef>
+        </p:style>
+        <p:txBody>
+          <a:bodyPr rtlCol="0" anchor="ctr"/>
+          <a:lstStyle/>
+          <a:p>
+            <a:pPr algn="ctr"/>
+          </a:p>
+        </p:txBody>
+      </p:sp>
+      <p:pic>
+        <p:nvPicPr>
+          <p:cNvPr id="3" name="Picture 2" descr="tmp5s_lp2nt.png"/>
+          <p:cNvPicPr>
+            <a:picLocks noChangeAspect="1"/>
+          </p:cNvPicPr>
+          <p:nvPr/>
+        </p:nvPicPr>
+        <p:blipFill>
+          <a:blip r:embed="rId2"/>
+          <a:stretch>
+            <a:fillRect/>
+          </a:stretch>
+        </p:blipFill>
+        <p:spPr>
+          <a:xfrm>
             <a:off x="0" y="381076"/>
             <a:ext cx="12191695" cy="6095847"/>
+          </a:xfrm>
+          <a:prstGeom prst="rect">
+            <a:avLst/>
+          </a:prstGeom>
+        </p:spPr>
+      </p:pic>
+    </p:spTree>
+  </p:cSld>
+  <p:clrMapOvr>
+    <a:masterClrMapping/>
+  </p:clrMapOvr>
+</p:sld>
+</file>
+
+<file path=ppt/slides/slide18.xml><?xml version="1.0" encoding="utf-8"?>
+<p:sld xmlns:a="http://schemas.openxmlformats.org/drawingml/2006/main" xmlns:p="http://schemas.openxmlformats.org/presentationml/2006/main" xmlns:r="http://schemas.openxmlformats.org/officeDocument/2006/relationships">
+  <p:cSld>
+    <p:spTree>
+      <p:nvGrpSpPr>
+        <p:cNvPr id="1" name=""/>
+        <p:cNvGrpSpPr/>
+        <p:nvPr/>
+      </p:nvGrpSpPr>
+      <p:grpSpPr/>
+      <p:sp>
+        <p:nvSpPr>
+          <p:cNvPr id="2" name="Rectangle 1"/>
+          <p:cNvSpPr/>
+          <p:nvPr/>
+        </p:nvSpPr>
+        <p:spPr>
+          <a:xfrm>
+            <a:off x="0" y="0"/>
+            <a:ext cx="12191695" cy="6858000"/>
+          </a:xfrm>
+          <a:prstGeom prst="rect">
+            <a:avLst/>
+          </a:prstGeom>
+          <a:solidFill>
+            <a:srgbClr val="070710"/>
+          </a:solidFill>
+          <a:ln>
+            <a:noFill/>
+          </a:ln>
+        </p:spPr>
+        <p:style>
+          <a:lnRef idx="1">
+            <a:schemeClr val="accent1"/>
+          </a:lnRef>
+          <a:fillRef idx="3">
+            <a:schemeClr val="accent1"/>
+          </a:fillRef>
+          <a:effectRef idx="2">
+            <a:schemeClr val="accent1"/>
+          </a:effectRef>
+          <a:fontRef idx="minor">
+            <a:schemeClr val="lt1"/>
+          </a:fontRef>
+        </p:style>
+        <p:txBody>
+          <a:bodyPr rtlCol="0" anchor="ctr"/>
+          <a:lstStyle/>
+          <a:p>
+            <a:pPr algn="ctr"/>
+          </a:p>
+        </p:txBody>
+      </p:sp>
+      <p:pic>
+        <p:nvPicPr>
+          <p:cNvPr id="3" name="Picture 2" descr="kug-chennai-banner.jpg"/>
+          <p:cNvPicPr>
+            <a:picLocks noChangeAspect="1"/>
+          </p:cNvPicPr>
+          <p:nvPr/>
+        </p:nvPicPr>
+        <p:blipFill>
+          <a:blip r:embed="rId2"/>
+          <a:stretch>
+            <a:fillRect/>
+          </a:stretch>
+        </p:blipFill>
+        <p:spPr>
+          <a:xfrm>
+            <a:off x="0" y="85"/>
+            <a:ext cx="12191695" cy="6857828"/>
           </a:xfrm>
           <a:prstGeom prst="rect">
             <a:avLst/>
@@ -4712,8 +7307,8 @@
         </p:nvSpPr>
         <p:spPr>
           <a:xfrm>
-            <a:off x="777240" y="1417320"/>
-            <a:ext cx="10607040" cy="2011680"/>
+            <a:off x="640080" y="1691640"/>
+            <a:ext cx="10881360" cy="1737360"/>
           </a:xfrm>
           <a:prstGeom prst="rect">
             <a:avLst/>
@@ -4726,9 +7321,9 @@
           </a:bodyPr>
           <a:lstStyle/>
           <a:p>
-            <a:pPr algn="l"/>
-            <a:r>
-              <a:rPr sz="4000" b="1">
+            <a:pPr algn="ctr"/>
+            <a:r>
+              <a:rPr sz="3600" b="1">
                 <a:solidFill>
                   <a:srgbClr val="1D1D1F"/>
                 </a:solidFill>
@@ -4747,8 +7342,8 @@
         </p:nvSpPr>
         <p:spPr>
           <a:xfrm>
-            <a:off x="777240" y="3383280"/>
-            <a:ext cx="10607040" cy="1005840"/>
+            <a:off x="640080" y="3474720"/>
+            <a:ext cx="10881360" cy="777240"/>
           </a:xfrm>
           <a:prstGeom prst="rect">
             <a:avLst/>
@@ -4761,9 +7356,9 @@
           </a:bodyPr>
           <a:lstStyle/>
           <a:p>
-            <a:pPr algn="l"/>
-            <a:r>
-              <a:rPr sz="2400" b="0">
+            <a:pPr algn="ctr"/>
+            <a:r>
+              <a:rPr sz="2200" b="0">
                 <a:solidFill>
                   <a:srgbClr val="6E6E73"/>
                 </a:solidFill>
@@ -4782,7 +7377,7 @@
         </p:nvSpPr>
         <p:spPr>
           <a:xfrm>
-            <a:off x="777240" y="5806440"/>
+            <a:off x="4790541" y="5806440"/>
             <a:ext cx="1271016" cy="384048"/>
           </a:xfrm>
           <a:prstGeom prst="roundRect">
@@ -4825,7 +7420,7 @@
         </p:nvSpPr>
         <p:spPr>
           <a:xfrm>
-            <a:off x="777240" y="5843016"/>
+            <a:off x="4790541" y="5843016"/>
             <a:ext cx="1271016" cy="329184"/>
           </a:xfrm>
           <a:prstGeom prst="rect">
@@ -4860,7 +7455,7 @@
         </p:nvSpPr>
         <p:spPr>
           <a:xfrm>
-            <a:off x="2212848" y="5806440"/>
+            <a:off x="6226149" y="5806440"/>
             <a:ext cx="1175004" cy="384048"/>
           </a:xfrm>
           <a:prstGeom prst="roundRect">
@@ -4903,7 +7498,7 @@
         </p:nvSpPr>
         <p:spPr>
           <a:xfrm>
-            <a:off x="2212848" y="5843016"/>
+            <a:off x="6226149" y="5843016"/>
             <a:ext cx="1175004" cy="329184"/>
           </a:xfrm>
           <a:prstGeom prst="rect">
@@ -4999,8 +7594,8 @@
         </p:nvSpPr>
         <p:spPr>
           <a:xfrm>
-            <a:off x="777240" y="1417320"/>
-            <a:ext cx="10607040" cy="2011680"/>
+            <a:off x="640080" y="1554480"/>
+            <a:ext cx="10881360" cy="1737360"/>
           </a:xfrm>
           <a:prstGeom prst="rect">
             <a:avLst/>
@@ -5015,7 +7610,7 @@
           <a:p>
             <a:pPr algn="ctr"/>
             <a:r>
-              <a:rPr sz="3800" b="1">
+              <a:rPr sz="3400" b="1">
                 <a:solidFill>
                   <a:srgbClr val="1D1D1F"/>
                 </a:solidFill>
@@ -5034,8 +7629,8 @@
         </p:nvSpPr>
         <p:spPr>
           <a:xfrm>
-            <a:off x="777240" y="3383280"/>
-            <a:ext cx="10607040" cy="1005840"/>
+            <a:off x="640080" y="3337560"/>
+            <a:ext cx="10881360" cy="777240"/>
           </a:xfrm>
           <a:prstGeom prst="rect">
             <a:avLst/>
@@ -5050,7 +7645,7 @@
           <a:p>
             <a:pPr algn="ctr"/>
             <a:r>
-              <a:rPr sz="2400" b="0">
+              <a:rPr sz="2200" b="0">
                 <a:solidFill>
                   <a:srgbClr val="6E6E73"/>
                 </a:solidFill>
@@ -5069,7 +7664,7 @@
         </p:nvSpPr>
         <p:spPr>
           <a:xfrm>
-            <a:off x="2538831" y="5806440"/>
+            <a:off x="2538831" y="5074920"/>
             <a:ext cx="1367028" cy="384048"/>
           </a:xfrm>
           <a:prstGeom prst="roundRect">
@@ -5112,7 +7707,7 @@
         </p:nvSpPr>
         <p:spPr>
           <a:xfrm>
-            <a:off x="2538831" y="5843016"/>
+            <a:off x="2538831" y="5111496"/>
             <a:ext cx="1367028" cy="329184"/>
           </a:xfrm>
           <a:prstGeom prst="rect">
@@ -5147,7 +7742,7 @@
         </p:nvSpPr>
         <p:spPr>
           <a:xfrm>
-            <a:off x="4070451" y="5806440"/>
+            <a:off x="4070451" y="5074920"/>
             <a:ext cx="1847088" cy="384048"/>
           </a:xfrm>
           <a:prstGeom prst="roundRect">
@@ -5190,7 +7785,7 @@
         </p:nvSpPr>
         <p:spPr>
           <a:xfrm>
-            <a:off x="4070451" y="5843016"/>
+            <a:off x="4070451" y="5111496"/>
             <a:ext cx="1847088" cy="329184"/>
           </a:xfrm>
           <a:prstGeom prst="rect">
@@ -5225,7 +7820,7 @@
         </p:nvSpPr>
         <p:spPr>
           <a:xfrm>
-            <a:off x="6082131" y="5806440"/>
+            <a:off x="6082131" y="5074920"/>
             <a:ext cx="1943100" cy="384048"/>
           </a:xfrm>
           <a:prstGeom prst="roundRect">
@@ -5268,7 +7863,7 @@
         </p:nvSpPr>
         <p:spPr>
           <a:xfrm>
-            <a:off x="6082131" y="5843016"/>
+            <a:off x="6082131" y="5111496"/>
             <a:ext cx="1943100" cy="329184"/>
           </a:xfrm>
           <a:prstGeom prst="rect">
@@ -5303,7 +7898,7 @@
         </p:nvSpPr>
         <p:spPr>
           <a:xfrm>
-            <a:off x="8189823" y="5806440"/>
+            <a:off x="8189823" y="5074920"/>
             <a:ext cx="1463040" cy="384048"/>
           </a:xfrm>
           <a:prstGeom prst="roundRect">
@@ -5346,7 +7941,7 @@
         </p:nvSpPr>
         <p:spPr>
           <a:xfrm>
-            <a:off x="8189823" y="5843016"/>
+            <a:off x="8189823" y="5111496"/>
             <a:ext cx="1463040" cy="329184"/>
           </a:xfrm>
           <a:prstGeom prst="rect">
@@ -5442,8 +8037,8 @@
         </p:nvSpPr>
         <p:spPr>
           <a:xfrm>
-            <a:off x="777240" y="1234440"/>
-            <a:ext cx="10607040" cy="2011680"/>
+            <a:off x="640080" y="2148840"/>
+            <a:ext cx="10881360" cy="1737360"/>
           </a:xfrm>
           <a:prstGeom prst="rect">
             <a:avLst/>
@@ -5456,15 +8051,15 @@
           </a:bodyPr>
           <a:lstStyle/>
           <a:p>
-            <a:pPr algn="l"/>
-            <a:r>
-              <a:rPr sz="3200" b="1">
+            <a:pPr algn="ctr"/>
+            <a:r>
+              <a:rPr sz="3600" b="1">
                 <a:solidFill>
                   <a:srgbClr val="1D1D1F"/>
                 </a:solidFill>
                 <a:latin typeface="Calibri"/>
               </a:rPr>
-              <a:t>Your first paying customer beats another feature.</a:t>
+              <a:t>These already exist.</a:t>
             </a:r>
           </a:p>
         </p:txBody>
@@ -5477,8 +8072,8 @@
         </p:nvSpPr>
         <p:spPr>
           <a:xfrm>
-            <a:off x="777240" y="3200400"/>
-            <a:ext cx="10607040" cy="1005840"/>
+            <a:off x="640080" y="3931920"/>
+            <a:ext cx="10881360" cy="777240"/>
           </a:xfrm>
           <a:prstGeom prst="rect">
             <a:avLst/>
@@ -5491,15 +8086,15 @@
           </a:bodyPr>
           <a:lstStyle/>
           <a:p>
-            <a:pPr algn="l"/>
-            <a:r>
-              <a:rPr sz="2400" b="0">
+            <a:pPr algn="ctr"/>
+            <a:r>
+              <a:rPr sz="2200" b="0">
                 <a:solidFill>
                   <a:srgbClr val="6E6E73"/>
                 </a:solidFill>
                 <a:latin typeface="Calibri"/>
               </a:rPr>
-              <a:t>Too simple is why it stays in GitHub.</a:t>
+              <a:t>One job. A real price.</a:t>
             </a:r>
           </a:p>
         </p:txBody>
@@ -5512,8 +8107,8 @@
         </p:nvSpPr>
         <p:spPr>
           <a:xfrm>
-            <a:off x="777240" y="5806440"/>
-            <a:ext cx="1078992" cy="384048"/>
+            <a:off x="4504791" y="5623560"/>
+            <a:ext cx="694944" cy="384048"/>
           </a:xfrm>
           <a:prstGeom prst="roundRect">
             <a:avLst/>
@@ -5555,8 +8150,8 @@
         </p:nvSpPr>
         <p:spPr>
           <a:xfrm>
-            <a:off x="777240" y="5843016"/>
-            <a:ext cx="1078992" cy="329184"/>
+            <a:off x="4504791" y="5660136"/>
+            <a:ext cx="694944" cy="329184"/>
           </a:xfrm>
           <a:prstGeom prst="rect">
             <a:avLst/>
@@ -5577,7 +8172,7 @@
                 </a:solidFill>
                 <a:latin typeface="Calibri"/>
               </a:rPr>
-              <a:t>₹99–₹499</a:t>
+              <a:t>Maaa</a:t>
             </a:r>
           </a:p>
         </p:txBody>
@@ -5590,8 +8185,8 @@
         </p:nvSpPr>
         <p:spPr>
           <a:xfrm>
-            <a:off x="2020824" y="5806440"/>
-            <a:ext cx="1271016" cy="384048"/>
+            <a:off x="5364327" y="5623560"/>
+            <a:ext cx="1367028" cy="384048"/>
           </a:xfrm>
           <a:prstGeom prst="roundRect">
             <a:avLst/>
@@ -5633,8 +8228,8 @@
         </p:nvSpPr>
         <p:spPr>
           <a:xfrm>
-            <a:off x="2020824" y="5843016"/>
-            <a:ext cx="1271016" cy="329184"/>
+            <a:off x="5364327" y="5660136"/>
+            <a:ext cx="1367028" cy="329184"/>
           </a:xfrm>
           <a:prstGeom prst="rect">
             <a:avLst/>
@@ -5655,7 +8250,7 @@
                 </a:solidFill>
                 <a:latin typeface="Calibri"/>
               </a:rPr>
-              <a:t>₹199/month</a:t>
+              <a:t>Lucky Charm</a:t>
             </a:r>
           </a:p>
         </p:txBody>
@@ -5668,8 +8263,8 @@
         </p:nvSpPr>
         <p:spPr>
           <a:xfrm>
-            <a:off x="3456432" y="5806440"/>
-            <a:ext cx="1078992" cy="384048"/>
+            <a:off x="6895947" y="5623560"/>
+            <a:ext cx="790956" cy="384048"/>
           </a:xfrm>
           <a:prstGeom prst="roundRect">
             <a:avLst/>
@@ -5711,8 +8306,8 @@
         </p:nvSpPr>
         <p:spPr>
           <a:xfrm>
-            <a:off x="3456432" y="5843016"/>
-            <a:ext cx="1078992" cy="329184"/>
+            <a:off x="6895947" y="5660136"/>
+            <a:ext cx="790956" cy="329184"/>
           </a:xfrm>
           <a:prstGeom prst="rect">
             <a:avLst/>
@@ -5733,7 +8328,7 @@
                 </a:solidFill>
                 <a:latin typeface="Calibri"/>
               </a:rPr>
-              <a:t>Freemium</a:t>
+              <a:t>Carrd</a:t>
             </a:r>
           </a:p>
         </p:txBody>
@@ -5807,8 +8402,8 @@
         </p:nvSpPr>
         <p:spPr>
           <a:xfrm>
-            <a:off x="777240" y="1554480"/>
-            <a:ext cx="10607040" cy="2011680"/>
+            <a:off x="640080" y="1965960"/>
+            <a:ext cx="10881360" cy="1737360"/>
           </a:xfrm>
           <a:prstGeom prst="rect">
             <a:avLst/>
@@ -5823,13 +8418,13 @@
           <a:p>
             <a:pPr algn="ctr"/>
             <a:r>
-              <a:rPr sz="4400" b="1">
+              <a:rPr sz="3600" b="1">
                 <a:solidFill>
                   <a:srgbClr val="1D1D1F"/>
                 </a:solidFill>
                 <a:latin typeface="Calibri"/>
               </a:rPr>
-              <a:t>Five people × ₹199.</a:t>
+              <a:t>You don't have to invent it.</a:t>
             </a:r>
           </a:p>
         </p:txBody>
@@ -5842,8 +8437,8 @@
         </p:nvSpPr>
         <p:spPr>
           <a:xfrm>
-            <a:off x="777240" y="3520439"/>
-            <a:ext cx="10607040" cy="1005840"/>
+            <a:off x="640080" y="3749039"/>
+            <a:ext cx="10881360" cy="777240"/>
           </a:xfrm>
           <a:prstGeom prst="rect">
             <a:avLst/>
@@ -5858,325 +8453,13 @@
           <a:p>
             <a:pPr algn="ctr"/>
             <a:r>
-              <a:rPr sz="2400" b="0">
+              <a:rPr sz="2200" b="0">
                 <a:solidFill>
                   <a:srgbClr val="6E6E73"/>
                 </a:solidFill>
                 <a:latin typeface="Calibri"/>
               </a:rPr>
-              <a:t>Your first ₹1,000.</a:t>
-            </a:r>
-          </a:p>
-        </p:txBody>
-      </p:sp>
-      <p:sp>
-        <p:nvSpPr>
-          <p:cNvPr id="5" name="Rounded Rectangle 4"/>
-          <p:cNvSpPr/>
-          <p:nvPr/>
-        </p:nvSpPr>
-        <p:spPr>
-          <a:xfrm>
-            <a:off x="3210915" y="5806440"/>
-            <a:ext cx="1655064" cy="384048"/>
-          </a:xfrm>
-          <a:prstGeom prst="roundRect">
-            <a:avLst/>
-          </a:prstGeom>
-          <a:solidFill>
-            <a:srgbClr val="E8E8ED"/>
-          </a:solidFill>
-          <a:ln>
-            <a:noFill/>
-          </a:ln>
-        </p:spPr>
-        <p:style>
-          <a:lnRef idx="1">
-            <a:schemeClr val="accent1"/>
-          </a:lnRef>
-          <a:fillRef idx="3">
-            <a:schemeClr val="accent1"/>
-          </a:fillRef>
-          <a:effectRef idx="2">
-            <a:schemeClr val="accent1"/>
-          </a:effectRef>
-          <a:fontRef idx="minor">
-            <a:schemeClr val="lt1"/>
-          </a:fontRef>
-        </p:style>
-        <p:txBody>
-          <a:bodyPr rtlCol="0" anchor="ctr"/>
-          <a:lstStyle/>
-          <a:p>
-            <a:pPr algn="ctr"/>
-          </a:p>
-        </p:txBody>
-      </p:sp>
-      <p:sp>
-        <p:nvSpPr>
-          <p:cNvPr id="6" name="TextBox 5"/>
-          <p:cNvSpPr txBox="1"/>
-          <p:nvPr/>
-        </p:nvSpPr>
-        <p:spPr>
-          <a:xfrm>
-            <a:off x="3210915" y="5843016"/>
-            <a:ext cx="1655064" cy="329184"/>
-          </a:xfrm>
-          <a:prstGeom prst="rect">
-            <a:avLst/>
-          </a:prstGeom>
-          <a:noFill/>
-        </p:spPr>
-        <p:txBody>
-          <a:bodyPr wrap="square">
-            <a:spAutoFit/>
-          </a:bodyPr>
-          <a:lstStyle/>
-          <a:p>
-            <a:pPr algn="ctr"/>
-            <a:r>
-              <a:rPr sz="1200" b="1">
-                <a:solidFill>
-                  <a:srgbClr val="1D1D1F"/>
-                </a:solidFill>
-                <a:latin typeface="Calibri"/>
-              </a:rPr>
-              <a:t>₹199 extension</a:t>
-            </a:r>
-          </a:p>
-        </p:txBody>
-      </p:sp>
-      <p:sp>
-        <p:nvSpPr>
-          <p:cNvPr id="7" name="Rounded Rectangle 6"/>
-          <p:cNvSpPr/>
-          <p:nvPr/>
-        </p:nvSpPr>
-        <p:spPr>
-          <a:xfrm>
-            <a:off x="5030571" y="5806440"/>
-            <a:ext cx="1078992" cy="384048"/>
-          </a:xfrm>
-          <a:prstGeom prst="roundRect">
-            <a:avLst/>
-          </a:prstGeom>
-          <a:solidFill>
-            <a:srgbClr val="E8E8ED"/>
-          </a:solidFill>
-          <a:ln>
-            <a:noFill/>
-          </a:ln>
-        </p:spPr>
-        <p:style>
-          <a:lnRef idx="1">
-            <a:schemeClr val="accent1"/>
-          </a:lnRef>
-          <a:fillRef idx="3">
-            <a:schemeClr val="accent1"/>
-          </a:fillRef>
-          <a:effectRef idx="2">
-            <a:schemeClr val="accent1"/>
-          </a:effectRef>
-          <a:fontRef idx="minor">
-            <a:schemeClr val="lt1"/>
-          </a:fontRef>
-        </p:style>
-        <p:txBody>
-          <a:bodyPr rtlCol="0" anchor="ctr"/>
-          <a:lstStyle/>
-          <a:p>
-            <a:pPr algn="ctr"/>
-          </a:p>
-        </p:txBody>
-      </p:sp>
-      <p:sp>
-        <p:nvSpPr>
-          <p:cNvPr id="8" name="TextBox 7"/>
-          <p:cNvSpPr txBox="1"/>
-          <p:nvPr/>
-        </p:nvSpPr>
-        <p:spPr>
-          <a:xfrm>
-            <a:off x="5030571" y="5843016"/>
-            <a:ext cx="1078992" cy="329184"/>
-          </a:xfrm>
-          <a:prstGeom prst="rect">
-            <a:avLst/>
-          </a:prstGeom>
-          <a:noFill/>
-        </p:spPr>
-        <p:txBody>
-          <a:bodyPr wrap="square">
-            <a:spAutoFit/>
-          </a:bodyPr>
-          <a:lstStyle/>
-          <a:p>
-            <a:pPr algn="ctr"/>
-            <a:r>
-              <a:rPr sz="1200" b="1">
-                <a:solidFill>
-                  <a:srgbClr val="1D1D1F"/>
-                </a:solidFill>
-                <a:latin typeface="Calibri"/>
-              </a:rPr>
-              <a:t>₹299 app</a:t>
-            </a:r>
-          </a:p>
-        </p:txBody>
-      </p:sp>
-      <p:sp>
-        <p:nvSpPr>
-          <p:cNvPr id="9" name="Rounded Rectangle 8"/>
-          <p:cNvSpPr/>
-          <p:nvPr/>
-        </p:nvSpPr>
-        <p:spPr>
-          <a:xfrm>
-            <a:off x="6274155" y="5806440"/>
-            <a:ext cx="1271016" cy="384048"/>
-          </a:xfrm>
-          <a:prstGeom prst="roundRect">
-            <a:avLst/>
-          </a:prstGeom>
-          <a:solidFill>
-            <a:srgbClr val="E8E8ED"/>
-          </a:solidFill>
-          <a:ln>
-            <a:noFill/>
-          </a:ln>
-        </p:spPr>
-        <p:style>
-          <a:lnRef idx="1">
-            <a:schemeClr val="accent1"/>
-          </a:lnRef>
-          <a:fillRef idx="3">
-            <a:schemeClr val="accent1"/>
-          </a:fillRef>
-          <a:effectRef idx="2">
-            <a:schemeClr val="accent1"/>
-          </a:effectRef>
-          <a:fontRef idx="minor">
-            <a:schemeClr val="lt1"/>
-          </a:fontRef>
-        </p:style>
-        <p:txBody>
-          <a:bodyPr rtlCol="0" anchor="ctr"/>
-          <a:lstStyle/>
-          <a:p>
-            <a:pPr algn="ctr"/>
-          </a:p>
-        </p:txBody>
-      </p:sp>
-      <p:sp>
-        <p:nvSpPr>
-          <p:cNvPr id="10" name="TextBox 9"/>
-          <p:cNvSpPr txBox="1"/>
-          <p:nvPr/>
-        </p:nvSpPr>
-        <p:spPr>
-          <a:xfrm>
-            <a:off x="6274155" y="5843016"/>
-            <a:ext cx="1271016" cy="329184"/>
-          </a:xfrm>
-          <a:prstGeom prst="rect">
-            <a:avLst/>
-          </a:prstGeom>
-          <a:noFill/>
-        </p:spPr>
-        <p:txBody>
-          <a:bodyPr wrap="square">
-            <a:spAutoFit/>
-          </a:bodyPr>
-          <a:lstStyle/>
-          <a:p>
-            <a:pPr algn="ctr"/>
-            <a:r>
-              <a:rPr sz="1200" b="1">
-                <a:solidFill>
-                  <a:srgbClr val="1D1D1F"/>
-                </a:solidFill>
-                <a:latin typeface="Calibri"/>
-              </a:rPr>
-              <a:t>₹499/month</a:t>
-            </a:r>
-          </a:p>
-        </p:txBody>
-      </p:sp>
-      <p:sp>
-        <p:nvSpPr>
-          <p:cNvPr id="11" name="Rounded Rectangle 10"/>
-          <p:cNvSpPr/>
-          <p:nvPr/>
-        </p:nvSpPr>
-        <p:spPr>
-          <a:xfrm>
-            <a:off x="7709763" y="5806440"/>
-            <a:ext cx="1271016" cy="384048"/>
-          </a:xfrm>
-          <a:prstGeom prst="roundRect">
-            <a:avLst/>
-          </a:prstGeom>
-          <a:solidFill>
-            <a:srgbClr val="E8E8ED"/>
-          </a:solidFill>
-          <a:ln>
-            <a:noFill/>
-          </a:ln>
-        </p:spPr>
-        <p:style>
-          <a:lnRef idx="1">
-            <a:schemeClr val="accent1"/>
-          </a:lnRef>
-          <a:fillRef idx="3">
-            <a:schemeClr val="accent1"/>
-          </a:fillRef>
-          <a:effectRef idx="2">
-            <a:schemeClr val="accent1"/>
-          </a:effectRef>
-          <a:fontRef idx="minor">
-            <a:schemeClr val="lt1"/>
-          </a:fontRef>
-        </p:style>
-        <p:txBody>
-          <a:bodyPr rtlCol="0" anchor="ctr"/>
-          <a:lstStyle/>
-          <a:p>
-            <a:pPr algn="ctr"/>
-          </a:p>
-        </p:txBody>
-      </p:sp>
-      <p:sp>
-        <p:nvSpPr>
-          <p:cNvPr id="12" name="TextBox 11"/>
-          <p:cNvSpPr txBox="1"/>
-          <p:nvPr/>
-        </p:nvSpPr>
-        <p:spPr>
-          <a:xfrm>
-            <a:off x="7709763" y="5843016"/>
-            <a:ext cx="1271016" cy="329184"/>
-          </a:xfrm>
-          <a:prstGeom prst="rect">
-            <a:avLst/>
-          </a:prstGeom>
-          <a:noFill/>
-        </p:spPr>
-        <p:txBody>
-          <a:bodyPr wrap="square">
-            <a:spAutoFit/>
-          </a:bodyPr>
-          <a:lstStyle/>
-          <a:p>
-            <a:pPr algn="ctr"/>
-            <a:r>
-              <a:rPr sz="1200" b="1">
-                <a:solidFill>
-                  <a:srgbClr val="1D1D1F"/>
-                </a:solidFill>
-                <a:latin typeface="Calibri"/>
-              </a:rPr>
-              <a:t>Level pack</a:t>
+              <a:t>A better version is enough.</a:t>
             </a:r>
           </a:p>
         </p:txBody>
@@ -6250,8 +8533,8 @@
         </p:nvSpPr>
         <p:spPr>
           <a:xfrm>
-            <a:off x="777240" y="1554480"/>
-            <a:ext cx="10607040" cy="2011680"/>
+            <a:off x="640080" y="1051560"/>
+            <a:ext cx="10881360" cy="1737360"/>
           </a:xfrm>
           <a:prstGeom prst="rect">
             <a:avLst/>
@@ -6266,13 +8549,13 @@
           <a:p>
             <a:pPr algn="ctr"/>
             <a:r>
-              <a:rPr sz="4000" b="1">
+              <a:rPr sz="3600" b="1">
                 <a:solidFill>
                   <a:srgbClr val="1D1D1F"/>
                 </a:solidFill>
                 <a:latin typeface="Calibri"/>
               </a:rPr>
-              <a:t>Build anything. Ship something.</a:t>
+              <a:t>Start with the product.</a:t>
             </a:r>
           </a:p>
         </p:txBody>
@@ -6285,8 +8568,8 @@
         </p:nvSpPr>
         <p:spPr>
           <a:xfrm>
-            <a:off x="777240" y="3520439"/>
-            <a:ext cx="10607040" cy="1005840"/>
+            <a:off x="640080" y="2834639"/>
+            <a:ext cx="10881360" cy="777240"/>
           </a:xfrm>
           <a:prstGeom prst="rect">
             <a:avLst/>
@@ -6301,13 +8584,13 @@
           <a:p>
             <a:pPr algn="ctr"/>
             <a:r>
-              <a:rPr sz="2400" b="0">
+              <a:rPr sz="2200" b="0">
                 <a:solidFill>
                   <a:srgbClr val="6E6E73"/>
                 </a:solidFill>
                 <a:latin typeface="Calibri"/>
               </a:rPr>
-              <a:t>Solo or team.</a:t>
+              <a:t>A game, a charm, or a tiny app.</a:t>
             </a:r>
           </a:p>
         </p:txBody>
@@ -6320,17 +8603,17 @@
         </p:nvSpPr>
         <p:spPr>
           <a:xfrm>
-            <a:off x="4507077" y="5806440"/>
-            <a:ext cx="694944" cy="384048"/>
+            <a:off x="5623560" y="3703320"/>
+            <a:ext cx="960120" cy="1417320"/>
           </a:xfrm>
           <a:prstGeom prst="roundRect">
             <a:avLst/>
           </a:prstGeom>
-          <a:solidFill>
-            <a:srgbClr val="E8E8ED"/>
-          </a:solidFill>
-          <a:ln>
-            <a:noFill/>
+          <a:noFill/>
+          <a:ln w="27940">
+            <a:solidFill>
+              <a:srgbClr val="7C5CFF"/>
+            </a:solidFill>
           </a:ln>
         </p:spPr>
         <p:style>
@@ -6357,58 +8640,23 @@
       </p:sp>
       <p:sp>
         <p:nvSpPr>
-          <p:cNvPr id="6" name="TextBox 5"/>
-          <p:cNvSpPr txBox="1"/>
-          <p:nvPr/>
-        </p:nvSpPr>
-        <p:spPr>
-          <a:xfrm>
-            <a:off x="4507077" y="5843016"/>
-            <a:ext cx="694944" cy="329184"/>
-          </a:xfrm>
-          <a:prstGeom prst="rect">
+          <p:cNvPr id="6" name="Rounded Rectangle 5"/>
+          <p:cNvSpPr/>
+          <p:nvPr/>
+        </p:nvSpPr>
+        <p:spPr>
+          <a:xfrm>
+            <a:off x="5779008" y="3886200"/>
+            <a:ext cx="649224" cy="868680"/>
+          </a:xfrm>
+          <a:prstGeom prst="roundRect">
             <a:avLst/>
           </a:prstGeom>
           <a:noFill/>
-        </p:spPr>
-        <p:txBody>
-          <a:bodyPr wrap="square">
-            <a:spAutoFit/>
-          </a:bodyPr>
-          <a:lstStyle/>
-          <a:p>
-            <a:pPr algn="ctr"/>
-            <a:r>
-              <a:rPr sz="1200" b="1">
-                <a:solidFill>
-                  <a:srgbClr val="1D1D1F"/>
-                </a:solidFill>
-                <a:latin typeface="Calibri"/>
-              </a:rPr>
-              <a:t>Game</a:t>
-            </a:r>
-          </a:p>
-        </p:txBody>
-      </p:sp>
-      <p:sp>
-        <p:nvSpPr>
-          <p:cNvPr id="7" name="Rounded Rectangle 6"/>
-          <p:cNvSpPr/>
-          <p:nvPr/>
-        </p:nvSpPr>
-        <p:spPr>
-          <a:xfrm>
-            <a:off x="5366613" y="5806440"/>
-            <a:ext cx="598932" cy="384048"/>
-          </a:xfrm>
-          <a:prstGeom prst="roundRect">
-            <a:avLst/>
-          </a:prstGeom>
-          <a:solidFill>
-            <a:srgbClr val="E8E8ED"/>
-          </a:solidFill>
-          <a:ln>
-            <a:noFill/>
+          <a:ln w="22860">
+            <a:solidFill>
+              <a:srgbClr val="1EC8E6"/>
+            </a:solidFill>
           </a:ln>
         </p:spPr>
         <p:style>
@@ -6435,55 +8683,20 @@
       </p:sp>
       <p:sp>
         <p:nvSpPr>
-          <p:cNvPr id="8" name="TextBox 7"/>
-          <p:cNvSpPr txBox="1"/>
-          <p:nvPr/>
-        </p:nvSpPr>
-        <p:spPr>
-          <a:xfrm>
-            <a:off x="5366613" y="5843016"/>
-            <a:ext cx="598932" cy="329184"/>
-          </a:xfrm>
-          <a:prstGeom prst="rect">
-            <a:avLst/>
-          </a:prstGeom>
-          <a:noFill/>
-        </p:spPr>
-        <p:txBody>
-          <a:bodyPr wrap="square">
-            <a:spAutoFit/>
-          </a:bodyPr>
-          <a:lstStyle/>
-          <a:p>
-            <a:pPr algn="ctr"/>
-            <a:r>
-              <a:rPr sz="1200" b="1">
-                <a:solidFill>
-                  <a:srgbClr val="1D1D1F"/>
-                </a:solidFill>
-                <a:latin typeface="Calibri"/>
-              </a:rPr>
-              <a:t>App</a:t>
-            </a:r>
-          </a:p>
-        </p:txBody>
-      </p:sp>
-      <p:sp>
-        <p:nvSpPr>
-          <p:cNvPr id="9" name="Rounded Rectangle 8"/>
+          <p:cNvPr id="7" name="Oval 6"/>
           <p:cNvSpPr/>
           <p:nvPr/>
         </p:nvSpPr>
         <p:spPr>
           <a:xfrm>
-            <a:off x="6130137" y="5806440"/>
-            <a:ext cx="694944" cy="384048"/>
-          </a:xfrm>
-          <a:prstGeom prst="roundRect">
+            <a:off x="6016752" y="4828032"/>
+            <a:ext cx="164592" cy="164592"/>
+          </a:xfrm>
+          <a:prstGeom prst="ellipse">
             <a:avLst/>
           </a:prstGeom>
           <a:solidFill>
-            <a:srgbClr val="E8E8ED"/>
+            <a:srgbClr val="7C5CFF"/>
           </a:solidFill>
           <a:ln>
             <a:noFill/>
@@ -6513,58 +8726,23 @@
       </p:sp>
       <p:sp>
         <p:nvSpPr>
-          <p:cNvPr id="10" name="TextBox 9"/>
-          <p:cNvSpPr txBox="1"/>
-          <p:nvPr/>
-        </p:nvSpPr>
-        <p:spPr>
-          <a:xfrm>
-            <a:off x="6130137" y="5843016"/>
-            <a:ext cx="694944" cy="329184"/>
-          </a:xfrm>
-          <a:prstGeom prst="rect">
+          <p:cNvPr id="8" name="Oval 7"/>
+          <p:cNvSpPr/>
+          <p:nvPr/>
+        </p:nvSpPr>
+        <p:spPr>
+          <a:xfrm>
+            <a:off x="4709160" y="4160520"/>
+            <a:ext cx="502920" cy="502920"/>
+          </a:xfrm>
+          <a:prstGeom prst="ellipse">
             <a:avLst/>
           </a:prstGeom>
           <a:noFill/>
-        </p:spPr>
-        <p:txBody>
-          <a:bodyPr wrap="square">
-            <a:spAutoFit/>
-          </a:bodyPr>
-          <a:lstStyle/>
-          <a:p>
-            <a:pPr algn="ctr"/>
-            <a:r>
-              <a:rPr sz="1200" b="1">
-                <a:solidFill>
-                  <a:srgbClr val="1D1D1F"/>
-                </a:solidFill>
-                <a:latin typeface="Calibri"/>
-              </a:rPr>
-              <a:t>Site</a:t>
-            </a:r>
-          </a:p>
-        </p:txBody>
-      </p:sp>
-      <p:sp>
-        <p:nvSpPr>
-          <p:cNvPr id="11" name="Rounded Rectangle 10"/>
-          <p:cNvSpPr/>
-          <p:nvPr/>
-        </p:nvSpPr>
-        <p:spPr>
-          <a:xfrm>
-            <a:off x="6989673" y="5806440"/>
-            <a:ext cx="694944" cy="384048"/>
-          </a:xfrm>
-          <a:prstGeom prst="roundRect">
-            <a:avLst/>
-          </a:prstGeom>
-          <a:solidFill>
-            <a:srgbClr val="E8E8ED"/>
-          </a:solidFill>
-          <a:ln>
-            <a:noFill/>
+          <a:ln w="25400">
+            <a:solidFill>
+              <a:srgbClr val="7C5CFF"/>
+            </a:solidFill>
           </a:ln>
         </p:spPr>
         <p:style>
@@ -6589,41 +8767,41 @@
           </a:p>
         </p:txBody>
       </p:sp>
-      <p:sp>
-        <p:nvSpPr>
-          <p:cNvPr id="12" name="TextBox 11"/>
-          <p:cNvSpPr txBox="1"/>
-          <p:nvPr/>
-        </p:nvSpPr>
-        <p:spPr>
-          <a:xfrm>
-            <a:off x="6989673" y="5843016"/>
-            <a:ext cx="694944" cy="329184"/>
-          </a:xfrm>
-          <a:prstGeom prst="rect">
-            <a:avLst/>
-          </a:prstGeom>
-          <a:noFill/>
-        </p:spPr>
-        <p:txBody>
-          <a:bodyPr wrap="square">
-            <a:spAutoFit/>
-          </a:bodyPr>
-          <a:lstStyle/>
-          <a:p>
-            <a:pPr algn="ctr"/>
-            <a:r>
-              <a:rPr sz="1200" b="1">
-                <a:solidFill>
-                  <a:srgbClr val="1D1D1F"/>
-                </a:solidFill>
-                <a:latin typeface="Calibri"/>
-              </a:rPr>
-              <a:t>Tool</a:t>
-            </a:r>
-          </a:p>
-        </p:txBody>
-      </p:sp>
+      <p:cxnSp>
+        <p:nvCxnSpPr>
+          <p:cNvPr id="9" name="Connector 8"/>
+          <p:cNvCxnSpPr/>
+          <p:nvPr/>
+        </p:nvCxnSpPr>
+        <p:spPr>
+          <a:xfrm>
+            <a:off x="4956048" y="3767328"/>
+            <a:ext cx="0" cy="393192"/>
+          </a:xfrm>
+          <a:prstGeom prst="line">
+            <a:avLst/>
+          </a:prstGeom>
+          <a:ln w="25400">
+            <a:solidFill>
+              <a:srgbClr val="1EC8E6"/>
+            </a:solidFill>
+          </a:ln>
+        </p:spPr>
+        <p:style>
+          <a:lnRef idx="2">
+            <a:schemeClr val="accent1"/>
+          </a:lnRef>
+          <a:fillRef idx="0">
+            <a:schemeClr val="accent1"/>
+          </a:fillRef>
+          <a:effectRef idx="1">
+            <a:schemeClr val="accent1"/>
+          </a:effectRef>
+          <a:fontRef idx="minor">
+            <a:schemeClr val="tx1"/>
+          </a:fontRef>
+        </p:style>
+      </p:cxnSp>
     </p:spTree>
   </p:cSld>
   <p:clrMapOvr>
@@ -6693,8 +8871,8 @@
         </p:nvSpPr>
         <p:spPr>
           <a:xfrm>
-            <a:off x="640080" y="2011680"/>
-            <a:ext cx="5852160" cy="2377440"/>
+            <a:off x="640080" y="1051560"/>
+            <a:ext cx="10881360" cy="1737360"/>
           </a:xfrm>
           <a:prstGeom prst="rect">
             <a:avLst/>
@@ -6707,7 +8885,7 @@
           </a:bodyPr>
           <a:lstStyle/>
           <a:p>
-            <a:pPr algn="l"/>
+            <a:pPr algn="ctr"/>
             <a:r>
               <a:rPr sz="3600" b="1">
                 <a:solidFill>
@@ -6715,35 +8893,369 @@
                 </a:solidFill>
                 <a:latin typeface="Calibri"/>
               </a:rPr>
-              <a:t>One sheet. Set Review Ready.</a:t>
-            </a:r>
-          </a:p>
-        </p:txBody>
-      </p:sp>
-      <p:pic>
-        <p:nvPicPr>
-          <p:cNvPr id="4" name="Picture 3" descr="shipaton-sheet-qr.png"/>
-          <p:cNvPicPr>
-            <a:picLocks noChangeAspect="1"/>
-          </p:cNvPicPr>
-          <p:nvPr/>
-        </p:nvPicPr>
-        <p:blipFill>
-          <a:blip r:embed="rId2"/>
-          <a:stretch>
-            <a:fillRect/>
-          </a:stretch>
-        </p:blipFill>
-        <p:spPr>
-          <a:xfrm>
-            <a:off x="7635240" y="1417320"/>
-            <a:ext cx="3840480" cy="3840480"/>
+              <a:t>Then take payment.</a:t>
+            </a:r>
+          </a:p>
+        </p:txBody>
+      </p:sp>
+      <p:sp>
+        <p:nvSpPr>
+          <p:cNvPr id="4" name="TextBox 3"/>
+          <p:cNvSpPr txBox="1"/>
+          <p:nvPr/>
+        </p:nvSpPr>
+        <p:spPr>
+          <a:xfrm>
+            <a:off x="640080" y="2834639"/>
+            <a:ext cx="10881360" cy="777240"/>
           </a:xfrm>
           <a:prstGeom prst="rect">
             <a:avLst/>
           </a:prstGeom>
-        </p:spPr>
-      </p:pic>
+          <a:noFill/>
+        </p:spPr>
+        <p:txBody>
+          <a:bodyPr wrap="square">
+            <a:spAutoFit/>
+          </a:bodyPr>
+          <a:lstStyle/>
+          <a:p>
+            <a:pPr algn="ctr"/>
+            <a:r>
+              <a:rPr sz="2200" b="0">
+                <a:solidFill>
+                  <a:srgbClr val="6E6E73"/>
+                </a:solidFill>
+                <a:latin typeface="Calibri"/>
+              </a:rPr>
+              <a:t>One price. One checkout.</a:t>
+            </a:r>
+          </a:p>
+        </p:txBody>
+      </p:sp>
+      <p:sp>
+        <p:nvSpPr>
+          <p:cNvPr id="5" name="Rounded Rectangle 4"/>
+          <p:cNvSpPr/>
+          <p:nvPr/>
+        </p:nvSpPr>
+        <p:spPr>
+          <a:xfrm>
+            <a:off x="4617720" y="3794760"/>
+            <a:ext cx="2926080" cy="1234440"/>
+          </a:xfrm>
+          <a:prstGeom prst="roundRect">
+            <a:avLst/>
+          </a:prstGeom>
+          <a:noFill/>
+          <a:ln w="27940">
+            <a:solidFill>
+              <a:srgbClr val="7C5CFF"/>
+            </a:solidFill>
+          </a:ln>
+        </p:spPr>
+        <p:style>
+          <a:lnRef idx="1">
+            <a:schemeClr val="accent1"/>
+          </a:lnRef>
+          <a:fillRef idx="3">
+            <a:schemeClr val="accent1"/>
+          </a:fillRef>
+          <a:effectRef idx="2">
+            <a:schemeClr val="accent1"/>
+          </a:effectRef>
+          <a:fontRef idx="minor">
+            <a:schemeClr val="lt1"/>
+          </a:fontRef>
+        </p:style>
+        <p:txBody>
+          <a:bodyPr rtlCol="0" anchor="ctr"/>
+          <a:lstStyle/>
+          <a:p>
+            <a:pPr algn="ctr"/>
+          </a:p>
+        </p:txBody>
+      </p:sp>
+      <p:sp>
+        <p:nvSpPr>
+          <p:cNvPr id="6" name="Rounded Rectangle 5"/>
+          <p:cNvSpPr/>
+          <p:nvPr/>
+        </p:nvSpPr>
+        <p:spPr>
+          <a:xfrm>
+            <a:off x="4617720" y="3794760"/>
+            <a:ext cx="2926080" cy="292608"/>
+          </a:xfrm>
+          <a:prstGeom prst="roundRect">
+            <a:avLst/>
+          </a:prstGeom>
+          <a:solidFill>
+            <a:srgbClr val="1EC8E6">
+              <a:lumMod val="45000"/>
+              <a:lumOff val="55000"/>
+            </a:srgbClr>
+          </a:solidFill>
+          <a:ln>
+            <a:noFill/>
+          </a:ln>
+        </p:spPr>
+        <p:style>
+          <a:lnRef idx="1">
+            <a:schemeClr val="accent1"/>
+          </a:lnRef>
+          <a:fillRef idx="3">
+            <a:schemeClr val="accent1"/>
+          </a:fillRef>
+          <a:effectRef idx="2">
+            <a:schemeClr val="accent1"/>
+          </a:effectRef>
+          <a:fontRef idx="minor">
+            <a:schemeClr val="lt1"/>
+          </a:fontRef>
+        </p:style>
+        <p:txBody>
+          <a:bodyPr rtlCol="0" anchor="ctr"/>
+          <a:lstStyle/>
+          <a:p>
+            <a:pPr algn="ctr"/>
+          </a:p>
+        </p:txBody>
+      </p:sp>
+      <p:cxnSp>
+        <p:nvCxnSpPr>
+          <p:cNvPr id="7" name="Connector 6"/>
+          <p:cNvCxnSpPr/>
+          <p:nvPr/>
+        </p:nvCxnSpPr>
+        <p:spPr>
+          <a:xfrm>
+            <a:off x="4937760" y="4617720"/>
+            <a:ext cx="868680" cy="0"/>
+          </a:xfrm>
+          <a:prstGeom prst="line">
+            <a:avLst/>
+          </a:prstGeom>
+          <a:ln w="27940">
+            <a:solidFill>
+              <a:srgbClr val="1EC8E6"/>
+            </a:solidFill>
+          </a:ln>
+        </p:spPr>
+        <p:style>
+          <a:lnRef idx="2">
+            <a:schemeClr val="accent1"/>
+          </a:lnRef>
+          <a:fillRef idx="0">
+            <a:schemeClr val="accent1"/>
+          </a:fillRef>
+          <a:effectRef idx="1">
+            <a:schemeClr val="accent1"/>
+          </a:effectRef>
+          <a:fontRef idx="minor">
+            <a:schemeClr val="tx1"/>
+          </a:fontRef>
+        </p:style>
+      </p:cxnSp>
+      <p:sp>
+        <p:nvSpPr>
+          <p:cNvPr id="8" name="Oval 7"/>
+          <p:cNvSpPr/>
+          <p:nvPr/>
+        </p:nvSpPr>
+        <p:spPr>
+          <a:xfrm>
+            <a:off x="6903720" y="4315968"/>
+            <a:ext cx="384048" cy="384048"/>
+          </a:xfrm>
+          <a:prstGeom prst="ellipse">
+            <a:avLst/>
+          </a:prstGeom>
+          <a:noFill/>
+          <a:ln w="25400">
+            <a:solidFill>
+              <a:srgbClr val="7C5CFF"/>
+            </a:solidFill>
+          </a:ln>
+        </p:spPr>
+        <p:style>
+          <a:lnRef idx="1">
+            <a:schemeClr val="accent1"/>
+          </a:lnRef>
+          <a:fillRef idx="3">
+            <a:schemeClr val="accent1"/>
+          </a:fillRef>
+          <a:effectRef idx="2">
+            <a:schemeClr val="accent1"/>
+          </a:effectRef>
+          <a:fontRef idx="minor">
+            <a:schemeClr val="lt1"/>
+          </a:fontRef>
+        </p:style>
+        <p:txBody>
+          <a:bodyPr rtlCol="0" anchor="ctr"/>
+          <a:lstStyle/>
+          <a:p>
+            <a:pPr algn="ctr"/>
+          </a:p>
+        </p:txBody>
+      </p:sp>
+      <p:sp>
+        <p:nvSpPr>
+          <p:cNvPr id="9" name="Rounded Rectangle 8"/>
+          <p:cNvSpPr/>
+          <p:nvPr/>
+        </p:nvSpPr>
+        <p:spPr>
+          <a:xfrm>
+            <a:off x="4838547" y="5806440"/>
+            <a:ext cx="1078992" cy="384048"/>
+          </a:xfrm>
+          <a:prstGeom prst="roundRect">
+            <a:avLst/>
+          </a:prstGeom>
+          <a:solidFill>
+            <a:srgbClr val="E8E8ED"/>
+          </a:solidFill>
+          <a:ln>
+            <a:noFill/>
+          </a:ln>
+        </p:spPr>
+        <p:style>
+          <a:lnRef idx="1">
+            <a:schemeClr val="accent1"/>
+          </a:lnRef>
+          <a:fillRef idx="3">
+            <a:schemeClr val="accent1"/>
+          </a:fillRef>
+          <a:effectRef idx="2">
+            <a:schemeClr val="accent1"/>
+          </a:effectRef>
+          <a:fontRef idx="minor">
+            <a:schemeClr val="lt1"/>
+          </a:fontRef>
+        </p:style>
+        <p:txBody>
+          <a:bodyPr rtlCol="0" anchor="ctr"/>
+          <a:lstStyle/>
+          <a:p>
+            <a:pPr algn="ctr"/>
+          </a:p>
+        </p:txBody>
+      </p:sp>
+      <p:sp>
+        <p:nvSpPr>
+          <p:cNvPr id="10" name="TextBox 9"/>
+          <p:cNvSpPr txBox="1"/>
+          <p:nvPr/>
+        </p:nvSpPr>
+        <p:spPr>
+          <a:xfrm>
+            <a:off x="4838547" y="5843016"/>
+            <a:ext cx="1078992" cy="329184"/>
+          </a:xfrm>
+          <a:prstGeom prst="rect">
+            <a:avLst/>
+          </a:prstGeom>
+          <a:noFill/>
+        </p:spPr>
+        <p:txBody>
+          <a:bodyPr wrap="square">
+            <a:spAutoFit/>
+          </a:bodyPr>
+          <a:lstStyle/>
+          <a:p>
+            <a:pPr algn="ctr"/>
+            <a:r>
+              <a:rPr sz="1200" b="1">
+                <a:solidFill>
+                  <a:srgbClr val="1D1D1F"/>
+                </a:solidFill>
+                <a:latin typeface="Calibri"/>
+              </a:rPr>
+              <a:t>₹99–₹499</a:t>
+            </a:r>
+          </a:p>
+        </p:txBody>
+      </p:sp>
+      <p:sp>
+        <p:nvSpPr>
+          <p:cNvPr id="11" name="Rounded Rectangle 10"/>
+          <p:cNvSpPr/>
+          <p:nvPr/>
+        </p:nvSpPr>
+        <p:spPr>
+          <a:xfrm>
+            <a:off x="6082131" y="5806440"/>
+            <a:ext cx="1271016" cy="384048"/>
+          </a:xfrm>
+          <a:prstGeom prst="roundRect">
+            <a:avLst/>
+          </a:prstGeom>
+          <a:solidFill>
+            <a:srgbClr val="E8E8ED"/>
+          </a:solidFill>
+          <a:ln>
+            <a:noFill/>
+          </a:ln>
+        </p:spPr>
+        <p:style>
+          <a:lnRef idx="1">
+            <a:schemeClr val="accent1"/>
+          </a:lnRef>
+          <a:fillRef idx="3">
+            <a:schemeClr val="accent1"/>
+          </a:fillRef>
+          <a:effectRef idx="2">
+            <a:schemeClr val="accent1"/>
+          </a:effectRef>
+          <a:fontRef idx="minor">
+            <a:schemeClr val="lt1"/>
+          </a:fontRef>
+        </p:style>
+        <p:txBody>
+          <a:bodyPr rtlCol="0" anchor="ctr"/>
+          <a:lstStyle/>
+          <a:p>
+            <a:pPr algn="ctr"/>
+          </a:p>
+        </p:txBody>
+      </p:sp>
+      <p:sp>
+        <p:nvSpPr>
+          <p:cNvPr id="12" name="TextBox 11"/>
+          <p:cNvSpPr txBox="1"/>
+          <p:nvPr/>
+        </p:nvSpPr>
+        <p:spPr>
+          <a:xfrm>
+            <a:off x="6082131" y="5843016"/>
+            <a:ext cx="1271016" cy="329184"/>
+          </a:xfrm>
+          <a:prstGeom prst="rect">
+            <a:avLst/>
+          </a:prstGeom>
+          <a:noFill/>
+        </p:spPr>
+        <p:txBody>
+          <a:bodyPr wrap="square">
+            <a:spAutoFit/>
+          </a:bodyPr>
+          <a:lstStyle/>
+          <a:p>
+            <a:pPr algn="ctr"/>
+            <a:r>
+              <a:rPr sz="1200" b="1">
+                <a:solidFill>
+                  <a:srgbClr val="1D1D1F"/>
+                </a:solidFill>
+                <a:latin typeface="Calibri"/>
+              </a:rPr>
+              <a:t>₹199/month</a:t>
+            </a:r>
+          </a:p>
+        </p:txBody>
+      </p:sp>
     </p:spTree>
   </p:cSld>
   <p:clrMapOvr>
@@ -6813,8 +9325,8 @@
         </p:nvSpPr>
         <p:spPr>
           <a:xfrm>
-            <a:off x="777240" y="2011680"/>
-            <a:ext cx="10607040" cy="2011680"/>
+            <a:off x="640080" y="1051560"/>
+            <a:ext cx="10881360" cy="1737360"/>
           </a:xfrm>
           <a:prstGeom prst="rect">
             <a:avLst/>
@@ -6829,27 +9341,316 @@
           <a:p>
             <a:pPr algn="ctr"/>
             <a:r>
-              <a:rPr sz="4400" b="1">
+              <a:rPr sz="3600" b="1">
                 <a:solidFill>
                   <a:srgbClr val="1D1D1F"/>
                 </a:solidFill>
                 <a:latin typeface="Calibri"/>
               </a:rPr>
-              <a:t>Thursday. Make it live.</a:t>
-            </a:r>
-          </a:p>
-        </p:txBody>
-      </p:sp>
-      <p:sp>
-        <p:nvSpPr>
-          <p:cNvPr id="4" name="Rounded Rectangle 3"/>
+              <a:t>Then watch what they do.</a:t>
+            </a:r>
+          </a:p>
+        </p:txBody>
+      </p:sp>
+      <p:sp>
+        <p:nvSpPr>
+          <p:cNvPr id="4" name="TextBox 3"/>
+          <p:cNvSpPr txBox="1"/>
+          <p:nvPr/>
+        </p:nvSpPr>
+        <p:spPr>
+          <a:xfrm>
+            <a:off x="640080" y="2834639"/>
+            <a:ext cx="10881360" cy="777240"/>
+          </a:xfrm>
+          <a:prstGeom prst="rect">
+            <a:avLst/>
+          </a:prstGeom>
+          <a:noFill/>
+        </p:spPr>
+        <p:txBody>
+          <a:bodyPr wrap="square">
+            <a:spAutoFit/>
+          </a:bodyPr>
+          <a:lstStyle/>
+          <a:p>
+            <a:pPr algn="ctr"/>
+            <a:r>
+              <a:rPr sz="2200" b="0">
+                <a:solidFill>
+                  <a:srgbClr val="6E6E73"/>
+                </a:solidFill>
+                <a:latin typeface="Calibri"/>
+              </a:rPr>
+              <a:t>One analytics tool is enough.</a:t>
+            </a:r>
+          </a:p>
+        </p:txBody>
+      </p:sp>
+      <p:cxnSp>
+        <p:nvCxnSpPr>
+          <p:cNvPr id="5" name="Connector 4"/>
+          <p:cNvCxnSpPr/>
+          <p:nvPr/>
+        </p:nvCxnSpPr>
+        <p:spPr>
+          <a:xfrm>
+            <a:off x="4709160" y="3794760"/>
+            <a:ext cx="0" cy="1280160"/>
+          </a:xfrm>
+          <a:prstGeom prst="line">
+            <a:avLst/>
+          </a:prstGeom>
+          <a:ln w="25400">
+            <a:solidFill>
+              <a:srgbClr val="7C5CFF"/>
+            </a:solidFill>
+          </a:ln>
+        </p:spPr>
+        <p:style>
+          <a:lnRef idx="2">
+            <a:schemeClr val="accent1"/>
+          </a:lnRef>
+          <a:fillRef idx="0">
+            <a:schemeClr val="accent1"/>
+          </a:fillRef>
+          <a:effectRef idx="1">
+            <a:schemeClr val="accent1"/>
+          </a:effectRef>
+          <a:fontRef idx="minor">
+            <a:schemeClr val="tx1"/>
+          </a:fontRef>
+        </p:style>
+      </p:cxnSp>
+      <p:cxnSp>
+        <p:nvCxnSpPr>
+          <p:cNvPr id="6" name="Connector 5"/>
+          <p:cNvCxnSpPr/>
+          <p:nvPr/>
+        </p:nvCxnSpPr>
+        <p:spPr>
+          <a:xfrm>
+            <a:off x="4709160" y="5074920"/>
+            <a:ext cx="2788919" cy="0"/>
+          </a:xfrm>
+          <a:prstGeom prst="line">
+            <a:avLst/>
+          </a:prstGeom>
+          <a:ln w="25400">
+            <a:solidFill>
+              <a:srgbClr val="7C5CFF"/>
+            </a:solidFill>
+          </a:ln>
+        </p:spPr>
+        <p:style>
+          <a:lnRef idx="2">
+            <a:schemeClr val="accent1"/>
+          </a:lnRef>
+          <a:fillRef idx="0">
+            <a:schemeClr val="accent1"/>
+          </a:fillRef>
+          <a:effectRef idx="1">
+            <a:schemeClr val="accent1"/>
+          </a:effectRef>
+          <a:fontRef idx="minor">
+            <a:schemeClr val="tx1"/>
+          </a:fontRef>
+        </p:style>
+      </p:cxnSp>
+      <p:sp>
+        <p:nvSpPr>
+          <p:cNvPr id="7" name="Rounded Rectangle 6"/>
           <p:cNvSpPr/>
           <p:nvPr/>
         </p:nvSpPr>
         <p:spPr>
           <a:xfrm>
-            <a:off x="4168749" y="5806440"/>
-            <a:ext cx="1078992" cy="384048"/>
+            <a:off x="4937760" y="4617720"/>
+            <a:ext cx="347472" cy="502920"/>
+          </a:xfrm>
+          <a:prstGeom prst="roundRect">
+            <a:avLst/>
+          </a:prstGeom>
+          <a:solidFill>
+            <a:srgbClr val="1EC8E6">
+              <a:lumMod val="65000"/>
+              <a:lumOff val="35000"/>
+            </a:srgbClr>
+          </a:solidFill>
+          <a:ln>
+            <a:noFill/>
+          </a:ln>
+        </p:spPr>
+        <p:style>
+          <a:lnRef idx="1">
+            <a:schemeClr val="accent1"/>
+          </a:lnRef>
+          <a:fillRef idx="3">
+            <a:schemeClr val="accent1"/>
+          </a:fillRef>
+          <a:effectRef idx="2">
+            <a:schemeClr val="accent1"/>
+          </a:effectRef>
+          <a:fontRef idx="minor">
+            <a:schemeClr val="lt1"/>
+          </a:fontRef>
+        </p:style>
+        <p:txBody>
+          <a:bodyPr rtlCol="0" anchor="ctr"/>
+          <a:lstStyle/>
+          <a:p>
+            <a:pPr algn="ctr"/>
+          </a:p>
+        </p:txBody>
+      </p:sp>
+      <p:sp>
+        <p:nvSpPr>
+          <p:cNvPr id="8" name="Rounded Rectangle 7"/>
+          <p:cNvSpPr/>
+          <p:nvPr/>
+        </p:nvSpPr>
+        <p:spPr>
+          <a:xfrm>
+            <a:off x="5623560" y="4297680"/>
+            <a:ext cx="347472" cy="777240"/>
+          </a:xfrm>
+          <a:prstGeom prst="roundRect">
+            <a:avLst/>
+          </a:prstGeom>
+          <a:solidFill>
+            <a:srgbClr val="7C5CFF">
+              <a:lumMod val="65000"/>
+              <a:lumOff val="35000"/>
+            </a:srgbClr>
+          </a:solidFill>
+          <a:ln>
+            <a:noFill/>
+          </a:ln>
+        </p:spPr>
+        <p:style>
+          <a:lnRef idx="1">
+            <a:schemeClr val="accent1"/>
+          </a:lnRef>
+          <a:fillRef idx="3">
+            <a:schemeClr val="accent1"/>
+          </a:fillRef>
+          <a:effectRef idx="2">
+            <a:schemeClr val="accent1"/>
+          </a:effectRef>
+          <a:fontRef idx="minor">
+            <a:schemeClr val="lt1"/>
+          </a:fontRef>
+        </p:style>
+        <p:txBody>
+          <a:bodyPr rtlCol="0" anchor="ctr"/>
+          <a:lstStyle/>
+          <a:p>
+            <a:pPr algn="ctr"/>
+          </a:p>
+        </p:txBody>
+      </p:sp>
+      <p:sp>
+        <p:nvSpPr>
+          <p:cNvPr id="9" name="Rounded Rectangle 8"/>
+          <p:cNvSpPr/>
+          <p:nvPr/>
+        </p:nvSpPr>
+        <p:spPr>
+          <a:xfrm>
+            <a:off x="6309360" y="4480560"/>
+            <a:ext cx="347472" cy="594360"/>
+          </a:xfrm>
+          <a:prstGeom prst="roundRect">
+            <a:avLst/>
+          </a:prstGeom>
+          <a:solidFill>
+            <a:srgbClr val="1EC8E6">
+              <a:lumMod val="65000"/>
+              <a:lumOff val="35000"/>
+            </a:srgbClr>
+          </a:solidFill>
+          <a:ln>
+            <a:noFill/>
+          </a:ln>
+        </p:spPr>
+        <p:style>
+          <a:lnRef idx="1">
+            <a:schemeClr val="accent1"/>
+          </a:lnRef>
+          <a:fillRef idx="3">
+            <a:schemeClr val="accent1"/>
+          </a:fillRef>
+          <a:effectRef idx="2">
+            <a:schemeClr val="accent1"/>
+          </a:effectRef>
+          <a:fontRef idx="minor">
+            <a:schemeClr val="lt1"/>
+          </a:fontRef>
+        </p:style>
+        <p:txBody>
+          <a:bodyPr rtlCol="0" anchor="ctr"/>
+          <a:lstStyle/>
+          <a:p>
+            <a:pPr algn="ctr"/>
+          </a:p>
+        </p:txBody>
+      </p:sp>
+      <p:sp>
+        <p:nvSpPr>
+          <p:cNvPr id="10" name="Rounded Rectangle 9"/>
+          <p:cNvSpPr/>
+          <p:nvPr/>
+        </p:nvSpPr>
+        <p:spPr>
+          <a:xfrm>
+            <a:off x="6995160" y="4023360"/>
+            <a:ext cx="347472" cy="1051560"/>
+          </a:xfrm>
+          <a:prstGeom prst="roundRect">
+            <a:avLst/>
+          </a:prstGeom>
+          <a:solidFill>
+            <a:srgbClr val="7C5CFF">
+              <a:lumMod val="65000"/>
+              <a:lumOff val="35000"/>
+            </a:srgbClr>
+          </a:solidFill>
+          <a:ln>
+            <a:noFill/>
+          </a:ln>
+        </p:spPr>
+        <p:style>
+          <a:lnRef idx="1">
+            <a:schemeClr val="accent1"/>
+          </a:lnRef>
+          <a:fillRef idx="3">
+            <a:schemeClr val="accent1"/>
+          </a:fillRef>
+          <a:effectRef idx="2">
+            <a:schemeClr val="accent1"/>
+          </a:effectRef>
+          <a:fontRef idx="minor">
+            <a:schemeClr val="lt1"/>
+          </a:fontRef>
+        </p:style>
+        <p:txBody>
+          <a:bodyPr rtlCol="0" anchor="ctr"/>
+          <a:lstStyle/>
+          <a:p>
+            <a:pPr algn="ctr"/>
+          </a:p>
+        </p:txBody>
+      </p:sp>
+      <p:sp>
+        <p:nvSpPr>
+          <p:cNvPr id="11" name="Rounded Rectangle 10"/>
+          <p:cNvSpPr/>
+          <p:nvPr/>
+        </p:nvSpPr>
+        <p:spPr>
+          <a:xfrm>
+            <a:off x="5604357" y="5806440"/>
+            <a:ext cx="982980" cy="384048"/>
           </a:xfrm>
           <a:prstGeom prst="roundRect">
             <a:avLst/>
@@ -6885,14 +9686,14 @@
       </p:sp>
       <p:sp>
         <p:nvSpPr>
-          <p:cNvPr id="5" name="TextBox 4"/>
+          <p:cNvPr id="12" name="TextBox 11"/>
           <p:cNvSpPr txBox="1"/>
           <p:nvPr/>
         </p:nvSpPr>
         <p:spPr>
           <a:xfrm>
-            <a:off x="4168749" y="5843016"/>
-            <a:ext cx="1078992" cy="329184"/>
+            <a:off x="5604357" y="5843016"/>
+            <a:ext cx="982980" cy="329184"/>
           </a:xfrm>
           <a:prstGeom prst="rect">
             <a:avLst/>
@@ -6913,163 +9714,7 @@
                 </a:solidFill>
                 <a:latin typeface="Calibri"/>
               </a:rPr>
-              <a:t>Deployed</a:t>
-            </a:r>
-          </a:p>
-        </p:txBody>
-      </p:sp>
-      <p:sp>
-        <p:nvSpPr>
-          <p:cNvPr id="6" name="Rounded Rectangle 5"/>
-          <p:cNvSpPr/>
-          <p:nvPr/>
-        </p:nvSpPr>
-        <p:spPr>
-          <a:xfrm>
-            <a:off x="5412333" y="5806440"/>
-            <a:ext cx="886968" cy="384048"/>
-          </a:xfrm>
-          <a:prstGeom prst="roundRect">
-            <a:avLst/>
-          </a:prstGeom>
-          <a:solidFill>
-            <a:srgbClr val="E8E8ED"/>
-          </a:solidFill>
-          <a:ln>
-            <a:noFill/>
-          </a:ln>
-        </p:spPr>
-        <p:style>
-          <a:lnRef idx="1">
-            <a:schemeClr val="accent1"/>
-          </a:lnRef>
-          <a:fillRef idx="3">
-            <a:schemeClr val="accent1"/>
-          </a:fillRef>
-          <a:effectRef idx="2">
-            <a:schemeClr val="accent1"/>
-          </a:effectRef>
-          <a:fontRef idx="minor">
-            <a:schemeClr val="lt1"/>
-          </a:fontRef>
-        </p:style>
-        <p:txBody>
-          <a:bodyPr rtlCol="0" anchor="ctr"/>
-          <a:lstStyle/>
-          <a:p>
-            <a:pPr algn="ctr"/>
-          </a:p>
-        </p:txBody>
-      </p:sp>
-      <p:sp>
-        <p:nvSpPr>
-          <p:cNvPr id="7" name="TextBox 6"/>
-          <p:cNvSpPr txBox="1"/>
-          <p:nvPr/>
-        </p:nvSpPr>
-        <p:spPr>
-          <a:xfrm>
-            <a:off x="5412333" y="5843016"/>
-            <a:ext cx="886968" cy="329184"/>
-          </a:xfrm>
-          <a:prstGeom prst="rect">
-            <a:avLst/>
-          </a:prstGeom>
-          <a:noFill/>
-        </p:spPr>
-        <p:txBody>
-          <a:bodyPr wrap="square">
-            <a:spAutoFit/>
-          </a:bodyPr>
-          <a:lstStyle/>
-          <a:p>
-            <a:pPr algn="ctr"/>
-            <a:r>
-              <a:rPr sz="1200" b="1">
-                <a:solidFill>
-                  <a:srgbClr val="1D1D1F"/>
-                </a:solidFill>
-                <a:latin typeface="Calibri"/>
-              </a:rPr>
-              <a:t>Usable</a:t>
-            </a:r>
-          </a:p>
-        </p:txBody>
-      </p:sp>
-      <p:sp>
-        <p:nvSpPr>
-          <p:cNvPr id="8" name="Rounded Rectangle 7"/>
-          <p:cNvSpPr/>
-          <p:nvPr/>
-        </p:nvSpPr>
-        <p:spPr>
-          <a:xfrm>
-            <a:off x="6463893" y="5806440"/>
-            <a:ext cx="1559052" cy="384048"/>
-          </a:xfrm>
-          <a:prstGeom prst="roundRect">
-            <a:avLst/>
-          </a:prstGeom>
-          <a:solidFill>
-            <a:srgbClr val="E8E8ED"/>
-          </a:solidFill>
-          <a:ln>
-            <a:noFill/>
-          </a:ln>
-        </p:spPr>
-        <p:style>
-          <a:lnRef idx="1">
-            <a:schemeClr val="accent1"/>
-          </a:lnRef>
-          <a:fillRef idx="3">
-            <a:schemeClr val="accent1"/>
-          </a:fillRef>
-          <a:effectRef idx="2">
-            <a:schemeClr val="accent1"/>
-          </a:effectRef>
-          <a:fontRef idx="minor">
-            <a:schemeClr val="lt1"/>
-          </a:fontRef>
-        </p:style>
-        <p:txBody>
-          <a:bodyPr rtlCol="0" anchor="ctr"/>
-          <a:lstStyle/>
-          <a:p>
-            <a:pPr algn="ctr"/>
-          </a:p>
-        </p:txBody>
-      </p:sp>
-      <p:sp>
-        <p:nvSpPr>
-          <p:cNvPr id="9" name="TextBox 8"/>
-          <p:cNvSpPr txBox="1"/>
-          <p:nvPr/>
-        </p:nvSpPr>
-        <p:spPr>
-          <a:xfrm>
-            <a:off x="6463893" y="5843016"/>
-            <a:ext cx="1559052" cy="329184"/>
-          </a:xfrm>
-          <a:prstGeom prst="rect">
-            <a:avLst/>
-          </a:prstGeom>
-          <a:noFill/>
-        </p:spPr>
-        <p:txBody>
-          <a:bodyPr wrap="square">
-            <a:spAutoFit/>
-          </a:bodyPr>
-          <a:lstStyle/>
-          <a:p>
-            <a:pPr algn="ctr"/>
-            <a:r>
-              <a:rPr sz="1200" b="1">
-                <a:solidFill>
-                  <a:srgbClr val="1D1D1F"/>
-                </a:solidFill>
-                <a:latin typeface="Calibri"/>
-              </a:rPr>
-              <a:t>Payments work</a:t>
+              <a:t>PostHog</a:t>
             </a:r>
           </a:p>
         </p:txBody>
@@ -7143,8 +9788,8 @@
         </p:nvSpPr>
         <p:spPr>
           <a:xfrm>
-            <a:off x="777240" y="1051560"/>
-            <a:ext cx="10607040" cy="1188720"/>
+            <a:off x="640080" y="1143000"/>
+            <a:ext cx="10881360" cy="1737360"/>
           </a:xfrm>
           <a:prstGeom prst="rect">
             <a:avLst/>
@@ -7157,15 +9802,15 @@
           </a:bodyPr>
           <a:lstStyle/>
           <a:p>
-            <a:pPr algn="l"/>
-            <a:r>
-              <a:rPr sz="4000" b="1">
+            <a:pPr algn="ctr"/>
+            <a:r>
+              <a:rPr sz="3200" b="1">
                 <a:solidFill>
                   <a:srgbClr val="1D1D1F"/>
                 </a:solidFill>
                 <a:latin typeface="Calibri"/>
               </a:rPr>
-              <a:t>Ship it. Get reviewed.</a:t>
+              <a:t>Then give them a place to talk.</a:t>
             </a:r>
           </a:p>
         </p:txBody>
@@ -7178,8 +9823,8 @@
         </p:nvSpPr>
         <p:spPr>
           <a:xfrm>
-            <a:off x="777240" y="2377440"/>
-            <a:ext cx="10424160" cy="2103120"/>
+            <a:off x="640080" y="2926080"/>
+            <a:ext cx="10881360" cy="777240"/>
           </a:xfrm>
           <a:prstGeom prst="rect">
             <a:avLst/>
@@ -7192,73 +9837,38 @@
           </a:bodyPr>
           <a:lstStyle/>
           <a:p>
-            <a:pPr algn="l"/>
-            <a:r>
-              <a:rPr sz="2600" b="1">
-                <a:solidFill>
-                  <a:srgbClr val="1D1D1F"/>
-                </a:solidFill>
-                <a:latin typeface="Calibri"/>
-              </a:rPr>
-              <a:t>We're going to see 10 person billion-dollar companies pretty soon.</a:t>
-            </a:r>
-          </a:p>
-        </p:txBody>
-      </p:sp>
-      <p:sp>
-        <p:nvSpPr>
-          <p:cNvPr id="5" name="TextBox 4"/>
-          <p:cNvSpPr txBox="1"/>
-          <p:nvPr/>
-        </p:nvSpPr>
-        <p:spPr>
-          <a:xfrm>
-            <a:off x="777240" y="4572000"/>
-            <a:ext cx="10424160" cy="365760"/>
-          </a:xfrm>
-          <a:prstGeom prst="rect">
-            <a:avLst/>
-          </a:prstGeom>
-          <a:noFill/>
-        </p:spPr>
-        <p:txBody>
-          <a:bodyPr wrap="square">
-            <a:spAutoFit/>
-          </a:bodyPr>
-          <a:lstStyle/>
-          <a:p>
-            <a:pPr algn="l"/>
-            <a:r>
-              <a:rPr sz="1400" b="1">
+            <a:pPr algn="ctr"/>
+            <a:r>
+              <a:rPr sz="2200" b="0">
                 <a:solidFill>
                   <a:srgbClr val="6E6E73"/>
                 </a:solidFill>
                 <a:latin typeface="Calibri"/>
               </a:rPr>
-              <a:t>Sam Altman</a:t>
-            </a:r>
-          </a:p>
-        </p:txBody>
-      </p:sp>
-      <p:sp>
-        <p:nvSpPr>
-          <p:cNvPr id="6" name="Rounded Rectangle 5"/>
+              <a:t>Discord is enough.</a:t>
+            </a:r>
+          </a:p>
+        </p:txBody>
+      </p:sp>
+      <p:sp>
+        <p:nvSpPr>
+          <p:cNvPr id="5" name="Rounded Rectangle 4"/>
           <p:cNvSpPr/>
           <p:nvPr/>
         </p:nvSpPr>
         <p:spPr>
           <a:xfrm>
-            <a:off x="777240" y="5806440"/>
-            <a:ext cx="1751076" cy="384048"/>
+            <a:off x="4709160" y="3794760"/>
+            <a:ext cx="1554480" cy="777240"/>
           </a:xfrm>
           <a:prstGeom prst="roundRect">
             <a:avLst/>
           </a:prstGeom>
-          <a:solidFill>
-            <a:srgbClr val="E8E8ED"/>
-          </a:solidFill>
-          <a:ln>
-            <a:noFill/>
+          <a:noFill/>
+          <a:ln w="27940">
+            <a:solidFill>
+              <a:srgbClr val="7C5CFF"/>
+            </a:solidFill>
           </a:ln>
         </p:spPr>
         <p:style>
@@ -7285,36 +9895,173 @@
       </p:sp>
       <p:sp>
         <p:nvSpPr>
-          <p:cNvPr id="7" name="TextBox 6"/>
-          <p:cNvSpPr txBox="1"/>
-          <p:nvPr/>
-        </p:nvSpPr>
-        <p:spPr>
-          <a:xfrm>
-            <a:off x="777240" y="5843016"/>
-            <a:ext cx="1751076" cy="329184"/>
-          </a:xfrm>
-          <a:prstGeom prst="rect">
+          <p:cNvPr id="6" name="Rounded Rectangle 5"/>
+          <p:cNvSpPr/>
+          <p:nvPr/>
+        </p:nvSpPr>
+        <p:spPr>
+          <a:xfrm>
+            <a:off x="5943600" y="4434840"/>
+            <a:ext cx="1554480" cy="658368"/>
+          </a:xfrm>
+          <a:prstGeom prst="roundRect">
             <a:avLst/>
           </a:prstGeom>
           <a:noFill/>
-        </p:spPr>
-        <p:txBody>
-          <a:bodyPr wrap="square">
-            <a:spAutoFit/>
-          </a:bodyPr>
-          <a:lstStyle/>
-          <a:p>
-            <a:pPr algn="ctr"/>
-            <a:r>
-              <a:rPr sz="1200" b="1">
-                <a:solidFill>
-                  <a:srgbClr val="1D1D1F"/>
-                </a:solidFill>
-                <a:latin typeface="Calibri"/>
-              </a:rPr>
-              <a:t>DevFest tickets</a:t>
-            </a:r>
+          <a:ln w="27940">
+            <a:solidFill>
+              <a:srgbClr val="1EC8E6"/>
+            </a:solidFill>
+          </a:ln>
+        </p:spPr>
+        <p:style>
+          <a:lnRef idx="1">
+            <a:schemeClr val="accent1"/>
+          </a:lnRef>
+          <a:fillRef idx="3">
+            <a:schemeClr val="accent1"/>
+          </a:fillRef>
+          <a:effectRef idx="2">
+            <a:schemeClr val="accent1"/>
+          </a:effectRef>
+          <a:fontRef idx="minor">
+            <a:schemeClr val="lt1"/>
+          </a:fontRef>
+        </p:style>
+        <p:txBody>
+          <a:bodyPr rtlCol="0" anchor="ctr"/>
+          <a:lstStyle/>
+          <a:p>
+            <a:pPr algn="ctr"/>
+          </a:p>
+        </p:txBody>
+      </p:sp>
+      <p:sp>
+        <p:nvSpPr>
+          <p:cNvPr id="7" name="Oval 6"/>
+          <p:cNvSpPr/>
+          <p:nvPr/>
+        </p:nvSpPr>
+        <p:spPr>
+          <a:xfrm>
+            <a:off x="4983480" y="4069080"/>
+            <a:ext cx="164592" cy="164592"/>
+          </a:xfrm>
+          <a:prstGeom prst="ellipse">
+            <a:avLst/>
+          </a:prstGeom>
+          <a:solidFill>
+            <a:srgbClr val="1EC8E6"/>
+          </a:solidFill>
+          <a:ln>
+            <a:noFill/>
+          </a:ln>
+        </p:spPr>
+        <p:style>
+          <a:lnRef idx="1">
+            <a:schemeClr val="accent1"/>
+          </a:lnRef>
+          <a:fillRef idx="3">
+            <a:schemeClr val="accent1"/>
+          </a:fillRef>
+          <a:effectRef idx="2">
+            <a:schemeClr val="accent1"/>
+          </a:effectRef>
+          <a:fontRef idx="minor">
+            <a:schemeClr val="lt1"/>
+          </a:fontRef>
+        </p:style>
+        <p:txBody>
+          <a:bodyPr rtlCol="0" anchor="ctr"/>
+          <a:lstStyle/>
+          <a:p>
+            <a:pPr algn="ctr"/>
+          </a:p>
+        </p:txBody>
+      </p:sp>
+      <p:sp>
+        <p:nvSpPr>
+          <p:cNvPr id="8" name="Oval 7"/>
+          <p:cNvSpPr/>
+          <p:nvPr/>
+        </p:nvSpPr>
+        <p:spPr>
+          <a:xfrm>
+            <a:off x="5276088" y="4069080"/>
+            <a:ext cx="164592" cy="164592"/>
+          </a:xfrm>
+          <a:prstGeom prst="ellipse">
+            <a:avLst/>
+          </a:prstGeom>
+          <a:solidFill>
+            <a:srgbClr val="7C5CFF"/>
+          </a:solidFill>
+          <a:ln>
+            <a:noFill/>
+          </a:ln>
+        </p:spPr>
+        <p:style>
+          <a:lnRef idx="1">
+            <a:schemeClr val="accent1"/>
+          </a:lnRef>
+          <a:fillRef idx="3">
+            <a:schemeClr val="accent1"/>
+          </a:fillRef>
+          <a:effectRef idx="2">
+            <a:schemeClr val="accent1"/>
+          </a:effectRef>
+          <a:fontRef idx="minor">
+            <a:schemeClr val="lt1"/>
+          </a:fontRef>
+        </p:style>
+        <p:txBody>
+          <a:bodyPr rtlCol="0" anchor="ctr"/>
+          <a:lstStyle/>
+          <a:p>
+            <a:pPr algn="ctr"/>
+          </a:p>
+        </p:txBody>
+      </p:sp>
+      <p:sp>
+        <p:nvSpPr>
+          <p:cNvPr id="9" name="Oval 8"/>
+          <p:cNvSpPr/>
+          <p:nvPr/>
+        </p:nvSpPr>
+        <p:spPr>
+          <a:xfrm>
+            <a:off x="5568696" y="4069080"/>
+            <a:ext cx="164592" cy="164592"/>
+          </a:xfrm>
+          <a:prstGeom prst="ellipse">
+            <a:avLst/>
+          </a:prstGeom>
+          <a:solidFill>
+            <a:srgbClr val="1EC8E6"/>
+          </a:solidFill>
+          <a:ln>
+            <a:noFill/>
+          </a:ln>
+        </p:spPr>
+        <p:style>
+          <a:lnRef idx="1">
+            <a:schemeClr val="accent1"/>
+          </a:lnRef>
+          <a:fillRef idx="3">
+            <a:schemeClr val="accent1"/>
+          </a:fillRef>
+          <a:effectRef idx="2">
+            <a:schemeClr val="accent1"/>
+          </a:effectRef>
+          <a:fontRef idx="minor">
+            <a:schemeClr val="lt1"/>
+          </a:fontRef>
+        </p:style>
+        <p:txBody>
+          <a:bodyPr rtlCol="0" anchor="ctr"/>
+          <a:lstStyle/>
+          <a:p>
+            <a:pPr algn="ctr"/>
           </a:p>
         </p:txBody>
       </p:sp>
